--- a/IUEA_Teaching_Plan/decks/CML3113_Week01_Mining_Petroleum.pptx
+++ b/IUEA_Teaching_Plan/decks/CML3113_Week01_Mining_Petroleum.pptx
@@ -60,6 +60,8 @@
     <p:sldId id="308" r:id="rId60"/>
     <p:sldId id="309" r:id="rId61"/>
     <p:sldId id="310" r:id="rId62"/>
+    <p:sldId id="311" r:id="rId63"/>
+    <p:sldId id="312" r:id="rId64"/>
   </p:sldIdLst>
   <p:sldSz cx="12191695" cy="6858000" type="screen4x3"/>
   <p:notesSz cx="6858000" cy="9144000"/>
@@ -512,7 +514,7 @@
 </file>
 
 <file path=ppt/notesSlides/notesSlide1.xml><?xml version="1.0" encoding="utf-8"?>
-<p:notes xmlns:a="http://schemas.openxmlformats.org/drawingml/2006/main" xmlns:p="http://schemas.openxmlformats.org/presentationml/2006/main" xmlns:r="http://schemas.openxmlformats.org/officeDocument/2006/relationships">
+<p:notes xmlns:a="http://schemas.openxmlformats.org/drawingml/2006/main" xmlns:p="http://schemas.openxmlformats.org/presentationml/2006/main">
   <p:cSld>
     <p:spTree>
       <p:nvGrpSpPr>
@@ -556,7 +558,87 @@
           <a:lstStyle/>
           <a:p>
             <a:r>
+              <a:t>TEACHING PURPOSE</a:t>
+            </a:r>
+          </a:p>
+          <a:p>
+            <a:r>
+              <a:t>AI, machine learning</a:t>
+            </a:r>
+          </a:p>
+          <a:p>
+            <a:r>
+              <a:t/>
+            </a:r>
+          </a:p>
+          <a:p>
+            <a:r>
+              <a:t>LECTURER CUE</a:t>
+            </a:r>
+          </a:p>
+          <a:p>
+            <a:r>
               <a:t>Today runs entirely on paper. You will not touch a computer, so nothing you do this session depends on owning a laptop or having a connection. By the end you will have answered a real engineering question from twelve rows of a real dataset with a pencil, and measured how wrong you were.</a:t>
+            </a:r>
+          </a:p>
+          <a:p>
+            <a:r>
+              <a:t/>
+            </a:r>
+          </a:p>
+          <a:p>
+            <a:r>
+              <a:t>EXPLAIN IN ORDINARY WORDS</a:t>
+            </a:r>
+          </a:p>
+          <a:p>
+            <a:r>
+              <a:t>A feature is an input available when predicting. The target is the answer to learn from. Regression predicts a number; classification predicts a category. Learning patterns does not by itself establish cause.</a:t>
+            </a:r>
+          </a:p>
+          <a:p>
+            <a:r>
+              <a:t/>
+            </a:r>
+          </a:p>
+          <a:p>
+            <a:r>
+              <a:t>CHECK AND EXPECTED ANSWER</a:t>
+            </a:r>
+          </a:p>
+          <a:p>
+            <a:r>
+              <a:t>Predicting concrete strength: regression. Predicting pass/fail: classification. Is a later test result available before that test? No.</a:t>
+            </a:r>
+          </a:p>
+          <a:p>
+            <a:r>
+              <a:t/>
+            </a:r>
+          </a:p>
+          <a:p>
+            <a:r>
+              <a:t>IF LEARNERS ARE STUCK</a:t>
+            </a:r>
+          </a:p>
+          <a:p>
+            <a:r>
+              <a:t>Describe the engineering decision in everyday language, then label one row, an input and its answer. Compare with a rule you could write directly.</a:t>
+            </a:r>
+          </a:p>
+          <a:p>
+            <a:r>
+              <a:t/>
+            </a:r>
+          </a:p>
+          <a:p>
+            <a:r>
+              <a:t>NEXT</a:t>
+            </a:r>
+          </a:p>
+          <a:p>
+            <a:r>
+              <a:t>Jotham Martin Wambi. Move on after a learner can explain the current example or required action.</a:t>
             </a:r>
           </a:p>
         </p:txBody>
@@ -582,7 +664,7 @@
 </file>
 
 <file path=ppt/notesSlides/notesSlide10.xml><?xml version="1.0" encoding="utf-8"?>
-<p:notes xmlns:a="http://schemas.openxmlformats.org/drawingml/2006/main" xmlns:p="http://schemas.openxmlformats.org/presentationml/2006/main" xmlns:r="http://schemas.openxmlformats.org/officeDocument/2006/relationships">
+<p:notes xmlns:a="http://schemas.openxmlformats.org/drawingml/2006/main" xmlns:p="http://schemas.openxmlformats.org/presentationml/2006/main">
   <p:cSld>
     <p:spTree>
       <p:nvGrpSpPr>
@@ -626,7 +708,57 @@
           <a:lstStyle/>
           <a:p>
             <a:r>
+              <a:t>TEACHING PURPOSE</a:t>
+            </a:r>
+          </a:p>
+          <a:p>
+            <a:r>
+              <a:t>The whole field, start to finish</a:t>
+            </a:r>
+          </a:p>
+          <a:p>
+            <a:r>
+              <a:t/>
+            </a:r>
+          </a:p>
+          <a:p>
+            <a:r>
+              <a:t>CONNECT</a:t>
+            </a:r>
+          </a:p>
+          <a:p>
+            <a:r>
+              <a:t>Build on the preceding slide: What I expect, and what you can expect back.</a:t>
+            </a:r>
+          </a:p>
+          <a:p>
+            <a:r>
+              <a:t/>
+            </a:r>
+          </a:p>
+          <a:p>
+            <a:r>
+              <a:t>LECTURER CUE</a:t>
+            </a:r>
+          </a:p>
+          <a:p>
+            <a:r>
               <a:t>This segment hands you the map of the field before any of it is taught, so that every later week has somewhere to sit rather than arriving from nowhere. The structure follows the public roadmap.sh Machine Learning roadmap, which is the map the profession itself uses, so you can check this course against something written outside this room.</a:t>
+            </a:r>
+          </a:p>
+          <a:p>
+            <a:r>
+              <a:t/>
+            </a:r>
+          </a:p>
+          <a:p>
+            <a:r>
+              <a:t>NEXT</a:t>
+            </a:r>
+          </a:p>
+          <a:p>
+            <a:r>
+              <a:t>The machine learning roadmap. Move on after a learner can explain the current example or required action.</a:t>
             </a:r>
           </a:p>
         </p:txBody>
@@ -651,8 +783,8 @@
 </p:notes>
 </file>
 
-<file path=ppt/notesSlides/notesSlide11.xml><?xml version="1.0" encoding="utf-8"?>
-<p:notes xmlns:a="http://schemas.openxmlformats.org/drawingml/2006/main" xmlns:p="http://schemas.openxmlformats.org/presentationml/2006/main" xmlns:r="http://schemas.openxmlformats.org/officeDocument/2006/relationships">
+<file path=ppt/notesSlides/notesSlide10052.xml><?xml version="1.0" encoding="utf-8"?>
+<p:notes xmlns:a="http://schemas.openxmlformats.org/drawingml/2006/main" xmlns:p="http://schemas.openxmlformats.org/presentationml/2006/main">
   <p:cSld>
     <p:spTree>
       <p:nvGrpSpPr>
@@ -696,7 +828,87 @@
           <a:lstStyle/>
           <a:p>
             <a:r>
-              <a:t>Fifteen stages, from Python to transformers. By December you will have covered stages 1 to 9. Most of the individual terms on the figure mean nothing to you today and that is expected — what to take from it is the shape of the field and where this course stops. The interactive version is at roadmap.sh/machine-learning, and it is worth an evening of clicking around.</a:t>
+              <a:t>TEACHING PURPOSE</a:t>
+            </a:r>
+          </a:p>
+          <a:p>
+            <a:r>
+              <a:t>Every word we used today (1 of 3)</a:t>
+            </a:r>
+          </a:p>
+          <a:p>
+            <a:r>
+              <a:t/>
+            </a:r>
+          </a:p>
+          <a:p>
+            <a:r>
+              <a:t>CONNECT</a:t>
+            </a:r>
+          </a:p>
+          <a:p>
+            <a:r>
+              <a:t>Build on the preceding slide: How did you do?.</a:t>
+            </a:r>
+          </a:p>
+          <a:p>
+            <a:r>
+              <a:t/>
+            </a:r>
+          </a:p>
+          <a:p>
+            <a:r>
+              <a:t>EXPLAIN IN ORDINARY WORDS</a:t>
+            </a:r>
+          </a:p>
+          <a:p>
+            <a:r>
+              <a:t>A cleaning decision needs evidence, a stated rule and a before/after check. Similar rows may be genuine repeated events. Reconciliation compares totals built under the same definitions.</a:t>
+            </a:r>
+          </a:p>
+          <a:p>
+            <a:r>
+              <a:t/>
+            </a:r>
+          </a:p>
+          <a:p>
+            <a:r>
+              <a:t>CHECK AND EXPECTED ANSWER</a:t>
+            </a:r>
+          </a:p>
+          <a:p>
+            <a:r>
+              <a:t>May we delete every repeated amount? No. Check the row identifier and the table grain first.</a:t>
+            </a:r>
+          </a:p>
+          <a:p>
+            <a:r>
+              <a:t/>
+            </a:r>
+          </a:p>
+          <a:p>
+            <a:r>
+              <a:t>IF LEARNERS ARE STUCK</a:t>
+            </a:r>
+          </a:p>
+          <a:p>
+            <a:r>
+              <a:t>Keep raw data, record counts before and after each action, then explain any remaining difference instead of forcing totals to agree.</a:t>
+            </a:r>
+          </a:p>
+          <a:p>
+            <a:r>
+              <a:t/>
+            </a:r>
+          </a:p>
+          <a:p>
+            <a:r>
+              <a:t>NEXT</a:t>
+            </a:r>
+          </a:p>
+          <a:p>
+            <a:r>
+              <a:t>Every word we used today (2 of 3). Move on after a learner can explain the current example or required action.</a:t>
             </a:r>
           </a:p>
         </p:txBody>
@@ -721,8 +933,8 @@
 </p:notes>
 </file>
 
-<file path=ppt/notesSlides/notesSlide12.xml><?xml version="1.0" encoding="utf-8"?>
-<p:notes xmlns:a="http://schemas.openxmlformats.org/drawingml/2006/main" xmlns:p="http://schemas.openxmlformats.org/presentationml/2006/main" xmlns:r="http://schemas.openxmlformats.org/officeDocument/2006/relationships">
+<file path=ppt/notesSlides/notesSlide10053.xml><?xml version="1.0" encoding="utf-8"?>
+<p:notes xmlns:a="http://schemas.openxmlformats.org/drawingml/2006/main" xmlns:p="http://schemas.openxmlformats.org/presentationml/2006/main">
   <p:cSld>
     <p:spTree>
       <p:nvGrpSpPr>
@@ -766,7 +978,87 @@
           <a:lstStyle/>
           <a:p>
             <a:r>
-              <a:t>The mathematics stage — calculus, linear algebra, statistics, probability — is the one most people entering this field find hardest, and you did it in Years 1 and 2. What you are missing is stages 1 and 3, Python and the data libraries, which Weeks 2 to 6 cover in five weeks of work. The expensive prerequisite is already behind you.</a:t>
+              <a:t>TEACHING PURPOSE</a:t>
+            </a:r>
+          </a:p>
+          <a:p>
+            <a:r>
+              <a:t>Every word we used today (2 of 3)</a:t>
+            </a:r>
+          </a:p>
+          <a:p>
+            <a:r>
+              <a:t/>
+            </a:r>
+          </a:p>
+          <a:p>
+            <a:r>
+              <a:t>CONNECT</a:t>
+            </a:r>
+          </a:p>
+          <a:p>
+            <a:r>
+              <a:t>Build on the preceding slide: Every word we used today (1 of 3).</a:t>
+            </a:r>
+          </a:p>
+          <a:p>
+            <a:r>
+              <a:t/>
+            </a:r>
+          </a:p>
+          <a:p>
+            <a:r>
+              <a:t>EXPLAIN IN ORDINARY WORDS</a:t>
+            </a:r>
+          </a:p>
+          <a:p>
+            <a:r>
+              <a:t>A feature is an input available when predicting. The target is the answer to learn from. Regression predicts a number; classification predicts a category. Learning patterns does not by itself establish cause.</a:t>
+            </a:r>
+          </a:p>
+          <a:p>
+            <a:r>
+              <a:t/>
+            </a:r>
+          </a:p>
+          <a:p>
+            <a:r>
+              <a:t>CHECK AND EXPECTED ANSWER</a:t>
+            </a:r>
+          </a:p>
+          <a:p>
+            <a:r>
+              <a:t>Predicting concrete strength: regression. Predicting pass/fail: classification. Is a later test result available before that test? No.</a:t>
+            </a:r>
+          </a:p>
+          <a:p>
+            <a:r>
+              <a:t/>
+            </a:r>
+          </a:p>
+          <a:p>
+            <a:r>
+              <a:t>IF LEARNERS ARE STUCK</a:t>
+            </a:r>
+          </a:p>
+          <a:p>
+            <a:r>
+              <a:t>Describe the engineering decision in everyday language, then label one row, an input and its answer. Compare with a rule you could write directly.</a:t>
+            </a:r>
+          </a:p>
+          <a:p>
+            <a:r>
+              <a:t/>
+            </a:r>
+          </a:p>
+          <a:p>
+            <a:r>
+              <a:t>NEXT</a:t>
+            </a:r>
+          </a:p>
+          <a:p>
+            <a:r>
+              <a:t>Every word we used today (3 of 3). Move on after a learner can explain the current example or required action.</a:t>
             </a:r>
           </a:p>
         </p:txBody>
@@ -791,8 +1083,8 @@
 </p:notes>
 </file>
 
-<file path=ppt/notesSlides/notesSlide13.xml><?xml version="1.0" encoding="utf-8"?>
-<p:notes xmlns:a="http://schemas.openxmlformats.org/drawingml/2006/main" xmlns:p="http://schemas.openxmlformats.org/presentationml/2006/main" xmlns:r="http://schemas.openxmlformats.org/officeDocument/2006/relationships">
+<file path=ppt/notesSlides/notesSlide11.xml><?xml version="1.0" encoding="utf-8"?>
+<p:notes xmlns:a="http://schemas.openxmlformats.org/drawingml/2006/main" xmlns:p="http://schemas.openxmlformats.org/presentationml/2006/main">
   <p:cSld>
     <p:spTree>
       <p:nvGrpSpPr>
@@ -836,7 +1128,102 @@
           <a:lstStyle/>
           <a:p>
             <a:r>
-              <a:t>The grey stages sit outside this course: reinforcement learning, full MLOps and most of the advanced language-model material. If you want to go after them later, roadmap.sh publishes separate roadmaps for the AI engineer, the data scientist, MLOps and AI agents, and any of the four is a reasonable next step after December.</a:t>
+              <a:t>TEACHING PURPOSE</a:t>
+            </a:r>
+          </a:p>
+          <a:p>
+            <a:r>
+              <a:t>The machine learning roadmap</a:t>
+            </a:r>
+          </a:p>
+          <a:p>
+            <a:r>
+              <a:t/>
+            </a:r>
+          </a:p>
+          <a:p>
+            <a:r>
+              <a:t>CONNECT</a:t>
+            </a:r>
+          </a:p>
+          <a:p>
+            <a:r>
+              <a:t>Build on the preceding slide: The whole field, start to finish.</a:t>
+            </a:r>
+          </a:p>
+          <a:p>
+            <a:r>
+              <a:t/>
+            </a:r>
+          </a:p>
+          <a:p>
+            <a:r>
+              <a:t>LECTURER CUE</a:t>
+            </a:r>
+          </a:p>
+          <a:p>
+            <a:r>
+              <a:t>Fifteen stages, from Python to transformers. By December you will have covered stages 1 to 9. Most of the individual terms on the figure mean nothing to you today and that is expected — what to take from it is the shape of the field and where this course stops. The interactive version is at roadmap.sh/machine-learning, and it is worth an evening of clicking around.</a:t>
+            </a:r>
+          </a:p>
+          <a:p>
+            <a:r>
+              <a:t/>
+            </a:r>
+          </a:p>
+          <a:p>
+            <a:r>
+              <a:t>EXPLAIN IN ORDINARY WORDS</a:t>
+            </a:r>
+          </a:p>
+          <a:p>
+            <a:r>
+              <a:t>A feature is an input available when predicting. The target is the answer to learn from. Regression predicts a number; classification predicts a category. Learning patterns does not by itself establish cause.</a:t>
+            </a:r>
+          </a:p>
+          <a:p>
+            <a:r>
+              <a:t/>
+            </a:r>
+          </a:p>
+          <a:p>
+            <a:r>
+              <a:t>CHECK AND EXPECTED ANSWER</a:t>
+            </a:r>
+          </a:p>
+          <a:p>
+            <a:r>
+              <a:t>Predicting concrete strength: regression. Predicting pass/fail: classification. Is a later test result available before that test? No.</a:t>
+            </a:r>
+          </a:p>
+          <a:p>
+            <a:r>
+              <a:t/>
+            </a:r>
+          </a:p>
+          <a:p>
+            <a:r>
+              <a:t>IF LEARNERS ARE STUCK</a:t>
+            </a:r>
+          </a:p>
+          <a:p>
+            <a:r>
+              <a:t>Describe the engineering decision in everyday language, then label one row, an input and its answer. Compare with a rule you could write directly.</a:t>
+            </a:r>
+          </a:p>
+          <a:p>
+            <a:r>
+              <a:t/>
+            </a:r>
+          </a:p>
+          <a:p>
+            <a:r>
+              <a:t>NEXT</a:t>
+            </a:r>
+          </a:p>
+          <a:p>
+            <a:r>
+              <a:t>Stage 2 is the one that matters to you. Move on after a learner can explain the current example or required action.</a:t>
             </a:r>
           </a:p>
         </p:txBody>
@@ -861,8 +1248,8 @@
 </p:notes>
 </file>
 
-<file path=ppt/notesSlides/notesSlide14.xml><?xml version="1.0" encoding="utf-8"?>
-<p:notes xmlns:a="http://schemas.openxmlformats.org/drawingml/2006/main" xmlns:p="http://schemas.openxmlformats.org/presentationml/2006/main" xmlns:r="http://schemas.openxmlformats.org/officeDocument/2006/relationships">
+<file path=ppt/notesSlides/notesSlide12.xml><?xml version="1.0" encoding="utf-8"?>
+<p:notes xmlns:a="http://schemas.openxmlformats.org/drawingml/2006/main" xmlns:p="http://schemas.openxmlformats.org/presentationml/2006/main">
   <p:cSld>
     <p:spTree>
       <p:nvGrpSpPr>
@@ -906,7 +1293,102 @@
           <a:lstStyle/>
           <a:p>
             <a:r>
-              <a:t>Four different roadmaps and four different careers. This course points at the first one, applied inside your own engineering discipline. A computer science graduate will beat you at general machine learning, and that contest is avoidable: a civil engineer who can model concrete strength, or a mining engineer who can predict concentrate quality, is competing in a much smaller field.</a:t>
+              <a:t>TEACHING PURPOSE</a:t>
+            </a:r>
+          </a:p>
+          <a:p>
+            <a:r>
+              <a:t>Stage 2 is the one that matters to you</a:t>
+            </a:r>
+          </a:p>
+          <a:p>
+            <a:r>
+              <a:t/>
+            </a:r>
+          </a:p>
+          <a:p>
+            <a:r>
+              <a:t>CONNECT</a:t>
+            </a:r>
+          </a:p>
+          <a:p>
+            <a:r>
+              <a:t>Build on the preceding slide: The machine learning roadmap.</a:t>
+            </a:r>
+          </a:p>
+          <a:p>
+            <a:r>
+              <a:t/>
+            </a:r>
+          </a:p>
+          <a:p>
+            <a:r>
+              <a:t>LECTURER CUE</a:t>
+            </a:r>
+          </a:p>
+          <a:p>
+            <a:r>
+              <a:t>The mathematics stage — calculus, linear algebra, statistics, probability — is the one most people entering this field find hardest, and you did it in Years 1 and 2. What you are missing is stages 1 and 3, Python and the data libraries, which Weeks 2 to 6 cover in five weeks of work. The expensive prerequisite is already behind you.</a:t>
+            </a:r>
+          </a:p>
+          <a:p>
+            <a:r>
+              <a:t/>
+            </a:r>
+          </a:p>
+          <a:p>
+            <a:r>
+              <a:t>EXPLAIN IN ORDINARY WORDS</a:t>
+            </a:r>
+          </a:p>
+          <a:p>
+            <a:r>
+              <a:t>A probability-like score and a class decision are different outputs. A threshold turns a score into an action. Lowering a warning threshold usually raises both detections and false alarms.</a:t>
+            </a:r>
+          </a:p>
+          <a:p>
+            <a:r>
+              <a:t/>
+            </a:r>
+          </a:p>
+          <a:p>
+            <a:r>
+              <a:t>CHECK AND EXPECTED ANSWER</a:t>
+            </a:r>
+          </a:p>
+          <a:p>
+            <a:r>
+              <a:t>At a rule of score &gt;= 0.5, what happens at 0.5? It is positive. With &gt; 0.5 it would not be.</a:t>
+            </a:r>
+          </a:p>
+          <a:p>
+            <a:r>
+              <a:t/>
+            </a:r>
+          </a:p>
+          <a:p>
+            <a:r>
+              <a:t>IF LEARNERS ARE STUCK</a:t>
+            </a:r>
+          </a:p>
+          <a:p>
+            <a:r>
+              <a:t>Mark three scores below, at and above the boundary. Do not promise the score is well calibrated without checking.</a:t>
+            </a:r>
+          </a:p>
+          <a:p>
+            <a:r>
+              <a:t/>
+            </a:r>
+          </a:p>
+          <a:p>
+            <a:r>
+              <a:t>NEXT</a:t>
+            </a:r>
+          </a:p>
+          <a:p>
+            <a:r>
+              <a:t>Where this course sits, honestly. Move on after a learner can explain the current example or required action.</a:t>
             </a:r>
           </a:p>
         </p:txBody>
@@ -931,8 +1413,8 @@
 </p:notes>
 </file>
 
-<file path=ppt/notesSlides/notesSlide15.xml><?xml version="1.0" encoding="utf-8"?>
-<p:notes xmlns:a="http://schemas.openxmlformats.org/drawingml/2006/main" xmlns:p="http://schemas.openxmlformats.org/presentationml/2006/main" xmlns:r="http://schemas.openxmlformats.org/officeDocument/2006/relationships">
+<file path=ppt/notesSlides/notesSlide13.xml><?xml version="1.0" encoding="utf-8"?>
+<p:notes xmlns:a="http://schemas.openxmlformats.org/drawingml/2006/main" xmlns:p="http://schemas.openxmlformats.org/presentationml/2006/main">
   <p:cSld>
     <p:spTree>
       <p:nvGrpSpPr>
@@ -976,7 +1458,57 @@
           <a:lstStyle/>
           <a:p>
             <a:r>
-              <a:t>Three words — artificial intelligence, machine learning, data science — get used interchangeably in job adverts, papers and vendor brochures. Fifteen minutes here is what lets you read those documents without being misled by them.</a:t>
+              <a:t>TEACHING PURPOSE</a:t>
+            </a:r>
+          </a:p>
+          <a:p>
+            <a:r>
+              <a:t>Where this course sits, honestly</a:t>
+            </a:r>
+          </a:p>
+          <a:p>
+            <a:r>
+              <a:t/>
+            </a:r>
+          </a:p>
+          <a:p>
+            <a:r>
+              <a:t>CONNECT</a:t>
+            </a:r>
+          </a:p>
+          <a:p>
+            <a:r>
+              <a:t>Build on the preceding slide: Stage 2 is the one that matters to you.</a:t>
+            </a:r>
+          </a:p>
+          <a:p>
+            <a:r>
+              <a:t/>
+            </a:r>
+          </a:p>
+          <a:p>
+            <a:r>
+              <a:t>LECTURER CUE</a:t>
+            </a:r>
+          </a:p>
+          <a:p>
+            <a:r>
+              <a:t>The grey stages sit outside this course: reinforcement learning, full MLOps and most of the advanced language-model material. If you want to go after them later, roadmap.sh publishes separate roadmaps for the AI engineer, the data scientist, MLOps and AI agents, and any of the four is a reasonable next step after December.</a:t>
+            </a:r>
+          </a:p>
+          <a:p>
+            <a:r>
+              <a:t/>
+            </a:r>
+          </a:p>
+          <a:p>
+            <a:r>
+              <a:t>NEXT</a:t>
+            </a:r>
+          </a:p>
+          <a:p>
+            <a:r>
+              <a:t>Four jobs this field splits into. Move on after a learner can explain the current example or required action.</a:t>
             </a:r>
           </a:p>
         </p:txBody>
@@ -1001,8 +1533,8 @@
 </p:notes>
 </file>
 
-<file path=ppt/notesSlides/notesSlide16.xml><?xml version="1.0" encoding="utf-8"?>
-<p:notes xmlns:a="http://schemas.openxmlformats.org/drawingml/2006/main" xmlns:p="http://schemas.openxmlformats.org/presentationml/2006/main" xmlns:r="http://schemas.openxmlformats.org/officeDocument/2006/relationships">
+<file path=ppt/notesSlides/notesSlide14.xml><?xml version="1.0" encoding="utf-8"?>
+<p:notes xmlns:a="http://schemas.openxmlformats.org/drawingml/2006/main" xmlns:p="http://schemas.openxmlformats.org/presentationml/2006/main">
   <p:cSld>
     <p:spTree>
       <p:nvGrpSpPr>
@@ -1046,7 +1578,102 @@
           <a:lstStyle/>
           <a:p>
             <a:r>
-              <a:t>Each term is contained by the one before it. Data science is the odd one out: it overlaps all of them and is contained by none, because it is the craft of getting an answer out of data at all — finding it, cleaning it, questioning it, presenting it. Most of your semester goes into the data science ring, and the modelling turns out to be the small part.</a:t>
+              <a:t>TEACHING PURPOSE</a:t>
+            </a:r>
+          </a:p>
+          <a:p>
+            <a:r>
+              <a:t>Four jobs this field splits into</a:t>
+            </a:r>
+          </a:p>
+          <a:p>
+            <a:r>
+              <a:t/>
+            </a:r>
+          </a:p>
+          <a:p>
+            <a:r>
+              <a:t>CONNECT</a:t>
+            </a:r>
+          </a:p>
+          <a:p>
+            <a:r>
+              <a:t>Build on the preceding slide: Where this course sits, honestly.</a:t>
+            </a:r>
+          </a:p>
+          <a:p>
+            <a:r>
+              <a:t/>
+            </a:r>
+          </a:p>
+          <a:p>
+            <a:r>
+              <a:t>LECTURER CUE</a:t>
+            </a:r>
+          </a:p>
+          <a:p>
+            <a:r>
+              <a:t>Four different roadmaps and four different careers. This course points at the first one, applied inside your own engineering discipline. A computer science graduate will beat you at general machine learning, and that contest is avoidable: a civil engineer who can model concrete strength, or a mining engineer who can predict concentrate quality, is competing in a much smaller field.</a:t>
+            </a:r>
+          </a:p>
+          <a:p>
+            <a:r>
+              <a:t/>
+            </a:r>
+          </a:p>
+          <a:p>
+            <a:r>
+              <a:t>EXPLAIN IN ORDINARY WORDS</a:t>
+            </a:r>
+          </a:p>
+          <a:p>
+            <a:r>
+              <a:t>A feature is an input available when predicting. The target is the answer to learn from. Regression predicts a number; classification predicts a category. Learning patterns does not by itself establish cause.</a:t>
+            </a:r>
+          </a:p>
+          <a:p>
+            <a:r>
+              <a:t/>
+            </a:r>
+          </a:p>
+          <a:p>
+            <a:r>
+              <a:t>CHECK AND EXPECTED ANSWER</a:t>
+            </a:r>
+          </a:p>
+          <a:p>
+            <a:r>
+              <a:t>Predicting concrete strength: regression. Predicting pass/fail: classification. Is a later test result available before that test? No.</a:t>
+            </a:r>
+          </a:p>
+          <a:p>
+            <a:r>
+              <a:t/>
+            </a:r>
+          </a:p>
+          <a:p>
+            <a:r>
+              <a:t>IF LEARNERS ARE STUCK</a:t>
+            </a:r>
+          </a:p>
+          <a:p>
+            <a:r>
+              <a:t>Describe the engineering decision in everyday language, then label one row, an input and its answer. Compare with a rule you could write directly.</a:t>
+            </a:r>
+          </a:p>
+          <a:p>
+            <a:r>
+              <a:t/>
+            </a:r>
+          </a:p>
+          <a:p>
+            <a:r>
+              <a:t>NEXT</a:t>
+            </a:r>
+          </a:p>
+          <a:p>
+            <a:r>
+              <a:t>What this course is actually about. Move on after a learner can explain the current example or required action.</a:t>
             </a:r>
           </a:p>
         </p:txBody>
@@ -1071,8 +1698,8 @@
 </p:notes>
 </file>
 
-<file path=ppt/notesSlides/notesSlide17.xml><?xml version="1.0" encoding="utf-8"?>
-<p:notes xmlns:a="http://schemas.openxmlformats.org/drawingml/2006/main" xmlns:p="http://schemas.openxmlformats.org/presentationml/2006/main" xmlns:r="http://schemas.openxmlformats.org/officeDocument/2006/relationships">
+<file path=ppt/notesSlides/notesSlide15.xml><?xml version="1.0" encoding="utf-8"?>
+<p:notes xmlns:a="http://schemas.openxmlformats.org/drawingml/2006/main" xmlns:p="http://schemas.openxmlformats.org/presentationml/2006/main">
   <p:cSld>
     <p:spTree>
       <p:nvGrpSpPr>
@@ -1116,7 +1743,57 @@
           <a:lstStyle/>
           <a:p>
             <a:r>
-              <a:t>A thermostat follows one fixed rule and has no capacity to do better, which puts it outside the definition. A spam filter that improves as it sees more mail sits inside it. Whether any of this is 'really' intelligent is a genuine open question in the field; here the word is a label for an area of work.</a:t>
+              <a:t>TEACHING PURPOSE</a:t>
+            </a:r>
+          </a:p>
+          <a:p>
+            <a:r>
+              <a:t>What this course is actually about</a:t>
+            </a:r>
+          </a:p>
+          <a:p>
+            <a:r>
+              <a:t/>
+            </a:r>
+          </a:p>
+          <a:p>
+            <a:r>
+              <a:t>CONNECT</a:t>
+            </a:r>
+          </a:p>
+          <a:p>
+            <a:r>
+              <a:t>Build on the preceding slide: Four jobs this field splits into.</a:t>
+            </a:r>
+          </a:p>
+          <a:p>
+            <a:r>
+              <a:t/>
+            </a:r>
+          </a:p>
+          <a:p>
+            <a:r>
+              <a:t>LECTURER CUE</a:t>
+            </a:r>
+          </a:p>
+          <a:p>
+            <a:r>
+              <a:t>Three words — artificial intelligence, machine learning, data science — get used interchangeably in job adverts, papers and vendor brochures. Fifteen minutes here is what lets you read those documents without being misled by them.</a:t>
+            </a:r>
+          </a:p>
+          <a:p>
+            <a:r>
+              <a:t/>
+            </a:r>
+          </a:p>
+          <a:p>
+            <a:r>
+              <a:t>NEXT</a:t>
+            </a:r>
+          </a:p>
+          <a:p>
+            <a:r>
+              <a:t>The words, and how they nest. Move on after a learner can explain the current example or required action.</a:t>
             </a:r>
           </a:p>
         </p:txBody>
@@ -1141,8 +1818,8 @@
 </p:notes>
 </file>
 
-<file path=ppt/notesSlides/notesSlide18.xml><?xml version="1.0" encoding="utf-8"?>
-<p:notes xmlns:a="http://schemas.openxmlformats.org/drawingml/2006/main" xmlns:p="http://schemas.openxmlformats.org/presentationml/2006/main" xmlns:r="http://schemas.openxmlformats.org/officeDocument/2006/relationships">
+<file path=ppt/notesSlides/notesSlide16.xml><?xml version="1.0" encoding="utf-8"?>
+<p:notes xmlns:a="http://schemas.openxmlformats.org/drawingml/2006/main" xmlns:p="http://schemas.openxmlformats.org/presentationml/2006/main">
   <p:cSld>
     <p:spTree>
       <p:nvGrpSpPr>
@@ -1186,7 +1863,102 @@
           <a:lstStyle/>
           <a:p>
             <a:r>
-              <a:t>This is the definition the rest of the course rests on. Note the last step of the example: the computer infers a relationship and you then decide whether to trust it. That step is the easy one to skip, and Weeks 10 to 14 are entirely about it.</a:t>
+              <a:t>TEACHING PURPOSE</a:t>
+            </a:r>
+          </a:p>
+          <a:p>
+            <a:r>
+              <a:t>The words, and how they nest</a:t>
+            </a:r>
+          </a:p>
+          <a:p>
+            <a:r>
+              <a:t/>
+            </a:r>
+          </a:p>
+          <a:p>
+            <a:r>
+              <a:t>CONNECT</a:t>
+            </a:r>
+          </a:p>
+          <a:p>
+            <a:r>
+              <a:t>Build on the preceding slide: What this course is actually about.</a:t>
+            </a:r>
+          </a:p>
+          <a:p>
+            <a:r>
+              <a:t/>
+            </a:r>
+          </a:p>
+          <a:p>
+            <a:r>
+              <a:t>LECTURER CUE</a:t>
+            </a:r>
+          </a:p>
+          <a:p>
+            <a:r>
+              <a:t>Each term is contained by the one before it. Data science is the odd one out: it overlaps all of them and is contained by none, because it is the craft of getting an answer out of data at all — finding it, cleaning it, questioning it, presenting it. Most of your semester goes into the data science ring, and the modelling turns out to be the small part.</a:t>
+            </a:r>
+          </a:p>
+          <a:p>
+            <a:r>
+              <a:t/>
+            </a:r>
+          </a:p>
+          <a:p>
+            <a:r>
+              <a:t>EXPLAIN IN ORDINARY WORDS</a:t>
+            </a:r>
+          </a:p>
+          <a:p>
+            <a:r>
+              <a:t>A cleaning decision needs evidence, a stated rule and a before/after check. Similar rows may be genuine repeated events. Reconciliation compares totals built under the same definitions.</a:t>
+            </a:r>
+          </a:p>
+          <a:p>
+            <a:r>
+              <a:t/>
+            </a:r>
+          </a:p>
+          <a:p>
+            <a:r>
+              <a:t>CHECK AND EXPECTED ANSWER</a:t>
+            </a:r>
+          </a:p>
+          <a:p>
+            <a:r>
+              <a:t>May we delete every repeated amount? No. Check the row identifier and the table grain first.</a:t>
+            </a:r>
+          </a:p>
+          <a:p>
+            <a:r>
+              <a:t/>
+            </a:r>
+          </a:p>
+          <a:p>
+            <a:r>
+              <a:t>IF LEARNERS ARE STUCK</a:t>
+            </a:r>
+          </a:p>
+          <a:p>
+            <a:r>
+              <a:t>Keep raw data, record counts before and after each action, then explain any remaining difference instead of forcing totals to agree.</a:t>
+            </a:r>
+          </a:p>
+          <a:p>
+            <a:r>
+              <a:t/>
+            </a:r>
+          </a:p>
+          <a:p>
+            <a:r>
+              <a:t>NEXT</a:t>
+            </a:r>
+          </a:p>
+          <a:p>
+            <a:r>
+              <a:t>Artificial intelligence. Move on after a learner can explain the current example or required action.</a:t>
             </a:r>
           </a:p>
         </p:txBody>
@@ -1211,8 +1983,8 @@
 </p:notes>
 </file>
 
-<file path=ppt/notesSlides/notesSlide19.xml><?xml version="1.0" encoding="utf-8"?>
-<p:notes xmlns:a="http://schemas.openxmlformats.org/drawingml/2006/main" xmlns:p="http://schemas.openxmlformats.org/presentationml/2006/main" xmlns:r="http://schemas.openxmlformats.org/officeDocument/2006/relationships">
+<file path=ppt/notesSlides/notesSlide17.xml><?xml version="1.0" encoding="utf-8"?>
+<p:notes xmlns:a="http://schemas.openxmlformats.org/drawingml/2006/main" xmlns:p="http://schemas.openxmlformats.org/presentationml/2006/main">
   <p:cSld>
     <p:spTree>
       <p:nvGrpSpPr>
@@ -1256,7 +2028,102 @@
           <a:lstStyle/>
           <a:p>
             <a:r>
-              <a:t>In industry the split is roughly eighty per cent getting data into a usable state and twenty per cent modelling. An engineer with clean data beats a better algorithm with dirty data. The missing-assay example on this slide is a real Week 6 exercise: you will be handed records with a large part of one column absent and asked whether they are missing at random and what that does to your conclusion.</a:t>
+              <a:t>TEACHING PURPOSE</a:t>
+            </a:r>
+          </a:p>
+          <a:p>
+            <a:r>
+              <a:t>Artificial intelligence</a:t>
+            </a:r>
+          </a:p>
+          <a:p>
+            <a:r>
+              <a:t/>
+            </a:r>
+          </a:p>
+          <a:p>
+            <a:r>
+              <a:t>CONNECT</a:t>
+            </a:r>
+          </a:p>
+          <a:p>
+            <a:r>
+              <a:t>Build on the preceding slide: The words, and how they nest.</a:t>
+            </a:r>
+          </a:p>
+          <a:p>
+            <a:r>
+              <a:t/>
+            </a:r>
+          </a:p>
+          <a:p>
+            <a:r>
+              <a:t>LECTURER CUE</a:t>
+            </a:r>
+          </a:p>
+          <a:p>
+            <a:r>
+              <a:t>A thermostat follows one fixed rule and has no capacity to do better, which puts it outside the definition. A spam filter that improves as it sees more mail sits inside it. Whether any of this is 'really' intelligent is a genuine open question in the field; here the word is a label for an area of work.</a:t>
+            </a:r>
+          </a:p>
+          <a:p>
+            <a:r>
+              <a:t/>
+            </a:r>
+          </a:p>
+          <a:p>
+            <a:r>
+              <a:t>EXPLAIN IN ORDINARY WORDS</a:t>
+            </a:r>
+          </a:p>
+          <a:p>
+            <a:r>
+              <a:t>A feature is an input available when predicting. The target is the answer to learn from. Regression predicts a number; classification predicts a category. Learning patterns does not by itself establish cause.</a:t>
+            </a:r>
+          </a:p>
+          <a:p>
+            <a:r>
+              <a:t/>
+            </a:r>
+          </a:p>
+          <a:p>
+            <a:r>
+              <a:t>CHECK AND EXPECTED ANSWER</a:t>
+            </a:r>
+          </a:p>
+          <a:p>
+            <a:r>
+              <a:t>Predicting concrete strength: regression. Predicting pass/fail: classification. Is a later test result available before that test? No.</a:t>
+            </a:r>
+          </a:p>
+          <a:p>
+            <a:r>
+              <a:t/>
+            </a:r>
+          </a:p>
+          <a:p>
+            <a:r>
+              <a:t>IF LEARNERS ARE STUCK</a:t>
+            </a:r>
+          </a:p>
+          <a:p>
+            <a:r>
+              <a:t>Describe the engineering decision in everyday language, then label one row, an input and its answer. Compare with a rule you could write directly.</a:t>
+            </a:r>
+          </a:p>
+          <a:p>
+            <a:r>
+              <a:t/>
+            </a:r>
+          </a:p>
+          <a:p>
+            <a:r>
+              <a:t>NEXT</a:t>
+            </a:r>
+          </a:p>
+          <a:p>
+            <a:r>
+              <a:t>Machine learning. Move on after a learner can explain the current example or required action.</a:t>
             </a:r>
           </a:p>
         </p:txBody>
@@ -1281,8 +2148,8 @@
 </p:notes>
 </file>
 
-<file path=ppt/notesSlides/notesSlide2.xml><?xml version="1.0" encoding="utf-8"?>
-<p:notes xmlns:a="http://schemas.openxmlformats.org/drawingml/2006/main" xmlns:p="http://schemas.openxmlformats.org/presentationml/2006/main" xmlns:r="http://schemas.openxmlformats.org/officeDocument/2006/relationships">
+<file path=ppt/notesSlides/notesSlide18.xml><?xml version="1.0" encoding="utf-8"?>
+<p:notes xmlns:a="http://schemas.openxmlformats.org/drawingml/2006/main" xmlns:p="http://schemas.openxmlformats.org/presentationml/2006/main">
   <p:cSld>
     <p:spTree>
       <p:nvGrpSpPr>
@@ -1326,31 +2193,102 @@
           <a:lstStyle/>
           <a:p>
             <a:r>
-              <a:t>A short introduction, and there is a reason for it beyond courtesy.</a:t>
-            </a:r>
-          </a:p>
-          <a:p/>
-          <a:p>
-            <a:r>
-              <a:t>First, so that you know what you can ask me for. The work on the right is where my experience actually is: sensor data and predictive maintenance, language models over documents, and getting models into something a colleague can use. If your project heads in one of those directions I can help you in detail. If it heads somewhere I know less well, I will tell you that rather than guess.</a:t>
-            </a:r>
-          </a:p>
-          <a:p/>
-          <a:p>
-            <a:r>
-              <a:t>Second, because of the route rather than the titles. I read economics and information technology as undergraduate degrees, and my first seven years of work were in banking, tax and product management, none of which involved building a model. Nobody starts where this field expects them to start, and the engineering degree you are already halfway through is a better foundation for machine learning than most computing degrees, for reasons we come to in the roadmap segment.</a:t>
-            </a:r>
-          </a:p>
-          <a:p/>
-          <a:p>
-            <a:r>
-              <a:t>Third, so the claims in this course are checkable. Where I tell you a technique behaves a certain way, it is usually because I have watched it fail somewhere first.</a:t>
-            </a:r>
-          </a:p>
-          <a:p/>
-          <a:p>
-            <a:r>
-              <a:t>The contact details are real. Use them.</a:t>
+              <a:t>TEACHING PURPOSE</a:t>
+            </a:r>
+          </a:p>
+          <a:p>
+            <a:r>
+              <a:t>Machine learning</a:t>
+            </a:r>
+          </a:p>
+          <a:p>
+            <a:r>
+              <a:t/>
+            </a:r>
+          </a:p>
+          <a:p>
+            <a:r>
+              <a:t>CONNECT</a:t>
+            </a:r>
+          </a:p>
+          <a:p>
+            <a:r>
+              <a:t>Build on the preceding slide: Artificial intelligence.</a:t>
+            </a:r>
+          </a:p>
+          <a:p>
+            <a:r>
+              <a:t/>
+            </a:r>
+          </a:p>
+          <a:p>
+            <a:r>
+              <a:t>LECTURER CUE</a:t>
+            </a:r>
+          </a:p>
+          <a:p>
+            <a:r>
+              <a:t>This is the definition the rest of the course rests on. Note the last step of the example: the computer infers a relationship and you then decide whether to trust it. That step is the easy one to skip, and Weeks 10 to 14 are entirely about it.</a:t>
+            </a:r>
+          </a:p>
+          <a:p>
+            <a:r>
+              <a:t/>
+            </a:r>
+          </a:p>
+          <a:p>
+            <a:r>
+              <a:t>EXPLAIN IN ORDINARY WORDS</a:t>
+            </a:r>
+          </a:p>
+          <a:p>
+            <a:r>
+              <a:t>A feature is an input available when predicting. The target is the answer to learn from. Regression predicts a number; classification predicts a category. Learning patterns does not by itself establish cause.</a:t>
+            </a:r>
+          </a:p>
+          <a:p>
+            <a:r>
+              <a:t/>
+            </a:r>
+          </a:p>
+          <a:p>
+            <a:r>
+              <a:t>CHECK AND EXPECTED ANSWER</a:t>
+            </a:r>
+          </a:p>
+          <a:p>
+            <a:r>
+              <a:t>Predicting concrete strength: regression. Predicting pass/fail: classification. Is a later test result available before that test? No.</a:t>
+            </a:r>
+          </a:p>
+          <a:p>
+            <a:r>
+              <a:t/>
+            </a:r>
+          </a:p>
+          <a:p>
+            <a:r>
+              <a:t>IF LEARNERS ARE STUCK</a:t>
+            </a:r>
+          </a:p>
+          <a:p>
+            <a:r>
+              <a:t>Describe the engineering decision in everyday language, then label one row, an input and its answer. Compare with a rule you could write directly.</a:t>
+            </a:r>
+          </a:p>
+          <a:p>
+            <a:r>
+              <a:t/>
+            </a:r>
+          </a:p>
+          <a:p>
+            <a:r>
+              <a:t>NEXT</a:t>
+            </a:r>
+          </a:p>
+          <a:p>
+            <a:r>
+              <a:t>Data science. Move on after a learner can explain the current example or required action.</a:t>
             </a:r>
           </a:p>
         </p:txBody>
@@ -1375,8 +2313,8 @@
 </p:notes>
 </file>
 
-<file path=ppt/notesSlides/notesSlide20.xml><?xml version="1.0" encoding="utf-8"?>
-<p:notes xmlns:a="http://schemas.openxmlformats.org/drawingml/2006/main" xmlns:p="http://schemas.openxmlformats.org/presentationml/2006/main" xmlns:r="http://schemas.openxmlformats.org/officeDocument/2006/relationships">
+<file path=ppt/notesSlides/notesSlide19.xml><?xml version="1.0" encoding="utf-8"?>
+<p:notes xmlns:a="http://schemas.openxmlformats.org/drawingml/2006/main" xmlns:p="http://schemas.openxmlformats.org/presentationml/2006/main">
   <p:cSld>
     <p:spTree>
       <p:nvGrpSpPr>
@@ -1420,7 +2358,102 @@
           <a:lstStyle/>
           <a:p>
             <a:r>
-              <a:t>The core teaching segment of the session: the difference between writing a rule and inferring one from examples, plus the vocabulary for talking about a table of data. Everything from Week 5 onwards assumes both.</a:t>
+              <a:t>TEACHING PURPOSE</a:t>
+            </a:r>
+          </a:p>
+          <a:p>
+            <a:r>
+              <a:t>Data science</a:t>
+            </a:r>
+          </a:p>
+          <a:p>
+            <a:r>
+              <a:t/>
+            </a:r>
+          </a:p>
+          <a:p>
+            <a:r>
+              <a:t>CONNECT</a:t>
+            </a:r>
+          </a:p>
+          <a:p>
+            <a:r>
+              <a:t>Build on the preceding slide: Machine learning.</a:t>
+            </a:r>
+          </a:p>
+          <a:p>
+            <a:r>
+              <a:t/>
+            </a:r>
+          </a:p>
+          <a:p>
+            <a:r>
+              <a:t>LECTURER CUE</a:t>
+            </a:r>
+          </a:p>
+          <a:p>
+            <a:r>
+              <a:t>In industry the split is roughly eighty per cent getting data into a usable state and twenty per cent modelling. An engineer with clean data beats a better algorithm with dirty data. The missing-assay example on this slide is a real Week 6 exercise: you will be handed records with a large part of one column absent and asked whether they are missing at random and what that does to your conclusion.</a:t>
+            </a:r>
+          </a:p>
+          <a:p>
+            <a:r>
+              <a:t/>
+            </a:r>
+          </a:p>
+          <a:p>
+            <a:r>
+              <a:t>EXPLAIN IN ORDINARY WORDS</a:t>
+            </a:r>
+          </a:p>
+          <a:p>
+            <a:r>
+              <a:t>Missing means not recorded, not automatically zero. Decide why it is missing and document the rule. Fitted fill values must come from training data when evaluating a model.</a:t>
+            </a:r>
+          </a:p>
+          <a:p>
+            <a:r>
+              <a:t/>
+            </a:r>
+          </a:p>
+          <a:p>
+            <a:r>
+              <a:t>CHECK AND EXPECTED ANSWER</a:t>
+            </a:r>
+          </a:p>
+          <a:p>
+            <a:r>
+              <a:t>Is an unrecorded energy reading evidence of zero consumption? No.</a:t>
+            </a:r>
+          </a:p>
+          <a:p>
+            <a:r>
+              <a:t/>
+            </a:r>
+          </a:p>
+          <a:p>
+            <a:r>
+              <a:t>IF LEARNERS ARE STUCK</a:t>
+            </a:r>
+          </a:p>
+          <a:p>
+            <a:r>
+              <a:t>Use three rows: a recorded zero, a recorded positive value and a blank. Explain their different meanings before cleaning.</a:t>
+            </a:r>
+          </a:p>
+          <a:p>
+            <a:r>
+              <a:t/>
+            </a:r>
+          </a:p>
+          <a:p>
+            <a:r>
+              <a:t>NEXT</a:t>
+            </a:r>
+          </a:p>
+          <a:p>
+            <a:r>
+              <a:t>Two ways to make a computer decide. Move on after a learner can explain the current example or required action.</a:t>
             </a:r>
           </a:p>
         </p:txBody>
@@ -1445,8 +2478,8 @@
 </p:notes>
 </file>
 
-<file path=ppt/notesSlides/notesSlide21.xml><?xml version="1.0" encoding="utf-8"?>
-<p:notes xmlns:a="http://schemas.openxmlformats.org/drawingml/2006/main" xmlns:p="http://schemas.openxmlformats.org/presentationml/2006/main" xmlns:r="http://schemas.openxmlformats.org/officeDocument/2006/relationships">
+<file path=ppt/notesSlides/notesSlide2.xml><?xml version="1.0" encoding="utf-8"?>
+<p:notes xmlns:a="http://schemas.openxmlformats.org/drawingml/2006/main" xmlns:p="http://schemas.openxmlformats.org/presentationml/2006/main">
   <p:cSld>
     <p:spTree>
       <p:nvGrpSpPr>
@@ -1490,7 +2523,122 @@
           <a:lstStyle/>
           <a:p>
             <a:r>
-              <a:t>Sit with the question before any answer arrives. Two honest first reactions are 'you cannot' and 'there must be a formula somewhere', and both are useful. The hands-on prediction exercise shows what a third answer looks like.</a:t>
+              <a:t>TEACHING PURPOSE</a:t>
+            </a:r>
+          </a:p>
+          <a:p>
+            <a:r>
+              <a:t>Jotham Martin Wambi</a:t>
+            </a:r>
+          </a:p>
+          <a:p>
+            <a:r>
+              <a:t/>
+            </a:r>
+          </a:p>
+          <a:p>
+            <a:r>
+              <a:t>CONNECT</a:t>
+            </a:r>
+          </a:p>
+          <a:p>
+            <a:r>
+              <a:t>Build on the preceding slide: AI, machine learning.</a:t>
+            </a:r>
+          </a:p>
+          <a:p>
+            <a:r>
+              <a:t/>
+            </a:r>
+          </a:p>
+          <a:p>
+            <a:r>
+              <a:t>LECTURER CUE</a:t>
+            </a:r>
+          </a:p>
+          <a:p>
+            <a:r>
+              <a:t>A short introduction, and there is a reason for it beyond courtesy.</a:t>
+            </a:r>
+          </a:p>
+          <a:p>
+            <a:r>
+              <a:t>First, so that you know what you can ask me for. The work on the right is where my experience actually is: sensor data and predictive maintenance, language models over documents, and getting models into something a colleague can use. If your project heads in one of those directions I can help you in detail. If it heads somewhere I know less well, I will tell you that rather than guess.</a:t>
+            </a:r>
+          </a:p>
+          <a:p>
+            <a:r>
+              <a:t>Second, because of the route rather than the titles. I read economics and information technology as undergraduate degrees, and my first seven years of work were in banking, tax and product management, none of which involved building a model. Nobody starts where this field expects them to start, and the engineering degree you are already halfway through is a better foundation for machine learning than most computing degrees, for reasons we come to in the roadmap segment.</a:t>
+            </a:r>
+          </a:p>
+          <a:p>
+            <a:r>
+              <a:t>Third, so the claims in this course are checkable. Where I tell you a technique behaves a certain way, it is usually because I have watched it fail somewhere first.</a:t>
+            </a:r>
+          </a:p>
+          <a:p>
+            <a:r>
+              <a:t>The contact details are real. Use them.</a:t>
+            </a:r>
+          </a:p>
+          <a:p>
+            <a:r>
+              <a:t/>
+            </a:r>
+          </a:p>
+          <a:p>
+            <a:r>
+              <a:t>EXPLAIN IN ORDINARY WORDS</a:t>
+            </a:r>
+          </a:p>
+          <a:p>
+            <a:r>
+              <a:t>A condition is a True/False question. Python executes the matching indented branch. = assigns; == compares. &gt;= includes the boundary, while &gt; excludes it.</a:t>
+            </a:r>
+          </a:p>
+          <a:p>
+            <a:r>
+              <a:t/>
+            </a:r>
+          </a:p>
+          <a:p>
+            <a:r>
+              <a:t>CHECK AND EXPECTED ANSWER</a:t>
+            </a:r>
+          </a:p>
+          <a:p>
+            <a:r>
+              <a:t>With value 30, is value &gt;= 30 true? Yes. Is value &gt; 30 true? No.</a:t>
+            </a:r>
+          </a:p>
+          <a:p>
+            <a:r>
+              <a:t/>
+            </a:r>
+          </a:p>
+          <a:p>
+            <a:r>
+              <a:t>IF LEARNERS ARE STUCK</a:t>
+            </a:r>
+          </a:p>
+          <a:p>
+            <a:r>
+              <a:t>Try one value below, at and above the boundary before running the code.</a:t>
+            </a:r>
+          </a:p>
+          <a:p>
+            <a:r>
+              <a:t/>
+            </a:r>
+          </a:p>
+          <a:p>
+            <a:r>
+              <a:t>NEXT</a:t>
+            </a:r>
+          </a:p>
+          <a:p>
+            <a:r>
+              <a:t>By the end of today you can…. Move on after a learner can explain the current example or required action.</a:t>
             </a:r>
           </a:p>
         </p:txBody>
@@ -1515,8 +2663,8 @@
 </p:notes>
 </file>
 
-<file path=ppt/notesSlides/notesSlide22.xml><?xml version="1.0" encoding="utf-8"?>
-<p:notes xmlns:a="http://schemas.openxmlformats.org/drawingml/2006/main" xmlns:p="http://schemas.openxmlformats.org/presentationml/2006/main" xmlns:r="http://schemas.openxmlformats.org/officeDocument/2006/relationships">
+<file path=ppt/notesSlides/notesSlide20.xml><?xml version="1.0" encoding="utf-8"?>
+<p:notes xmlns:a="http://schemas.openxmlformats.org/drawingml/2006/main" xmlns:p="http://schemas.openxmlformats.org/presentationml/2006/main">
   <p:cSld>
     <p:spTree>
       <p:nvGrpSpPr>
@@ -1560,7 +2708,57 @@
           <a:lstStyle/>
           <a:p>
             <a:r>
-              <a:t>A worked case from your own discipline: IF the pulp pH falls below 9.0 THEN alarm the operator — Process engineering gives you that set point. No data is needed to write the rule. That belongs firmly in the left-hand column. The right-hand column earns its place when there is no threshold in any code of practice and no formula to look up, and you have examples of past cases instead. Neither column is better; the useful question is whether you already know the rule for the problem in front of you.</a:t>
+              <a:t>TEACHING PURPOSE</a:t>
+            </a:r>
+          </a:p>
+          <a:p>
+            <a:r>
+              <a:t>Two ways to make a computer decide</a:t>
+            </a:r>
+          </a:p>
+          <a:p>
+            <a:r>
+              <a:t/>
+            </a:r>
+          </a:p>
+          <a:p>
+            <a:r>
+              <a:t>CONNECT</a:t>
+            </a:r>
+          </a:p>
+          <a:p>
+            <a:r>
+              <a:t>Build on the preceding slide: Data science.</a:t>
+            </a:r>
+          </a:p>
+          <a:p>
+            <a:r>
+              <a:t/>
+            </a:r>
+          </a:p>
+          <a:p>
+            <a:r>
+              <a:t>LECTURER CUE</a:t>
+            </a:r>
+          </a:p>
+          <a:p>
+            <a:r>
+              <a:t>The core teaching segment of the session: the difference between writing a rule and inferring one from examples, plus the vocabulary for talking about a table of data. Everything from Week 5 onwards assumes both.</a:t>
+            </a:r>
+          </a:p>
+          <a:p>
+            <a:r>
+              <a:t/>
+            </a:r>
+          </a:p>
+          <a:p>
+            <a:r>
+              <a:t>NEXT</a:t>
+            </a:r>
+          </a:p>
+          <a:p>
+            <a:r>
+              <a:t>"The silica assay takes an hour to come back from the laboratory. Can we know it now, from the process variables we already measure?". Move on after a learner can explain the current example or required action.</a:t>
             </a:r>
           </a:p>
         </p:txBody>
@@ -1585,8 +2783,8 @@
 </p:notes>
 </file>
 
-<file path=ppt/notesSlides/notesSlide23.xml><?xml version="1.0" encoding="utf-8"?>
-<p:notes xmlns:a="http://schemas.openxmlformats.org/drawingml/2006/main" xmlns:p="http://schemas.openxmlformats.org/presentationml/2006/main" xmlns:r="http://schemas.openxmlformats.org/officeDocument/2006/relationships">
+<file path=ppt/notesSlides/notesSlide21.xml><?xml version="1.0" encoding="utf-8"?>
+<p:notes xmlns:a="http://schemas.openxmlformats.org/drawingml/2006/main" xmlns:p="http://schemas.openxmlformats.org/presentationml/2006/main">
   <p:cSld>
     <p:spTree>
       <p:nvGrpSpPr>
@@ -1630,7 +2828,102 @@
           <a:lstStyle/>
           <a:p>
             <a:r>
-              <a:t>Most of engineering stays in the left-hand column and that is the correct place for it. The third item on the left is the one that decides real projects: a model whose decision cannot be explained line by line often cannot be used at all, whatever its accuracy on test data. That constraint returns in Week 12.</a:t>
+              <a:t>TEACHING PURPOSE</a:t>
+            </a:r>
+          </a:p>
+          <a:p>
+            <a:r>
+              <a:t>"The silica assay takes an hour to come back from the laboratory. Can we know it now, from the process variables we already measure?"</a:t>
+            </a:r>
+          </a:p>
+          <a:p>
+            <a:r>
+              <a:t/>
+            </a:r>
+          </a:p>
+          <a:p>
+            <a:r>
+              <a:t>CONNECT</a:t>
+            </a:r>
+          </a:p>
+          <a:p>
+            <a:r>
+              <a:t>Build on the preceding slide: Two ways to make a computer decide.</a:t>
+            </a:r>
+          </a:p>
+          <a:p>
+            <a:r>
+              <a:t/>
+            </a:r>
+          </a:p>
+          <a:p>
+            <a:r>
+              <a:t>LECTURER CUE</a:t>
+            </a:r>
+          </a:p>
+          <a:p>
+            <a:r>
+              <a:t>Sit with the question before any answer arrives. Two honest first reactions are 'you cannot' and 'there must be a formula somewhere', and both are useful. The hands-on prediction exercise shows what a third answer looks like.</a:t>
+            </a:r>
+          </a:p>
+          <a:p>
+            <a:r>
+              <a:t/>
+            </a:r>
+          </a:p>
+          <a:p>
+            <a:r>
+              <a:t>EXPLAIN IN ORDINARY WORDS</a:t>
+            </a:r>
+          </a:p>
+          <a:p>
+            <a:r>
+              <a:t>A value is a piece of information. A variable is a name referring to a value. In length_m = 5, Python evaluates the right side and binds that result to the name on the left.</a:t>
+            </a:r>
+          </a:p>
+          <a:p>
+            <a:r>
+              <a:t/>
+            </a:r>
+          </a:p>
+          <a:p>
+            <a:r>
+              <a:t>CHECK AND EXPECTED ANSWER</a:t>
+            </a:r>
+          </a:p>
+          <a:p>
+            <a:r>
+              <a:t>After x=3 then x=5, what does print(x) display? 5. The earlier value is not added automatically.</a:t>
+            </a:r>
+          </a:p>
+          <a:p>
+            <a:r>
+              <a:t/>
+            </a:r>
+          </a:p>
+          <a:p>
+            <a:r>
+              <a:t>IF LEARNERS ARE STUCK</a:t>
+            </a:r>
+          </a:p>
+          <a:p>
+            <a:r>
+              <a:t>Write the name on a card and the current value beside it. Distinguish number 3 from quoted text "3".</a:t>
+            </a:r>
+          </a:p>
+          <a:p>
+            <a:r>
+              <a:t/>
+            </a:r>
+          </a:p>
+          <a:p>
+            <a:r>
+              <a:t>NEXT</a:t>
+            </a:r>
+          </a:p>
+          <a:p>
+            <a:r>
+              <a:t>Traditional programming, and machine learning. Move on after a learner can explain the current example or required action.</a:t>
             </a:r>
           </a:p>
         </p:txBody>
@@ -1655,8 +2948,8 @@
 </p:notes>
 </file>
 
-<file path=ppt/notesSlides/notesSlide24.xml><?xml version="1.0" encoding="utf-8"?>
-<p:notes xmlns:a="http://schemas.openxmlformats.org/drawingml/2006/main" xmlns:p="http://schemas.openxmlformats.org/presentationml/2006/main" xmlns:r="http://schemas.openxmlformats.org/officeDocument/2006/relationships">
+<file path=ppt/notesSlides/notesSlide22.xml><?xml version="1.0" encoding="utf-8"?>
+<p:notes xmlns:a="http://schemas.openxmlformats.org/drawingml/2006/main" xmlns:p="http://schemas.openxmlformats.org/presentationml/2006/main">
   <p:cSld>
     <p:spTree>
       <p:nvGrpSpPr>
@@ -1700,7 +2993,102 @@
           <a:lstStyle/>
           <a:p>
             <a:r>
-              <a:t>This is the picture to fix in your head, because every dataset you meet this semester has this shape. One row is one example. The feature columns hold what you know beforehand and the target column holds the thing you want to predict. Worth thinking about: the target of one problem can be a feature of another. Curing temperature is the target if you are studying an oven and a feature if you are predicting strength.</a:t>
+              <a:t>TEACHING PURPOSE</a:t>
+            </a:r>
+          </a:p>
+          <a:p>
+            <a:r>
+              <a:t>Traditional programming, and machine learning</a:t>
+            </a:r>
+          </a:p>
+          <a:p>
+            <a:r>
+              <a:t/>
+            </a:r>
+          </a:p>
+          <a:p>
+            <a:r>
+              <a:t>CONNECT</a:t>
+            </a:r>
+          </a:p>
+          <a:p>
+            <a:r>
+              <a:t>Build on the preceding slide: "The silica assay takes an hour to come back from the laboratory. Can we know it now, from the process variables we already measure?".</a:t>
+            </a:r>
+          </a:p>
+          <a:p>
+            <a:r>
+              <a:t/>
+            </a:r>
+          </a:p>
+          <a:p>
+            <a:r>
+              <a:t>LECTURER CUE</a:t>
+            </a:r>
+          </a:p>
+          <a:p>
+            <a:r>
+              <a:t>A worked case from your own discipline: IF the pulp pH falls below 9.0 THEN alarm the operator — Process engineering gives you that set point. No data is needed to write the rule. That belongs firmly in the left-hand column. The right-hand column earns its place when there is no threshold in any code of practice and no formula to look up, and you have examples of past cases instead. Neither column is better; the useful question is whether you already know the rule for the problem in front of you.</a:t>
+            </a:r>
+          </a:p>
+          <a:p>
+            <a:r>
+              <a:t/>
+            </a:r>
+          </a:p>
+          <a:p>
+            <a:r>
+              <a:t>EXPLAIN IN ORDINARY WORDS</a:t>
+            </a:r>
+          </a:p>
+          <a:p>
+            <a:r>
+              <a:t>A feature is an input available when predicting. The target is the answer to learn from. Regression predicts a number; classification predicts a category. Learning patterns does not by itself establish cause.</a:t>
+            </a:r>
+          </a:p>
+          <a:p>
+            <a:r>
+              <a:t/>
+            </a:r>
+          </a:p>
+          <a:p>
+            <a:r>
+              <a:t>CHECK AND EXPECTED ANSWER</a:t>
+            </a:r>
+          </a:p>
+          <a:p>
+            <a:r>
+              <a:t>Predicting concrete strength: regression. Predicting pass/fail: classification. Is a later test result available before that test? No.</a:t>
+            </a:r>
+          </a:p>
+          <a:p>
+            <a:r>
+              <a:t/>
+            </a:r>
+          </a:p>
+          <a:p>
+            <a:r>
+              <a:t>IF LEARNERS ARE STUCK</a:t>
+            </a:r>
+          </a:p>
+          <a:p>
+            <a:r>
+              <a:t>Describe the engineering decision in everyday language, then label one row, an input and its answer. Compare with a rule you could write directly.</a:t>
+            </a:r>
+          </a:p>
+          <a:p>
+            <a:r>
+              <a:t/>
+            </a:r>
+          </a:p>
+          <a:p>
+            <a:r>
+              <a:t>NEXT</a:t>
+            </a:r>
+          </a:p>
+          <a:p>
+            <a:r>
+              <a:t>When to write the rule, and when to learn it from data. Move on after a learner can explain the current example or required action.</a:t>
             </a:r>
           </a:p>
         </p:txBody>
@@ -1725,8 +3113,8 @@
 </p:notes>
 </file>
 
-<file path=ppt/notesSlides/notesSlide25.xml><?xml version="1.0" encoding="utf-8"?>
-<p:notes xmlns:a="http://schemas.openxmlformats.org/drawingml/2006/main" xmlns:p="http://schemas.openxmlformats.org/presentationml/2006/main" xmlns:r="http://schemas.openxmlformats.org/officeDocument/2006/relationships">
+<file path=ppt/notesSlides/notesSlide23.xml><?xml version="1.0" encoding="utf-8"?>
+<p:notes xmlns:a="http://schemas.openxmlformats.org/drawingml/2006/main" xmlns:p="http://schemas.openxmlformats.org/presentationml/2006/main">
   <p:cSld>
     <p:spTree>
       <p:nvGrpSpPr>
@@ -1770,7 +3158,102 @@
           <a:lstStyle/>
           <a:p>
             <a:r>
-              <a:t>The 'association is not a cause' line is the seed of correlation versus causation, which arrives properly in Week 8. One error to start watching for now: including a column that is only known after the target is known. That is data leakage, it is the most destructive mistake in applied machine learning, and Week 10 is a full session on it.</a:t>
+              <a:t>TEACHING PURPOSE</a:t>
+            </a:r>
+          </a:p>
+          <a:p>
+            <a:r>
+              <a:t>When to write the rule, and when to learn it from data</a:t>
+            </a:r>
+          </a:p>
+          <a:p>
+            <a:r>
+              <a:t/>
+            </a:r>
+          </a:p>
+          <a:p>
+            <a:r>
+              <a:t>CONNECT</a:t>
+            </a:r>
+          </a:p>
+          <a:p>
+            <a:r>
+              <a:t>Build on the preceding slide: Traditional programming, and machine learning.</a:t>
+            </a:r>
+          </a:p>
+          <a:p>
+            <a:r>
+              <a:t/>
+            </a:r>
+          </a:p>
+          <a:p>
+            <a:r>
+              <a:t>LECTURER CUE</a:t>
+            </a:r>
+          </a:p>
+          <a:p>
+            <a:r>
+              <a:t>Most of engineering stays in the left-hand column and that is the correct place for it. The third item on the left is the one that decides real projects: a model whose decision cannot be explained line by line often cannot be used at all, whatever its accuracy on test data. That constraint returns in Week 12.</a:t>
+            </a:r>
+          </a:p>
+          <a:p>
+            <a:r>
+              <a:t/>
+            </a:r>
+          </a:p>
+          <a:p>
+            <a:r>
+              <a:t>EXPLAIN IN ORDINARY WORDS</a:t>
+            </a:r>
+          </a:p>
+          <a:p>
+            <a:r>
+              <a:t>A value is a piece of information. A variable is a name referring to a value. In length_m = 5, Python evaluates the right side and binds that result to the name on the left.</a:t>
+            </a:r>
+          </a:p>
+          <a:p>
+            <a:r>
+              <a:t/>
+            </a:r>
+          </a:p>
+          <a:p>
+            <a:r>
+              <a:t>CHECK AND EXPECTED ANSWER</a:t>
+            </a:r>
+          </a:p>
+          <a:p>
+            <a:r>
+              <a:t>After x=3 then x=5, what does print(x) display? 5. The earlier value is not added automatically.</a:t>
+            </a:r>
+          </a:p>
+          <a:p>
+            <a:r>
+              <a:t/>
+            </a:r>
+          </a:p>
+          <a:p>
+            <a:r>
+              <a:t>IF LEARNERS ARE STUCK</a:t>
+            </a:r>
+          </a:p>
+          <a:p>
+            <a:r>
+              <a:t>Write the name on a card and the current value beside it. Distinguish number 3 from quoted text "3".</a:t>
+            </a:r>
+          </a:p>
+          <a:p>
+            <a:r>
+              <a:t/>
+            </a:r>
+          </a:p>
+          <a:p>
+            <a:r>
+              <a:t>NEXT</a:t>
+            </a:r>
+          </a:p>
+          <a:p>
+            <a:r>
+              <a:t>What we actually mean by 'data'. Move on after a learner can explain the current example or required action.</a:t>
             </a:r>
           </a:p>
         </p:txBody>
@@ -1795,8 +3278,8 @@
 </p:notes>
 </file>
 
-<file path=ppt/notesSlides/notesSlide26.xml><?xml version="1.0" encoding="utf-8"?>
-<p:notes xmlns:a="http://schemas.openxmlformats.org/drawingml/2006/main" xmlns:p="http://schemas.openxmlformats.org/presentationml/2006/main" xmlns:r="http://schemas.openxmlformats.org/officeDocument/2006/relationships">
+<file path=ppt/notesSlides/notesSlide24.xml><?xml version="1.0" encoding="utf-8"?>
+<p:notes xmlns:a="http://schemas.openxmlformats.org/drawingml/2006/main" xmlns:p="http://schemas.openxmlformats.org/presentationml/2006/main">
   <p:cSld>
     <p:spTree>
       <p:nvGrpSpPr>
@@ -1840,7 +3323,102 @@
           <a:lstStyle/>
           <a:p>
             <a:r>
-              <a:t>Write something for each of the three before you turn to the answers. Question B is deliberately hard for Week 1 — noticing that the repair column can only be filled in after the failure has happened is enough at this stage, even if you cannot yet name what is wrong with using it.</a:t>
+              <a:t>TEACHING PURPOSE</a:t>
+            </a:r>
+          </a:p>
+          <a:p>
+            <a:r>
+              <a:t>What we actually mean by 'data'</a:t>
+            </a:r>
+          </a:p>
+          <a:p>
+            <a:r>
+              <a:t/>
+            </a:r>
+          </a:p>
+          <a:p>
+            <a:r>
+              <a:t>CONNECT</a:t>
+            </a:r>
+          </a:p>
+          <a:p>
+            <a:r>
+              <a:t>Build on the preceding slide: When to write the rule, and when to learn it from data.</a:t>
+            </a:r>
+          </a:p>
+          <a:p>
+            <a:r>
+              <a:t/>
+            </a:r>
+          </a:p>
+          <a:p>
+            <a:r>
+              <a:t>LECTURER CUE</a:t>
+            </a:r>
+          </a:p>
+          <a:p>
+            <a:r>
+              <a:t>This is the picture to fix in your head, because every dataset you meet this semester has this shape. One row is one example. The feature columns hold what you know beforehand and the target column holds the thing you want to predict. Worth thinking about: the target of one problem can be a feature of another. Curing temperature is the target if you are studying an oven and a feature if you are predicting strength.</a:t>
+            </a:r>
+          </a:p>
+          <a:p>
+            <a:r>
+              <a:t/>
+            </a:r>
+          </a:p>
+          <a:p>
+            <a:r>
+              <a:t>EXPLAIN IN ORDINARY WORDS</a:t>
+            </a:r>
+          </a:p>
+          <a:p>
+            <a:r>
+              <a:t>A feature is an input available when predicting. The target is the answer to learn from. Regression predicts a number; classification predicts a category. Learning patterns does not by itself establish cause.</a:t>
+            </a:r>
+          </a:p>
+          <a:p>
+            <a:r>
+              <a:t/>
+            </a:r>
+          </a:p>
+          <a:p>
+            <a:r>
+              <a:t>CHECK AND EXPECTED ANSWER</a:t>
+            </a:r>
+          </a:p>
+          <a:p>
+            <a:r>
+              <a:t>Predicting concrete strength: regression. Predicting pass/fail: classification. Is a later test result available before that test? No.</a:t>
+            </a:r>
+          </a:p>
+          <a:p>
+            <a:r>
+              <a:t/>
+            </a:r>
+          </a:p>
+          <a:p>
+            <a:r>
+              <a:t>IF LEARNERS ARE STUCK</a:t>
+            </a:r>
+          </a:p>
+          <a:p>
+            <a:r>
+              <a:t>Describe the engineering decision in everyday language, then label one row, an input and its answer. Compare with a rule you could write directly.</a:t>
+            </a:r>
+          </a:p>
+          <a:p>
+            <a:r>
+              <a:t/>
+            </a:r>
+          </a:p>
+          <a:p>
+            <a:r>
+              <a:t>NEXT</a:t>
+            </a:r>
+          </a:p>
+          <a:p>
+            <a:r>
+              <a:t>Feature, and target. Move on after a learner can explain the current example or required action.</a:t>
             </a:r>
           </a:p>
         </p:txBody>
@@ -1865,8 +3443,8 @@
 </p:notes>
 </file>
 
-<file path=ppt/notesSlides/notesSlide27.xml><?xml version="1.0" encoding="utf-8"?>
-<p:notes xmlns:a="http://schemas.openxmlformats.org/drawingml/2006/main" xmlns:p="http://schemas.openxmlformats.org/presentationml/2006/main" xmlns:r="http://schemas.openxmlformats.org/officeDocument/2006/relationships">
+<file path=ppt/notesSlides/notesSlide25.xml><?xml version="1.0" encoding="utf-8"?>
+<p:notes xmlns:a="http://schemas.openxmlformats.org/drawingml/2006/main" xmlns:p="http://schemas.openxmlformats.org/presentationml/2006/main">
   <p:cSld>
     <p:spTree>
       <p:nvGrpSpPr>
@@ -1910,7 +3488,102 @@
           <a:lstStyle/>
           <a:p>
             <a:r>
-              <a:t>Getting B wrong is normal; professional teams ship this bug regularly and only find it when the model reaches service. The name for it is data leakage. The timing test in answer B — could I know this column before the outcome? — is the one habit to carry out of this slide.</a:t>
+              <a:t>TEACHING PURPOSE</a:t>
+            </a:r>
+          </a:p>
+          <a:p>
+            <a:r>
+              <a:t>Feature, and target</a:t>
+            </a:r>
+          </a:p>
+          <a:p>
+            <a:r>
+              <a:t/>
+            </a:r>
+          </a:p>
+          <a:p>
+            <a:r>
+              <a:t>CONNECT</a:t>
+            </a:r>
+          </a:p>
+          <a:p>
+            <a:r>
+              <a:t>Build on the preceding slide: What we actually mean by 'data'.</a:t>
+            </a:r>
+          </a:p>
+          <a:p>
+            <a:r>
+              <a:t/>
+            </a:r>
+          </a:p>
+          <a:p>
+            <a:r>
+              <a:t>LECTURER CUE</a:t>
+            </a:r>
+          </a:p>
+          <a:p>
+            <a:r>
+              <a:t>The 'association is not a cause' line is the seed of correlation versus causation, which arrives properly in Week 8. One error to start watching for now: including a column that is only known after the target is known. That is data leakage, it is the most destructive mistake in applied machine learning, and Week 10 is a full session on it.</a:t>
+            </a:r>
+          </a:p>
+          <a:p>
+            <a:r>
+              <a:t/>
+            </a:r>
+          </a:p>
+          <a:p>
+            <a:r>
+              <a:t>EXPLAIN IN ORDINARY WORDS</a:t>
+            </a:r>
+          </a:p>
+          <a:p>
+            <a:r>
+              <a:t>A feature is an input available when predicting. The target is the answer to learn from. Regression predicts a number; classification predicts a category. Learning patterns does not by itself establish cause.</a:t>
+            </a:r>
+          </a:p>
+          <a:p>
+            <a:r>
+              <a:t/>
+            </a:r>
+          </a:p>
+          <a:p>
+            <a:r>
+              <a:t>CHECK AND EXPECTED ANSWER</a:t>
+            </a:r>
+          </a:p>
+          <a:p>
+            <a:r>
+              <a:t>Predicting concrete strength: regression. Predicting pass/fail: classification. Is a later test result available before that test? No.</a:t>
+            </a:r>
+          </a:p>
+          <a:p>
+            <a:r>
+              <a:t/>
+            </a:r>
+          </a:p>
+          <a:p>
+            <a:r>
+              <a:t>IF LEARNERS ARE STUCK</a:t>
+            </a:r>
+          </a:p>
+          <a:p>
+            <a:r>
+              <a:t>Describe the engineering decision in everyday language, then label one row, an input and its answer. Compare with a rule you could write directly.</a:t>
+            </a:r>
+          </a:p>
+          <a:p>
+            <a:r>
+              <a:t/>
+            </a:r>
+          </a:p>
+          <a:p>
+            <a:r>
+              <a:t>NEXT</a:t>
+            </a:r>
+          </a:p>
+          <a:p>
+            <a:r>
+              <a:t>Can you answer these?. Move on after a learner can explain the current example or required action.</a:t>
             </a:r>
           </a:p>
         </p:txBody>
@@ -1935,8 +3608,8 @@
 </p:notes>
 </file>
 
-<file path=ppt/notesSlides/notesSlide28.xml><?xml version="1.0" encoding="utf-8"?>
-<p:notes xmlns:a="http://schemas.openxmlformats.org/drawingml/2006/main" xmlns:p="http://schemas.openxmlformats.org/presentationml/2006/main" xmlns:r="http://schemas.openxmlformats.org/officeDocument/2006/relationships">
+<file path=ppt/notesSlides/notesSlide26.xml><?xml version="1.0" encoding="utf-8"?>
+<p:notes xmlns:a="http://schemas.openxmlformats.org/drawingml/2006/main" xmlns:p="http://schemas.openxmlformats.org/presentationml/2006/main">
   <p:cSld>
     <p:spTree>
       <p:nvGrpSpPr>
@@ -1980,7 +3653,172 @@
           <a:lstStyle/>
           <a:p>
             <a:r>
-              <a:t>Teams of four or five, formed now and kept for the rest of the semester. You are about to do machine learning by hand, on paper, before anybody writes a line of code.</a:t>
+              <a:t>TEACHING PURPOSE</a:t>
+            </a:r>
+          </a:p>
+          <a:p>
+            <a:r>
+              <a:t>Can you answer these?</a:t>
+            </a:r>
+          </a:p>
+          <a:p>
+            <a:r>
+              <a:t/>
+            </a:r>
+          </a:p>
+          <a:p>
+            <a:r>
+              <a:t>CONNECT</a:t>
+            </a:r>
+          </a:p>
+          <a:p>
+            <a:r>
+              <a:t>Build on the preceding slide: Feature, and target.</a:t>
+            </a:r>
+          </a:p>
+          <a:p>
+            <a:r>
+              <a:t/>
+            </a:r>
+          </a:p>
+          <a:p>
+            <a:r>
+              <a:t>LECTURER CUE</a:t>
+            </a:r>
+          </a:p>
+          <a:p>
+            <a:r>
+              <a:t>Write something for each of the three before you turn to the answers. Question B is deliberately hard for Week 1 — noticing that the repair column can only be filled in after the failure has happened is enough at this stage, even if you cannot yet name what is wrong with using it.</a:t>
+            </a:r>
+          </a:p>
+          <a:p>
+            <a:r>
+              <a:t/>
+            </a:r>
+          </a:p>
+          <a:p>
+            <a:r>
+              <a:t>EXPLAIN IN ORDINARY WORDS</a:t>
+            </a:r>
+          </a:p>
+          <a:p>
+            <a:r>
+              <a:t>A feature is an input available when predicting. The target is the answer to learn from. Regression predicts a number; classification predicts a category. Learning patterns does not by itself establish cause.</a:t>
+            </a:r>
+          </a:p>
+          <a:p>
+            <a:r>
+              <a:t/>
+            </a:r>
+          </a:p>
+          <a:p>
+            <a:r>
+              <a:t>CHECK AND EXPECTED ANSWER</a:t>
+            </a:r>
+          </a:p>
+          <a:p>
+            <a:r>
+              <a:t>Predicting concrete strength: regression. Predicting pass/fail: classification. Is a later test result available before that test? No.</a:t>
+            </a:r>
+          </a:p>
+          <a:p>
+            <a:r>
+              <a:t/>
+            </a:r>
+          </a:p>
+          <a:p>
+            <a:r>
+              <a:t>IF LEARNERS ARE STUCK</a:t>
+            </a:r>
+          </a:p>
+          <a:p>
+            <a:r>
+              <a:t>Describe the engineering decision in everyday language, then label one row, an input and its answer. Compare with a rule you could write directly.</a:t>
+            </a:r>
+          </a:p>
+          <a:p>
+            <a:r>
+              <a:t/>
+            </a:r>
+          </a:p>
+          <a:p>
+            <a:r>
+              <a:t>DISCUSSION KEY FOR THIS SLIDE</a:t>
+            </a:r>
+          </a:p>
+          <a:p>
+            <a:r>
+              <a:t>ANSWERS</a:t>
+            </a:r>
+          </a:p>
+          <a:p>
+            <a:r>
+              <a:t>How did you do?</a:t>
+            </a:r>
+          </a:p>
+          <a:p>
+            <a:r>
+              <a:t>A</a:t>
+            </a:r>
+          </a:p>
+          <a:p>
+            <a:r>
+              <a:t>Feature or target?</a:t>
+            </a:r>
+          </a:p>
+          <a:p>
+            <a:r>
+              <a:t>The target. It is the thing you want to predict. Everything measured beforehand is a feature.</a:t>
+            </a:r>
+          </a:p>
+          <a:p>
+            <a:r>
+              <a:t>B</a:t>
+            </a:r>
+          </a:p>
+          <a:p>
+            <a:r>
+              <a:t>The repair column?</a:t>
+            </a:r>
+          </a:p>
+          <a:p>
+            <a:r>
+              <a:t>No. You only know what repair was done AFTER the failure, so it cannot help you predict the failure. Include it and your model will look brilliant in testing and be useless in service. This is called data leakage and we spend a whole session on it in Week 10.</a:t>
+            </a:r>
+          </a:p>
+          <a:p>
+            <a:r>
+              <a:t>C</a:t>
+            </a:r>
+          </a:p>
+          <a:p>
+            <a:r>
+              <a:t>A rule you already know?</a:t>
+            </a:r>
+          </a:p>
+          <a:p>
+            <a:r>
+              <a:t>Anything with a formula or a code threshold: Contained metal is tonnage times grade. That is arithmetic; there is nothing to predict. If a validated equation exists, use the equation.</a:t>
+            </a:r>
+          </a:p>
+          <a:p>
+            <a:r>
+              <a:t>Let learners attempt first; use this to explain the reasoning, not just reveal the answer.</a:t>
+            </a:r>
+          </a:p>
+          <a:p>
+            <a:r>
+              <a:t/>
+            </a:r>
+          </a:p>
+          <a:p>
+            <a:r>
+              <a:t>NEXT</a:t>
+            </a:r>
+          </a:p>
+          <a:p>
+            <a:r>
+              <a:t>How did you do?. Move on after a learner can explain the current example or required action.</a:t>
             </a:r>
           </a:p>
         </p:txBody>
@@ -2005,8 +3843,8 @@
 </p:notes>
 </file>
 
-<file path=ppt/notesSlides/notesSlide29.xml><?xml version="1.0" encoding="utf-8"?>
-<p:notes xmlns:a="http://schemas.openxmlformats.org/drawingml/2006/main" xmlns:p="http://schemas.openxmlformats.org/presentationml/2006/main" xmlns:r="http://schemas.openxmlformats.org/officeDocument/2006/relationships">
+<file path=ppt/notesSlides/notesSlide27.xml><?xml version="1.0" encoding="utf-8"?>
+<p:notes xmlns:a="http://schemas.openxmlformats.org/drawingml/2006/main" xmlns:p="http://schemas.openxmlformats.org/presentationml/2006/main">
   <p:cSld>
     <p:spTree>
       <p:nvGrpSpPr>
@@ -2050,7 +3888,102 @@
           <a:lstStyle/>
           <a:p>
             <a:r>
-              <a:t>The number your team predicts matters far less than the sentence saying how you got it, so write the reasoning down. The next three slides give names to whatever method you used, and that only works if you can still see what you did. If you are stuck, start with one question: which single column seems to move with the outcome, and why that one?</a:t>
+              <a:t>TEACHING PURPOSE</a:t>
+            </a:r>
+          </a:p>
+          <a:p>
+            <a:r>
+              <a:t>How did you do?</a:t>
+            </a:r>
+          </a:p>
+          <a:p>
+            <a:r>
+              <a:t/>
+            </a:r>
+          </a:p>
+          <a:p>
+            <a:r>
+              <a:t>CONNECT</a:t>
+            </a:r>
+          </a:p>
+          <a:p>
+            <a:r>
+              <a:t>Build on the preceding slide: Can you answer these?.</a:t>
+            </a:r>
+          </a:p>
+          <a:p>
+            <a:r>
+              <a:t/>
+            </a:r>
+          </a:p>
+          <a:p>
+            <a:r>
+              <a:t>LECTURER CUE</a:t>
+            </a:r>
+          </a:p>
+          <a:p>
+            <a:r>
+              <a:t>Getting B wrong is normal; professional teams ship this bug regularly and only find it when the model reaches service. The name for it is data leakage. The timing test in answer B — could I know this column before the outcome? — is the one habit to carry out of this slide.</a:t>
+            </a:r>
+          </a:p>
+          <a:p>
+            <a:r>
+              <a:t/>
+            </a:r>
+          </a:p>
+          <a:p>
+            <a:r>
+              <a:t>EXPLAIN IN ORDINARY WORDS</a:t>
+            </a:r>
+          </a:p>
+          <a:p>
+            <a:r>
+              <a:t>Training fits rules. Validation helps choose among rules. The final test estimates performance after choices are fixed. Information that would be unavailable at the real prediction time must stay out of the inputs.</a:t>
+            </a:r>
+          </a:p>
+          <a:p>
+            <a:r>
+              <a:t/>
+            </a:r>
+          </a:p>
+          <a:p>
+            <a:r>
+              <a:t>CHECK AND EXPECTED ANSWER</a:t>
+            </a:r>
+          </a:p>
+          <a:p>
+            <a:r>
+              <a:t>May two readings of the same machine appear on both sides when evaluating new machines? No; split by machine. For forecasting, train on the past and evaluate later time.</a:t>
+            </a:r>
+          </a:p>
+          <a:p>
+            <a:r>
+              <a:t/>
+            </a:r>
+          </a:p>
+          <a:p>
+            <a:r>
+              <a:t>IF LEARNERS ARE STUCK</a:t>
+            </a:r>
+          </a:p>
+          <a:p>
+            <a:r>
+              <a:t>Use three envelopes. Keep the final-test envelope closed while selecting features or settings.</a:t>
+            </a:r>
+          </a:p>
+          <a:p>
+            <a:r>
+              <a:t/>
+            </a:r>
+          </a:p>
+          <a:p>
+            <a:r>
+              <a:t>NEXT</a:t>
+            </a:r>
+          </a:p>
+          <a:p>
+            <a:r>
+              <a:t>Hands on: predict case 13. Move on after a learner can explain the current example or required action.</a:t>
             </a:r>
           </a:p>
         </p:txBody>
@@ -2075,8 +4008,8 @@
 </p:notes>
 </file>
 
-<file path=ppt/notesSlides/notesSlide3.xml><?xml version="1.0" encoding="utf-8"?>
-<p:notes xmlns:a="http://schemas.openxmlformats.org/drawingml/2006/main" xmlns:p="http://schemas.openxmlformats.org/presentationml/2006/main" xmlns:r="http://schemas.openxmlformats.org/officeDocument/2006/relationships">
+<file path=ppt/notesSlides/notesSlide28.xml><?xml version="1.0" encoding="utf-8"?>
+<p:notes xmlns:a="http://schemas.openxmlformats.org/drawingml/2006/main" xmlns:p="http://schemas.openxmlformats.org/presentationml/2006/main">
   <p:cSld>
     <p:spTree>
       <p:nvGrpSpPr>
@@ -2120,7 +4053,102 @@
           <a:lstStyle/>
           <a:p>
             <a:r>
-              <a:t>Seven objectives, and they are the whole session. Nothing is hidden behind them and there is no reading list you are expected to have done. Mark yourself against each one at the end of the session; whatever you cannot claim is what to revise before Week 2.</a:t>
+              <a:t>TEACHING PURPOSE</a:t>
+            </a:r>
+          </a:p>
+          <a:p>
+            <a:r>
+              <a:t>Hands on: predict case 13</a:t>
+            </a:r>
+          </a:p>
+          <a:p>
+            <a:r>
+              <a:t/>
+            </a:r>
+          </a:p>
+          <a:p>
+            <a:r>
+              <a:t>CONNECT</a:t>
+            </a:r>
+          </a:p>
+          <a:p>
+            <a:r>
+              <a:t>Build on the preceding slide: How did you do?.</a:t>
+            </a:r>
+          </a:p>
+          <a:p>
+            <a:r>
+              <a:t/>
+            </a:r>
+          </a:p>
+          <a:p>
+            <a:r>
+              <a:t>LECTURER CUE</a:t>
+            </a:r>
+          </a:p>
+          <a:p>
+            <a:r>
+              <a:t>Teams of four or five, formed now and kept for the rest of the semester. You are about to do machine learning by hand, on paper, before anybody writes a line of code.</a:t>
+            </a:r>
+          </a:p>
+          <a:p>
+            <a:r>
+              <a:t/>
+            </a:r>
+          </a:p>
+          <a:p>
+            <a:r>
+              <a:t>EXPLAIN IN ORDINARY WORDS</a:t>
+            </a:r>
+          </a:p>
+          <a:p>
+            <a:r>
+              <a:t>A feature is an input available when predicting. The target is the answer to learn from. Regression predicts a number; classification predicts a category. Learning patterns does not by itself establish cause.</a:t>
+            </a:r>
+          </a:p>
+          <a:p>
+            <a:r>
+              <a:t/>
+            </a:r>
+          </a:p>
+          <a:p>
+            <a:r>
+              <a:t>CHECK AND EXPECTED ANSWER</a:t>
+            </a:r>
+          </a:p>
+          <a:p>
+            <a:r>
+              <a:t>Predicting concrete strength: regression. Predicting pass/fail: classification. Is a later test result available before that test? No.</a:t>
+            </a:r>
+          </a:p>
+          <a:p>
+            <a:r>
+              <a:t/>
+            </a:r>
+          </a:p>
+          <a:p>
+            <a:r>
+              <a:t>IF LEARNERS ARE STUCK</a:t>
+            </a:r>
+          </a:p>
+          <a:p>
+            <a:r>
+              <a:t>Describe the engineering decision in everyday language, then label one row, an input and its answer. Compare with a rule you could write directly.</a:t>
+            </a:r>
+          </a:p>
+          <a:p>
+            <a:r>
+              <a:t/>
+            </a:r>
+          </a:p>
+          <a:p>
+            <a:r>
+              <a:t>NEXT</a:t>
+            </a:r>
+          </a:p>
+          <a:p>
+            <a:r>
+              <a:t>Your task. Move on after a learner can explain the current example or required action.</a:t>
             </a:r>
           </a:p>
         </p:txBody>
@@ -2145,8 +4173,8 @@
 </p:notes>
 </file>
 
-<file path=ppt/notesSlides/notesSlide30.xml><?xml version="1.0" encoding="utf-8"?>
-<p:notes xmlns:a="http://schemas.openxmlformats.org/drawingml/2006/main" xmlns:p="http://schemas.openxmlformats.org/presentationml/2006/main" xmlns:r="http://schemas.openxmlformats.org/officeDocument/2006/relationships">
+<file path=ppt/notesSlides/notesSlide29.xml><?xml version="1.0" encoding="utf-8"?>
+<p:notes xmlns:a="http://schemas.openxmlformats.org/drawingml/2006/main" xmlns:p="http://schemas.openxmlformats.org/presentationml/2006/main">
   <p:cSld>
     <p:spTree>
       <p:nvGrpSpPr>
@@ -2190,7 +4218,102 @@
           <a:lstStyle/>
           <a:p>
             <a:r>
-              <a:t>There is no single right method, and this is one line of thinking that works. Step five is what separates an engineer from a calculator: how confident am I, and what would change my mind? The two practical tests, in Weeks 7 and 14, assess that step far more heavily than the arithmetic.</a:t>
+              <a:t>TEACHING PURPOSE</a:t>
+            </a:r>
+          </a:p>
+          <a:p>
+            <a:r>
+              <a:t>Your task</a:t>
+            </a:r>
+          </a:p>
+          <a:p>
+            <a:r>
+              <a:t/>
+            </a:r>
+          </a:p>
+          <a:p>
+            <a:r>
+              <a:t>CONNECT</a:t>
+            </a:r>
+          </a:p>
+          <a:p>
+            <a:r>
+              <a:t>Build on the preceding slide: Hands on: predict case 13.</a:t>
+            </a:r>
+          </a:p>
+          <a:p>
+            <a:r>
+              <a:t/>
+            </a:r>
+          </a:p>
+          <a:p>
+            <a:r>
+              <a:t>LECTURER CUE</a:t>
+            </a:r>
+          </a:p>
+          <a:p>
+            <a:r>
+              <a:t>The number your team predicts matters far less than the sentence saying how you got it, so write the reasoning down. The next three slides give names to whatever method you used, and that only works if you can still see what you did. If you are stuck, start with one question: which single column seems to move with the outcome, and why that one?</a:t>
+            </a:r>
+          </a:p>
+          <a:p>
+            <a:r>
+              <a:t/>
+            </a:r>
+          </a:p>
+          <a:p>
+            <a:r>
+              <a:t>EXPLAIN IN ORDINARY WORDS</a:t>
+            </a:r>
+          </a:p>
+          <a:p>
+            <a:r>
+              <a:t>A feature is an input available when predicting. The target is the answer to learn from. Regression predicts a number; classification predicts a category. Learning patterns does not by itself establish cause.</a:t>
+            </a:r>
+          </a:p>
+          <a:p>
+            <a:r>
+              <a:t/>
+            </a:r>
+          </a:p>
+          <a:p>
+            <a:r>
+              <a:t>CHECK AND EXPECTED ANSWER</a:t>
+            </a:r>
+          </a:p>
+          <a:p>
+            <a:r>
+              <a:t>Predicting concrete strength: regression. Predicting pass/fail: classification. Is a later test result available before that test? No.</a:t>
+            </a:r>
+          </a:p>
+          <a:p>
+            <a:r>
+              <a:t/>
+            </a:r>
+          </a:p>
+          <a:p>
+            <a:r>
+              <a:t>IF LEARNERS ARE STUCK</a:t>
+            </a:r>
+          </a:p>
+          <a:p>
+            <a:r>
+              <a:t>Describe the engineering decision in everyday language, then label one row, an input and its answer. Compare with a rule you could write directly.</a:t>
+            </a:r>
+          </a:p>
+          <a:p>
+            <a:r>
+              <a:t/>
+            </a:r>
+          </a:p>
+          <a:p>
+            <a:r>
+              <a:t>NEXT</a:t>
+            </a:r>
+          </a:p>
+          <a:p>
+            <a:r>
+              <a:t>Reading the pattern from twelve cases. Move on after a learner can explain the current example or required action.</a:t>
             </a:r>
           </a:p>
         </p:txBody>
@@ -2215,8 +4338,8 @@
 </p:notes>
 </file>
 
-<file path=ppt/notesSlides/notesSlide31.xml><?xml version="1.0" encoding="utf-8"?>
-<p:notes xmlns:a="http://schemas.openxmlformats.org/drawingml/2006/main" xmlns:p="http://schemas.openxmlformats.org/presentationml/2006/main" xmlns:r="http://schemas.openxmlformats.org/officeDocument/2006/relationships">
+<file path=ppt/notesSlides/notesSlide3.xml><?xml version="1.0" encoding="utf-8"?>
+<p:notes xmlns:a="http://schemas.openxmlformats.org/drawingml/2006/main" xmlns:p="http://schemas.openxmlformats.org/presentationml/2006/main">
   <p:cSld>
     <p:spTree>
       <p:nvGrpSpPr>
@@ -2260,7 +4383,102 @@
           <a:lstStyle/>
           <a:p>
             <a:r>
-              <a:t>The spread of team answers is the teaching point. Several different reasonable methods produced several different numbers, so being reasonable is not enough on its own — you need a way to measure which method is better. One case cannot tell you that, which is what Week 8 sets up.</a:t>
+              <a:t>TEACHING PURPOSE</a:t>
+            </a:r>
+          </a:p>
+          <a:p>
+            <a:r>
+              <a:t>By the end of today you can…</a:t>
+            </a:r>
+          </a:p>
+          <a:p>
+            <a:r>
+              <a:t/>
+            </a:r>
+          </a:p>
+          <a:p>
+            <a:r>
+              <a:t>CONNECT</a:t>
+            </a:r>
+          </a:p>
+          <a:p>
+            <a:r>
+              <a:t>Build on the preceding slide: Jotham Martin Wambi.</a:t>
+            </a:r>
+          </a:p>
+          <a:p>
+            <a:r>
+              <a:t/>
+            </a:r>
+          </a:p>
+          <a:p>
+            <a:r>
+              <a:t>LECTURER CUE</a:t>
+            </a:r>
+          </a:p>
+          <a:p>
+            <a:r>
+              <a:t>Seven objectives, and they are the whole session. Nothing is hidden behind them and there is no reading list you are expected to have done. Mark yourself against each one at the end of the session; whatever you cannot claim is what to revise before Week 2.</a:t>
+            </a:r>
+          </a:p>
+          <a:p>
+            <a:r>
+              <a:t/>
+            </a:r>
+          </a:p>
+          <a:p>
+            <a:r>
+              <a:t>EXPLAIN IN ORDINARY WORDS</a:t>
+            </a:r>
+          </a:p>
+          <a:p>
+            <a:r>
+              <a:t>A feature is an input available when predicting. The target is the answer to learn from. Regression predicts a number; classification predicts a category. Learning patterns does not by itself establish cause.</a:t>
+            </a:r>
+          </a:p>
+          <a:p>
+            <a:r>
+              <a:t/>
+            </a:r>
+          </a:p>
+          <a:p>
+            <a:r>
+              <a:t>CHECK AND EXPECTED ANSWER</a:t>
+            </a:r>
+          </a:p>
+          <a:p>
+            <a:r>
+              <a:t>Predicting concrete strength: regression. Predicting pass/fail: classification. Is a later test result available before that test? No.</a:t>
+            </a:r>
+          </a:p>
+          <a:p>
+            <a:r>
+              <a:t/>
+            </a:r>
+          </a:p>
+          <a:p>
+            <a:r>
+              <a:t>IF LEARNERS ARE STUCK</a:t>
+            </a:r>
+          </a:p>
+          <a:p>
+            <a:r>
+              <a:t>Describe the engineering decision in everyday language, then label one row, an input and its answer. Compare with a rule you could write directly.</a:t>
+            </a:r>
+          </a:p>
+          <a:p>
+            <a:r>
+              <a:t/>
+            </a:r>
+          </a:p>
+          <a:p>
+            <a:r>
+              <a:t>NEXT</a:t>
+            </a:r>
+          </a:p>
+          <a:p>
+            <a:r>
+              <a:t>How every session this semester is shaped. Move on after a learner can explain the current example or required action.</a:t>
             </a:r>
           </a:p>
         </p:txBody>
@@ -2285,8 +4503,8 @@
 </p:notes>
 </file>
 
-<file path=ppt/notesSlides/notesSlide32.xml><?xml version="1.0" encoding="utf-8"?>
-<p:notes xmlns:a="http://schemas.openxmlformats.org/drawingml/2006/main" xmlns:p="http://schemas.openxmlformats.org/presentationml/2006/main" xmlns:r="http://schemas.openxmlformats.org/officeDocument/2006/relationships">
+<file path=ppt/notesSlides/notesSlide30.xml><?xml version="1.0" encoding="utf-8"?>
+<p:notes xmlns:a="http://schemas.openxmlformats.org/drawingml/2006/main" xmlns:p="http://schemas.openxmlformats.org/presentationml/2006/main">
   <p:cSld>
     <p:spTree>
       <p:nvGrpSpPr>
@@ -2330,7 +4548,57 @@
           <a:lstStyle/>
           <a:p>
             <a:r>
-              <a:t>The syllabus for the rest of the semester is largely a set of names for what you just did with a pencil. The fourth pair is the one to dwell on: you predicted a case that was not in front of you when you formed the rule. That is generalisation, and everything in Week 10 follows from it.</a:t>
+              <a:t>TEACHING PURPOSE</a:t>
+            </a:r>
+          </a:p>
+          <a:p>
+            <a:r>
+              <a:t>Reading the pattern from twelve cases</a:t>
+            </a:r>
+          </a:p>
+          <a:p>
+            <a:r>
+              <a:t/>
+            </a:r>
+          </a:p>
+          <a:p>
+            <a:r>
+              <a:t>CONNECT</a:t>
+            </a:r>
+          </a:p>
+          <a:p>
+            <a:r>
+              <a:t>Build on the preceding slide: Your task.</a:t>
+            </a:r>
+          </a:p>
+          <a:p>
+            <a:r>
+              <a:t/>
+            </a:r>
+          </a:p>
+          <a:p>
+            <a:r>
+              <a:t>LECTURER CUE</a:t>
+            </a:r>
+          </a:p>
+          <a:p>
+            <a:r>
+              <a:t>There is no single right method, and this is one line of thinking that works. Step five is what separates an engineer from a calculator: how confident am I, and what would change my mind? The two practical tests, in Weeks 7 and 14, assess that step far more heavily than the arithmetic.</a:t>
+            </a:r>
+          </a:p>
+          <a:p>
+            <a:r>
+              <a:t/>
+            </a:r>
+          </a:p>
+          <a:p>
+            <a:r>
+              <a:t>NEXT</a:t>
+            </a:r>
+          </a:p>
+          <a:p>
+            <a:r>
+              <a:t>The answer, and your error. Move on after a learner can explain the current example or required action.</a:t>
             </a:r>
           </a:p>
         </p:txBody>
@@ -2355,8 +4623,8 @@
 </p:notes>
 </file>
 
-<file path=ppt/notesSlides/notesSlide33.xml><?xml version="1.0" encoding="utf-8"?>
-<p:notes xmlns:a="http://schemas.openxmlformats.org/drawingml/2006/main" xmlns:p="http://schemas.openxmlformats.org/presentationml/2006/main" xmlns:r="http://schemas.openxmlformats.org/officeDocument/2006/relationships">
+<file path=ppt/notesSlides/notesSlide31.xml><?xml version="1.0" encoding="utf-8"?>
+<p:notes xmlns:a="http://schemas.openxmlformats.org/drawingml/2006/main" xmlns:p="http://schemas.openxmlformats.org/presentationml/2006/main">
   <p:cSld>
     <p:spTree>
       <p:nvGrpSpPr>
@@ -2400,7 +4668,57 @@
           <a:lstStyle/>
           <a:p>
             <a:r>
-              <a:t>Ten minutes. The challenge segment after the break is the longest single working block of the session, so use the time.</a:t>
+              <a:t>TEACHING PURPOSE</a:t>
+            </a:r>
+          </a:p>
+          <a:p>
+            <a:r>
+              <a:t>The answer, and your error</a:t>
+            </a:r>
+          </a:p>
+          <a:p>
+            <a:r>
+              <a:t/>
+            </a:r>
+          </a:p>
+          <a:p>
+            <a:r>
+              <a:t>CONNECT</a:t>
+            </a:r>
+          </a:p>
+          <a:p>
+            <a:r>
+              <a:t>Build on the preceding slide: Reading the pattern from twelve cases.</a:t>
+            </a:r>
+          </a:p>
+          <a:p>
+            <a:r>
+              <a:t/>
+            </a:r>
+          </a:p>
+          <a:p>
+            <a:r>
+              <a:t>LECTURER CUE</a:t>
+            </a:r>
+          </a:p>
+          <a:p>
+            <a:r>
+              <a:t>The spread of team answers is the teaching point. Several different reasonable methods produced several different numbers, so being reasonable is not enough on its own — you need a way to measure which method is better. One case cannot tell you that, which is what Week 8 sets up.</a:t>
+            </a:r>
+          </a:p>
+          <a:p>
+            <a:r>
+              <a:t/>
+            </a:r>
+          </a:p>
+          <a:p>
+            <a:r>
+              <a:t>NEXT</a:t>
+            </a:r>
+          </a:p>
+          <a:p>
+            <a:r>
+              <a:t>You just did every step of a machine learning project. Move on after a learner can explain the current example or required action.</a:t>
             </a:r>
           </a:p>
         </p:txBody>
@@ -2425,8 +4743,8 @@
 </p:notes>
 </file>
 
-<file path=ppt/notesSlides/notesSlide34.xml><?xml version="1.0" encoding="utf-8"?>
-<p:notes xmlns:a="http://schemas.openxmlformats.org/drawingml/2006/main" xmlns:p="http://schemas.openxmlformats.org/presentationml/2006/main" xmlns:r="http://schemas.openxmlformats.org/officeDocument/2006/relationships">
+<file path=ppt/notesSlides/notesSlide32.xml><?xml version="1.0" encoding="utf-8"?>
+<p:notes xmlns:a="http://schemas.openxmlformats.org/drawingml/2006/main" xmlns:p="http://schemas.openxmlformats.org/presentationml/2006/main">
   <p:cSld>
     <p:spTree>
       <p:nvGrpSpPr>
@@ -2470,7 +4788,102 @@
           <a:lstStyle/>
           <a:p>
             <a:r>
-              <a:t>A short segment carrying one distinction that decides which method you reach for all semester. It needs to be automatic by Week 8, when you start fitting models to both kinds of problem.</a:t>
+              <a:t>TEACHING PURPOSE</a:t>
+            </a:r>
+          </a:p>
+          <a:p>
+            <a:r>
+              <a:t>You just did every step of a machine learning project</a:t>
+            </a:r>
+          </a:p>
+          <a:p>
+            <a:r>
+              <a:t/>
+            </a:r>
+          </a:p>
+          <a:p>
+            <a:r>
+              <a:t>CONNECT</a:t>
+            </a:r>
+          </a:p>
+          <a:p>
+            <a:r>
+              <a:t>Build on the preceding slide: The answer, and your error.</a:t>
+            </a:r>
+          </a:p>
+          <a:p>
+            <a:r>
+              <a:t/>
+            </a:r>
+          </a:p>
+          <a:p>
+            <a:r>
+              <a:t>LECTURER CUE</a:t>
+            </a:r>
+          </a:p>
+          <a:p>
+            <a:r>
+              <a:t>The syllabus for the rest of the semester is largely a set of names for what you just did with a pencil. The fourth pair is the one to dwell on: you predicted a case that was not in front of you when you formed the rule. That is generalisation, and everything in Week 10 follows from it.</a:t>
+            </a:r>
+          </a:p>
+          <a:p>
+            <a:r>
+              <a:t/>
+            </a:r>
+          </a:p>
+          <a:p>
+            <a:r>
+              <a:t>EXPLAIN IN ORDINARY WORDS</a:t>
+            </a:r>
+          </a:p>
+          <a:p>
+            <a:r>
+              <a:t>A feature is an input available when predicting. The target is the answer to learn from. Regression predicts a number; classification predicts a category. Learning patterns does not by itself establish cause.</a:t>
+            </a:r>
+          </a:p>
+          <a:p>
+            <a:r>
+              <a:t/>
+            </a:r>
+          </a:p>
+          <a:p>
+            <a:r>
+              <a:t>CHECK AND EXPECTED ANSWER</a:t>
+            </a:r>
+          </a:p>
+          <a:p>
+            <a:r>
+              <a:t>Predicting concrete strength: regression. Predicting pass/fail: classification. Is a later test result available before that test? No.</a:t>
+            </a:r>
+          </a:p>
+          <a:p>
+            <a:r>
+              <a:t/>
+            </a:r>
+          </a:p>
+          <a:p>
+            <a:r>
+              <a:t>IF LEARNERS ARE STUCK</a:t>
+            </a:r>
+          </a:p>
+          <a:p>
+            <a:r>
+              <a:t>Describe the engineering decision in everyday language, then label one row, an input and its answer. Compare with a rule you could write directly.</a:t>
+            </a:r>
+          </a:p>
+          <a:p>
+            <a:r>
+              <a:t/>
+            </a:r>
+          </a:p>
+          <a:p>
+            <a:r>
+              <a:t>NEXT</a:t>
+            </a:r>
+          </a:p>
+          <a:p>
+            <a:r>
+              <a:t>Break. Move on after a learner can explain the current example or required action.</a:t>
             </a:r>
           </a:p>
         </p:txBody>
@@ -2495,8 +4908,8 @@
 </p:notes>
 </file>
 
-<file path=ppt/notesSlides/notesSlide35.xml><?xml version="1.0" encoding="utf-8"?>
-<p:notes xmlns:a="http://schemas.openxmlformats.org/drawingml/2006/main" xmlns:p="http://schemas.openxmlformats.org/presentationml/2006/main" xmlns:r="http://schemas.openxmlformats.org/officeDocument/2006/relationships">
+<file path=ppt/notesSlides/notesSlide33.xml><?xml version="1.0" encoding="utf-8"?>
+<p:notes xmlns:a="http://schemas.openxmlformats.org/drawingml/2006/main" xmlns:p="http://schemas.openxmlformats.org/presentationml/2006/main">
   <p:cSld>
     <p:spTree>
       <p:nvGrpSpPr>
@@ -2540,7 +4953,57 @@
           <a:lstStyle/>
           <a:p>
             <a:r>
-              <a:t>The point that is easy to miss: the SAME dataset can pose either question. Take the target on the left and band it — ore or waste; or lithology: sandstone, shale, limestone — and the regression problem has become a classification problem. Banding is an engineering decision with consequences, because it throws away the distance between two values inside the same band, and it comes back in Week 9 when you start choosing how to measure performance.</a:t>
+              <a:t>TEACHING PURPOSE</a:t>
+            </a:r>
+          </a:p>
+          <a:p>
+            <a:r>
+              <a:t>Break</a:t>
+            </a:r>
+          </a:p>
+          <a:p>
+            <a:r>
+              <a:t/>
+            </a:r>
+          </a:p>
+          <a:p>
+            <a:r>
+              <a:t>CONNECT</a:t>
+            </a:r>
+          </a:p>
+          <a:p>
+            <a:r>
+              <a:t>Build on the preceding slide: You just did every step of a machine learning project.</a:t>
+            </a:r>
+          </a:p>
+          <a:p>
+            <a:r>
+              <a:t/>
+            </a:r>
+          </a:p>
+          <a:p>
+            <a:r>
+              <a:t>LECTURER CUE</a:t>
+            </a:r>
+          </a:p>
+          <a:p>
+            <a:r>
+              <a:t>Ten minutes. The challenge segment after the break is the longest single working block of the session, so use the time.</a:t>
+            </a:r>
+          </a:p>
+          <a:p>
+            <a:r>
+              <a:t/>
+            </a:r>
+          </a:p>
+          <a:p>
+            <a:r>
+              <a:t>NEXT</a:t>
+            </a:r>
+          </a:p>
+          <a:p>
+            <a:r>
+              <a:t>Two kinds of question. Move on after a learner can explain the current example or required action.</a:t>
             </a:r>
           </a:p>
         </p:txBody>
@@ -2565,8 +5028,8 @@
 </p:notes>
 </file>
 
-<file path=ppt/notesSlides/notesSlide36.xml><?xml version="1.0" encoding="utf-8"?>
-<p:notes xmlns:a="http://schemas.openxmlformats.org/drawingml/2006/main" xmlns:p="http://schemas.openxmlformats.org/presentationml/2006/main" xmlns:r="http://schemas.openxmlformats.org/officeDocument/2006/relationships">
+<file path=ppt/notesSlides/notesSlide34.xml><?xml version="1.0" encoding="utf-8"?>
+<p:notes xmlns:a="http://schemas.openxmlformats.org/drawingml/2006/main" xmlns:p="http://schemas.openxmlformats.org/presentationml/2006/main">
   <p:cSld>
     <p:spTree>
       <p:nvGrpSpPr>
@@ -2610,7 +5073,102 @@
           <a:lstStyle/>
           <a:p>
             <a:r>
-              <a:t>Carry the test as a habit: what would the answer look like written down? A quantity with a unit means regression. A word or a label means classification. That question resolves almost every case you will meet, and it is faster than trying to remember the definitions.</a:t>
+              <a:t>TEACHING PURPOSE</a:t>
+            </a:r>
+          </a:p>
+          <a:p>
+            <a:r>
+              <a:t>Two kinds of question</a:t>
+            </a:r>
+          </a:p>
+          <a:p>
+            <a:r>
+              <a:t/>
+            </a:r>
+          </a:p>
+          <a:p>
+            <a:r>
+              <a:t>CONNECT</a:t>
+            </a:r>
+          </a:p>
+          <a:p>
+            <a:r>
+              <a:t>Build on the preceding slide: Break.</a:t>
+            </a:r>
+          </a:p>
+          <a:p>
+            <a:r>
+              <a:t/>
+            </a:r>
+          </a:p>
+          <a:p>
+            <a:r>
+              <a:t>LECTURER CUE</a:t>
+            </a:r>
+          </a:p>
+          <a:p>
+            <a:r>
+              <a:t>A short segment carrying one distinction that decides which method you reach for all semester. It needs to be automatic by Week 8, when you start fitting models to both kinds of problem.</a:t>
+            </a:r>
+          </a:p>
+          <a:p>
+            <a:r>
+              <a:t/>
+            </a:r>
+          </a:p>
+          <a:p>
+            <a:r>
+              <a:t>EXPLAIN IN ORDINARY WORDS</a:t>
+            </a:r>
+          </a:p>
+          <a:p>
+            <a:r>
+              <a:t>An observation describes the data. A finding answers a defined question with evidence. A recommendation adds an action, its justification and limits.</a:t>
+            </a:r>
+          </a:p>
+          <a:p>
+            <a:r>
+              <a:t/>
+            </a:r>
+          </a:p>
+          <a:p>
+            <a:r>
+              <a:t>CHECK AND EXPECTED ANSWER</a:t>
+            </a:r>
+          </a:p>
+          <a:p>
+            <a:r>
+              <a:t>Does a difference between two groups prove one caused the other? No. Other differences or selection may explain it.</a:t>
+            </a:r>
+          </a:p>
+          <a:p>
+            <a:r>
+              <a:t/>
+            </a:r>
+          </a:p>
+          <a:p>
+            <a:r>
+              <a:t>IF LEARNERS ARE STUCK</a:t>
+            </a:r>
+          </a:p>
+          <a:p>
+            <a:r>
+              <a:t>Ask for the population, time period, number and comparison. Then ask what additional evidence could change the recommendation.</a:t>
+            </a:r>
+          </a:p>
+          <a:p>
+            <a:r>
+              <a:t/>
+            </a:r>
+          </a:p>
+          <a:p>
+            <a:r>
+              <a:t>NEXT</a:t>
+            </a:r>
+          </a:p>
+          <a:p>
+            <a:r>
+              <a:t>Regression and classification. Move on after a learner can explain the current example or required action.</a:t>
             </a:r>
           </a:p>
         </p:txBody>
@@ -2635,8 +5193,8 @@
 </p:notes>
 </file>
 
-<file path=ppt/notesSlides/notesSlide37.xml><?xml version="1.0" encoding="utf-8"?>
-<p:notes xmlns:a="http://schemas.openxmlformats.org/drawingml/2006/main" xmlns:p="http://schemas.openxmlformats.org/presentationml/2006/main" xmlns:r="http://schemas.openxmlformats.org/officeDocument/2006/relationships">
+<file path=ppt/notesSlides/notesSlide35.xml><?xml version="1.0" encoding="utf-8"?>
+<p:notes xmlns:a="http://schemas.openxmlformats.org/drawingml/2006/main" xmlns:p="http://schemas.openxmlformats.org/presentationml/2006/main">
   <p:cSld>
     <p:spTree>
       <p:nvGrpSpPr>
@@ -2680,7 +5238,102 @@
           <a:lstStyle/>
           <a:p>
             <a:r>
-              <a:t>Question C is the interesting one. It is still classification, with five categories rather than two. Multi-class problems are harder to evaluate because one accuracy figure hides which classes you are getting wrong, and that is a Week 9 topic.</a:t>
+              <a:t>TEACHING PURPOSE</a:t>
+            </a:r>
+          </a:p>
+          <a:p>
+            <a:r>
+              <a:t>Regression and classification</a:t>
+            </a:r>
+          </a:p>
+          <a:p>
+            <a:r>
+              <a:t/>
+            </a:r>
+          </a:p>
+          <a:p>
+            <a:r>
+              <a:t>CONNECT</a:t>
+            </a:r>
+          </a:p>
+          <a:p>
+            <a:r>
+              <a:t>Build on the preceding slide: Two kinds of question.</a:t>
+            </a:r>
+          </a:p>
+          <a:p>
+            <a:r>
+              <a:t/>
+            </a:r>
+          </a:p>
+          <a:p>
+            <a:r>
+              <a:t>LECTURER CUE</a:t>
+            </a:r>
+          </a:p>
+          <a:p>
+            <a:r>
+              <a:t>The point that is easy to miss: the SAME dataset can pose either question. Take the target on the left and band it — ore or waste; or lithology: sandstone, shale, limestone — and the regression problem has become a classification problem. Banding is an engineering decision with consequences, because it throws away the distance between two values inside the same band, and it comes back in Week 9 when you start choosing how to measure performance.</a:t>
+            </a:r>
+          </a:p>
+          <a:p>
+            <a:r>
+              <a:t/>
+            </a:r>
+          </a:p>
+          <a:p>
+            <a:r>
+              <a:t>EXPLAIN IN ORDINARY WORDS</a:t>
+            </a:r>
+          </a:p>
+          <a:p>
+            <a:r>
+              <a:t>A feature is an input available when predicting. The target is the answer to learn from. Regression predicts a number; classification predicts a category. Learning patterns does not by itself establish cause.</a:t>
+            </a:r>
+          </a:p>
+          <a:p>
+            <a:r>
+              <a:t/>
+            </a:r>
+          </a:p>
+          <a:p>
+            <a:r>
+              <a:t>CHECK AND EXPECTED ANSWER</a:t>
+            </a:r>
+          </a:p>
+          <a:p>
+            <a:r>
+              <a:t>Predicting concrete strength: regression. Predicting pass/fail: classification. Is a later test result available before that test? No.</a:t>
+            </a:r>
+          </a:p>
+          <a:p>
+            <a:r>
+              <a:t/>
+            </a:r>
+          </a:p>
+          <a:p>
+            <a:r>
+              <a:t>IF LEARNERS ARE STUCK</a:t>
+            </a:r>
+          </a:p>
+          <a:p>
+            <a:r>
+              <a:t>Describe the engineering decision in everyday language, then label one row, an input and its answer. Compare with a rule you could write directly.</a:t>
+            </a:r>
+          </a:p>
+          <a:p>
+            <a:r>
+              <a:t/>
+            </a:r>
+          </a:p>
+          <a:p>
+            <a:r>
+              <a:t>NEXT</a:t>
+            </a:r>
+          </a:p>
+          <a:p>
+            <a:r>
+              <a:t>Regression, and classification. Move on after a learner can explain the current example or required action.</a:t>
             </a:r>
           </a:p>
         </p:txBody>
@@ -2705,8 +5358,8 @@
 </p:notes>
 </file>
 
-<file path=ppt/notesSlides/notesSlide38.xml><?xml version="1.0" encoding="utf-8"?>
-<p:notes xmlns:a="http://schemas.openxmlformats.org/drawingml/2006/main" xmlns:p="http://schemas.openxmlformats.org/presentationml/2006/main" xmlns:r="http://schemas.openxmlformats.org/officeDocument/2006/relationships">
+<file path=ppt/notesSlides/notesSlide36.xml><?xml version="1.0" encoding="utf-8"?>
+<p:notes xmlns:a="http://schemas.openxmlformats.org/drawingml/2006/main" xmlns:p="http://schemas.openxmlformats.org/presentationml/2006/main">
   <p:cSld>
     <p:spTree>
       <p:nvGrpSpPr>
@@ -2750,7 +5403,102 @@
           <a:lstStyle/>
           <a:p>
             <a:r>
-              <a:t>You now have vocabulary you can use immediately: binary classification for two categories, multi-class for three or more. The distinction starts to matter as soon as you begin measuring performance in Week 9, because the same accuracy figure means different things in the two cases.</a:t>
+              <a:t>TEACHING PURPOSE</a:t>
+            </a:r>
+          </a:p>
+          <a:p>
+            <a:r>
+              <a:t>Regression, and classification</a:t>
+            </a:r>
+          </a:p>
+          <a:p>
+            <a:r>
+              <a:t/>
+            </a:r>
+          </a:p>
+          <a:p>
+            <a:r>
+              <a:t>CONNECT</a:t>
+            </a:r>
+          </a:p>
+          <a:p>
+            <a:r>
+              <a:t>Build on the preceding slide: Regression and classification.</a:t>
+            </a:r>
+          </a:p>
+          <a:p>
+            <a:r>
+              <a:t/>
+            </a:r>
+          </a:p>
+          <a:p>
+            <a:r>
+              <a:t>LECTURER CUE</a:t>
+            </a:r>
+          </a:p>
+          <a:p>
+            <a:r>
+              <a:t>Carry the test as a habit: what would the answer look like written down? A quantity with a unit means regression. A word or a label means classification. That question resolves almost every case you will meet, and it is faster than trying to remember the definitions.</a:t>
+            </a:r>
+          </a:p>
+          <a:p>
+            <a:r>
+              <a:t/>
+            </a:r>
+          </a:p>
+          <a:p>
+            <a:r>
+              <a:t>EXPLAIN IN ORDINARY WORDS</a:t>
+            </a:r>
+          </a:p>
+          <a:p>
+            <a:r>
+              <a:t>A feature is an input available when predicting. The target is the answer to learn from. Regression predicts a number; classification predicts a category. Learning patterns does not by itself establish cause.</a:t>
+            </a:r>
+          </a:p>
+          <a:p>
+            <a:r>
+              <a:t/>
+            </a:r>
+          </a:p>
+          <a:p>
+            <a:r>
+              <a:t>CHECK AND EXPECTED ANSWER</a:t>
+            </a:r>
+          </a:p>
+          <a:p>
+            <a:r>
+              <a:t>Predicting concrete strength: regression. Predicting pass/fail: classification. Is a later test result available before that test? No.</a:t>
+            </a:r>
+          </a:p>
+          <a:p>
+            <a:r>
+              <a:t/>
+            </a:r>
+          </a:p>
+          <a:p>
+            <a:r>
+              <a:t>IF LEARNERS ARE STUCK</a:t>
+            </a:r>
+          </a:p>
+          <a:p>
+            <a:r>
+              <a:t>Describe the engineering decision in everyday language, then label one row, an input and its answer. Compare with a rule you could write directly.</a:t>
+            </a:r>
+          </a:p>
+          <a:p>
+            <a:r>
+              <a:t/>
+            </a:r>
+          </a:p>
+          <a:p>
+            <a:r>
+              <a:t>NEXT</a:t>
+            </a:r>
+          </a:p>
+          <a:p>
+            <a:r>
+              <a:t>Can you answer these?. Move on after a learner can explain the current example or required action.</a:t>
             </a:r>
           </a:p>
         </p:txBody>
@@ -2775,8 +5523,8 @@
 </p:notes>
 </file>
 
-<file path=ppt/notesSlides/notesSlide39.xml><?xml version="1.0" encoding="utf-8"?>
-<p:notes xmlns:a="http://schemas.openxmlformats.org/drawingml/2006/main" xmlns:p="http://schemas.openxmlformats.org/presentationml/2006/main" xmlns:r="http://schemas.openxmlformats.org/officeDocument/2006/relationships">
+<file path=ppt/notesSlides/notesSlide37.xml><?xml version="1.0" encoding="utf-8"?>
+<p:notes xmlns:a="http://schemas.openxmlformats.org/drawingml/2006/main" xmlns:p="http://schemas.openxmlformats.org/presentationml/2006/main">
   <p:cSld>
     <p:spTree>
       <p:nvGrpSpPr>
@@ -2820,7 +5568,172 @@
           <a:lstStyle/>
           <a:p>
             <a:r>
-              <a:t>Four honest limits, so that you can recognise in advance when data will not help. This is also your protection against being sold a technique that cannot work on the problem you have.</a:t>
+              <a:t>TEACHING PURPOSE</a:t>
+            </a:r>
+          </a:p>
+          <a:p>
+            <a:r>
+              <a:t>Can you answer these?</a:t>
+            </a:r>
+          </a:p>
+          <a:p>
+            <a:r>
+              <a:t/>
+            </a:r>
+          </a:p>
+          <a:p>
+            <a:r>
+              <a:t>CONNECT</a:t>
+            </a:r>
+          </a:p>
+          <a:p>
+            <a:r>
+              <a:t>Build on the preceding slide: Regression, and classification.</a:t>
+            </a:r>
+          </a:p>
+          <a:p>
+            <a:r>
+              <a:t/>
+            </a:r>
+          </a:p>
+          <a:p>
+            <a:r>
+              <a:t>LECTURER CUE</a:t>
+            </a:r>
+          </a:p>
+          <a:p>
+            <a:r>
+              <a:t>Question C is the interesting one. It is still classification, with five categories rather than two. Multi-class problems are harder to evaluate because one accuracy figure hides which classes you are getting wrong, and that is a Week 9 topic.</a:t>
+            </a:r>
+          </a:p>
+          <a:p>
+            <a:r>
+              <a:t/>
+            </a:r>
+          </a:p>
+          <a:p>
+            <a:r>
+              <a:t>EXPLAIN IN ORDINARY WORDS</a:t>
+            </a:r>
+          </a:p>
+          <a:p>
+            <a:r>
+              <a:t>A feature is an input available when predicting. The target is the answer to learn from. Regression predicts a number; classification predicts a category. Learning patterns does not by itself establish cause.</a:t>
+            </a:r>
+          </a:p>
+          <a:p>
+            <a:r>
+              <a:t/>
+            </a:r>
+          </a:p>
+          <a:p>
+            <a:r>
+              <a:t>CHECK AND EXPECTED ANSWER</a:t>
+            </a:r>
+          </a:p>
+          <a:p>
+            <a:r>
+              <a:t>Predicting concrete strength: regression. Predicting pass/fail: classification. Is a later test result available before that test? No.</a:t>
+            </a:r>
+          </a:p>
+          <a:p>
+            <a:r>
+              <a:t/>
+            </a:r>
+          </a:p>
+          <a:p>
+            <a:r>
+              <a:t>IF LEARNERS ARE STUCK</a:t>
+            </a:r>
+          </a:p>
+          <a:p>
+            <a:r>
+              <a:t>Describe the engineering decision in everyday language, then label one row, an input and its answer. Compare with a rule you could write directly.</a:t>
+            </a:r>
+          </a:p>
+          <a:p>
+            <a:r>
+              <a:t/>
+            </a:r>
+          </a:p>
+          <a:p>
+            <a:r>
+              <a:t>DISCUSSION KEY FOR THIS SLIDE</a:t>
+            </a:r>
+          </a:p>
+          <a:p>
+            <a:r>
+              <a:t>ANSWERS</a:t>
+            </a:r>
+          </a:p>
+          <a:p>
+            <a:r>
+              <a:t>How did you do?</a:t>
+            </a:r>
+          </a:p>
+          <a:p>
+            <a:r>
+              <a:t>A</a:t>
+            </a:r>
+          </a:p>
+          <a:p>
+            <a:r>
+              <a:t>Days until replacement?</a:t>
+            </a:r>
+          </a:p>
+          <a:p>
+            <a:r>
+              <a:t>Regression. The answer is a number with a unit — days.</a:t>
+            </a:r>
+          </a:p>
+          <a:p>
+            <a:r>
+              <a:t>B</a:t>
+            </a:r>
+          </a:p>
+          <a:p>
+            <a:r>
+              <a:t>Pass or fail?</a:t>
+            </a:r>
+          </a:p>
+          <a:p>
+            <a:r>
+              <a:t>Classification. Two categories, so it is called binary classification.</a:t>
+            </a:r>
+          </a:p>
+          <a:p>
+            <a:r>
+              <a:t>C</a:t>
+            </a:r>
+          </a:p>
+          <a:p>
+            <a:r>
+              <a:t>Which of five fault types?</a:t>
+            </a:r>
+          </a:p>
+          <a:p>
+            <a:r>
+              <a:t>Still classification, but multi-class rather than binary. It is harder: with five classes there are far more ways to be wrong, and a single accuracy figure hides which ones you get wrong. Week 9.</a:t>
+            </a:r>
+          </a:p>
+          <a:p>
+            <a:r>
+              <a:t>Let learners attempt first; use this to explain the reasoning, not just reveal the answer.</a:t>
+            </a:r>
+          </a:p>
+          <a:p>
+            <a:r>
+              <a:t/>
+            </a:r>
+          </a:p>
+          <a:p>
+            <a:r>
+              <a:t>NEXT</a:t>
+            </a:r>
+          </a:p>
+          <a:p>
+            <a:r>
+              <a:t>How did you do?. Move on after a learner can explain the current example or required action.</a:t>
             </a:r>
           </a:p>
         </p:txBody>
@@ -2845,8 +5758,8 @@
 </p:notes>
 </file>
 
-<file path=ppt/notesSlides/notesSlide4.xml><?xml version="1.0" encoding="utf-8"?>
-<p:notes xmlns:a="http://schemas.openxmlformats.org/drawingml/2006/main" xmlns:p="http://schemas.openxmlformats.org/presentationml/2006/main" xmlns:r="http://schemas.openxmlformats.org/officeDocument/2006/relationships">
+<file path=ppt/notesSlides/notesSlide38.xml><?xml version="1.0" encoding="utf-8"?>
+<p:notes xmlns:a="http://schemas.openxmlformats.org/drawingml/2006/main" xmlns:p="http://schemas.openxmlformats.org/presentationml/2006/main">
   <p:cSld>
     <p:spTree>
       <p:nvGrpSpPr>
@@ -2890,7 +5803,102 @@
           <a:lstStyle/>
           <a:p>
             <a:r>
-              <a:t>Every session this semester has the same shape: eleven segments across three hours, with no block of talking longer than 25 minutes and roughly half the time spent working rather than listening. That is why attendance matters more here than on a lecture course — the practical and challenge segments cannot be read off a deck afterwards. There is a 10-minute break at the midpoint.</a:t>
+              <a:t>TEACHING PURPOSE</a:t>
+            </a:r>
+          </a:p>
+          <a:p>
+            <a:r>
+              <a:t>How did you do?</a:t>
+            </a:r>
+          </a:p>
+          <a:p>
+            <a:r>
+              <a:t/>
+            </a:r>
+          </a:p>
+          <a:p>
+            <a:r>
+              <a:t>CONNECT</a:t>
+            </a:r>
+          </a:p>
+          <a:p>
+            <a:r>
+              <a:t>Build on the preceding slide: Can you answer these?.</a:t>
+            </a:r>
+          </a:p>
+          <a:p>
+            <a:r>
+              <a:t/>
+            </a:r>
+          </a:p>
+          <a:p>
+            <a:r>
+              <a:t>LECTURER CUE</a:t>
+            </a:r>
+          </a:p>
+          <a:p>
+            <a:r>
+              <a:t>You now have vocabulary you can use immediately: binary classification for two categories, multi-class for three or more. The distinction starts to matter as soon as you begin measuring performance in Week 9, because the same accuracy figure means different things in the two cases.</a:t>
+            </a:r>
+          </a:p>
+          <a:p>
+            <a:r>
+              <a:t/>
+            </a:r>
+          </a:p>
+          <a:p>
+            <a:r>
+              <a:t>EXPLAIN IN ORDINARY WORDS</a:t>
+            </a:r>
+          </a:p>
+          <a:p>
+            <a:r>
+              <a:t>Read each quantity and unit before using a formula. Python calculates numbers but does not enforce physical units. Parentheses specify which operation happens first.</a:t>
+            </a:r>
+          </a:p>
+          <a:p>
+            <a:r>
+              <a:t/>
+            </a:r>
+          </a:p>
+          <a:p>
+            <a:r>
+              <a:t>CHECK AND EXPECTED ANSWER</a:t>
+            </a:r>
+          </a:p>
+          <a:p>
+            <a:r>
+              <a:t>What is 5 m times 3 m? 15 square metres. What is 7/2 in Python? 3.5; 7//2 is 3.</a:t>
+            </a:r>
+          </a:p>
+          <a:p>
+            <a:r>
+              <a:t/>
+            </a:r>
+          </a:p>
+          <a:p>
+            <a:r>
+              <a:t>IF LEARNERS ARE STUCK</a:t>
+            </a:r>
+          </a:p>
+          <a:p>
+            <a:r>
+              <a:t>Write the formula and units on paper, substitute small values, then translate it to Python. Check zero denominators and the issued sign convention.</a:t>
+            </a:r>
+          </a:p>
+          <a:p>
+            <a:r>
+              <a:t/>
+            </a:r>
+          </a:p>
+          <a:p>
+            <a:r>
+              <a:t>NEXT</a:t>
+            </a:r>
+          </a:p>
+          <a:p>
+            <a:r>
+              <a:t>What machine learning cannot do. Move on after a learner can explain the current example or required action.</a:t>
             </a:r>
           </a:p>
         </p:txBody>
@@ -2915,8 +5923,8 @@
 </p:notes>
 </file>
 
-<file path=ppt/notesSlides/notesSlide40.xml><?xml version="1.0" encoding="utf-8"?>
-<p:notes xmlns:a="http://schemas.openxmlformats.org/drawingml/2006/main" xmlns:p="http://schemas.openxmlformats.org/presentationml/2006/main" xmlns:r="http://schemas.openxmlformats.org/officeDocument/2006/relationships">
+<file path=ppt/notesSlides/notesSlide39.xml><?xml version="1.0" encoding="utf-8"?>
+<p:notes xmlns:a="http://schemas.openxmlformats.org/drawingml/2006/main" xmlns:p="http://schemas.openxmlformats.org/presentationml/2006/main">
   <p:cSld>
     <p:spTree>
       <p:nvGrpSpPr>
@@ -2960,7 +5968,102 @@
           <a:lstStyle/>
           <a:p>
             <a:r>
-              <a:t>The caption is the sentence to remember. A machine learning method will always return an answer and will never tell you that the question was unanswerable. Judging that is your job, and it is the reason a trained engineer is still needed after the code runs.</a:t>
+              <a:t>TEACHING PURPOSE</a:t>
+            </a:r>
+          </a:p>
+          <a:p>
+            <a:r>
+              <a:t>What machine learning cannot do</a:t>
+            </a:r>
+          </a:p>
+          <a:p>
+            <a:r>
+              <a:t/>
+            </a:r>
+          </a:p>
+          <a:p>
+            <a:r>
+              <a:t>CONNECT</a:t>
+            </a:r>
+          </a:p>
+          <a:p>
+            <a:r>
+              <a:t>Build on the preceding slide: How did you do?.</a:t>
+            </a:r>
+          </a:p>
+          <a:p>
+            <a:r>
+              <a:t/>
+            </a:r>
+          </a:p>
+          <a:p>
+            <a:r>
+              <a:t>LECTURER CUE</a:t>
+            </a:r>
+          </a:p>
+          <a:p>
+            <a:r>
+              <a:t>Four honest limits, so that you can recognise in advance when data will not help. This is also your protection against being sold a technique that cannot work on the problem you have.</a:t>
+            </a:r>
+          </a:p>
+          <a:p>
+            <a:r>
+              <a:t/>
+            </a:r>
+          </a:p>
+          <a:p>
+            <a:r>
+              <a:t>EXPLAIN IN ORDINARY WORDS</a:t>
+            </a:r>
+          </a:p>
+          <a:p>
+            <a:r>
+              <a:t>A feature is an input available when predicting. The target is the answer to learn from. Regression predicts a number; classification predicts a category. Learning patterns does not by itself establish cause.</a:t>
+            </a:r>
+          </a:p>
+          <a:p>
+            <a:r>
+              <a:t/>
+            </a:r>
+          </a:p>
+          <a:p>
+            <a:r>
+              <a:t>CHECK AND EXPECTED ANSWER</a:t>
+            </a:r>
+          </a:p>
+          <a:p>
+            <a:r>
+              <a:t>Predicting concrete strength: regression. Predicting pass/fail: classification. Is a later test result available before that test? No.</a:t>
+            </a:r>
+          </a:p>
+          <a:p>
+            <a:r>
+              <a:t/>
+            </a:r>
+          </a:p>
+          <a:p>
+            <a:r>
+              <a:t>IF LEARNERS ARE STUCK</a:t>
+            </a:r>
+          </a:p>
+          <a:p>
+            <a:r>
+              <a:t>Describe the engineering decision in everyday language, then label one row, an input and its answer. Compare with a rule you could write directly.</a:t>
+            </a:r>
+          </a:p>
+          <a:p>
+            <a:r>
+              <a:t/>
+            </a:r>
+          </a:p>
+          <a:p>
+            <a:r>
+              <a:t>NEXT</a:t>
+            </a:r>
+          </a:p>
+          <a:p>
+            <a:r>
+              <a:t>Four limits, and none of them go away. Move on after a learner can explain the current example or required action.</a:t>
             </a:r>
           </a:p>
         </p:txBody>
@@ -2985,8 +6088,8 @@
 </p:notes>
 </file>
 
-<file path=ppt/notesSlides/notesSlide41.xml><?xml version="1.0" encoding="utf-8"?>
-<p:notes xmlns:a="http://schemas.openxmlformats.org/drawingml/2006/main" xmlns:p="http://schemas.openxmlformats.org/presentationml/2006/main" xmlns:r="http://schemas.openxmlformats.org/officeDocument/2006/relationships">
+<file path=ppt/notesSlides/notesSlide4.xml><?xml version="1.0" encoding="utf-8"?>
+<p:notes xmlns:a="http://schemas.openxmlformats.org/drawingml/2006/main" xmlns:p="http://schemas.openxmlformats.org/presentationml/2006/main">
   <p:cSld>
     <p:spTree>
       <p:nvGrpSpPr>
@@ -3030,7 +6133,57 @@
           <a:lstStyle/>
           <a:p>
             <a:r>
-              <a:t>Every project in Week 9 has to survive these four questions before it is approved. A team that cannot answer them has picked a technique and gone looking for somewhere to use it, which is the most common way a student project fails.</a:t>
+              <a:t>TEACHING PURPOSE</a:t>
+            </a:r>
+          </a:p>
+          <a:p>
+            <a:r>
+              <a:t>How every session this semester is shaped</a:t>
+            </a:r>
+          </a:p>
+          <a:p>
+            <a:r>
+              <a:t/>
+            </a:r>
+          </a:p>
+          <a:p>
+            <a:r>
+              <a:t>CONNECT</a:t>
+            </a:r>
+          </a:p>
+          <a:p>
+            <a:r>
+              <a:t>Build on the preceding slide: By the end of today you can….</a:t>
+            </a:r>
+          </a:p>
+          <a:p>
+            <a:r>
+              <a:t/>
+            </a:r>
+          </a:p>
+          <a:p>
+            <a:r>
+              <a:t>LECTURER CUE</a:t>
+            </a:r>
+          </a:p>
+          <a:p>
+            <a:r>
+              <a:t>Every session this semester has the same shape: eleven segments across three hours, with no block of talking longer than 25 minutes and roughly half the time spent working rather than listening. That is why attendance matters more here than on a lecture course — the practical and challenge segments cannot be read off a deck afterwards. There is a 10-minute break at the midpoint.</a:t>
+            </a:r>
+          </a:p>
+          <a:p>
+            <a:r>
+              <a:t/>
+            </a:r>
+          </a:p>
+          <a:p>
+            <a:r>
+              <a:t>NEXT</a:t>
+            </a:r>
+          </a:p>
+          <a:p>
+            <a:r>
+              <a:t>Where this semester goes. Move on after a learner can explain the current example or required action.</a:t>
             </a:r>
           </a:p>
         </p:txBody>
@@ -3055,8 +6208,8 @@
 </p:notes>
 </file>
 
-<file path=ppt/notesSlides/notesSlide42.xml><?xml version="1.0" encoding="utf-8"?>
-<p:notes xmlns:a="http://schemas.openxmlformats.org/drawingml/2006/main" xmlns:p="http://schemas.openxmlformats.org/presentationml/2006/main" xmlns:r="http://schemas.openxmlformats.org/officeDocument/2006/relationships">
+<file path=ppt/notesSlides/notesSlide40.xml><?xml version="1.0" encoding="utf-8"?>
+<p:notes xmlns:a="http://schemas.openxmlformats.org/drawingml/2006/main" xmlns:p="http://schemas.openxmlformats.org/presentationml/2006/main">
   <p:cSld>
     <p:spTree>
       <p:nvGrpSpPr>
@@ -3100,7 +6253,102 @@
           <a:lstStyle/>
           <a:p>
             <a:r>
-              <a:t>In this segment you get a problem and no method, and the questions you are asked will not be answered for you. Proceeding without instructions is the skill being practised, and roughly one segment of every session this semester works this way.</a:t>
+              <a:t>TEACHING PURPOSE</a:t>
+            </a:r>
+          </a:p>
+          <a:p>
+            <a:r>
+              <a:t>Four limits, and none of them go away</a:t>
+            </a:r>
+          </a:p>
+          <a:p>
+            <a:r>
+              <a:t/>
+            </a:r>
+          </a:p>
+          <a:p>
+            <a:r>
+              <a:t>CONNECT</a:t>
+            </a:r>
+          </a:p>
+          <a:p>
+            <a:r>
+              <a:t>Build on the preceding slide: What machine learning cannot do.</a:t>
+            </a:r>
+          </a:p>
+          <a:p>
+            <a:r>
+              <a:t/>
+            </a:r>
+          </a:p>
+          <a:p>
+            <a:r>
+              <a:t>LECTURER CUE</a:t>
+            </a:r>
+          </a:p>
+          <a:p>
+            <a:r>
+              <a:t>The caption is the sentence to remember. A machine learning method will always return an answer and will never tell you that the question was unanswerable. Judging that is your job, and it is the reason a trained engineer is still needed after the code runs.</a:t>
+            </a:r>
+          </a:p>
+          <a:p>
+            <a:r>
+              <a:t/>
+            </a:r>
+          </a:p>
+          <a:p>
+            <a:r>
+              <a:t>EXPLAIN IN ORDINARY WORDS</a:t>
+            </a:r>
+          </a:p>
+          <a:p>
+            <a:r>
+              <a:t>Missing means not recorded, not automatically zero. Decide why it is missing and document the rule. Fitted fill values must come from training data when evaluating a model.</a:t>
+            </a:r>
+          </a:p>
+          <a:p>
+            <a:r>
+              <a:t/>
+            </a:r>
+          </a:p>
+          <a:p>
+            <a:r>
+              <a:t>CHECK AND EXPECTED ANSWER</a:t>
+            </a:r>
+          </a:p>
+          <a:p>
+            <a:r>
+              <a:t>Is an unrecorded energy reading evidence of zero consumption? No.</a:t>
+            </a:r>
+          </a:p>
+          <a:p>
+            <a:r>
+              <a:t/>
+            </a:r>
+          </a:p>
+          <a:p>
+            <a:r>
+              <a:t>IF LEARNERS ARE STUCK</a:t>
+            </a:r>
+          </a:p>
+          <a:p>
+            <a:r>
+              <a:t>Use three rows: a recorded zero, a recorded positive value and a blank. Explain their different meanings before cleaning.</a:t>
+            </a:r>
+          </a:p>
+          <a:p>
+            <a:r>
+              <a:t/>
+            </a:r>
+          </a:p>
+          <a:p>
+            <a:r>
+              <a:t>NEXT</a:t>
+            </a:r>
+          </a:p>
+          <a:p>
+            <a:r>
+              <a:t>The same four limits, in your own discipline. Move on after a learner can explain the current example or required action.</a:t>
             </a:r>
           </a:p>
         </p:txBody>
@@ -3125,8 +6373,8 @@
 </p:notes>
 </file>
 
-<file path=ppt/notesSlides/notesSlide43.xml><?xml version="1.0" encoding="utf-8"?>
-<p:notes xmlns:a="http://schemas.openxmlformats.org/drawingml/2006/main" xmlns:p="http://schemas.openxmlformats.org/presentationml/2006/main" xmlns:r="http://schemas.openxmlformats.org/officeDocument/2006/relationships">
+<file path=ppt/notesSlides/notesSlide41.xml><?xml version="1.0" encoding="utf-8"?>
+<p:notes xmlns:a="http://schemas.openxmlformats.org/drawingml/2006/main" xmlns:p="http://schemas.openxmlformats.org/presentationml/2006/main">
   <p:cSld>
     <p:spTree>
       <p:nvGrpSpPr>
@@ -3170,7 +6418,102 @@
           <a:lstStyle/>
           <a:p>
             <a:r>
-              <a:t>The rejections carry more weight than the acceptances. A team that can say clearly why something is NOT a machine learning problem has understood the session, and the six questions on the slide are the ones to argue each placement against. Keep your sheet: the class list of problems built in this segment is what teams draw on when they choose projects in Week 9.</a:t>
+              <a:t>TEACHING PURPOSE</a:t>
+            </a:r>
+          </a:p>
+          <a:p>
+            <a:r>
+              <a:t>The same four limits, in your own discipline</a:t>
+            </a:r>
+          </a:p>
+          <a:p>
+            <a:r>
+              <a:t/>
+            </a:r>
+          </a:p>
+          <a:p>
+            <a:r>
+              <a:t>CONNECT</a:t>
+            </a:r>
+          </a:p>
+          <a:p>
+            <a:r>
+              <a:t>Build on the preceding slide: Four limits, and none of them go away.</a:t>
+            </a:r>
+          </a:p>
+          <a:p>
+            <a:r>
+              <a:t/>
+            </a:r>
+          </a:p>
+          <a:p>
+            <a:r>
+              <a:t>LECTURER CUE</a:t>
+            </a:r>
+          </a:p>
+          <a:p>
+            <a:r>
+              <a:t>Every project in Week 9 has to survive these four questions before it is approved. A team that cannot answer them has picked a technique and gone looking for somewhere to use it, which is the most common way a student project fails.</a:t>
+            </a:r>
+          </a:p>
+          <a:p>
+            <a:r>
+              <a:t/>
+            </a:r>
+          </a:p>
+          <a:p>
+            <a:r>
+              <a:t>EXPLAIN IN ORDINARY WORDS</a:t>
+            </a:r>
+          </a:p>
+          <a:p>
+            <a:r>
+              <a:t>Read each quantity and unit before using a formula. Python calculates numbers but does not enforce physical units. Parentheses specify which operation happens first.</a:t>
+            </a:r>
+          </a:p>
+          <a:p>
+            <a:r>
+              <a:t/>
+            </a:r>
+          </a:p>
+          <a:p>
+            <a:r>
+              <a:t>CHECK AND EXPECTED ANSWER</a:t>
+            </a:r>
+          </a:p>
+          <a:p>
+            <a:r>
+              <a:t>What is 5 m times 3 m? 15 square metres. What is 7/2 in Python? 3.5; 7//2 is 3.</a:t>
+            </a:r>
+          </a:p>
+          <a:p>
+            <a:r>
+              <a:t/>
+            </a:r>
+          </a:p>
+          <a:p>
+            <a:r>
+              <a:t>IF LEARNERS ARE STUCK</a:t>
+            </a:r>
+          </a:p>
+          <a:p>
+            <a:r>
+              <a:t>Write the formula and units on paper, substitute small values, then translate it to Python. Check zero denominators and the issued sign convention.</a:t>
+            </a:r>
+          </a:p>
+          <a:p>
+            <a:r>
+              <a:t/>
+            </a:r>
+          </a:p>
+          <a:p>
+            <a:r>
+              <a:t>NEXT</a:t>
+            </a:r>
+          </a:p>
+          <a:p>
+            <a:r>
+              <a:t>Challenge: the Problem Hunt. Move on after a learner can explain the current example or required action.</a:t>
             </a:r>
           </a:p>
         </p:txBody>
@@ -3195,8 +6538,8 @@
 </p:notes>
 </file>
 
-<file path=ppt/notesSlides/notesSlide44.xml><?xml version="1.0" encoding="utf-8"?>
-<p:notes xmlns:a="http://schemas.openxmlformats.org/drawingml/2006/main" xmlns:p="http://schemas.openxmlformats.org/presentationml/2006/main" xmlns:r="http://schemas.openxmlformats.org/officeDocument/2006/relationships">
+<file path=ppt/notesSlides/notesSlide42.xml><?xml version="1.0" encoding="utf-8"?>
+<p:notes xmlns:a="http://schemas.openxmlformats.org/drawingml/2006/main" xmlns:p="http://schemas.openxmlformats.org/presentationml/2006/main">
   <p:cSld>
     <p:spTree>
       <p:nvGrpSpPr>
@@ -3240,7 +6583,102 @@
           <a:lstStyle/>
           <a:p>
             <a:r>
-              <a:t>Sign the team charter before you leave: names, contact details, a weekly meeting slot, and what you will do if somebody stops contributing. Agreeing that in Week 1 is far easier than agreeing it in November, and the charter is the document your contribution log gets read against.</a:t>
+              <a:t>TEACHING PURPOSE</a:t>
+            </a:r>
+          </a:p>
+          <a:p>
+            <a:r>
+              <a:t>Challenge: the Problem Hunt</a:t>
+            </a:r>
+          </a:p>
+          <a:p>
+            <a:r>
+              <a:t/>
+            </a:r>
+          </a:p>
+          <a:p>
+            <a:r>
+              <a:t>CONNECT</a:t>
+            </a:r>
+          </a:p>
+          <a:p>
+            <a:r>
+              <a:t>Build on the preceding slide: The same four limits, in your own discipline.</a:t>
+            </a:r>
+          </a:p>
+          <a:p>
+            <a:r>
+              <a:t/>
+            </a:r>
+          </a:p>
+          <a:p>
+            <a:r>
+              <a:t>LECTURER CUE</a:t>
+            </a:r>
+          </a:p>
+          <a:p>
+            <a:r>
+              <a:t>In this segment you get a problem and no method, and the questions you are asked will not be answered for you. Proceeding without instructions is the skill being practised, and roughly one segment of every session this semester works this way.</a:t>
+            </a:r>
+          </a:p>
+          <a:p>
+            <a:r>
+              <a:t/>
+            </a:r>
+          </a:p>
+          <a:p>
+            <a:r>
+              <a:t>EXPLAIN IN ORDINARY WORDS</a:t>
+            </a:r>
+          </a:p>
+          <a:p>
+            <a:r>
+              <a:t>An observation describes the data. A finding answers a defined question with evidence. A recommendation adds an action, its justification and limits.</a:t>
+            </a:r>
+          </a:p>
+          <a:p>
+            <a:r>
+              <a:t/>
+            </a:r>
+          </a:p>
+          <a:p>
+            <a:r>
+              <a:t>CHECK AND EXPECTED ANSWER</a:t>
+            </a:r>
+          </a:p>
+          <a:p>
+            <a:r>
+              <a:t>Does a difference between two groups prove one caused the other? No. Other differences or selection may explain it.</a:t>
+            </a:r>
+          </a:p>
+          <a:p>
+            <a:r>
+              <a:t/>
+            </a:r>
+          </a:p>
+          <a:p>
+            <a:r>
+              <a:t>IF LEARNERS ARE STUCK</a:t>
+            </a:r>
+          </a:p>
+          <a:p>
+            <a:r>
+              <a:t>Ask for the population, time period, number and comparison. Then ask what additional evidence could change the recommendation.</a:t>
+            </a:r>
+          </a:p>
+          <a:p>
+            <a:r>
+              <a:t/>
+            </a:r>
+          </a:p>
+          <a:p>
+            <a:r>
+              <a:t>NEXT</a:t>
+            </a:r>
+          </a:p>
+          <a:p>
+            <a:r>
+              <a:t>Problem Hunt. Move on after a learner can explain the current example or required action.</a:t>
             </a:r>
           </a:p>
         </p:txBody>
@@ -3265,8 +6703,8 @@
 </p:notes>
 </file>
 
-<file path=ppt/notesSlides/notesSlide45.xml><?xml version="1.0" encoding="utf-8"?>
-<p:notes xmlns:a="http://schemas.openxmlformats.org/drawingml/2006/main" xmlns:p="http://schemas.openxmlformats.org/presentationml/2006/main" xmlns:r="http://schemas.openxmlformats.org/officeDocument/2006/relationships">
+<file path=ppt/notesSlides/notesSlide43.xml><?xml version="1.0" encoding="utf-8"?>
+<p:notes xmlns:a="http://schemas.openxmlformats.org/drawingml/2006/main" xmlns:p="http://schemas.openxmlformats.org/presentationml/2006/main">
   <p:cSld>
     <p:spTree>
       <p:nvGrpSpPr>
@@ -3310,7 +6748,102 @@
           <a:lstStyle/>
           <a:p>
             <a:r>
-              <a:t>Gallery walk: your team visits two other teams' boards and writes one question on each sheet. Questions only, no verdicts. This is the first peer review of the semester, and in Week 13 peer review is graded.</a:t>
+              <a:t>TEACHING PURPOSE</a:t>
+            </a:r>
+          </a:p>
+          <a:p>
+            <a:r>
+              <a:t>Problem Hunt</a:t>
+            </a:r>
+          </a:p>
+          <a:p>
+            <a:r>
+              <a:t/>
+            </a:r>
+          </a:p>
+          <a:p>
+            <a:r>
+              <a:t>CONNECT</a:t>
+            </a:r>
+          </a:p>
+          <a:p>
+            <a:r>
+              <a:t>Build on the preceding slide: Challenge: the Problem Hunt.</a:t>
+            </a:r>
+          </a:p>
+          <a:p>
+            <a:r>
+              <a:t/>
+            </a:r>
+          </a:p>
+          <a:p>
+            <a:r>
+              <a:t>LECTURER CUE</a:t>
+            </a:r>
+          </a:p>
+          <a:p>
+            <a:r>
+              <a:t>The rejections carry more weight than the acceptances. A team that can say clearly why something is NOT a machine learning problem has understood the session, and the six questions on the slide are the ones to argue each placement against. Keep your sheet: the class list of problems built in this segment is what teams draw on when they choose projects in Week 9.</a:t>
+            </a:r>
+          </a:p>
+          <a:p>
+            <a:r>
+              <a:t/>
+            </a:r>
+          </a:p>
+          <a:p>
+            <a:r>
+              <a:t>EXPLAIN IN ORDINARY WORDS</a:t>
+            </a:r>
+          </a:p>
+          <a:p>
+            <a:r>
+              <a:t>A list keeps items in order. Python positions start at zero. In [2,4,6], position 0 contains 2 and position 2 contains 6. A slice excludes its stop position.</a:t>
+            </a:r>
+          </a:p>
+          <a:p>
+            <a:r>
+              <a:t/>
+            </a:r>
+          </a:p>
+          <a:p>
+            <a:r>
+              <a:t>CHECK AND EXPECTED ANSWER</a:t>
+            </a:r>
+          </a:p>
+          <a:p>
+            <a:r>
+              <a:t>What is [2,4,6][1]? 4. Is there a position 3? No.</a:t>
+            </a:r>
+          </a:p>
+          <a:p>
+            <a:r>
+              <a:t/>
+            </a:r>
+          </a:p>
+          <a:p>
+            <a:r>
+              <a:t>IF LEARNERS ARE STUCK</a:t>
+            </a:r>
+          </a:p>
+          <a:p>
+            <a:r>
+              <a:t>Draw three numbered boxes starting at zero. Keep the position separate from the value stored in it.</a:t>
+            </a:r>
+          </a:p>
+          <a:p>
+            <a:r>
+              <a:t/>
+            </a:r>
+          </a:p>
+          <a:p>
+            <a:r>
+              <a:t>NEXT</a:t>
+            </a:r>
+          </a:p>
+          <a:p>
+            <a:r>
+              <a:t>How your team works, all semester. Move on after a learner can explain the current example or required action.</a:t>
             </a:r>
           </a:p>
         </p:txBody>
@@ -3335,8 +6868,8 @@
 </p:notes>
 </file>
 
-<file path=ppt/notesSlides/notesSlide46.xml><?xml version="1.0" encoding="utf-8"?>
-<p:notes xmlns:a="http://schemas.openxmlformats.org/drawingml/2006/main" xmlns:p="http://schemas.openxmlformats.org/presentationml/2006/main" xmlns:r="http://schemas.openxmlformats.org/officeDocument/2006/relationships">
+<file path=ppt/notesSlides/notesSlide44.xml><?xml version="1.0" encoding="utf-8"?>
+<p:notes xmlns:a="http://schemas.openxmlformats.org/drawingml/2006/main" xmlns:p="http://schemas.openxmlformats.org/presentationml/2006/main">
   <p:cSld>
     <p:spTree>
       <p:nvGrpSpPr>
@@ -3380,7 +6913,102 @@
           <a:lstStyle/>
           <a:p>
             <a:r>
-              <a:t>The 'not solvable' item is the most valuable part of A1, because it forces you to use the four limits rather than remember them. Take the instruction not to install anything seriously: the course runs in Google Colab, and a Python installation you set up at home creates a problem that cannot be diagnosed in class.</a:t>
+              <a:t>TEACHING PURPOSE</a:t>
+            </a:r>
+          </a:p>
+          <a:p>
+            <a:r>
+              <a:t>How your team works, all semester</a:t>
+            </a:r>
+          </a:p>
+          <a:p>
+            <a:r>
+              <a:t/>
+            </a:r>
+          </a:p>
+          <a:p>
+            <a:r>
+              <a:t>CONNECT</a:t>
+            </a:r>
+          </a:p>
+          <a:p>
+            <a:r>
+              <a:t>Build on the preceding slide: Problem Hunt.</a:t>
+            </a:r>
+          </a:p>
+          <a:p>
+            <a:r>
+              <a:t/>
+            </a:r>
+          </a:p>
+          <a:p>
+            <a:r>
+              <a:t>LECTURER CUE</a:t>
+            </a:r>
+          </a:p>
+          <a:p>
+            <a:r>
+              <a:t>Sign the team charter before you leave: names, contact details, a weekly meeting slot, and what you will do if somebody stops contributing. Agreeing that in Week 1 is far easier than agreeing it in November, and the charter is the document your contribution log gets read against.</a:t>
+            </a:r>
+          </a:p>
+          <a:p>
+            <a:r>
+              <a:t/>
+            </a:r>
+          </a:p>
+          <a:p>
+            <a:r>
+              <a:t>EXPLAIN IN ORDINARY WORDS</a:t>
+            </a:r>
+          </a:p>
+          <a:p>
+            <a:r>
+              <a:t>A repository is the project folder and recorded history. A commit records a chosen change; uploading or pushing shares it. A README tells someone else how to run the work.</a:t>
+            </a:r>
+          </a:p>
+          <a:p>
+            <a:r>
+              <a:t/>
+            </a:r>
+          </a:p>
+          <a:p>
+            <a:r>
+              <a:t>CHECK AND EXPECTED ANSWER</a:t>
+            </a:r>
+          </a:p>
+          <a:p>
+            <a:r>
+              <a:t>Does saving to GitHub hand in the assignment? No; submission requires the correct form and its confirmation.</a:t>
+            </a:r>
+          </a:p>
+          <a:p>
+            <a:r>
+              <a:t/>
+            </a:r>
+          </a:p>
+          <a:p>
+            <a:r>
+              <a:t>IF LEARNERS ARE STUCK</a:t>
+            </a:r>
+          </a:p>
+          <a:p>
+            <a:r>
+              <a:t>Ask a partner to follow only the README. It should identify the data, files, run order and expected result. Keep secrets out of the repository.</a:t>
+            </a:r>
+          </a:p>
+          <a:p>
+            <a:r>
+              <a:t/>
+            </a:r>
+          </a:p>
+          <a:p>
+            <a:r>
+              <a:t>NEXT</a:t>
+            </a:r>
+          </a:p>
+          <a:p>
+            <a:r>
+              <a:t>Gallery walk, and what you owe me. Move on after a learner can explain the current example or required action.</a:t>
             </a:r>
           </a:p>
         </p:txBody>
@@ -3405,8 +7033,8 @@
 </p:notes>
 </file>
 
-<file path=ppt/notesSlides/notesSlide47.xml><?xml version="1.0" encoding="utf-8"?>
-<p:notes xmlns:a="http://schemas.openxmlformats.org/drawingml/2006/main" xmlns:p="http://schemas.openxmlformats.org/presentationml/2006/main" xmlns:r="http://schemas.openxmlformats.org/officeDocument/2006/relationships">
+<file path=ppt/notesSlides/notesSlide45.xml><?xml version="1.0" encoding="utf-8"?>
+<p:notes xmlns:a="http://schemas.openxmlformats.org/drawingml/2006/main" xmlns:p="http://schemas.openxmlformats.org/presentationml/2006/main">
   <p:cSld>
     <p:spTree>
       <p:nvGrpSpPr>
@@ -3450,7 +7078,57 @@
           <a:lstStyle/>
           <a:p>
             <a:r>
-              <a:t>Watch for where he draws the boundaries between the four terms, and whether they match the nested diagram from today. If they differ, raise it next week — the field genuinely does not fully agree on this. Two optional extras: StatQuest, 'A Gentle Introduction to Machine Learning', https://www.youtube.com/watch?v=Gv9_4yMHFhI, whose author Josh Starmer is the spine of Weeks 8 to 12; and if you have ninety seconds only, Fireship, 'Machine Learning Explained in 100 Seconds', https://www.youtube.com/watch?v=PeMlggyqz0Y</a:t>
+              <a:t>TEACHING PURPOSE</a:t>
+            </a:r>
+          </a:p>
+          <a:p>
+            <a:r>
+              <a:t>Gallery walk, and what you owe me</a:t>
+            </a:r>
+          </a:p>
+          <a:p>
+            <a:r>
+              <a:t/>
+            </a:r>
+          </a:p>
+          <a:p>
+            <a:r>
+              <a:t>CONNECT</a:t>
+            </a:r>
+          </a:p>
+          <a:p>
+            <a:r>
+              <a:t>Build on the preceding slide: How your team works, all semester.</a:t>
+            </a:r>
+          </a:p>
+          <a:p>
+            <a:r>
+              <a:t/>
+            </a:r>
+          </a:p>
+          <a:p>
+            <a:r>
+              <a:t>LECTURER CUE</a:t>
+            </a:r>
+          </a:p>
+          <a:p>
+            <a:r>
+              <a:t>Gallery walk: your team visits two other teams' boards and writes one question on each sheet. Questions only, no verdicts. This is the first peer review of the semester, and in Week 13 peer review is graded.</a:t>
+            </a:r>
+          </a:p>
+          <a:p>
+            <a:r>
+              <a:t/>
+            </a:r>
+          </a:p>
+          <a:p>
+            <a:r>
+              <a:t>NEXT</a:t>
+            </a:r>
+          </a:p>
+          <a:p>
+            <a:r>
+              <a:t>Before Week 2. Move on after a learner can explain the current example or required action.</a:t>
             </a:r>
           </a:p>
         </p:txBody>
@@ -3475,8 +7153,8 @@
 </p:notes>
 </file>
 
-<file path=ppt/notesSlides/notesSlide48.xml><?xml version="1.0" encoding="utf-8"?>
-<p:notes xmlns:a="http://schemas.openxmlformats.org/drawingml/2006/main" xmlns:p="http://schemas.openxmlformats.org/presentationml/2006/main" xmlns:r="http://schemas.openxmlformats.org/officeDocument/2006/relationships">
+<file path=ppt/notesSlides/notesSlide46.xml><?xml version="1.0" encoding="utf-8"?>
+<p:notes xmlns:a="http://schemas.openxmlformats.org/drawingml/2006/main" xmlns:p="http://schemas.openxmlformats.org/presentationml/2006/main">
   <p:cSld>
     <p:spTree>
       <p:nvGrpSpPr>
@@ -3520,7 +7198,132 @@
           <a:lstStyle/>
           <a:p>
             <a:r>
-              <a:t>Everything from here on is revision material rather than presented content: a summary, a self-test with worked answers, an eighteen-term glossary and a one-page reference sheet. It is written to be studied from in your own time.</a:t>
+              <a:t>TEACHING PURPOSE</a:t>
+            </a:r>
+          </a:p>
+          <a:p>
+            <a:r>
+              <a:t>Before Week 2</a:t>
+            </a:r>
+          </a:p>
+          <a:p>
+            <a:r>
+              <a:t/>
+            </a:r>
+          </a:p>
+          <a:p>
+            <a:r>
+              <a:t>CONNECT</a:t>
+            </a:r>
+          </a:p>
+          <a:p>
+            <a:r>
+              <a:t>Build on the preceding slide: Gallery walk, and what you owe me.</a:t>
+            </a:r>
+          </a:p>
+          <a:p>
+            <a:r>
+              <a:t/>
+            </a:r>
+          </a:p>
+          <a:p>
+            <a:r>
+              <a:t>LECTURER CUE</a:t>
+            </a:r>
+          </a:p>
+          <a:p>
+            <a:r>
+              <a:t>The 'not solvable' item is the most valuable part of A1, because it forces you to use the four limits rather than remember them. Take the instruction not to install anything seriously: the course runs in Google Colab, and a Python installation you set up at home creates a problem that cannot be diagnosed in class.</a:t>
+            </a:r>
+          </a:p>
+          <a:p>
+            <a:r>
+              <a:t/>
+            </a:r>
+          </a:p>
+          <a:p>
+            <a:r>
+              <a:t>EXPLAIN IN ORDINARY WORDS</a:t>
+            </a:r>
+          </a:p>
+          <a:p>
+            <a:r>
+              <a:t>A notebook contains code cells and explanatory text cells. The runtime remembers values from cells that actually ran, which may differ from their visual order.</a:t>
+            </a:r>
+          </a:p>
+          <a:p>
+            <a:r>
+              <a:t/>
+            </a:r>
+          </a:p>
+          <a:p>
+            <a:r>
+              <a:t>CHECK AND EXPECTED ANSWER</a:t>
+            </a:r>
+          </a:p>
+          <a:p>
+            <a:r>
+              <a:t>Does editing a cell update a value already stored in memory? No; the cell must run.</a:t>
+            </a:r>
+          </a:p>
+          <a:p>
+            <a:r>
+              <a:t/>
+            </a:r>
+          </a:p>
+          <a:p>
+            <a:r>
+              <a:t>IF LEARNERS ARE STUCK</a:t>
+            </a:r>
+          </a:p>
+          <a:p>
+            <a:r>
+              <a:t>Outside an assessment restriction, restart and run from the top after loading data. Fix the first error before later cells; save the successful notebook.</a:t>
+            </a:r>
+          </a:p>
+          <a:p>
+            <a:r>
+              <a:t/>
+            </a:r>
+          </a:p>
+          <a:p>
+            <a:r>
+              <a:t>ASSIGNMENT HANDOVER</a:t>
+            </a:r>
+          </a:p>
+          <a:p>
+            <a:r>
+              <a:t>Open the matching public student guide and show the exact starter filename, required outputs and upload set. Ask one learner to repeat what to submit and where. IUEA Student Registration Number is required freeform text; learners enter their own number. A saved repository is not a submitted form. Read the live deadline and keep the submission confirmation. Do not release an assessment that is still awaiting grading validation.</a:t>
+            </a:r>
+          </a:p>
+          <a:p>
+            <a:r>
+              <a:t/>
+            </a:r>
+          </a:p>
+          <a:p>
+            <a:r>
+              <a:t>A1 CATCH-UP</a:t>
+            </a:r>
+          </a:p>
+          <a:p>
+            <a:r>
+              <a:t>The original Week 1 schedule has been superseded for catch-up collection. Use the current cohort A1 form deadline, aligned with its Week 2 assignment upload. Quiz 1 is separate and gets 24 hours from its own activation.</a:t>
+            </a:r>
+          </a:p>
+          <a:p>
+            <a:r>
+              <a:t/>
+            </a:r>
+          </a:p>
+          <a:p>
+            <a:r>
+              <a:t>NEXT</a:t>
+            </a:r>
+          </a:p>
+          <a:p>
+            <a:r>
+              <a:t>Watch this before Week 2. Move on after a learner can explain the current example or required action.</a:t>
             </a:r>
           </a:p>
         </p:txBody>
@@ -3545,8 +7348,8 @@
 </p:notes>
 </file>
 
-<file path=ppt/notesSlides/notesSlide49.xml><?xml version="1.0" encoding="utf-8"?>
-<p:notes xmlns:a="http://schemas.openxmlformats.org/drawingml/2006/main" xmlns:p="http://schemas.openxmlformats.org/presentationml/2006/main" xmlns:r="http://schemas.openxmlformats.org/officeDocument/2006/relationships">
+<file path=ppt/notesSlides/notesSlide47.xml><?xml version="1.0" encoding="utf-8"?>
+<p:notes xmlns:a="http://schemas.openxmlformats.org/drawingml/2006/main" xmlns:p="http://schemas.openxmlformats.org/presentationml/2006/main">
   <p:cSld>
     <p:spTree>
       <p:nvGrpSpPr>
@@ -3590,7 +7393,117 @@
           <a:lstStyle/>
           <a:p>
             <a:r>
-              <a:t>Seven statements covering the whole session. If any of them reads as new to you, go back to the slide it came from before Week 2 rather than after it.</a:t>
+              <a:t>TEACHING PURPOSE</a:t>
+            </a:r>
+          </a:p>
+          <a:p>
+            <a:r>
+              <a:t>Watch this before Week 2</a:t>
+            </a:r>
+          </a:p>
+          <a:p>
+            <a:r>
+              <a:t/>
+            </a:r>
+          </a:p>
+          <a:p>
+            <a:r>
+              <a:t>CONNECT</a:t>
+            </a:r>
+          </a:p>
+          <a:p>
+            <a:r>
+              <a:t>Build on the preceding slide: Before Week 2.</a:t>
+            </a:r>
+          </a:p>
+          <a:p>
+            <a:r>
+              <a:t/>
+            </a:r>
+          </a:p>
+          <a:p>
+            <a:r>
+              <a:t>LECTURER CUE</a:t>
+            </a:r>
+          </a:p>
+          <a:p>
+            <a:r>
+              <a:t>Watch for where he draws the boundaries between the four terms, and whether they match the nested diagram from today. If they differ, raise it next week — the field genuinely does not fully agree on this. Two optional extras: StatQuest, 'A Gentle Introduction to Machine Learning', https://www.youtube.com/watch?v=Gv9_4yMHFhI, whose author Josh Starmer is the spine of Weeks 8 to 12; and if you have ninety seconds only, Fireship, 'Machine Learning Explained in 100 Seconds', https://www.youtube.com/watch?v=PeMlggyqz0Y</a:t>
+            </a:r>
+          </a:p>
+          <a:p>
+            <a:r>
+              <a:t/>
+            </a:r>
+          </a:p>
+          <a:p>
+            <a:r>
+              <a:t>EXPLAIN IN ORDINARY WORDS</a:t>
+            </a:r>
+          </a:p>
+          <a:p>
+            <a:r>
+              <a:t>A feature is an input available when predicting. The target is the answer to learn from. Regression predicts a number; classification predicts a category. Learning patterns does not by itself establish cause.</a:t>
+            </a:r>
+          </a:p>
+          <a:p>
+            <a:r>
+              <a:t/>
+            </a:r>
+          </a:p>
+          <a:p>
+            <a:r>
+              <a:t>CHECK AND EXPECTED ANSWER</a:t>
+            </a:r>
+          </a:p>
+          <a:p>
+            <a:r>
+              <a:t>Predicting concrete strength: regression. Predicting pass/fail: classification. Is a later test result available before that test? No.</a:t>
+            </a:r>
+          </a:p>
+          <a:p>
+            <a:r>
+              <a:t/>
+            </a:r>
+          </a:p>
+          <a:p>
+            <a:r>
+              <a:t>IF LEARNERS ARE STUCK</a:t>
+            </a:r>
+          </a:p>
+          <a:p>
+            <a:r>
+              <a:t>Describe the engineering decision in everyday language, then label one row, an input and its answer. Compare with a rule you could write directly.</a:t>
+            </a:r>
+          </a:p>
+          <a:p>
+            <a:r>
+              <a:t/>
+            </a:r>
+          </a:p>
+          <a:p>
+            <a:r>
+              <a:t>VIDEO ROUTINE</a:t>
+            </a:r>
+          </a:p>
+          <a:p>
+            <a:r>
+              <a:t>Preview the exact link and stated excerpt before class. State the viewing question first, pause after the example, and ask a learner to explain it. If access fails, use the adjacent worked example and discussion rather than spend class time troubleshooting streaming.</a:t>
+            </a:r>
+          </a:p>
+          <a:p>
+            <a:r>
+              <a:t/>
+            </a:r>
+          </a:p>
+          <a:p>
+            <a:r>
+              <a:t>NEXT</a:t>
+            </a:r>
+          </a:p>
+          <a:p>
+            <a:r>
+              <a:t>Revision material. Move on after a learner can explain the current example or required action.</a:t>
             </a:r>
           </a:p>
         </p:txBody>
@@ -3615,8 +7528,8 @@
 </p:notes>
 </file>
 
-<file path=ppt/notesSlides/notesSlide5.xml><?xml version="1.0" encoding="utf-8"?>
-<p:notes xmlns:a="http://schemas.openxmlformats.org/drawingml/2006/main" xmlns:p="http://schemas.openxmlformats.org/presentationml/2006/main" xmlns:r="http://schemas.openxmlformats.org/officeDocument/2006/relationships">
+<file path=ppt/notesSlides/notesSlide48.xml><?xml version="1.0" encoding="utf-8"?>
+<p:notes xmlns:a="http://schemas.openxmlformats.org/drawingml/2006/main" xmlns:p="http://schemas.openxmlformats.org/presentationml/2006/main">
   <p:cSld>
     <p:spTree>
       <p:nvGrpSpPr>
@@ -3660,7 +7573,57 @@
           <a:lstStyle/>
           <a:p>
             <a:r>
-              <a:t>Fifteen weeks. Weeks 7 and 14 are practical tests where you are given data you have never seen and asked what you make of it, and the project runs from Week 9 to the last session. There is nothing to memorise in this course, which surprises most students who arrive expecting to revise definitions.</a:t>
+              <a:t>TEACHING PURPOSE</a:t>
+            </a:r>
+          </a:p>
+          <a:p>
+            <a:r>
+              <a:t>Revision material</a:t>
+            </a:r>
+          </a:p>
+          <a:p>
+            <a:r>
+              <a:t/>
+            </a:r>
+          </a:p>
+          <a:p>
+            <a:r>
+              <a:t>CONNECT</a:t>
+            </a:r>
+          </a:p>
+          <a:p>
+            <a:r>
+              <a:t>Build on the preceding slide: Watch this before Week 2.</a:t>
+            </a:r>
+          </a:p>
+          <a:p>
+            <a:r>
+              <a:t/>
+            </a:r>
+          </a:p>
+          <a:p>
+            <a:r>
+              <a:t>LECTURER CUE</a:t>
+            </a:r>
+          </a:p>
+          <a:p>
+            <a:r>
+              <a:t>Everything from here on is revision material rather than presented content: a summary, a self-test with worked answers, an eighteen-term glossary and a one-page reference sheet. It is written to be studied from in your own time.</a:t>
+            </a:r>
+          </a:p>
+          <a:p>
+            <a:r>
+              <a:t/>
+            </a:r>
+          </a:p>
+          <a:p>
+            <a:r>
+              <a:t>NEXT</a:t>
+            </a:r>
+          </a:p>
+          <a:p>
+            <a:r>
+              <a:t>What you should take away. Move on after a learner can explain the current example or required action.</a:t>
             </a:r>
           </a:p>
         </p:txBody>
@@ -3685,8 +7648,8 @@
 </p:notes>
 </file>
 
-<file path=ppt/notesSlides/notesSlide50.xml><?xml version="1.0" encoding="utf-8"?>
-<p:notes xmlns:a="http://schemas.openxmlformats.org/drawingml/2006/main" xmlns:p="http://schemas.openxmlformats.org/presentationml/2006/main" xmlns:r="http://schemas.openxmlformats.org/officeDocument/2006/relationships">
+<file path=ppt/notesSlides/notesSlide49.xml><?xml version="1.0" encoding="utf-8"?>
+<p:notes xmlns:a="http://schemas.openxmlformats.org/drawingml/2006/main" xmlns:p="http://schemas.openxmlformats.org/presentationml/2006/main">
   <p:cSld>
     <p:spTree>
       <p:nvGrpSpPr>
@@ -3730,7 +7693,102 @@
           <a:lstStyle/>
           <a:p>
             <a:r>
-              <a:t>Optional revision, best attempted with a pencil before you look at the next slide. Question D is a Week 10 idea planted early: anything that notices the circularity of testing a model on cases it has already seen is a good answer at this stage.</a:t>
+              <a:t>TEACHING PURPOSE</a:t>
+            </a:r>
+          </a:p>
+          <a:p>
+            <a:r>
+              <a:t>What you should take away</a:t>
+            </a:r>
+          </a:p>
+          <a:p>
+            <a:r>
+              <a:t/>
+            </a:r>
+          </a:p>
+          <a:p>
+            <a:r>
+              <a:t>CONNECT</a:t>
+            </a:r>
+          </a:p>
+          <a:p>
+            <a:r>
+              <a:t>Build on the preceding slide: Revision material.</a:t>
+            </a:r>
+          </a:p>
+          <a:p>
+            <a:r>
+              <a:t/>
+            </a:r>
+          </a:p>
+          <a:p>
+            <a:r>
+              <a:t>LECTURER CUE</a:t>
+            </a:r>
+          </a:p>
+          <a:p>
+            <a:r>
+              <a:t>Seven statements covering the whole session. If any of them reads as new to you, go back to the slide it came from before Week 2 rather than after it.</a:t>
+            </a:r>
+          </a:p>
+          <a:p>
+            <a:r>
+              <a:t/>
+            </a:r>
+          </a:p>
+          <a:p>
+            <a:r>
+              <a:t>EXPLAIN IN ORDINARY WORDS</a:t>
+            </a:r>
+          </a:p>
+          <a:p>
+            <a:r>
+              <a:t>Missing means not recorded, not automatically zero. Decide why it is missing and document the rule. Fitted fill values must come from training data when evaluating a model.</a:t>
+            </a:r>
+          </a:p>
+          <a:p>
+            <a:r>
+              <a:t/>
+            </a:r>
+          </a:p>
+          <a:p>
+            <a:r>
+              <a:t>CHECK AND EXPECTED ANSWER</a:t>
+            </a:r>
+          </a:p>
+          <a:p>
+            <a:r>
+              <a:t>Is an unrecorded energy reading evidence of zero consumption? No.</a:t>
+            </a:r>
+          </a:p>
+          <a:p>
+            <a:r>
+              <a:t/>
+            </a:r>
+          </a:p>
+          <a:p>
+            <a:r>
+              <a:t>IF LEARNERS ARE STUCK</a:t>
+            </a:r>
+          </a:p>
+          <a:p>
+            <a:r>
+              <a:t>Use three rows: a recorded zero, a recorded positive value and a blank. Explain their different meanings before cleaning.</a:t>
+            </a:r>
+          </a:p>
+          <a:p>
+            <a:r>
+              <a:t/>
+            </a:r>
+          </a:p>
+          <a:p>
+            <a:r>
+              <a:t>NEXT</a:t>
+            </a:r>
+          </a:p>
+          <a:p>
+            <a:r>
+              <a:t>Self-test — try these before you look. Move on after a learner can explain the current example or required action.</a:t>
             </a:r>
           </a:p>
         </p:txBody>
@@ -3755,8 +7813,8 @@
 </p:notes>
 </file>
 
-<file path=ppt/notesSlides/notesSlide51.xml><?xml version="1.0" encoding="utf-8"?>
-<p:notes xmlns:a="http://schemas.openxmlformats.org/drawingml/2006/main" xmlns:p="http://schemas.openxmlformats.org/presentationml/2006/main" xmlns:r="http://schemas.openxmlformats.org/officeDocument/2006/relationships">
+<file path=ppt/notesSlides/notesSlide5.xml><?xml version="1.0" encoding="utf-8"?>
+<p:notes xmlns:a="http://schemas.openxmlformats.org/drawingml/2006/main" xmlns:p="http://schemas.openxmlformats.org/presentationml/2006/main">
   <p:cSld>
     <p:spTree>
       <p:nvGrpSpPr>
@@ -3800,7 +7858,57 @@
           <a:lstStyle/>
           <a:p>
             <a:r>
-              <a:t>Answer D is the most important idea in the course. A model can simply memorise the cases it was shown, so good performance on those cases is no evidence of anything. The only honest test is data the model has never seen, which is exactly what case 13 was for you.</a:t>
+              <a:t>TEACHING PURPOSE</a:t>
+            </a:r>
+          </a:p>
+          <a:p>
+            <a:r>
+              <a:t>Where this semester goes</a:t>
+            </a:r>
+          </a:p>
+          <a:p>
+            <a:r>
+              <a:t/>
+            </a:r>
+          </a:p>
+          <a:p>
+            <a:r>
+              <a:t>CONNECT</a:t>
+            </a:r>
+          </a:p>
+          <a:p>
+            <a:r>
+              <a:t>Build on the preceding slide: How every session this semester is shaped.</a:t>
+            </a:r>
+          </a:p>
+          <a:p>
+            <a:r>
+              <a:t/>
+            </a:r>
+          </a:p>
+          <a:p>
+            <a:r>
+              <a:t>LECTURER CUE</a:t>
+            </a:r>
+          </a:p>
+          <a:p>
+            <a:r>
+              <a:t>Fifteen weeks. Weeks 7 and 14 are practical tests where you are given data you have never seen and asked what you make of it, and the project runs from Week 9 to the last session. There is nothing to memorise in this course, which surprises most students who arrive expecting to revise definitions.</a:t>
+            </a:r>
+          </a:p>
+          <a:p>
+            <a:r>
+              <a:t/>
+            </a:r>
+          </a:p>
+          <a:p>
+            <a:r>
+              <a:t>NEXT</a:t>
+            </a:r>
+          </a:p>
+          <a:p>
+            <a:r>
+              <a:t>What you will be able to say by December. Move on after a learner can explain the current example or required action.</a:t>
             </a:r>
           </a:p>
         </p:txBody>
@@ -3825,8 +7933,8 @@
 </p:notes>
 </file>
 
-<file path=ppt/notesSlides/notesSlide52.xml><?xml version="1.0" encoding="utf-8"?>
-<p:notes xmlns:a="http://schemas.openxmlformats.org/drawingml/2006/main" xmlns:p="http://schemas.openxmlformats.org/presentationml/2006/main" xmlns:r="http://schemas.openxmlformats.org/officeDocument/2006/relationships">
+<file path=ppt/notesSlides/notesSlide50.xml><?xml version="1.0" encoding="utf-8"?>
+<p:notes xmlns:a="http://schemas.openxmlformats.org/drawingml/2006/main" xmlns:p="http://schemas.openxmlformats.org/presentationml/2006/main">
   <p:cSld>
     <p:spTree>
       <p:nvGrpSpPr>
@@ -3870,7 +7978,202 @@
           <a:lstStyle/>
           <a:p>
             <a:r>
-              <a:t>Eighteen terms. If you can define all eighteen by Week 3 you are ahead of the schedule, and these exact words appear in the weekly quizzes. The last two entries, generalisation and association versus cause, are forward references; they are printed here so the words are familiar when they arrive properly in Weeks 8 and 10.</a:t>
+              <a:t>TEACHING PURPOSE</a:t>
+            </a:r>
+          </a:p>
+          <a:p>
+            <a:r>
+              <a:t>Self-test — try these before you look</a:t>
+            </a:r>
+          </a:p>
+          <a:p>
+            <a:r>
+              <a:t/>
+            </a:r>
+          </a:p>
+          <a:p>
+            <a:r>
+              <a:t>CONNECT</a:t>
+            </a:r>
+          </a:p>
+          <a:p>
+            <a:r>
+              <a:t>Build on the preceding slide: What you should take away.</a:t>
+            </a:r>
+          </a:p>
+          <a:p>
+            <a:r>
+              <a:t/>
+            </a:r>
+          </a:p>
+          <a:p>
+            <a:r>
+              <a:t>LECTURER CUE</a:t>
+            </a:r>
+          </a:p>
+          <a:p>
+            <a:r>
+              <a:t>Optional revision, best attempted with a pencil before you look at the next slide. Question D is a Week 10 idea planted early: anything that notices the circularity of testing a model on cases it has already seen is a good answer at this stage.</a:t>
+            </a:r>
+          </a:p>
+          <a:p>
+            <a:r>
+              <a:t/>
+            </a:r>
+          </a:p>
+          <a:p>
+            <a:r>
+              <a:t>EXPLAIN IN ORDINARY WORDS</a:t>
+            </a:r>
+          </a:p>
+          <a:p>
+            <a:r>
+              <a:t>A percentage is out of one hundred. Moving from 10% to 15% is an increase of 5 percentage points, but 50% relative to the original 10%.</a:t>
+            </a:r>
+          </a:p>
+          <a:p>
+            <a:r>
+              <a:t/>
+            </a:r>
+          </a:p>
+          <a:p>
+            <a:r>
+              <a:t>CHECK AND EXPECTED ANSWER</a:t>
+            </a:r>
+          </a:p>
+          <a:p>
+            <a:r>
+              <a:t>From 20% to 25%: how many percentage points? 5. Relative increase? 25%.</a:t>
+            </a:r>
+          </a:p>
+          <a:p>
+            <a:r>
+              <a:t/>
+            </a:r>
+          </a:p>
+          <a:p>
+            <a:r>
+              <a:t>IF LEARNERS ARE STUCK</a:t>
+            </a:r>
+          </a:p>
+          <a:p>
+            <a:r>
+              <a:t>Write the subtraction and the division separately; label their different units.</a:t>
+            </a:r>
+          </a:p>
+          <a:p>
+            <a:r>
+              <a:t/>
+            </a:r>
+          </a:p>
+          <a:p>
+            <a:r>
+              <a:t>DISCUSSION KEY FOR THIS SLIDE</a:t>
+            </a:r>
+          </a:p>
+          <a:p>
+            <a:r>
+              <a:t>ANSWERS</a:t>
+            </a:r>
+          </a:p>
+          <a:p>
+            <a:r>
+              <a:t>How did you do?</a:t>
+            </a:r>
+          </a:p>
+          <a:p>
+            <a:r>
+              <a:t>A</a:t>
+            </a:r>
+          </a:p>
+          <a:p>
+            <a:r>
+              <a:t>Three questions before agreeing to 'use AI'?</a:t>
+            </a:r>
+          </a:p>
+          <a:p>
+            <a:r>
+              <a:t>What exactly are we predicting? What data exists, who measured it, and is it kept? And would a rule or an equation we already have do this better? If any of those has no answer, stop.</a:t>
+            </a:r>
+          </a:p>
+          <a:p>
+            <a:r>
+              <a:t>B</a:t>
+            </a:r>
+          </a:p>
+          <a:p>
+            <a:r>
+              <a:t>Features and target in a repair table?</a:t>
+            </a:r>
+          </a:p>
+          <a:p>
+            <a:r>
+              <a:t>The target is whatever you want to predict — say time to next failure. Features are everything known BEFORE that: operating hours, load, temperature. The test is timing: anything only known afterwards cannot be a feature.</a:t>
+            </a:r>
+          </a:p>
+          <a:p>
+            <a:r>
+              <a:t>C</a:t>
+            </a:r>
+          </a:p>
+          <a:p>
+            <a:r>
+              <a:t>One of each from your discipline?</a:t>
+            </a:r>
+          </a:p>
+          <a:p>
+            <a:r>
+              <a:t>Regression: any quantity with a unit — silica in the concentrate in percentage points. Classification: ore or waste; or lithology: sandstone, shale, limestone.</a:t>
+            </a:r>
+          </a:p>
+          <a:p>
+            <a:r>
+              <a:t>D</a:t>
+            </a:r>
+          </a:p>
+          <a:p>
+            <a:r>
+              <a:t>Why is a good fit on seen data not evidence?</a:t>
+            </a:r>
+          </a:p>
+          <a:p>
+            <a:r>
+              <a:t>Because the model could simply have memorised those cases. The only honest test is performance on examples it has never seen — exactly what you did with case 13. This is the whole subject of Week 10.</a:t>
+            </a:r>
+          </a:p>
+          <a:p>
+            <a:r>
+              <a:t>E</a:t>
+            </a:r>
+          </a:p>
+          <a:p>
+            <a:r>
+              <a:t>What else before acting?</a:t>
+            </a:r>
+          </a:p>
+          <a:p>
+            <a:r>
+              <a:t>How large the error is in engineering terms and whether that is tolerable; what it costs when the model is wrong; and whether today's conditions still resemble the data it learned from.</a:t>
+            </a:r>
+          </a:p>
+          <a:p>
+            <a:r>
+              <a:t>Let learners attempt first; use this to explain the reasoning, not just reveal the answer.</a:t>
+            </a:r>
+          </a:p>
+          <a:p>
+            <a:r>
+              <a:t/>
+            </a:r>
+          </a:p>
+          <a:p>
+            <a:r>
+              <a:t>NEXT</a:t>
+            </a:r>
+          </a:p>
+          <a:p>
+            <a:r>
+              <a:t>How did you do?. Move on after a learner can explain the current example or required action.</a:t>
             </a:r>
           </a:p>
         </p:txBody>
@@ -3895,8 +8198,8 @@
 </p:notes>
 </file>
 
-<file path=ppt/notesSlides/notesSlide53.xml><?xml version="1.0" encoding="utf-8"?>
-<p:notes xmlns:a="http://schemas.openxmlformats.org/drawingml/2006/main" xmlns:p="http://schemas.openxmlformats.org/presentationml/2006/main" xmlns:r="http://schemas.openxmlformats.org/officeDocument/2006/relationships">
+<file path=ppt/notesSlides/notesSlide51.xml><?xml version="1.0" encoding="utf-8"?>
+<p:notes xmlns:a="http://schemas.openxmlformats.org/drawingml/2006/main" xmlns:p="http://schemas.openxmlformats.org/presentationml/2006/main">
   <p:cSld>
     <p:spTree>
       <p:nvGrpSpPr>
@@ -3940,7 +8243,102 @@
           <a:lstStyle/>
           <a:p>
             <a:r>
-              <a:t>These eight questions are the spine of the whole course. Every project milestone from Week 9 onwards is assessed against some subset of them, and this is the page worth having in front of you in the Week 14 practical test.</a:t>
+              <a:t>TEACHING PURPOSE</a:t>
+            </a:r>
+          </a:p>
+          <a:p>
+            <a:r>
+              <a:t>How did you do?</a:t>
+            </a:r>
+          </a:p>
+          <a:p>
+            <a:r>
+              <a:t/>
+            </a:r>
+          </a:p>
+          <a:p>
+            <a:r>
+              <a:t>CONNECT</a:t>
+            </a:r>
+          </a:p>
+          <a:p>
+            <a:r>
+              <a:t>Build on the preceding slide: Self-test — try these before you look.</a:t>
+            </a:r>
+          </a:p>
+          <a:p>
+            <a:r>
+              <a:t/>
+            </a:r>
+          </a:p>
+          <a:p>
+            <a:r>
+              <a:t>LECTURER CUE</a:t>
+            </a:r>
+          </a:p>
+          <a:p>
+            <a:r>
+              <a:t>Answer D is the most important idea in the course. A model can simply memorise the cases it was shown, so good performance on those cases is no evidence of anything. The only honest test is data the model has never seen, which is exactly what case 13 was for you.</a:t>
+            </a:r>
+          </a:p>
+          <a:p>
+            <a:r>
+              <a:t/>
+            </a:r>
+          </a:p>
+          <a:p>
+            <a:r>
+              <a:t>EXPLAIN IN ORDINARY WORDS</a:t>
+            </a:r>
+          </a:p>
+          <a:p>
+            <a:r>
+              <a:t>A percentage is out of one hundred. Moving from 10% to 15% is an increase of 5 percentage points, but 50% relative to the original 10%.</a:t>
+            </a:r>
+          </a:p>
+          <a:p>
+            <a:r>
+              <a:t/>
+            </a:r>
+          </a:p>
+          <a:p>
+            <a:r>
+              <a:t>CHECK AND EXPECTED ANSWER</a:t>
+            </a:r>
+          </a:p>
+          <a:p>
+            <a:r>
+              <a:t>From 20% to 25%: how many percentage points? 5. Relative increase? 25%.</a:t>
+            </a:r>
+          </a:p>
+          <a:p>
+            <a:r>
+              <a:t/>
+            </a:r>
+          </a:p>
+          <a:p>
+            <a:r>
+              <a:t>IF LEARNERS ARE STUCK</a:t>
+            </a:r>
+          </a:p>
+          <a:p>
+            <a:r>
+              <a:t>Write the subtraction and the division separately; label their different units.</a:t>
+            </a:r>
+          </a:p>
+          <a:p>
+            <a:r>
+              <a:t/>
+            </a:r>
+          </a:p>
+          <a:p>
+            <a:r>
+              <a:t>NEXT</a:t>
+            </a:r>
+          </a:p>
+          <a:p>
+            <a:r>
+              <a:t>Every word we used today (1 of 3). Move on after a learner can explain the current example or required action.</a:t>
             </a:r>
           </a:p>
         </p:txBody>
@@ -3965,8 +8363,8 @@
 </p:notes>
 </file>
 
-<file path=ppt/notesSlides/notesSlide54.xml><?xml version="1.0" encoding="utf-8"?>
-<p:notes xmlns:a="http://schemas.openxmlformats.org/drawingml/2006/main" xmlns:p="http://schemas.openxmlformats.org/presentationml/2006/main" xmlns:r="http://schemas.openxmlformats.org/officeDocument/2006/relationships">
+<file path=ppt/notesSlides/notesSlide52.xml><?xml version="1.0" encoding="utf-8"?>
+<p:notes xmlns:a="http://schemas.openxmlformats.org/drawingml/2006/main" xmlns:p="http://schemas.openxmlformats.org/presentationml/2006/main">
   <p:cSld>
     <p:spTree>
       <p:nvGrpSpPr>
@@ -4010,13 +8408,102 @@
           <a:lstStyle/>
           <a:p>
             <a:r>
-              <a:t>The last five minutes of every teaching session. Five questions, one per cent, and you see your score as you submit.</a:t>
-            </a:r>
-          </a:p>
-          <a:p/>
-          <a:p>
-            <a:r>
-              <a:t>Nothing on it can be answered without reading what it shows you, so there is nothing to revise for it beyond having done the session. Twelve run across the semester and the best ten count.</a:t>
+              <a:t>TEACHING PURPOSE</a:t>
+            </a:r>
+          </a:p>
+          <a:p>
+            <a:r>
+              <a:t>Every word we used today (3 of 3)</a:t>
+            </a:r>
+          </a:p>
+          <a:p>
+            <a:r>
+              <a:t/>
+            </a:r>
+          </a:p>
+          <a:p>
+            <a:r>
+              <a:t>CONNECT</a:t>
+            </a:r>
+          </a:p>
+          <a:p>
+            <a:r>
+              <a:t>Build on the preceding slide: Every word we used today (2 of 3).</a:t>
+            </a:r>
+          </a:p>
+          <a:p>
+            <a:r>
+              <a:t/>
+            </a:r>
+          </a:p>
+          <a:p>
+            <a:r>
+              <a:t>LECTURER CUE</a:t>
+            </a:r>
+          </a:p>
+          <a:p>
+            <a:r>
+              <a:t>Eighteen terms. If you can define all eighteen by Week 3 you are ahead of the schedule, and these exact words appear in the weekly quizzes. The last two entries, generalisation and association versus cause, are forward references; they are printed here so the words are familiar when they arrive properly in Weeks 8 and 10.</a:t>
+            </a:r>
+          </a:p>
+          <a:p>
+            <a:r>
+              <a:t/>
+            </a:r>
+          </a:p>
+          <a:p>
+            <a:r>
+              <a:t>EXPLAIN IN ORDINARY WORDS</a:t>
+            </a:r>
+          </a:p>
+          <a:p>
+            <a:r>
+              <a:t>Training fits rules. Validation helps choose among rules. The final test estimates performance after choices are fixed. Information that would be unavailable at the real prediction time must stay out of the inputs.</a:t>
+            </a:r>
+          </a:p>
+          <a:p>
+            <a:r>
+              <a:t/>
+            </a:r>
+          </a:p>
+          <a:p>
+            <a:r>
+              <a:t>CHECK AND EXPECTED ANSWER</a:t>
+            </a:r>
+          </a:p>
+          <a:p>
+            <a:r>
+              <a:t>May two readings of the same machine appear on both sides when evaluating new machines? No; split by machine. For forecasting, train on the past and evaluate later time.</a:t>
+            </a:r>
+          </a:p>
+          <a:p>
+            <a:r>
+              <a:t/>
+            </a:r>
+          </a:p>
+          <a:p>
+            <a:r>
+              <a:t>IF LEARNERS ARE STUCK</a:t>
+            </a:r>
+          </a:p>
+          <a:p>
+            <a:r>
+              <a:t>Use three envelopes. Keep the final-test envelope closed while selecting features or settings.</a:t>
+            </a:r>
+          </a:p>
+          <a:p>
+            <a:r>
+              <a:t/>
+            </a:r>
+          </a:p>
+          <a:p>
+            <a:r>
+              <a:t>NEXT</a:t>
+            </a:r>
+          </a:p>
+          <a:p>
+            <a:r>
+              <a:t>Eight questions to ask about any data problem. Move on after a learner can explain the current example or required action.</a:t>
             </a:r>
           </a:p>
         </p:txBody>
@@ -4041,8 +8528,8 @@
 </p:notes>
 </file>
 
-<file path=ppt/notesSlides/notesSlide55.xml><?xml version="1.0" encoding="utf-8"?>
-<p:notes xmlns:a="http://schemas.openxmlformats.org/drawingml/2006/main" xmlns:p="http://schemas.openxmlformats.org/presentationml/2006/main" xmlns:r="http://schemas.openxmlformats.org/officeDocument/2006/relationships">
+<file path=ppt/notesSlides/notesSlide53.xml><?xml version="1.0" encoding="utf-8"?>
+<p:notes xmlns:a="http://schemas.openxmlformats.org/drawingml/2006/main" xmlns:p="http://schemas.openxmlformats.org/presentationml/2006/main">
   <p:cSld>
     <p:spTree>
       <p:nvGrpSpPr>
@@ -4086,7 +8573,102 @@
           <a:lstStyle/>
           <a:p>
             <a:r>
-              <a:t>Before next week: A1 due at the start of the session, a GitHub account and a Google account created, the video watched, and nothing installed. Week 2 needs a browser and nothing else.</a:t>
+              <a:t>TEACHING PURPOSE</a:t>
+            </a:r>
+          </a:p>
+          <a:p>
+            <a:r>
+              <a:t>Eight questions to ask about any data problem</a:t>
+            </a:r>
+          </a:p>
+          <a:p>
+            <a:r>
+              <a:t/>
+            </a:r>
+          </a:p>
+          <a:p>
+            <a:r>
+              <a:t>CONNECT</a:t>
+            </a:r>
+          </a:p>
+          <a:p>
+            <a:r>
+              <a:t>Build on the preceding slide: Every word we used today (3 of 3).</a:t>
+            </a:r>
+          </a:p>
+          <a:p>
+            <a:r>
+              <a:t/>
+            </a:r>
+          </a:p>
+          <a:p>
+            <a:r>
+              <a:t>LECTURER CUE</a:t>
+            </a:r>
+          </a:p>
+          <a:p>
+            <a:r>
+              <a:t>These eight questions are the spine of the whole course. Every project milestone from Week 9 onwards is assessed against some subset of them, and this is the page worth having in front of you in the Week 14 practical test.</a:t>
+            </a:r>
+          </a:p>
+          <a:p>
+            <a:r>
+              <a:t/>
+            </a:r>
+          </a:p>
+          <a:p>
+            <a:r>
+              <a:t>EXPLAIN IN ORDINARY WORDS</a:t>
+            </a:r>
+          </a:p>
+          <a:p>
+            <a:r>
+              <a:t>An observation describes the data. A finding answers a defined question with evidence. A recommendation adds an action, its justification and limits.</a:t>
+            </a:r>
+          </a:p>
+          <a:p>
+            <a:r>
+              <a:t/>
+            </a:r>
+          </a:p>
+          <a:p>
+            <a:r>
+              <a:t>CHECK AND EXPECTED ANSWER</a:t>
+            </a:r>
+          </a:p>
+          <a:p>
+            <a:r>
+              <a:t>Does a difference between two groups prove one caused the other? No. Other differences or selection may explain it.</a:t>
+            </a:r>
+          </a:p>
+          <a:p>
+            <a:r>
+              <a:t/>
+            </a:r>
+          </a:p>
+          <a:p>
+            <a:r>
+              <a:t>IF LEARNERS ARE STUCK</a:t>
+            </a:r>
+          </a:p>
+          <a:p>
+            <a:r>
+              <a:t>Ask for the population, time period, number and comparison. Then ask what additional evidence could change the recommendation.</a:t>
+            </a:r>
+          </a:p>
+          <a:p>
+            <a:r>
+              <a:t/>
+            </a:r>
+          </a:p>
+          <a:p>
+            <a:r>
+              <a:t>NEXT</a:t>
+            </a:r>
+          </a:p>
+          <a:p>
+            <a:r>
+              <a:t>Five questions,. Move on after a learner can explain the current example or required action.</a:t>
             </a:r>
           </a:p>
         </p:txBody>
@@ -4111,8 +8693,8 @@
 </p:notes>
 </file>
 
-<file path=ppt/notesSlides/notesSlide6.xml><?xml version="1.0" encoding="utf-8"?>
-<p:notes xmlns:a="http://schemas.openxmlformats.org/drawingml/2006/main" xmlns:p="http://schemas.openxmlformats.org/presentationml/2006/main" xmlns:r="http://schemas.openxmlformats.org/officeDocument/2006/relationships">
+<file path=ppt/notesSlides/notesSlide54.xml><?xml version="1.0" encoding="utf-8"?>
+<p:notes xmlns:a="http://schemas.openxmlformats.org/drawingml/2006/main" xmlns:p="http://schemas.openxmlformats.org/presentationml/2006/main">
   <p:cSld>
     <p:spTree>
       <p:nvGrpSpPr>
@@ -4156,7 +8738,122 @@
           <a:lstStyle/>
           <a:p>
             <a:r>
-              <a:t>Six steps, from knowing what a dataset is to saying 'here is a model I built and here is how I know it works'. Most of you cannot do step two today and all of you can reach step six by December. The students who get there are the ones who do the weekly deliverable every week, and the difference is visible by about Week 6.</a:t>
+              <a:t>TEACHING PURPOSE</a:t>
+            </a:r>
+          </a:p>
+          <a:p>
+            <a:r>
+              <a:t>Five questions,</a:t>
+            </a:r>
+          </a:p>
+          <a:p>
+            <a:r>
+              <a:t/>
+            </a:r>
+          </a:p>
+          <a:p>
+            <a:r>
+              <a:t>CONNECT</a:t>
+            </a:r>
+          </a:p>
+          <a:p>
+            <a:r>
+              <a:t>Build on the preceding slide: Eight questions to ask about any data problem.</a:t>
+            </a:r>
+          </a:p>
+          <a:p>
+            <a:r>
+              <a:t/>
+            </a:r>
+          </a:p>
+          <a:p>
+            <a:r>
+              <a:t>LECTURER CUE</a:t>
+            </a:r>
+          </a:p>
+          <a:p>
+            <a:r>
+              <a:t>The last five minutes of every teaching session. Five questions, one per cent, and you see your score as you submit.</a:t>
+            </a:r>
+          </a:p>
+          <a:p>
+            <a:r>
+              <a:t>Nothing on it can be answered without reading what it shows you, so there is nothing to revise for it beyond having done the session. Twelve run across the semester and the best ten count.</a:t>
+            </a:r>
+          </a:p>
+          <a:p>
+            <a:r>
+              <a:t/>
+            </a:r>
+          </a:p>
+          <a:p>
+            <a:r>
+              <a:t>EXPLAIN IN ORDINARY WORDS</a:t>
+            </a:r>
+          </a:p>
+          <a:p>
+            <a:r>
+              <a:t>An observation describes the data. A finding answers a defined question with evidence. A recommendation adds an action, its justification and limits.</a:t>
+            </a:r>
+          </a:p>
+          <a:p>
+            <a:r>
+              <a:t/>
+            </a:r>
+          </a:p>
+          <a:p>
+            <a:r>
+              <a:t>CHECK AND EXPECTED ANSWER</a:t>
+            </a:r>
+          </a:p>
+          <a:p>
+            <a:r>
+              <a:t>Does a difference between two groups prove one caused the other? No. Other differences or selection may explain it.</a:t>
+            </a:r>
+          </a:p>
+          <a:p>
+            <a:r>
+              <a:t/>
+            </a:r>
+          </a:p>
+          <a:p>
+            <a:r>
+              <a:t>IF LEARNERS ARE STUCK</a:t>
+            </a:r>
+          </a:p>
+          <a:p>
+            <a:r>
+              <a:t>Ask for the population, time period, number and comparison. Then ask what additional evidence could change the recommendation.</a:t>
+            </a:r>
+          </a:p>
+          <a:p>
+            <a:r>
+              <a:t/>
+            </a:r>
+          </a:p>
+          <a:p>
+            <a:r>
+              <a:t>QUIZ OPERATION</a:t>
+            </a:r>
+          </a:p>
+          <a:p>
+            <a:r>
+              <a:t>Opening the student link does not activate the quiz. In Quiz Controls run the matching open_W&lt;week&gt;_&lt;cohort&gt; function once when ready. Announce the logged closing time: 24 hours after activation. Five minutes describes expected answering time, not the availability window. Quiz 1 and Quiz 2 require separate activation when collecting catch-up work.</a:t>
+            </a:r>
+          </a:p>
+          <a:p>
+            <a:r>
+              <a:t/>
+            </a:r>
+          </a:p>
+          <a:p>
+            <a:r>
+              <a:t>NEXT</a:t>
+            </a:r>
+          </a:p>
+          <a:p>
+            <a:r>
+              <a:t>You have already done. Move on after a learner can explain the current example or required action.</a:t>
             </a:r>
           </a:p>
         </p:txBody>
@@ -4181,8 +8878,8 @@
 </p:notes>
 </file>
 
-<file path=ppt/notesSlides/notesSlide7.xml><?xml version="1.0" encoding="utf-8"?>
-<p:notes xmlns:a="http://schemas.openxmlformats.org/drawingml/2006/main" xmlns:p="http://schemas.openxmlformats.org/presentationml/2006/main" xmlns:r="http://schemas.openxmlformats.org/officeDocument/2006/relationships">
+<file path=ppt/notesSlides/notesSlide55.xml><?xml version="1.0" encoding="utf-8"?>
+<p:notes xmlns:a="http://schemas.openxmlformats.org/drawingml/2006/main" xmlns:p="http://schemas.openxmlformats.org/presentationml/2006/main">
   <p:cSld>
     <p:spTree>
       <p:nvGrpSpPr>
@@ -4226,7 +8923,87 @@
           <a:lstStyle/>
           <a:p>
             <a:r>
-              <a:t>Fifteen minutes on how the course works: the promise, the assessment, and what is expected on both sides. Everything after this segment is engineering.</a:t>
+              <a:t>TEACHING PURPOSE</a:t>
+            </a:r>
+          </a:p>
+          <a:p>
+            <a:r>
+              <a:t>You have already done</a:t>
+            </a:r>
+          </a:p>
+          <a:p>
+            <a:r>
+              <a:t/>
+            </a:r>
+          </a:p>
+          <a:p>
+            <a:r>
+              <a:t>CONNECT</a:t>
+            </a:r>
+          </a:p>
+          <a:p>
+            <a:r>
+              <a:t>Build on the preceding slide: Five questions,.</a:t>
+            </a:r>
+          </a:p>
+          <a:p>
+            <a:r>
+              <a:t/>
+            </a:r>
+          </a:p>
+          <a:p>
+            <a:r>
+              <a:t>LECTURER CUE</a:t>
+            </a:r>
+          </a:p>
+          <a:p>
+            <a:r>
+              <a:t>Before next week: A1 due at the start of the session, a GitHub account and a Google account created, the video watched, and nothing installed. Week 2 needs a browser and nothing else.</a:t>
+            </a:r>
+          </a:p>
+          <a:p>
+            <a:r>
+              <a:t/>
+            </a:r>
+          </a:p>
+          <a:p>
+            <a:r>
+              <a:t>EXPLAIN IN ORDINARY WORDS</a:t>
+            </a:r>
+          </a:p>
+          <a:p>
+            <a:r>
+              <a:t>A notebook contains code cells and explanatory text cells. The runtime remembers values from cells that actually ran, which may differ from their visual order.</a:t>
+            </a:r>
+          </a:p>
+          <a:p>
+            <a:r>
+              <a:t/>
+            </a:r>
+          </a:p>
+          <a:p>
+            <a:r>
+              <a:t>CHECK AND EXPECTED ANSWER</a:t>
+            </a:r>
+          </a:p>
+          <a:p>
+            <a:r>
+              <a:t>Does editing a cell update a value already stored in memory? No; the cell must run.</a:t>
+            </a:r>
+          </a:p>
+          <a:p>
+            <a:r>
+              <a:t/>
+            </a:r>
+          </a:p>
+          <a:p>
+            <a:r>
+              <a:t>IF LEARNERS ARE STUCK</a:t>
+            </a:r>
+          </a:p>
+          <a:p>
+            <a:r>
+              <a:t>Outside an assessment restriction, restart and run from the top after loading data. Fix the first error before later cells; save the successful notebook.</a:t>
             </a:r>
           </a:p>
         </p:txBody>
@@ -4251,8 +9028,8 @@
 </p:notes>
 </file>
 
-<file path=ppt/notesSlides/notesSlide8.xml><?xml version="1.0" encoding="utf-8"?>
-<p:notes xmlns:a="http://schemas.openxmlformats.org/drawingml/2006/main" xmlns:p="http://schemas.openxmlformats.org/presentationml/2006/main" xmlns:r="http://schemas.openxmlformats.org/officeDocument/2006/relationships">
+<file path=ppt/notesSlides/notesSlide6.xml><?xml version="1.0" encoding="utf-8"?>
+<p:notes xmlns:a="http://schemas.openxmlformats.org/drawingml/2006/main" xmlns:p="http://schemas.openxmlformats.org/presentationml/2006/main">
   <p:cSld>
     <p:spTree>
       <p:nvGrpSpPr>
@@ -4296,7 +9073,57 @@
           <a:lstStyle/>
           <a:p>
             <a:r>
-              <a:t>Two details the figure does not carry. Every teaching session ends with a five-minute quiz of five questions, taken on your phone by QR code, auto-marked, and you have your score before you leave the room. There are twelve of them and the best ten count, one per cent each, so missing two costs you nothing and there are no resits to arrange. The two practical tests run offline on lab machines with no internet and no AI assistants. AI tools are permitted and taught in the coursework provided you declare what you used, because the mark follows what you can explain.</a:t>
+              <a:t>TEACHING PURPOSE</a:t>
+            </a:r>
+          </a:p>
+          <a:p>
+            <a:r>
+              <a:t>What you will be able to say by December</a:t>
+            </a:r>
+          </a:p>
+          <a:p>
+            <a:r>
+              <a:t/>
+            </a:r>
+          </a:p>
+          <a:p>
+            <a:r>
+              <a:t>CONNECT</a:t>
+            </a:r>
+          </a:p>
+          <a:p>
+            <a:r>
+              <a:t>Build on the preceding slide: Where this semester goes.</a:t>
+            </a:r>
+          </a:p>
+          <a:p>
+            <a:r>
+              <a:t/>
+            </a:r>
+          </a:p>
+          <a:p>
+            <a:r>
+              <a:t>LECTURER CUE</a:t>
+            </a:r>
+          </a:p>
+          <a:p>
+            <a:r>
+              <a:t>Six steps, from knowing what a dataset is to saying 'here is a model I built and here is how I know it works'. Most of you cannot do step two today and all of you can reach step six by December. The students who get there are the ones who do the weekly deliverable every week, and the difference is visible by about Week 6.</a:t>
+            </a:r>
+          </a:p>
+          <a:p>
+            <a:r>
+              <a:t/>
+            </a:r>
+          </a:p>
+          <a:p>
+            <a:r>
+              <a:t>NEXT</a:t>
+            </a:r>
+          </a:p>
+          <a:p>
+            <a:r>
+              <a:t>Welcome, and how this course works. Move on after a learner can explain the current example or required action.</a:t>
             </a:r>
           </a:p>
         </p:txBody>
@@ -4321,8 +9148,8 @@
 </p:notes>
 </file>
 
-<file path=ppt/notesSlides/notesSlide9.xml><?xml version="1.0" encoding="utf-8"?>
-<p:notes xmlns:a="http://schemas.openxmlformats.org/drawingml/2006/main" xmlns:p="http://schemas.openxmlformats.org/presentationml/2006/main" xmlns:r="http://schemas.openxmlformats.org/officeDocument/2006/relationships">
+<file path=ppt/notesSlides/notesSlide7.xml><?xml version="1.0" encoding="utf-8"?>
+<p:notes xmlns:a="http://schemas.openxmlformats.org/drawingml/2006/main" xmlns:p="http://schemas.openxmlformats.org/presentationml/2006/main">
   <p:cSld>
     <p:spTree>
       <p:nvGrpSpPr>
@@ -4366,7 +9193,297 @@
           <a:lstStyle/>
           <a:p>
             <a:r>
+              <a:t>TEACHING PURPOSE</a:t>
+            </a:r>
+          </a:p>
+          <a:p>
+            <a:r>
+              <a:t>Welcome, and how this course works</a:t>
+            </a:r>
+          </a:p>
+          <a:p>
+            <a:r>
+              <a:t/>
+            </a:r>
+          </a:p>
+          <a:p>
+            <a:r>
+              <a:t>CONNECT</a:t>
+            </a:r>
+          </a:p>
+          <a:p>
+            <a:r>
+              <a:t>Build on the preceding slide: What you will be able to say by December.</a:t>
+            </a:r>
+          </a:p>
+          <a:p>
+            <a:r>
+              <a:t/>
+            </a:r>
+          </a:p>
+          <a:p>
+            <a:r>
+              <a:t>LECTURER CUE</a:t>
+            </a:r>
+          </a:p>
+          <a:p>
+            <a:r>
+              <a:t>Fifteen minutes on how the course works: the promise, the assessment, and what is expected on both sides. Everything after this segment is engineering.</a:t>
+            </a:r>
+          </a:p>
+          <a:p>
+            <a:r>
+              <a:t/>
+            </a:r>
+          </a:p>
+          <a:p>
+            <a:r>
+              <a:t>NEXT</a:t>
+            </a:r>
+          </a:p>
+          <a:p>
+            <a:r>
+              <a:t>How you are assessed. Move on after a learner can explain the current example or required action.</a:t>
+            </a:r>
+          </a:p>
+        </p:txBody>
+      </p:sp>
+      <p:sp>
+        <p:nvSpPr>
+          <p:cNvPr id="4" name="Slide Number Placeholder 3"/>
+          <p:cNvSpPr>
+            <a:spLocks noGrp="1"/>
+          </p:cNvSpPr>
+          <p:nvPr>
+            <p:ph type="sldNum" idx="5" sz="quarter"/>
+          </p:nvPr>
+        </p:nvSpPr>
+        <p:spPr/>
+      </p:sp>
+    </p:spTree>
+  </p:cSld>
+  <p:clrMapOvr>
+    <a:masterClrMapping/>
+  </p:clrMapOvr>
+</p:notes>
+</file>
+
+<file path=ppt/notesSlides/notesSlide8.xml><?xml version="1.0" encoding="utf-8"?>
+<p:notes xmlns:a="http://schemas.openxmlformats.org/drawingml/2006/main" xmlns:p="http://schemas.openxmlformats.org/presentationml/2006/main">
+  <p:cSld>
+    <p:spTree>
+      <p:nvGrpSpPr>
+        <p:cNvPr id="1" name=""/>
+        <p:cNvGrpSpPr/>
+        <p:nvPr/>
+      </p:nvGrpSpPr>
+      <p:grpSpPr>
+        <a:xfrm>
+          <a:off x="0" y="0"/>
+          <a:ext cx="0" cy="0"/>
+          <a:chOff x="0" y="0"/>
+          <a:chExt cx="0" cy="0"/>
+        </a:xfrm>
+      </p:grpSpPr>
+      <p:sp>
+        <p:nvSpPr>
+          <p:cNvPr id="2" name="Slide Image Placeholder 1"/>
+          <p:cNvSpPr>
+            <a:spLocks noGrp="1"/>
+          </p:cNvSpPr>
+          <p:nvPr>
+            <p:ph type="sldImg" idx="2"/>
+          </p:nvPr>
+        </p:nvSpPr>
+        <p:spPr/>
+      </p:sp>
+      <p:sp>
+        <p:nvSpPr>
+          <p:cNvPr id="3" name="Notes Placeholder 2"/>
+          <p:cNvSpPr>
+            <a:spLocks noGrp="1"/>
+          </p:cNvSpPr>
+          <p:nvPr>
+            <p:ph type="body" idx="3" sz="quarter"/>
+          </p:nvPr>
+        </p:nvSpPr>
+        <p:spPr/>
+        <p:txBody>
+          <a:bodyPr/>
+          <a:lstStyle/>
+          <a:p>
+            <a:r>
+              <a:t>TEACHING PURPOSE</a:t>
+            </a:r>
+          </a:p>
+          <a:p>
+            <a:r>
+              <a:t>How you are assessed</a:t>
+            </a:r>
+          </a:p>
+          <a:p>
+            <a:r>
+              <a:t/>
+            </a:r>
+          </a:p>
+          <a:p>
+            <a:r>
+              <a:t>CONNECT</a:t>
+            </a:r>
+          </a:p>
+          <a:p>
+            <a:r>
+              <a:t>Build on the preceding slide: Welcome, and how this course works.</a:t>
+            </a:r>
+          </a:p>
+          <a:p>
+            <a:r>
+              <a:t/>
+            </a:r>
+          </a:p>
+          <a:p>
+            <a:r>
+              <a:t>LECTURER CUE</a:t>
+            </a:r>
+          </a:p>
+          <a:p>
+            <a:r>
+              <a:t>Two details the figure does not carry. Every teaching session ends with a five-minute quiz of five questions, taken on your phone by QR code, auto-marked, and you have your score before you leave the room. There are twelve of them and the best ten count, one per cent each, so missing two costs you nothing and there are no resits to arrange. The two practical tests run offline on lab machines with no internet and no AI assistants. AI tools are permitted and taught in the coursework provided you declare what you used, because the mark follows what you can explain.</a:t>
+            </a:r>
+          </a:p>
+          <a:p>
+            <a:r>
+              <a:t/>
+            </a:r>
+          </a:p>
+          <a:p>
+            <a:r>
+              <a:t>NEXT</a:t>
+            </a:r>
+          </a:p>
+          <a:p>
+            <a:r>
+              <a:t>What I expect, and what you can expect back. Move on after a learner can explain the current example or required action.</a:t>
+            </a:r>
+          </a:p>
+        </p:txBody>
+      </p:sp>
+      <p:sp>
+        <p:nvSpPr>
+          <p:cNvPr id="4" name="Slide Number Placeholder 3"/>
+          <p:cNvSpPr>
+            <a:spLocks noGrp="1"/>
+          </p:cNvSpPr>
+          <p:nvPr>
+            <p:ph type="sldNum" idx="5" sz="quarter"/>
+          </p:nvPr>
+        </p:nvSpPr>
+        <p:spPr/>
+      </p:sp>
+    </p:spTree>
+  </p:cSld>
+  <p:clrMapOvr>
+    <a:masterClrMapping/>
+  </p:clrMapOvr>
+</p:notes>
+</file>
+
+<file path=ppt/notesSlides/notesSlide9.xml><?xml version="1.0" encoding="utf-8"?>
+<p:notes xmlns:a="http://schemas.openxmlformats.org/drawingml/2006/main" xmlns:p="http://schemas.openxmlformats.org/presentationml/2006/main">
+  <p:cSld>
+    <p:spTree>
+      <p:nvGrpSpPr>
+        <p:cNvPr id="1" name=""/>
+        <p:cNvGrpSpPr/>
+        <p:nvPr/>
+      </p:nvGrpSpPr>
+      <p:grpSpPr>
+        <a:xfrm>
+          <a:off x="0" y="0"/>
+          <a:ext cx="0" cy="0"/>
+          <a:chOff x="0" y="0"/>
+          <a:chExt cx="0" cy="0"/>
+        </a:xfrm>
+      </p:grpSpPr>
+      <p:sp>
+        <p:nvSpPr>
+          <p:cNvPr id="2" name="Slide Image Placeholder 1"/>
+          <p:cNvSpPr>
+            <a:spLocks noGrp="1"/>
+          </p:cNvSpPr>
+          <p:nvPr>
+            <p:ph type="sldImg" idx="2"/>
+          </p:nvPr>
+        </p:nvSpPr>
+        <p:spPr/>
+      </p:sp>
+      <p:sp>
+        <p:nvSpPr>
+          <p:cNvPr id="3" name="Notes Placeholder 2"/>
+          <p:cNvSpPr>
+            <a:spLocks noGrp="1"/>
+          </p:cNvSpPr>
+          <p:nvPr>
+            <p:ph type="body" idx="3" sz="quarter"/>
+          </p:nvPr>
+        </p:nvSpPr>
+        <p:spPr/>
+        <p:txBody>
+          <a:bodyPr/>
+          <a:lstStyle/>
+          <a:p>
+            <a:r>
+              <a:t>TEACHING PURPOSE</a:t>
+            </a:r>
+          </a:p>
+          <a:p>
+            <a:r>
+              <a:t>What I expect, and what you can expect back</a:t>
+            </a:r>
+          </a:p>
+          <a:p>
+            <a:r>
+              <a:t/>
+            </a:r>
+          </a:p>
+          <a:p>
+            <a:r>
+              <a:t>CONNECT</a:t>
+            </a:r>
+          </a:p>
+          <a:p>
+            <a:r>
+              <a:t>Build on the preceding slide: How you are assessed.</a:t>
+            </a:r>
+          </a:p>
+          <a:p>
+            <a:r>
+              <a:t/>
+            </a:r>
+          </a:p>
+          <a:p>
+            <a:r>
+              <a:t>LECTURER CUE</a:t>
+            </a:r>
+          </a:p>
+          <a:p>
+            <a:r>
               <a:t>The 'ask well' item is the one that changes how much you get out of the semester. Bring the error message, what you already tried, and what you expected to happen; assembling those three things solves the problem outright often enough to be worth the effort every time. If you are stuck for more than five minutes in a practical, put your hand up rather than sitting quietly.</a:t>
+            </a:r>
+          </a:p>
+          <a:p>
+            <a:r>
+              <a:t/>
+            </a:r>
+          </a:p>
+          <a:p>
+            <a:r>
+              <a:t>NEXT</a:t>
+            </a:r>
+          </a:p>
+          <a:p>
+            <a:r>
+              <a:t>The whole field, start to finish. Move on after a learner can explain the current example or required action.</a:t>
             </a:r>
           </a:p>
         </p:txBody>
@@ -10662,7 +15779,7 @@
         <p:spPr>
           <a:xfrm>
             <a:off x="941832" y="2860596"/>
-            <a:ext cx="4270248" cy="364337"/>
+            <a:ext cx="4270248" cy="682955"/>
           </a:xfrm>
           <a:prstGeom prst="rect">
             <a:avLst/>
@@ -10690,7 +15807,8 @@
                 </a:solidFill>
                 <a:latin typeface="Calibri"/>
               </a:rPr>
-              <a:t>PhD Informatics, UEC Tokyo — in progress</a:t>
+              <a:t>PhD student in Applied Informatics
+Osaka Metropolitan University, Japan</a:t>
             </a:r>
           </a:p>
         </p:txBody>
@@ -10703,7 +15821,7 @@
         </p:nvSpPr>
         <p:spPr>
           <a:xfrm>
-            <a:off x="704088" y="3334662"/>
+            <a:off x="704088" y="3653280"/>
             <a:ext cx="100584" cy="100584"/>
           </a:xfrm>
           <a:prstGeom prst="ellipse">
@@ -10747,7 +15865,7 @@
         </p:nvSpPr>
         <p:spPr>
           <a:xfrm>
-            <a:off x="941832" y="3279798"/>
+            <a:off x="941832" y="3598416"/>
             <a:ext cx="4270248" cy="682955"/>
           </a:xfrm>
           <a:prstGeom prst="rect">
@@ -10776,7 +15894,8 @@
                 </a:solidFill>
                 <a:latin typeface="Calibri"/>
               </a:rPr>
-              <a:t>MSc Data Science and ML, Yamaguchi, 2024 — valedictorian</a:t>
+              <a:t>Master of Technology Management
+Yamaguchi University, Japan</a:t>
             </a:r>
           </a:p>
         </p:txBody>
@@ -10789,7 +15908,7 @@
         </p:nvSpPr>
         <p:spPr>
           <a:xfrm>
-            <a:off x="704088" y="4072482"/>
+            <a:off x="704088" y="4391100"/>
             <a:ext cx="100584" cy="100584"/>
           </a:xfrm>
           <a:prstGeom prst="ellipse">
@@ -10833,7 +15952,7 @@
         </p:nvSpPr>
         <p:spPr>
           <a:xfrm>
-            <a:off x="941832" y="4017618"/>
+            <a:off x="941832" y="4336236"/>
             <a:ext cx="4270248" cy="364337"/>
           </a:xfrm>
           <a:prstGeom prst="rect">
@@ -10875,7 +15994,7 @@
         </p:nvSpPr>
         <p:spPr>
           <a:xfrm>
-            <a:off x="704088" y="4491683"/>
+            <a:off x="704088" y="4810301"/>
             <a:ext cx="100584" cy="100584"/>
           </a:xfrm>
           <a:prstGeom prst="ellipse">
@@ -10919,7 +16038,7 @@
         </p:nvSpPr>
         <p:spPr>
           <a:xfrm>
-            <a:off x="941832" y="4436819"/>
+            <a:off x="941832" y="4755437"/>
             <a:ext cx="4270248" cy="682955"/>
           </a:xfrm>
           <a:prstGeom prst="rect">
@@ -20248,7 +25367,7 @@
         <p:spPr>
           <a:xfrm>
             <a:off x="685800" y="1911095"/>
-            <a:ext cx="10820095" cy="1792224"/>
+            <a:ext cx="10820095" cy="2378340"/>
           </a:xfrm>
           <a:prstGeom prst="roundRect">
             <a:avLst>
@@ -20293,7 +25412,7 @@
         <p:spPr>
           <a:xfrm>
             <a:off x="978408" y="2112264"/>
-            <a:ext cx="10234879" cy="1426464"/>
+            <a:ext cx="10234879" cy="2012580"/>
           </a:xfrm>
           <a:prstGeom prst="rect">
             <a:avLst/>
@@ -20372,7 +25491,7 @@
         </p:nvSpPr>
         <p:spPr>
           <a:xfrm>
-            <a:off x="685800" y="4014215"/>
+            <a:off x="685800" y="4563756"/>
             <a:ext cx="10820095" cy="310896"/>
           </a:xfrm>
           <a:prstGeom prst="rect">
@@ -20398,7 +25517,7 @@
                 </a:solidFill>
                 <a:latin typeface="Calibri"/>
               </a:rPr>
-              <a:t>Work these questions in order:</a:t>
+              <a:t>Work these questions in order</a:t>
             </a:r>
           </a:p>
         </p:txBody>
@@ -20411,8 +25530,8 @@
         </p:nvSpPr>
         <p:spPr>
           <a:xfrm>
-            <a:off x="685800" y="4434840"/>
-            <a:ext cx="5227167" cy="365760"/>
+            <a:off x="685800" y="5039244"/>
+            <a:ext cx="5227167" cy="385501"/>
           </a:xfrm>
           <a:prstGeom prst="rect">
             <a:avLst/>
@@ -20440,7 +25559,7 @@
                 </a:solidFill>
                 <a:latin typeface="Calibri"/>
               </a:rPr>
-              <a:t>→  What are you actually trying to find?</a:t>
+              <a:t>What are you actually trying to find?</a:t>
             </a:r>
           </a:p>
         </p:txBody>
@@ -20453,8 +25572,8 @@
         </p:nvSpPr>
         <p:spPr>
           <a:xfrm>
-            <a:off x="685800" y="4855464"/>
-            <a:ext cx="5227167" cy="365760"/>
+            <a:off x="685800" y="5516186"/>
+            <a:ext cx="5227167" cy="385501"/>
           </a:xfrm>
           <a:prstGeom prst="rect">
             <a:avLst/>
@@ -20482,7 +25601,7 @@
                 </a:solidFill>
                 <a:latin typeface="Calibri"/>
               </a:rPr>
-              <a:t>→  Who measures that, and how often?</a:t>
+              <a:t>Who measures that, and how often?</a:t>
             </a:r>
           </a:p>
         </p:txBody>
@@ -20495,8 +25614,8 @@
         </p:nvSpPr>
         <p:spPr>
           <a:xfrm>
-            <a:off x="685800" y="5276088"/>
-            <a:ext cx="5227167" cy="365760"/>
+            <a:off x="685800" y="5993128"/>
+            <a:ext cx="5227167" cy="385501"/>
           </a:xfrm>
           <a:prstGeom prst="rect">
             <a:avLst/>
@@ -20524,7 +25643,7 @@
                 </a:solidFill>
                 <a:latin typeface="Calibri"/>
               </a:rPr>
-              <a:t>→  Would a rule you already know do this better?</a:t>
+              <a:t>Would a rule you already know do this better?</a:t>
             </a:r>
           </a:p>
         </p:txBody>
@@ -20537,8 +25656,8 @@
         </p:nvSpPr>
         <p:spPr>
           <a:xfrm>
-            <a:off x="6278727" y="4434840"/>
-            <a:ext cx="5227167" cy="365760"/>
+            <a:off x="6278727" y="5039244"/>
+            <a:ext cx="5227167" cy="385501"/>
           </a:xfrm>
           <a:prstGeom prst="rect">
             <a:avLst/>
@@ -20566,7 +25685,7 @@
                 </a:solidFill>
                 <a:latin typeface="Calibri"/>
               </a:rPr>
-              <a:t>→  What would the answer let somebody DO?</a:t>
+              <a:t>What would the answer let somebody DO?</a:t>
             </a:r>
           </a:p>
         </p:txBody>
@@ -20579,8 +25698,8 @@
         </p:nvSpPr>
         <p:spPr>
           <a:xfrm>
-            <a:off x="6278727" y="4855464"/>
-            <a:ext cx="5227167" cy="365760"/>
+            <a:off x="6278727" y="5516186"/>
+            <a:ext cx="5227167" cy="385501"/>
           </a:xfrm>
           <a:prstGeom prst="rect">
             <a:avLst/>
@@ -20608,7 +25727,7 @@
                 </a:solidFill>
                 <a:latin typeface="Calibri"/>
               </a:rPr>
-              <a:t>→  How would you know if you were wrong?</a:t>
+              <a:t>How would you know if you were wrong?</a:t>
             </a:r>
           </a:p>
         </p:txBody>
@@ -20621,8 +25740,8 @@
         </p:nvSpPr>
         <p:spPr>
           <a:xfrm>
-            <a:off x="6278727" y="5276088"/>
-            <a:ext cx="5227167" cy="365760"/>
+            <a:off x="6278727" y="5993128"/>
+            <a:ext cx="5227167" cy="385501"/>
           </a:xfrm>
           <a:prstGeom prst="rect">
             <a:avLst/>
@@ -20650,7 +25769,7 @@
                 </a:solidFill>
                 <a:latin typeface="Calibri"/>
               </a:rPr>
-              <a:t>→  What does a mistake cost here?</a:t>
+              <a:t>What does a mistake cost here?</a:t>
             </a:r>
           </a:p>
         </p:txBody>
@@ -21379,7 +26498,7 @@
 </file>
 
 <file path=ppt/slides/slide46.xml><?xml version="1.0" encoding="utf-8"?>
-<p:sld xmlns:a="http://schemas.openxmlformats.org/drawingml/2006/main" xmlns:p="http://schemas.openxmlformats.org/presentationml/2006/main" xmlns:r="http://schemas.openxmlformats.org/officeDocument/2006/relationships">
+<p:sld xmlns:a="http://schemas.openxmlformats.org/drawingml/2006/main" xmlns:p="http://schemas.openxmlformats.org/presentationml/2006/main">
   <p:cSld>
     <p:spTree>
       <p:nvGrpSpPr>
@@ -21503,7 +26622,7 @@
                 </a:solidFill>
                 <a:latin typeface="Calibri"/>
               </a:rPr>
-              <a:t>Assignment A1 — one page, due at the start of Week 2</a:t>
+              <a:t>Assignment A1 — use the current form deadline</a:t>
             </a:r>
           </a:p>
         </p:txBody>
@@ -21587,7 +26706,7 @@
                 </a:solidFill>
                 <a:latin typeface="Calibri"/>
               </a:rPr>
-              <a:t>For each one: what data it would need, and where that data might actually come from — who measures it, how often, and whether anyone has kept it.</a:t>
+              <a:t>For each: state inputs, target, data source and one limitation.</a:t>
             </a:r>
           </a:p>
         </p:txBody>
@@ -21629,7 +26748,7 @@
                 </a:solidFill>
                 <a:latin typeface="Calibri"/>
               </a:rPr>
-              <a:t>One of the three must be a problem you think is NOT solvable with the data that exists. Say why.</a:t>
+              <a:t>Choose one problem and dataset. Explain why it is feasible.</a:t>
             </a:r>
           </a:p>
         </p:txBody>
@@ -21671,7 +26790,7 @@
                 </a:solidFill>
                 <a:latin typeface="Calibri"/>
               </a:rPr>
-              <a:t>Marked pass or redo. What is being checked is engagement.</a:t>
+              <a:t>Marks: framing 6, data 8, judgement 6. Submit one DOCX or text PDF.</a:t>
             </a:r>
           </a:p>
         </p:txBody>
@@ -25001,7 +30120,7 @@
                 </a:solidFill>
                 <a:latin typeface="Calibri"/>
               </a:rPr>
-              <a:t>GLOSSARY — KEEP THIS SLIDE</a:t>
+              <a:t>GLOSSARY</a:t>
             </a:r>
           </a:p>
         </p:txBody>
@@ -25043,7 +30162,7 @@
                 </a:solidFill>
                 <a:latin typeface="Cambria"/>
               </a:rPr>
-              <a:t>Every word we used today</a:t>
+              <a:t>Every word we used today (1 of 3)</a:t>
             </a:r>
           </a:p>
         </p:txBody>
@@ -25057,26 +30176,29 @@
         <p:spPr>
           <a:xfrm>
             <a:off x="685800" y="1911095"/>
-            <a:ext cx="5181447" cy="192024"/>
-          </a:xfrm>
-          <a:prstGeom prst="rect">
-            <a:avLst/>
-          </a:prstGeom>
-          <a:noFill/>
-        </p:spPr>
-        <p:txBody>
-          <a:bodyPr wrap="square" lIns="0" rIns="0" tIns="0" bIns="0" anchor="t">
-            <a:spAutoFit/>
-          </a:bodyPr>
-          <a:lstStyle/>
-          <a:p>
-            <a:pPr algn="l">
-              <a:spcAft>
-                <a:spcPts val="600"/>
-              </a:spcAft>
-            </a:pPr>
-            <a:r>
-              <a:rPr sz="1650" b="1" i="0">
+            <a:ext cx="5181447" cy="367213"/>
+          </a:xfrm>
+          <a:prstGeom prst="rect">
+            <a:avLst/>
+          </a:prstGeom>
+          <a:noFill/>
+        </p:spPr>
+        <p:txBody>
+          <a:bodyPr wrap="square" lIns="0" rIns="0" tIns="0" bIns="0" anchor="t">
+            <a:spAutoFit/>
+          </a:bodyPr>
+          <a:lstStyle/>
+          <a:p>
+            <a:pPr algn="l">
+              <a:lnSpc>
+                <a:spcPct val="115000"/>
+              </a:lnSpc>
+              <a:spcAft>
+                <a:spcPts val="600"/>
+              </a:spcAft>
+            </a:pPr>
+            <a:r>
+              <a:rPr sz="1716" b="1" i="0">
                 <a:solidFill>
                   <a:srgbClr val="E4572E"/>
                 </a:solidFill>
@@ -25095,8 +30217,8 @@
         </p:nvSpPr>
         <p:spPr>
           <a:xfrm>
-            <a:off x="685800" y="2095439"/>
-            <a:ext cx="5181447" cy="402336"/>
+            <a:off x="685800" y="2278309"/>
+            <a:ext cx="5181447" cy="683129"/>
           </a:xfrm>
           <a:prstGeom prst="rect">
             <a:avLst/>
@@ -25111,16 +30233,16 @@
           <a:p>
             <a:pPr algn="l">
               <a:lnSpc>
-                <a:spcPct val="112000"/>
+                <a:spcPct val="118000"/>
               </a:lnSpc>
               <a:spcAft>
                 <a:spcPts val="600"/>
               </a:spcAft>
             </a:pPr>
             <a:r>
-              <a:rPr sz="1452" b="0" i="0">
-                <a:solidFill>
-                  <a:srgbClr val="334657"/>
+              <a:rPr sz="1584" b="0" i="0">
+                <a:solidFill>
+                  <a:srgbClr val="1C3144"/>
                 </a:solidFill>
                 <a:latin typeface="Calibri"/>
               </a:rPr>
@@ -25137,27 +30259,30 @@
         </p:nvSpPr>
         <p:spPr>
           <a:xfrm>
-            <a:off x="685800" y="2523744"/>
-            <a:ext cx="5181447" cy="192024"/>
-          </a:xfrm>
-          <a:prstGeom prst="rect">
-            <a:avLst/>
-          </a:prstGeom>
-          <a:noFill/>
-        </p:spPr>
-        <p:txBody>
-          <a:bodyPr wrap="square" lIns="0" rIns="0" tIns="0" bIns="0" anchor="t">
-            <a:spAutoFit/>
-          </a:bodyPr>
-          <a:lstStyle/>
-          <a:p>
-            <a:pPr algn="l">
-              <a:spcAft>
-                <a:spcPts val="600"/>
-              </a:spcAft>
-            </a:pPr>
-            <a:r>
-              <a:rPr sz="1650" b="1" i="0">
+            <a:off x="685800" y="3089454"/>
+            <a:ext cx="5181447" cy="367213"/>
+          </a:xfrm>
+          <a:prstGeom prst="rect">
+            <a:avLst/>
+          </a:prstGeom>
+          <a:noFill/>
+        </p:spPr>
+        <p:txBody>
+          <a:bodyPr wrap="square" lIns="0" rIns="0" tIns="0" bIns="0" anchor="t">
+            <a:spAutoFit/>
+          </a:bodyPr>
+          <a:lstStyle/>
+          <a:p>
+            <a:pPr algn="l">
+              <a:lnSpc>
+                <a:spcPct val="115000"/>
+              </a:lnSpc>
+              <a:spcAft>
+                <a:spcPts val="600"/>
+              </a:spcAft>
+            </a:pPr>
+            <a:r>
+              <a:rPr sz="1716" b="1" i="0">
                 <a:solidFill>
                   <a:srgbClr val="E4572E"/>
                 </a:solidFill>
@@ -25176,8 +30301,8 @@
         </p:nvSpPr>
         <p:spPr>
           <a:xfrm>
-            <a:off x="685800" y="2708087"/>
-            <a:ext cx="5181447" cy="224028"/>
+            <a:off x="685800" y="3456668"/>
+            <a:ext cx="5181447" cy="683129"/>
           </a:xfrm>
           <a:prstGeom prst="rect">
             <a:avLst/>
@@ -25192,16 +30317,16 @@
           <a:p>
             <a:pPr algn="l">
               <a:lnSpc>
-                <a:spcPct val="112000"/>
+                <a:spcPct val="118000"/>
               </a:lnSpc>
               <a:spcAft>
                 <a:spcPts val="600"/>
               </a:spcAft>
             </a:pPr>
             <a:r>
-              <a:rPr sz="1452" b="0" i="0">
-                <a:solidFill>
-                  <a:srgbClr val="334657"/>
+              <a:rPr sz="1584" b="0" i="0">
+                <a:solidFill>
+                  <a:srgbClr val="1C3144"/>
                 </a:solidFill>
                 <a:latin typeface="Calibri"/>
               </a:rPr>
@@ -25218,27 +30343,30 @@
         </p:nvSpPr>
         <p:spPr>
           <a:xfrm>
-            <a:off x="685800" y="2958084"/>
-            <a:ext cx="5181447" cy="192024"/>
-          </a:xfrm>
-          <a:prstGeom prst="rect">
-            <a:avLst/>
-          </a:prstGeom>
-          <a:noFill/>
-        </p:spPr>
-        <p:txBody>
-          <a:bodyPr wrap="square" lIns="0" rIns="0" tIns="0" bIns="0" anchor="t">
-            <a:spAutoFit/>
-          </a:bodyPr>
-          <a:lstStyle/>
-          <a:p>
-            <a:pPr algn="l">
-              <a:spcAft>
-                <a:spcPts val="600"/>
-              </a:spcAft>
-            </a:pPr>
-            <a:r>
-              <a:rPr sz="1650" b="1" i="0">
+            <a:off x="685800" y="4267813"/>
+            <a:ext cx="5181447" cy="367213"/>
+          </a:xfrm>
+          <a:prstGeom prst="rect">
+            <a:avLst/>
+          </a:prstGeom>
+          <a:noFill/>
+        </p:spPr>
+        <p:txBody>
+          <a:bodyPr wrap="square" lIns="0" rIns="0" tIns="0" bIns="0" anchor="t">
+            <a:spAutoFit/>
+          </a:bodyPr>
+          <a:lstStyle/>
+          <a:p>
+            <a:pPr algn="l">
+              <a:lnSpc>
+                <a:spcPct val="115000"/>
+              </a:lnSpc>
+              <a:spcAft>
+                <a:spcPts val="600"/>
+              </a:spcAft>
+            </a:pPr>
+            <a:r>
+              <a:rPr sz="1716" b="1" i="0">
                 <a:solidFill>
                   <a:srgbClr val="E4572E"/>
                 </a:solidFill>
@@ -25257,8 +30385,8 @@
         </p:nvSpPr>
         <p:spPr>
           <a:xfrm>
-            <a:off x="685800" y="3142427"/>
-            <a:ext cx="5181447" cy="224028"/>
+            <a:off x="685800" y="4635027"/>
+            <a:ext cx="5181447" cy="387284"/>
           </a:xfrm>
           <a:prstGeom prst="rect">
             <a:avLst/>
@@ -25273,16 +30401,16 @@
           <a:p>
             <a:pPr algn="l">
               <a:lnSpc>
-                <a:spcPct val="112000"/>
+                <a:spcPct val="118000"/>
               </a:lnSpc>
               <a:spcAft>
                 <a:spcPts val="600"/>
               </a:spcAft>
             </a:pPr>
             <a:r>
-              <a:rPr sz="1452" b="0" i="0">
-                <a:solidFill>
-                  <a:srgbClr val="334657"/>
+              <a:rPr sz="1584" b="0" i="0">
+                <a:solidFill>
+                  <a:srgbClr val="1C3144"/>
                 </a:solidFill>
                 <a:latin typeface="Calibri"/>
               </a:rPr>
@@ -25299,27 +30427,30 @@
         </p:nvSpPr>
         <p:spPr>
           <a:xfrm>
-            <a:off x="685800" y="3392424"/>
-            <a:ext cx="5181447" cy="192024"/>
-          </a:xfrm>
-          <a:prstGeom prst="rect">
-            <a:avLst/>
-          </a:prstGeom>
-          <a:noFill/>
-        </p:spPr>
-        <p:txBody>
-          <a:bodyPr wrap="square" lIns="0" rIns="0" tIns="0" bIns="0" anchor="t">
-            <a:spAutoFit/>
-          </a:bodyPr>
-          <a:lstStyle/>
-          <a:p>
-            <a:pPr algn="l">
-              <a:spcAft>
-                <a:spcPts val="600"/>
-              </a:spcAft>
-            </a:pPr>
-            <a:r>
-              <a:rPr sz="1650" b="1" i="0">
+            <a:off x="685800" y="5150328"/>
+            <a:ext cx="5181447" cy="367213"/>
+          </a:xfrm>
+          <a:prstGeom prst="rect">
+            <a:avLst/>
+          </a:prstGeom>
+          <a:noFill/>
+        </p:spPr>
+        <p:txBody>
+          <a:bodyPr wrap="square" lIns="0" rIns="0" tIns="0" bIns="0" anchor="t">
+            <a:spAutoFit/>
+          </a:bodyPr>
+          <a:lstStyle/>
+          <a:p>
+            <a:pPr algn="l">
+              <a:lnSpc>
+                <a:spcPct val="115000"/>
+              </a:lnSpc>
+              <a:spcAft>
+                <a:spcPts val="600"/>
+              </a:spcAft>
+            </a:pPr>
+            <a:r>
+              <a:rPr sz="1716" b="1" i="0">
                 <a:solidFill>
                   <a:srgbClr val="E4572E"/>
                 </a:solidFill>
@@ -25338,8 +30469,8 @@
         </p:nvSpPr>
         <p:spPr>
           <a:xfrm>
-            <a:off x="685800" y="3576767"/>
-            <a:ext cx="5181447" cy="402336"/>
+            <a:off x="685800" y="5517542"/>
+            <a:ext cx="5181447" cy="683129"/>
           </a:xfrm>
           <a:prstGeom prst="rect">
             <a:avLst/>
@@ -25354,16 +30485,16 @@
           <a:p>
             <a:pPr algn="l">
               <a:lnSpc>
-                <a:spcPct val="112000"/>
+                <a:spcPct val="118000"/>
               </a:lnSpc>
               <a:spcAft>
                 <a:spcPts val="600"/>
               </a:spcAft>
             </a:pPr>
             <a:r>
-              <a:rPr sz="1452" b="0" i="0">
-                <a:solidFill>
-                  <a:srgbClr val="334657"/>
+              <a:rPr sz="1584" b="0" i="0">
+                <a:solidFill>
+                  <a:srgbClr val="1C3144"/>
                 </a:solidFill>
                 <a:latin typeface="Calibri"/>
               </a:rPr>
@@ -25380,27 +30511,30 @@
         </p:nvSpPr>
         <p:spPr>
           <a:xfrm>
-            <a:off x="685800" y="4005072"/>
-            <a:ext cx="5181447" cy="192024"/>
-          </a:xfrm>
-          <a:prstGeom prst="rect">
-            <a:avLst/>
-          </a:prstGeom>
-          <a:noFill/>
-        </p:spPr>
-        <p:txBody>
-          <a:bodyPr wrap="square" lIns="0" rIns="0" tIns="0" bIns="0" anchor="t">
-            <a:spAutoFit/>
-          </a:bodyPr>
-          <a:lstStyle/>
-          <a:p>
-            <a:pPr algn="l">
-              <a:spcAft>
-                <a:spcPts val="600"/>
-              </a:spcAft>
-            </a:pPr>
-            <a:r>
-              <a:rPr sz="1650" b="1" i="0">
+            <a:off x="6324447" y="1911095"/>
+            <a:ext cx="5181447" cy="367213"/>
+          </a:xfrm>
+          <a:prstGeom prst="rect">
+            <a:avLst/>
+          </a:prstGeom>
+          <a:noFill/>
+        </p:spPr>
+        <p:txBody>
+          <a:bodyPr wrap="square" lIns="0" rIns="0" tIns="0" bIns="0" anchor="t">
+            <a:spAutoFit/>
+          </a:bodyPr>
+          <a:lstStyle/>
+          <a:p>
+            <a:pPr algn="l">
+              <a:lnSpc>
+                <a:spcPct val="115000"/>
+              </a:lnSpc>
+              <a:spcAft>
+                <a:spcPts val="600"/>
+              </a:spcAft>
+            </a:pPr>
+            <a:r>
+              <a:rPr sz="1716" b="1" i="0">
                 <a:solidFill>
                   <a:srgbClr val="E4572E"/>
                 </a:solidFill>
@@ -25419,8 +30553,8 @@
         </p:nvSpPr>
         <p:spPr>
           <a:xfrm>
-            <a:off x="685800" y="4189415"/>
-            <a:ext cx="5181447" cy="224028"/>
+            <a:off x="6324447" y="2278309"/>
+            <a:ext cx="5181447" cy="387284"/>
           </a:xfrm>
           <a:prstGeom prst="rect">
             <a:avLst/>
@@ -25435,16 +30569,16 @@
           <a:p>
             <a:pPr algn="l">
               <a:lnSpc>
-                <a:spcPct val="112000"/>
+                <a:spcPct val="118000"/>
               </a:lnSpc>
               <a:spcAft>
                 <a:spcPts val="600"/>
               </a:spcAft>
             </a:pPr>
             <a:r>
-              <a:rPr sz="1452" b="0" i="0">
-                <a:solidFill>
-                  <a:srgbClr val="334657"/>
+              <a:rPr sz="1584" b="0" i="0">
+                <a:solidFill>
+                  <a:srgbClr val="1C3144"/>
                 </a:solidFill>
                 <a:latin typeface="Calibri"/>
               </a:rPr>
@@ -25461,27 +30595,30 @@
         </p:nvSpPr>
         <p:spPr>
           <a:xfrm>
-            <a:off x="685800" y="4439412"/>
-            <a:ext cx="5181447" cy="192024"/>
-          </a:xfrm>
-          <a:prstGeom prst="rect">
-            <a:avLst/>
-          </a:prstGeom>
-          <a:noFill/>
-        </p:spPr>
-        <p:txBody>
-          <a:bodyPr wrap="square" lIns="0" rIns="0" tIns="0" bIns="0" anchor="t">
-            <a:spAutoFit/>
-          </a:bodyPr>
-          <a:lstStyle/>
-          <a:p>
-            <a:pPr algn="l">
-              <a:spcAft>
-                <a:spcPts val="600"/>
-              </a:spcAft>
-            </a:pPr>
-            <a:r>
-              <a:rPr sz="1650" b="1" i="0">
+            <a:off x="6324447" y="2793610"/>
+            <a:ext cx="5181447" cy="367213"/>
+          </a:xfrm>
+          <a:prstGeom prst="rect">
+            <a:avLst/>
+          </a:prstGeom>
+          <a:noFill/>
+        </p:spPr>
+        <p:txBody>
+          <a:bodyPr wrap="square" lIns="0" rIns="0" tIns="0" bIns="0" anchor="t">
+            <a:spAutoFit/>
+          </a:bodyPr>
+          <a:lstStyle/>
+          <a:p>
+            <a:pPr algn="l">
+              <a:lnSpc>
+                <a:spcPct val="115000"/>
+              </a:lnSpc>
+              <a:spcAft>
+                <a:spcPts val="600"/>
+              </a:spcAft>
+            </a:pPr>
+            <a:r>
+              <a:rPr sz="1716" b="1" i="0">
                 <a:solidFill>
                   <a:srgbClr val="E4572E"/>
                 </a:solidFill>
@@ -25500,8 +30637,8 @@
         </p:nvSpPr>
         <p:spPr>
           <a:xfrm>
-            <a:off x="685800" y="4623755"/>
-            <a:ext cx="5181447" cy="224028"/>
+            <a:off x="6324447" y="3160824"/>
+            <a:ext cx="5181447" cy="387284"/>
           </a:xfrm>
           <a:prstGeom prst="rect">
             <a:avLst/>
@@ -25516,16 +30653,16 @@
           <a:p>
             <a:pPr algn="l">
               <a:lnSpc>
-                <a:spcPct val="112000"/>
+                <a:spcPct val="118000"/>
               </a:lnSpc>
               <a:spcAft>
                 <a:spcPts val="600"/>
               </a:spcAft>
             </a:pPr>
             <a:r>
-              <a:rPr sz="1452" b="0" i="0">
-                <a:solidFill>
-                  <a:srgbClr val="334657"/>
+              <a:rPr sz="1584" b="0" i="0">
+                <a:solidFill>
+                  <a:srgbClr val="1C3144"/>
                 </a:solidFill>
                 <a:latin typeface="Calibri"/>
               </a:rPr>
@@ -25542,27 +30679,30 @@
         </p:nvSpPr>
         <p:spPr>
           <a:xfrm>
-            <a:off x="685800" y="4873751"/>
-            <a:ext cx="5181447" cy="192024"/>
-          </a:xfrm>
-          <a:prstGeom prst="rect">
-            <a:avLst/>
-          </a:prstGeom>
-          <a:noFill/>
-        </p:spPr>
-        <p:txBody>
-          <a:bodyPr wrap="square" lIns="0" rIns="0" tIns="0" bIns="0" anchor="t">
-            <a:spAutoFit/>
-          </a:bodyPr>
-          <a:lstStyle/>
-          <a:p>
-            <a:pPr algn="l">
-              <a:spcAft>
-                <a:spcPts val="600"/>
-              </a:spcAft>
-            </a:pPr>
-            <a:r>
-              <a:rPr sz="1650" b="1" i="0">
+            <a:off x="6324447" y="3676124"/>
+            <a:ext cx="5181447" cy="367213"/>
+          </a:xfrm>
+          <a:prstGeom prst="rect">
+            <a:avLst/>
+          </a:prstGeom>
+          <a:noFill/>
+        </p:spPr>
+        <p:txBody>
+          <a:bodyPr wrap="square" lIns="0" rIns="0" tIns="0" bIns="0" anchor="t">
+            <a:spAutoFit/>
+          </a:bodyPr>
+          <a:lstStyle/>
+          <a:p>
+            <a:pPr algn="l">
+              <a:lnSpc>
+                <a:spcPct val="115000"/>
+              </a:lnSpc>
+              <a:spcAft>
+                <a:spcPts val="600"/>
+              </a:spcAft>
+            </a:pPr>
+            <a:r>
+              <a:rPr sz="1716" b="1" i="0">
                 <a:solidFill>
                   <a:srgbClr val="E4572E"/>
                 </a:solidFill>
@@ -25581,8 +30721,8 @@
         </p:nvSpPr>
         <p:spPr>
           <a:xfrm>
-            <a:off x="685800" y="5058095"/>
-            <a:ext cx="5181447" cy="224028"/>
+            <a:off x="6324447" y="4043338"/>
+            <a:ext cx="5181447" cy="683129"/>
           </a:xfrm>
           <a:prstGeom prst="rect">
             <a:avLst/>
@@ -25597,16 +30737,16 @@
           <a:p>
             <a:pPr algn="l">
               <a:lnSpc>
-                <a:spcPct val="112000"/>
+                <a:spcPct val="118000"/>
               </a:lnSpc>
               <a:spcAft>
                 <a:spcPts val="600"/>
               </a:spcAft>
             </a:pPr>
             <a:r>
-              <a:rPr sz="1452" b="0" i="0">
-                <a:solidFill>
-                  <a:srgbClr val="334657"/>
+              <a:rPr sz="1584" b="0" i="0">
+                <a:solidFill>
+                  <a:srgbClr val="1C3144"/>
                 </a:solidFill>
                 <a:latin typeface="Calibri"/>
               </a:rPr>
@@ -25623,27 +30763,30 @@
         </p:nvSpPr>
         <p:spPr>
           <a:xfrm>
-            <a:off x="685800" y="5308091"/>
-            <a:ext cx="5181447" cy="192024"/>
-          </a:xfrm>
-          <a:prstGeom prst="rect">
-            <a:avLst/>
-          </a:prstGeom>
-          <a:noFill/>
-        </p:spPr>
-        <p:txBody>
-          <a:bodyPr wrap="square" lIns="0" rIns="0" tIns="0" bIns="0" anchor="t">
-            <a:spAutoFit/>
-          </a:bodyPr>
-          <a:lstStyle/>
-          <a:p>
-            <a:pPr algn="l">
-              <a:spcAft>
-                <a:spcPts val="600"/>
-              </a:spcAft>
-            </a:pPr>
-            <a:r>
-              <a:rPr sz="1650" b="1" i="0">
+            <a:off x="6324447" y="4854483"/>
+            <a:ext cx="5181447" cy="367213"/>
+          </a:xfrm>
+          <a:prstGeom prst="rect">
+            <a:avLst/>
+          </a:prstGeom>
+          <a:noFill/>
+        </p:spPr>
+        <p:txBody>
+          <a:bodyPr wrap="square" lIns="0" rIns="0" tIns="0" bIns="0" anchor="t">
+            <a:spAutoFit/>
+          </a:bodyPr>
+          <a:lstStyle/>
+          <a:p>
+            <a:pPr algn="l">
+              <a:lnSpc>
+                <a:spcPct val="115000"/>
+              </a:lnSpc>
+              <a:spcAft>
+                <a:spcPts val="600"/>
+              </a:spcAft>
+            </a:pPr>
+            <a:r>
+              <a:rPr sz="1716" b="1" i="0">
                 <a:solidFill>
                   <a:srgbClr val="E4572E"/>
                 </a:solidFill>
@@ -25662,8 +30805,8 @@
         </p:nvSpPr>
         <p:spPr>
           <a:xfrm>
-            <a:off x="685800" y="5492435"/>
-            <a:ext cx="5181447" cy="224028"/>
+            <a:off x="6324447" y="5221697"/>
+            <a:ext cx="5181447" cy="387284"/>
           </a:xfrm>
           <a:prstGeom prst="rect">
             <a:avLst/>
@@ -25678,830 +30821,20 @@
           <a:p>
             <a:pPr algn="l">
               <a:lnSpc>
-                <a:spcPct val="112000"/>
+                <a:spcPct val="118000"/>
               </a:lnSpc>
               <a:spcAft>
                 <a:spcPts val="600"/>
               </a:spcAft>
             </a:pPr>
             <a:r>
-              <a:rPr sz="1452" b="0" i="0">
-                <a:solidFill>
-                  <a:srgbClr val="334657"/>
+              <a:rPr sz="1584" b="0" i="0">
+                <a:solidFill>
+                  <a:srgbClr val="1C3144"/>
                 </a:solidFill>
                 <a:latin typeface="Calibri"/>
               </a:rPr>
               <a:t>The column you are trying to predict.</a:t>
-            </a:r>
-          </a:p>
-        </p:txBody>
-      </p:sp>
-      <p:sp>
-        <p:nvSpPr>
-          <p:cNvPr id="20" name="TextBox 19"/>
-          <p:cNvSpPr txBox="1"/>
-          <p:nvPr/>
-        </p:nvSpPr>
-        <p:spPr>
-          <a:xfrm>
-            <a:off x="685800" y="5742431"/>
-            <a:ext cx="5181447" cy="192024"/>
-          </a:xfrm>
-          <a:prstGeom prst="rect">
-            <a:avLst/>
-          </a:prstGeom>
-          <a:noFill/>
-        </p:spPr>
-        <p:txBody>
-          <a:bodyPr wrap="square" lIns="0" rIns="0" tIns="0" bIns="0" anchor="t">
-            <a:spAutoFit/>
-          </a:bodyPr>
-          <a:lstStyle/>
-          <a:p>
-            <a:pPr algn="l">
-              <a:spcAft>
-                <a:spcPts val="600"/>
-              </a:spcAft>
-            </a:pPr>
-            <a:r>
-              <a:rPr sz="1650" b="1" i="0">
-                <a:solidFill>
-                  <a:srgbClr val="E4572E"/>
-                </a:solidFill>
-                <a:latin typeface="Calibri"/>
-              </a:rPr>
-              <a:t>Regression</a:t>
-            </a:r>
-          </a:p>
-        </p:txBody>
-      </p:sp>
-      <p:sp>
-        <p:nvSpPr>
-          <p:cNvPr id="21" name="TextBox 20"/>
-          <p:cNvSpPr txBox="1"/>
-          <p:nvPr/>
-        </p:nvSpPr>
-        <p:spPr>
-          <a:xfrm>
-            <a:off x="685800" y="5926775"/>
-            <a:ext cx="5181447" cy="224028"/>
-          </a:xfrm>
-          <a:prstGeom prst="rect">
-            <a:avLst/>
-          </a:prstGeom>
-          <a:noFill/>
-        </p:spPr>
-        <p:txBody>
-          <a:bodyPr wrap="square" lIns="0" rIns="0" tIns="0" bIns="0" anchor="t">
-            <a:spAutoFit/>
-          </a:bodyPr>
-          <a:lstStyle/>
-          <a:p>
-            <a:pPr algn="l">
-              <a:lnSpc>
-                <a:spcPct val="112000"/>
-              </a:lnSpc>
-              <a:spcAft>
-                <a:spcPts val="600"/>
-              </a:spcAft>
-            </a:pPr>
-            <a:r>
-              <a:rPr sz="1452" b="0" i="0">
-                <a:solidFill>
-                  <a:srgbClr val="334657"/>
-                </a:solidFill>
-                <a:latin typeface="Calibri"/>
-              </a:rPr>
-              <a:t>Predicting a number on a continuous scale.</a:t>
-            </a:r>
-          </a:p>
-        </p:txBody>
-      </p:sp>
-      <p:sp>
-        <p:nvSpPr>
-          <p:cNvPr id="22" name="TextBox 21"/>
-          <p:cNvSpPr txBox="1"/>
-          <p:nvPr/>
-        </p:nvSpPr>
-        <p:spPr>
-          <a:xfrm>
-            <a:off x="6324447" y="1911095"/>
-            <a:ext cx="5181447" cy="192024"/>
-          </a:xfrm>
-          <a:prstGeom prst="rect">
-            <a:avLst/>
-          </a:prstGeom>
-          <a:noFill/>
-        </p:spPr>
-        <p:txBody>
-          <a:bodyPr wrap="square" lIns="0" rIns="0" tIns="0" bIns="0" anchor="t">
-            <a:spAutoFit/>
-          </a:bodyPr>
-          <a:lstStyle/>
-          <a:p>
-            <a:pPr algn="l">
-              <a:spcAft>
-                <a:spcPts val="600"/>
-              </a:spcAft>
-            </a:pPr>
-            <a:r>
-              <a:rPr sz="1650" b="1" i="0">
-                <a:solidFill>
-                  <a:srgbClr val="E4572E"/>
-                </a:solidFill>
-                <a:latin typeface="Calibri"/>
-              </a:rPr>
-              <a:t>Classification</a:t>
-            </a:r>
-          </a:p>
-        </p:txBody>
-      </p:sp>
-      <p:sp>
-        <p:nvSpPr>
-          <p:cNvPr id="23" name="TextBox 22"/>
-          <p:cNvSpPr txBox="1"/>
-          <p:nvPr/>
-        </p:nvSpPr>
-        <p:spPr>
-          <a:xfrm>
-            <a:off x="6324447" y="2095439"/>
-            <a:ext cx="5181447" cy="224028"/>
-          </a:xfrm>
-          <a:prstGeom prst="rect">
-            <a:avLst/>
-          </a:prstGeom>
-          <a:noFill/>
-        </p:spPr>
-        <p:txBody>
-          <a:bodyPr wrap="square" lIns="0" rIns="0" tIns="0" bIns="0" anchor="t">
-            <a:spAutoFit/>
-          </a:bodyPr>
-          <a:lstStyle/>
-          <a:p>
-            <a:pPr algn="l">
-              <a:lnSpc>
-                <a:spcPct val="112000"/>
-              </a:lnSpc>
-              <a:spcAft>
-                <a:spcPts val="600"/>
-              </a:spcAft>
-            </a:pPr>
-            <a:r>
-              <a:rPr sz="1452" b="0" i="0">
-                <a:solidFill>
-                  <a:srgbClr val="334657"/>
-                </a:solidFill>
-                <a:latin typeface="Calibri"/>
-              </a:rPr>
-              <a:t>Predicting which of a small set of categories a case belongs to.</a:t>
-            </a:r>
-          </a:p>
-        </p:txBody>
-      </p:sp>
-      <p:sp>
-        <p:nvSpPr>
-          <p:cNvPr id="24" name="TextBox 23"/>
-          <p:cNvSpPr txBox="1"/>
-          <p:nvPr/>
-        </p:nvSpPr>
-        <p:spPr>
-          <a:xfrm>
-            <a:off x="6324447" y="2345436"/>
-            <a:ext cx="5181447" cy="192024"/>
-          </a:xfrm>
-          <a:prstGeom prst="rect">
-            <a:avLst/>
-          </a:prstGeom>
-          <a:noFill/>
-        </p:spPr>
-        <p:txBody>
-          <a:bodyPr wrap="square" lIns="0" rIns="0" tIns="0" bIns="0" anchor="t">
-            <a:spAutoFit/>
-          </a:bodyPr>
-          <a:lstStyle/>
-          <a:p>
-            <a:pPr algn="l">
-              <a:spcAft>
-                <a:spcPts val="600"/>
-              </a:spcAft>
-            </a:pPr>
-            <a:r>
-              <a:rPr sz="1650" b="1" i="0">
-                <a:solidFill>
-                  <a:srgbClr val="E4572E"/>
-                </a:solidFill>
-                <a:latin typeface="Calibri"/>
-              </a:rPr>
-              <a:t>Binary classification</a:t>
-            </a:r>
-          </a:p>
-        </p:txBody>
-      </p:sp>
-      <p:sp>
-        <p:nvSpPr>
-          <p:cNvPr id="25" name="TextBox 24"/>
-          <p:cNvSpPr txBox="1"/>
-          <p:nvPr/>
-        </p:nvSpPr>
-        <p:spPr>
-          <a:xfrm>
-            <a:off x="6324447" y="2529779"/>
-            <a:ext cx="5181447" cy="224028"/>
-          </a:xfrm>
-          <a:prstGeom prst="rect">
-            <a:avLst/>
-          </a:prstGeom>
-          <a:noFill/>
-        </p:spPr>
-        <p:txBody>
-          <a:bodyPr wrap="square" lIns="0" rIns="0" tIns="0" bIns="0" anchor="t">
-            <a:spAutoFit/>
-          </a:bodyPr>
-          <a:lstStyle/>
-          <a:p>
-            <a:pPr algn="l">
-              <a:lnSpc>
-                <a:spcPct val="112000"/>
-              </a:lnSpc>
-              <a:spcAft>
-                <a:spcPts val="600"/>
-              </a:spcAft>
-            </a:pPr>
-            <a:r>
-              <a:rPr sz="1452" b="0" i="0">
-                <a:solidFill>
-                  <a:srgbClr val="334657"/>
-                </a:solidFill>
-                <a:latin typeface="Calibri"/>
-              </a:rPr>
-              <a:t>Classification with exactly two categories, such as pass or fail.</a:t>
-            </a:r>
-          </a:p>
-        </p:txBody>
-      </p:sp>
-      <p:sp>
-        <p:nvSpPr>
-          <p:cNvPr id="26" name="TextBox 25"/>
-          <p:cNvSpPr txBox="1"/>
-          <p:nvPr/>
-        </p:nvSpPr>
-        <p:spPr>
-          <a:xfrm>
-            <a:off x="6324447" y="2779776"/>
-            <a:ext cx="5181447" cy="192024"/>
-          </a:xfrm>
-          <a:prstGeom prst="rect">
-            <a:avLst/>
-          </a:prstGeom>
-          <a:noFill/>
-        </p:spPr>
-        <p:txBody>
-          <a:bodyPr wrap="square" lIns="0" rIns="0" tIns="0" bIns="0" anchor="t">
-            <a:spAutoFit/>
-          </a:bodyPr>
-          <a:lstStyle/>
-          <a:p>
-            <a:pPr algn="l">
-              <a:spcAft>
-                <a:spcPts val="600"/>
-              </a:spcAft>
-            </a:pPr>
-            <a:r>
-              <a:rPr sz="1650" b="1" i="0">
-                <a:solidFill>
-                  <a:srgbClr val="E4572E"/>
-                </a:solidFill>
-                <a:latin typeface="Calibri"/>
-              </a:rPr>
-              <a:t>Multi-class classification</a:t>
-            </a:r>
-          </a:p>
-        </p:txBody>
-      </p:sp>
-      <p:sp>
-        <p:nvSpPr>
-          <p:cNvPr id="27" name="TextBox 26"/>
-          <p:cNvSpPr txBox="1"/>
-          <p:nvPr/>
-        </p:nvSpPr>
-        <p:spPr>
-          <a:xfrm>
-            <a:off x="6324447" y="2964119"/>
-            <a:ext cx="5181447" cy="224028"/>
-          </a:xfrm>
-          <a:prstGeom prst="rect">
-            <a:avLst/>
-          </a:prstGeom>
-          <a:noFill/>
-        </p:spPr>
-        <p:txBody>
-          <a:bodyPr wrap="square" lIns="0" rIns="0" tIns="0" bIns="0" anchor="t">
-            <a:spAutoFit/>
-          </a:bodyPr>
-          <a:lstStyle/>
-          <a:p>
-            <a:pPr algn="l">
-              <a:lnSpc>
-                <a:spcPct val="112000"/>
-              </a:lnSpc>
-              <a:spcAft>
-                <a:spcPts val="600"/>
-              </a:spcAft>
-            </a:pPr>
-            <a:r>
-              <a:rPr sz="1452" b="0" i="0">
-                <a:solidFill>
-                  <a:srgbClr val="334657"/>
-                </a:solidFill>
-                <a:latin typeface="Calibri"/>
-              </a:rPr>
-              <a:t>Classification with three or more categories.</a:t>
-            </a:r>
-          </a:p>
-        </p:txBody>
-      </p:sp>
-      <p:sp>
-        <p:nvSpPr>
-          <p:cNvPr id="28" name="TextBox 27"/>
-          <p:cNvSpPr txBox="1"/>
-          <p:nvPr/>
-        </p:nvSpPr>
-        <p:spPr>
-          <a:xfrm>
-            <a:off x="6324447" y="3214116"/>
-            <a:ext cx="5181447" cy="192024"/>
-          </a:xfrm>
-          <a:prstGeom prst="rect">
-            <a:avLst/>
-          </a:prstGeom>
-          <a:noFill/>
-        </p:spPr>
-        <p:txBody>
-          <a:bodyPr wrap="square" lIns="0" rIns="0" tIns="0" bIns="0" anchor="t">
-            <a:spAutoFit/>
-          </a:bodyPr>
-          <a:lstStyle/>
-          <a:p>
-            <a:pPr algn="l">
-              <a:spcAft>
-                <a:spcPts val="600"/>
-              </a:spcAft>
-            </a:pPr>
-            <a:r>
-              <a:rPr sz="1650" b="1" i="0">
-                <a:solidFill>
-                  <a:srgbClr val="E4572E"/>
-                </a:solidFill>
-                <a:latin typeface="Calibri"/>
-              </a:rPr>
-              <a:t>Prediction</a:t>
-            </a:r>
-          </a:p>
-        </p:txBody>
-      </p:sp>
-      <p:sp>
-        <p:nvSpPr>
-          <p:cNvPr id="29" name="TextBox 28"/>
-          <p:cNvSpPr txBox="1"/>
-          <p:nvPr/>
-        </p:nvSpPr>
-        <p:spPr>
-          <a:xfrm>
-            <a:off x="6324447" y="3398459"/>
-            <a:ext cx="5181447" cy="224028"/>
-          </a:xfrm>
-          <a:prstGeom prst="rect">
-            <a:avLst/>
-          </a:prstGeom>
-          <a:noFill/>
-        </p:spPr>
-        <p:txBody>
-          <a:bodyPr wrap="square" lIns="0" rIns="0" tIns="0" bIns="0" anchor="t">
-            <a:spAutoFit/>
-          </a:bodyPr>
-          <a:lstStyle/>
-          <a:p>
-            <a:pPr algn="l">
-              <a:lnSpc>
-                <a:spcPct val="112000"/>
-              </a:lnSpc>
-              <a:spcAft>
-                <a:spcPts val="600"/>
-              </a:spcAft>
-            </a:pPr>
-            <a:r>
-              <a:rPr sz="1452" b="0" i="0">
-                <a:solidFill>
-                  <a:srgbClr val="334657"/>
-                </a:solidFill>
-                <a:latin typeface="Calibri"/>
-              </a:rPr>
-              <a:t>The model's answer for a case.</a:t>
-            </a:r>
-          </a:p>
-        </p:txBody>
-      </p:sp>
-      <p:sp>
-        <p:nvSpPr>
-          <p:cNvPr id="30" name="TextBox 29"/>
-          <p:cNvSpPr txBox="1"/>
-          <p:nvPr/>
-        </p:nvSpPr>
-        <p:spPr>
-          <a:xfrm>
-            <a:off x="6324447" y="3648456"/>
-            <a:ext cx="5181447" cy="192024"/>
-          </a:xfrm>
-          <a:prstGeom prst="rect">
-            <a:avLst/>
-          </a:prstGeom>
-          <a:noFill/>
-        </p:spPr>
-        <p:txBody>
-          <a:bodyPr wrap="square" lIns="0" rIns="0" tIns="0" bIns="0" anchor="t">
-            <a:spAutoFit/>
-          </a:bodyPr>
-          <a:lstStyle/>
-          <a:p>
-            <a:pPr algn="l">
-              <a:spcAft>
-                <a:spcPts val="600"/>
-              </a:spcAft>
-            </a:pPr>
-            <a:r>
-              <a:rPr sz="1650" b="1" i="0">
-                <a:solidFill>
-                  <a:srgbClr val="E4572E"/>
-                </a:solidFill>
-                <a:latin typeface="Calibri"/>
-              </a:rPr>
-              <a:t>Error</a:t>
-            </a:r>
-          </a:p>
-        </p:txBody>
-      </p:sp>
-      <p:sp>
-        <p:nvSpPr>
-          <p:cNvPr id="31" name="TextBox 30"/>
-          <p:cNvSpPr txBox="1"/>
-          <p:nvPr/>
-        </p:nvSpPr>
-        <p:spPr>
-          <a:xfrm>
-            <a:off x="6324447" y="3832799"/>
-            <a:ext cx="5181447" cy="402336"/>
-          </a:xfrm>
-          <a:prstGeom prst="rect">
-            <a:avLst/>
-          </a:prstGeom>
-          <a:noFill/>
-        </p:spPr>
-        <p:txBody>
-          <a:bodyPr wrap="square" lIns="0" rIns="0" tIns="0" bIns="0" anchor="t">
-            <a:spAutoFit/>
-          </a:bodyPr>
-          <a:lstStyle/>
-          <a:p>
-            <a:pPr algn="l">
-              <a:lnSpc>
-                <a:spcPct val="112000"/>
-              </a:lnSpc>
-              <a:spcAft>
-                <a:spcPts val="600"/>
-              </a:spcAft>
-            </a:pPr>
-            <a:r>
-              <a:rPr sz="1452" b="0" i="0">
-                <a:solidFill>
-                  <a:srgbClr val="334657"/>
-                </a:solidFill>
-                <a:latin typeface="Calibri"/>
-              </a:rPr>
-              <a:t>The distance between the prediction and the truth. Measuring it honestly is most of this course.</a:t>
-            </a:r>
-          </a:p>
-        </p:txBody>
-      </p:sp>
-      <p:sp>
-        <p:nvSpPr>
-          <p:cNvPr id="32" name="TextBox 31"/>
-          <p:cNvSpPr txBox="1"/>
-          <p:nvPr/>
-        </p:nvSpPr>
-        <p:spPr>
-          <a:xfrm>
-            <a:off x="6324447" y="4261104"/>
-            <a:ext cx="5181447" cy="192024"/>
-          </a:xfrm>
-          <a:prstGeom prst="rect">
-            <a:avLst/>
-          </a:prstGeom>
-          <a:noFill/>
-        </p:spPr>
-        <p:txBody>
-          <a:bodyPr wrap="square" lIns="0" rIns="0" tIns="0" bIns="0" anchor="t">
-            <a:spAutoFit/>
-          </a:bodyPr>
-          <a:lstStyle/>
-          <a:p>
-            <a:pPr algn="l">
-              <a:spcAft>
-                <a:spcPts val="600"/>
-              </a:spcAft>
-            </a:pPr>
-            <a:r>
-              <a:rPr sz="1650" b="1" i="0">
-                <a:solidFill>
-                  <a:srgbClr val="E4572E"/>
-                </a:solidFill>
-                <a:latin typeface="Calibri"/>
-              </a:rPr>
-              <a:t>Unseen data</a:t>
-            </a:r>
-          </a:p>
-        </p:txBody>
-      </p:sp>
-      <p:sp>
-        <p:nvSpPr>
-          <p:cNvPr id="33" name="TextBox 32"/>
-          <p:cNvSpPr txBox="1"/>
-          <p:nvPr/>
-        </p:nvSpPr>
-        <p:spPr>
-          <a:xfrm>
-            <a:off x="6324447" y="4445447"/>
-            <a:ext cx="5181447" cy="224028"/>
-          </a:xfrm>
-          <a:prstGeom prst="rect">
-            <a:avLst/>
-          </a:prstGeom>
-          <a:noFill/>
-        </p:spPr>
-        <p:txBody>
-          <a:bodyPr wrap="square" lIns="0" rIns="0" tIns="0" bIns="0" anchor="t">
-            <a:spAutoFit/>
-          </a:bodyPr>
-          <a:lstStyle/>
-          <a:p>
-            <a:pPr algn="l">
-              <a:lnSpc>
-                <a:spcPct val="112000"/>
-              </a:lnSpc>
-              <a:spcAft>
-                <a:spcPts val="600"/>
-              </a:spcAft>
-            </a:pPr>
-            <a:r>
-              <a:rPr sz="1452" b="0" i="0">
-                <a:solidFill>
-                  <a:srgbClr val="334657"/>
-                </a:solidFill>
-                <a:latin typeface="Calibri"/>
-              </a:rPr>
-              <a:t>Cases the model was not shown while it was learning. The only fair test.</a:t>
-            </a:r>
-          </a:p>
-        </p:txBody>
-      </p:sp>
-      <p:sp>
-        <p:nvSpPr>
-          <p:cNvPr id="34" name="TextBox 33"/>
-          <p:cNvSpPr txBox="1"/>
-          <p:nvPr/>
-        </p:nvSpPr>
-        <p:spPr>
-          <a:xfrm>
-            <a:off x="6324447" y="4695444"/>
-            <a:ext cx="5181447" cy="192024"/>
-          </a:xfrm>
-          <a:prstGeom prst="rect">
-            <a:avLst/>
-          </a:prstGeom>
-          <a:noFill/>
-        </p:spPr>
-        <p:txBody>
-          <a:bodyPr wrap="square" lIns="0" rIns="0" tIns="0" bIns="0" anchor="t">
-            <a:spAutoFit/>
-          </a:bodyPr>
-          <a:lstStyle/>
-          <a:p>
-            <a:pPr algn="l">
-              <a:spcAft>
-                <a:spcPts val="600"/>
-              </a:spcAft>
-            </a:pPr>
-            <a:r>
-              <a:rPr sz="1650" b="1" i="0">
-                <a:solidFill>
-                  <a:srgbClr val="E4572E"/>
-                </a:solidFill>
-                <a:latin typeface="Calibri"/>
-              </a:rPr>
-              <a:t>Data leakage</a:t>
-            </a:r>
-          </a:p>
-        </p:txBody>
-      </p:sp>
-      <p:sp>
-        <p:nvSpPr>
-          <p:cNvPr id="35" name="TextBox 34"/>
-          <p:cNvSpPr txBox="1"/>
-          <p:nvPr/>
-        </p:nvSpPr>
-        <p:spPr>
-          <a:xfrm>
-            <a:off x="6324447" y="4879787"/>
-            <a:ext cx="5181447" cy="402336"/>
-          </a:xfrm>
-          <a:prstGeom prst="rect">
-            <a:avLst/>
-          </a:prstGeom>
-          <a:noFill/>
-        </p:spPr>
-        <p:txBody>
-          <a:bodyPr wrap="square" lIns="0" rIns="0" tIns="0" bIns="0" anchor="t">
-            <a:spAutoFit/>
-          </a:bodyPr>
-          <a:lstStyle/>
-          <a:p>
-            <a:pPr algn="l">
-              <a:lnSpc>
-                <a:spcPct val="112000"/>
-              </a:lnSpc>
-              <a:spcAft>
-                <a:spcPts val="600"/>
-              </a:spcAft>
-            </a:pPr>
-            <a:r>
-              <a:rPr sz="1452" b="0" i="0">
-                <a:solidFill>
-                  <a:srgbClr val="334657"/>
-                </a:solidFill>
-                <a:latin typeface="Calibri"/>
-              </a:rPr>
-              <a:t>Accidentally giving the model information it would not have in real use — usually something only known after the outcome. Week 10.</a:t>
-            </a:r>
-          </a:p>
-        </p:txBody>
-      </p:sp>
-      <p:sp>
-        <p:nvSpPr>
-          <p:cNvPr id="36" name="TextBox 35"/>
-          <p:cNvSpPr txBox="1"/>
-          <p:nvPr/>
-        </p:nvSpPr>
-        <p:spPr>
-          <a:xfrm>
-            <a:off x="6324447" y="5308092"/>
-            <a:ext cx="5181447" cy="192024"/>
-          </a:xfrm>
-          <a:prstGeom prst="rect">
-            <a:avLst/>
-          </a:prstGeom>
-          <a:noFill/>
-        </p:spPr>
-        <p:txBody>
-          <a:bodyPr wrap="square" lIns="0" rIns="0" tIns="0" bIns="0" anchor="t">
-            <a:spAutoFit/>
-          </a:bodyPr>
-          <a:lstStyle/>
-          <a:p>
-            <a:pPr algn="l">
-              <a:spcAft>
-                <a:spcPts val="600"/>
-              </a:spcAft>
-            </a:pPr>
-            <a:r>
-              <a:rPr sz="1650" b="1" i="0">
-                <a:solidFill>
-                  <a:srgbClr val="E4572E"/>
-                </a:solidFill>
-                <a:latin typeface="Calibri"/>
-              </a:rPr>
-              <a:t>Generalisation</a:t>
-            </a:r>
-          </a:p>
-        </p:txBody>
-      </p:sp>
-      <p:sp>
-        <p:nvSpPr>
-          <p:cNvPr id="37" name="TextBox 36"/>
-          <p:cNvSpPr txBox="1"/>
-          <p:nvPr/>
-        </p:nvSpPr>
-        <p:spPr>
-          <a:xfrm>
-            <a:off x="6324447" y="5492435"/>
-            <a:ext cx="5181447" cy="224028"/>
-          </a:xfrm>
-          <a:prstGeom prst="rect">
-            <a:avLst/>
-          </a:prstGeom>
-          <a:noFill/>
-        </p:spPr>
-        <p:txBody>
-          <a:bodyPr wrap="square" lIns="0" rIns="0" tIns="0" bIns="0" anchor="t">
-            <a:spAutoFit/>
-          </a:bodyPr>
-          <a:lstStyle/>
-          <a:p>
-            <a:pPr algn="l">
-              <a:lnSpc>
-                <a:spcPct val="112000"/>
-              </a:lnSpc>
-              <a:spcAft>
-                <a:spcPts val="600"/>
-              </a:spcAft>
-            </a:pPr>
-            <a:r>
-              <a:rPr sz="1452" b="0" i="0">
-                <a:solidFill>
-                  <a:srgbClr val="334657"/>
-                </a:solidFill>
-                <a:latin typeface="Calibri"/>
-              </a:rPr>
-              <a:t>Whether a rule learned from past cases still works on new ones.</a:t>
-            </a:r>
-          </a:p>
-        </p:txBody>
-      </p:sp>
-      <p:sp>
-        <p:nvSpPr>
-          <p:cNvPr id="38" name="TextBox 37"/>
-          <p:cNvSpPr txBox="1"/>
-          <p:nvPr/>
-        </p:nvSpPr>
-        <p:spPr>
-          <a:xfrm>
-            <a:off x="6324447" y="5742431"/>
-            <a:ext cx="5181447" cy="192024"/>
-          </a:xfrm>
-          <a:prstGeom prst="rect">
-            <a:avLst/>
-          </a:prstGeom>
-          <a:noFill/>
-        </p:spPr>
-        <p:txBody>
-          <a:bodyPr wrap="square" lIns="0" rIns="0" tIns="0" bIns="0" anchor="t">
-            <a:spAutoFit/>
-          </a:bodyPr>
-          <a:lstStyle/>
-          <a:p>
-            <a:pPr algn="l">
-              <a:spcAft>
-                <a:spcPts val="600"/>
-              </a:spcAft>
-            </a:pPr>
-            <a:r>
-              <a:rPr sz="1650" b="1" i="0">
-                <a:solidFill>
-                  <a:srgbClr val="E4572E"/>
-                </a:solidFill>
-                <a:latin typeface="Calibri"/>
-              </a:rPr>
-              <a:t>Association vs cause</a:t>
-            </a:r>
-          </a:p>
-        </p:txBody>
-      </p:sp>
-      <p:sp>
-        <p:nvSpPr>
-          <p:cNvPr id="39" name="TextBox 38"/>
-          <p:cNvSpPr txBox="1"/>
-          <p:nvPr/>
-        </p:nvSpPr>
-        <p:spPr>
-          <a:xfrm>
-            <a:off x="6324447" y="5926775"/>
-            <a:ext cx="5181447" cy="224028"/>
-          </a:xfrm>
-          <a:prstGeom prst="rect">
-            <a:avLst/>
-          </a:prstGeom>
-          <a:noFill/>
-        </p:spPr>
-        <p:txBody>
-          <a:bodyPr wrap="square" lIns="0" rIns="0" tIns="0" bIns="0" anchor="t">
-            <a:spAutoFit/>
-          </a:bodyPr>
-          <a:lstStyle/>
-          <a:p>
-            <a:pPr algn="l">
-              <a:lnSpc>
-                <a:spcPct val="112000"/>
-              </a:lnSpc>
-              <a:spcAft>
-                <a:spcPts val="600"/>
-              </a:spcAft>
-            </a:pPr>
-            <a:r>
-              <a:rPr sz="1452" b="0" i="0">
-                <a:solidFill>
-                  <a:srgbClr val="334657"/>
-                </a:solidFill>
-                <a:latin typeface="Calibri"/>
-              </a:rPr>
-              <a:t>A model learns which columns move together. It knows nothing about mechanism.</a:t>
             </a:r>
           </a:p>
         </p:txBody>
@@ -26558,7 +30891,7 @@
                 </a:solidFill>
                 <a:latin typeface="Calibri"/>
               </a:rPr>
-              <a:t>CHEAT SHEET — KEEP THIS SLIDE</a:t>
+              <a:t>GLOSSARY</a:t>
             </a:r>
           </a:p>
         </p:txBody>
@@ -26600,7 +30933,7 @@
                 </a:solidFill>
                 <a:latin typeface="Cambria"/>
               </a:rPr>
-              <a:t>Eight questions to ask about any data problem</a:t>
+              <a:t>Every word we used today (2 of 3)</a:t>
             </a:r>
           </a:p>
         </p:txBody>
@@ -26614,7 +30947,7 @@
         <p:spPr>
           <a:xfrm>
             <a:off x="685800" y="1911095"/>
-            <a:ext cx="5158587" cy="378705"/>
+            <a:ext cx="5181447" cy="367213"/>
           </a:xfrm>
           <a:prstGeom prst="rect">
             <a:avLst/>
@@ -26629,20 +30962,20 @@
           <a:p>
             <a:pPr algn="l">
               <a:lnSpc>
-                <a:spcPct val="124000"/>
+                <a:spcPct val="115000"/>
               </a:lnSpc>
               <a:spcAft>
                 <a:spcPts val="600"/>
               </a:spcAft>
             </a:pPr>
             <a:r>
-              <a:rPr sz="1650" b="1" i="0">
+              <a:rPr sz="1716" b="1" i="0">
                 <a:solidFill>
                   <a:srgbClr val="E4572E"/>
                 </a:solidFill>
                 <a:latin typeface="Calibri"/>
               </a:rPr>
-              <a:t>1 · What exactly am I predicting?</a:t>
+              <a:t>Regression</a:t>
             </a:r>
           </a:p>
         </p:txBody>
@@ -26655,8 +30988,8 @@
         </p:nvSpPr>
         <p:spPr>
           <a:xfrm>
-            <a:off x="685800" y="2298945"/>
-            <a:ext cx="5158587" cy="598917"/>
+            <a:off x="685800" y="2278309"/>
+            <a:ext cx="5181447" cy="387284"/>
           </a:xfrm>
           <a:prstGeom prst="rect">
             <a:avLst/>
@@ -26671,20 +31004,20 @@
           <a:p>
             <a:pPr algn="l">
               <a:lnSpc>
-                <a:spcPct val="124000"/>
+                <a:spcPct val="118000"/>
               </a:lnSpc>
               <a:spcAft>
                 <a:spcPts val="600"/>
               </a:spcAft>
             </a:pPr>
             <a:r>
-              <a:rPr sz="1386" b="0" i="0">
-                <a:solidFill>
-                  <a:srgbClr val="334657"/>
-                </a:solidFill>
-                <a:latin typeface="Calibri"/>
-              </a:rPr>
-              <a:t>Name the target column and its unit. If you cannot, you do not have a problem yet.</a:t>
+              <a:rPr sz="1584" b="0" i="0">
+                <a:solidFill>
+                  <a:srgbClr val="1C3144"/>
+                </a:solidFill>
+                <a:latin typeface="Calibri"/>
+              </a:rPr>
+              <a:t>Predicting a number on a continuous scale.</a:t>
             </a:r>
           </a:p>
         </p:txBody>
@@ -26697,8 +31030,8 @@
         </p:nvSpPr>
         <p:spPr>
           <a:xfrm>
-            <a:off x="685800" y="3126462"/>
-            <a:ext cx="5158587" cy="378705"/>
+            <a:off x="685800" y="2793610"/>
+            <a:ext cx="5181447" cy="367213"/>
           </a:xfrm>
           <a:prstGeom prst="rect">
             <a:avLst/>
@@ -26713,20 +31046,20 @@
           <a:p>
             <a:pPr algn="l">
               <a:lnSpc>
-                <a:spcPct val="124000"/>
+                <a:spcPct val="115000"/>
               </a:lnSpc>
               <a:spcAft>
                 <a:spcPts val="600"/>
               </a:spcAft>
             </a:pPr>
             <a:r>
-              <a:rPr sz="1650" b="1" i="0">
+              <a:rPr sz="1716" b="1" i="0">
                 <a:solidFill>
                   <a:srgbClr val="E4572E"/>
                 </a:solidFill>
                 <a:latin typeface="Calibri"/>
               </a:rPr>
-              <a:t>2 · Is it a number or a category?</a:t>
+              <a:t>Classification</a:t>
             </a:r>
           </a:p>
         </p:txBody>
@@ -26739,8 +31072,8 @@
         </p:nvSpPr>
         <p:spPr>
           <a:xfrm>
-            <a:off x="685800" y="3514311"/>
-            <a:ext cx="5158587" cy="598917"/>
+            <a:off x="685800" y="3160824"/>
+            <a:ext cx="5181447" cy="683129"/>
           </a:xfrm>
           <a:prstGeom prst="rect">
             <a:avLst/>
@@ -26755,20 +31088,20 @@
           <a:p>
             <a:pPr algn="l">
               <a:lnSpc>
-                <a:spcPct val="124000"/>
+                <a:spcPct val="118000"/>
               </a:lnSpc>
               <a:spcAft>
                 <a:spcPts val="600"/>
               </a:spcAft>
             </a:pPr>
             <a:r>
-              <a:rPr sz="1386" b="0" i="0">
-                <a:solidFill>
-                  <a:srgbClr val="334657"/>
-                </a:solidFill>
-                <a:latin typeface="Calibri"/>
-              </a:rPr>
-              <a:t>What would the answer look like written down? A quantity with a unit means regression; a word means classification.</a:t>
+              <a:rPr sz="1584" b="0" i="0">
+                <a:solidFill>
+                  <a:srgbClr val="1C3144"/>
+                </a:solidFill>
+                <a:latin typeface="Calibri"/>
+              </a:rPr>
+              <a:t>Predicting which of a small set of categories a case belongs to.</a:t>
             </a:r>
           </a:p>
         </p:txBody>
@@ -26781,8 +31114,8 @@
         </p:nvSpPr>
         <p:spPr>
           <a:xfrm>
-            <a:off x="685800" y="4341828"/>
-            <a:ext cx="5158587" cy="378705"/>
+            <a:off x="685800" y="3971969"/>
+            <a:ext cx="5181447" cy="367213"/>
           </a:xfrm>
           <a:prstGeom prst="rect">
             <a:avLst/>
@@ -26797,20 +31130,20 @@
           <a:p>
             <a:pPr algn="l">
               <a:lnSpc>
-                <a:spcPct val="124000"/>
+                <a:spcPct val="115000"/>
               </a:lnSpc>
               <a:spcAft>
                 <a:spcPts val="600"/>
               </a:spcAft>
             </a:pPr>
             <a:r>
-              <a:rPr sz="1650" b="1" i="0">
+              <a:rPr sz="1716" b="1" i="0">
                 <a:solidFill>
                   <a:srgbClr val="E4572E"/>
                 </a:solidFill>
                 <a:latin typeface="Calibri"/>
               </a:rPr>
-              <a:t>3 · What do I know beforehand?</a:t>
+              <a:t>Binary classification</a:t>
             </a:r>
           </a:p>
         </p:txBody>
@@ -26823,8 +31156,8 @@
         </p:nvSpPr>
         <p:spPr>
           <a:xfrm>
-            <a:off x="685800" y="4729677"/>
-            <a:ext cx="5158587" cy="598917"/>
+            <a:off x="685800" y="4339183"/>
+            <a:ext cx="5181447" cy="683129"/>
           </a:xfrm>
           <a:prstGeom prst="rect">
             <a:avLst/>
@@ -26839,20 +31172,20 @@
           <a:p>
             <a:pPr algn="l">
               <a:lnSpc>
-                <a:spcPct val="124000"/>
+                <a:spcPct val="118000"/>
               </a:lnSpc>
               <a:spcAft>
                 <a:spcPts val="600"/>
               </a:spcAft>
             </a:pPr>
             <a:r>
-              <a:rPr sz="1386" b="0" i="0">
-                <a:solidFill>
-                  <a:srgbClr val="334657"/>
-                </a:solidFill>
-                <a:latin typeface="Calibri"/>
-              </a:rPr>
-              <a:t>List the features. Check every one: would I really have this before the outcome?</a:t>
+              <a:rPr sz="1584" b="0" i="0">
+                <a:solidFill>
+                  <a:srgbClr val="1C3144"/>
+                </a:solidFill>
+                <a:latin typeface="Calibri"/>
+              </a:rPr>
+              <a:t>Classification with exactly two categories, such as pass or fail.</a:t>
             </a:r>
           </a:p>
         </p:txBody>
@@ -26865,8 +31198,8 @@
         </p:nvSpPr>
         <p:spPr>
           <a:xfrm>
-            <a:off x="685800" y="5557194"/>
-            <a:ext cx="5158587" cy="378705"/>
+            <a:off x="685800" y="5150328"/>
+            <a:ext cx="5181447" cy="367213"/>
           </a:xfrm>
           <a:prstGeom prst="rect">
             <a:avLst/>
@@ -26881,20 +31214,20 @@
           <a:p>
             <a:pPr algn="l">
               <a:lnSpc>
-                <a:spcPct val="124000"/>
+                <a:spcPct val="115000"/>
               </a:lnSpc>
               <a:spcAft>
                 <a:spcPts val="600"/>
               </a:spcAft>
             </a:pPr>
             <a:r>
-              <a:rPr sz="1650" b="1" i="0">
+              <a:rPr sz="1716" b="1" i="0">
                 <a:solidFill>
                   <a:srgbClr val="E4572E"/>
                 </a:solidFill>
                 <a:latin typeface="Calibri"/>
               </a:rPr>
-              <a:t>4 · Where does the data come from?</a:t>
+              <a:t>Multi-class classification</a:t>
             </a:r>
           </a:p>
         </p:txBody>
@@ -26907,8 +31240,8 @@
         </p:nvSpPr>
         <p:spPr>
           <a:xfrm>
-            <a:off x="685800" y="5945043"/>
-            <a:ext cx="5158587" cy="598917"/>
+            <a:off x="685800" y="5517542"/>
+            <a:ext cx="5181447" cy="387284"/>
           </a:xfrm>
           <a:prstGeom prst="rect">
             <a:avLst/>
@@ -26923,20 +31256,20 @@
           <a:p>
             <a:pPr algn="l">
               <a:lnSpc>
-                <a:spcPct val="124000"/>
+                <a:spcPct val="118000"/>
               </a:lnSpc>
               <a:spcAft>
                 <a:spcPts val="600"/>
               </a:spcAft>
             </a:pPr>
             <a:r>
-              <a:rPr sz="1386" b="0" i="0">
-                <a:solidFill>
-                  <a:srgbClr val="334657"/>
-                </a:solidFill>
-                <a:latin typeface="Calibri"/>
-              </a:rPr>
-              <a:t>Who measured it, how often, over what period, and is it actually kept anywhere?</a:t>
+              <a:rPr sz="1584" b="0" i="0">
+                <a:solidFill>
+                  <a:srgbClr val="1C3144"/>
+                </a:solidFill>
+                <a:latin typeface="Calibri"/>
+              </a:rPr>
+              <a:t>Classification with three or more categories.</a:t>
             </a:r>
           </a:p>
         </p:txBody>
@@ -26949,8 +31282,8 @@
         </p:nvSpPr>
         <p:spPr>
           <a:xfrm>
-            <a:off x="6347307" y="1911095"/>
-            <a:ext cx="5158587" cy="378705"/>
+            <a:off x="6324447" y="1911095"/>
+            <a:ext cx="5181447" cy="367213"/>
           </a:xfrm>
           <a:prstGeom prst="rect">
             <a:avLst/>
@@ -26965,20 +31298,20 @@
           <a:p>
             <a:pPr algn="l">
               <a:lnSpc>
-                <a:spcPct val="124000"/>
+                <a:spcPct val="115000"/>
               </a:lnSpc>
               <a:spcAft>
                 <a:spcPts val="600"/>
               </a:spcAft>
             </a:pPr>
             <a:r>
-              <a:rPr sz="1650" b="1" i="0">
+              <a:rPr sz="1716" b="1" i="0">
                 <a:solidFill>
                   <a:srgbClr val="E4572E"/>
                 </a:solidFill>
                 <a:latin typeface="Calibri"/>
               </a:rPr>
-              <a:t>5 · Would a rule or an equation do this better?</a:t>
+              <a:t>Prediction</a:t>
             </a:r>
           </a:p>
         </p:txBody>
@@ -26991,8 +31324,8 @@
         </p:nvSpPr>
         <p:spPr>
           <a:xfrm>
-            <a:off x="6347307" y="2298945"/>
-            <a:ext cx="5158587" cy="598917"/>
+            <a:off x="6324447" y="2278309"/>
+            <a:ext cx="5181447" cy="387284"/>
           </a:xfrm>
           <a:prstGeom prst="rect">
             <a:avLst/>
@@ -27007,20 +31340,20 @@
           <a:p>
             <a:pPr algn="l">
               <a:lnSpc>
-                <a:spcPct val="124000"/>
+                <a:spcPct val="118000"/>
               </a:lnSpc>
               <a:spcAft>
                 <a:spcPts val="600"/>
               </a:spcAft>
             </a:pPr>
             <a:r>
-              <a:rPr sz="1386" b="0" i="0">
-                <a:solidFill>
-                  <a:srgbClr val="334657"/>
-                </a:solidFill>
-                <a:latin typeface="Calibri"/>
-              </a:rPr>
-              <a:t>If a code of practice or a validated formula answers it, use that instead.</a:t>
+              <a:rPr sz="1584" b="0" i="0">
+                <a:solidFill>
+                  <a:srgbClr val="1C3144"/>
+                </a:solidFill>
+                <a:latin typeface="Calibri"/>
+              </a:rPr>
+              <a:t>The model's answer for a case.</a:t>
             </a:r>
           </a:p>
         </p:txBody>
@@ -27033,8 +31366,8 @@
         </p:nvSpPr>
         <p:spPr>
           <a:xfrm>
-            <a:off x="6347307" y="3126462"/>
-            <a:ext cx="5158587" cy="378705"/>
+            <a:off x="6324447" y="2793610"/>
+            <a:ext cx="5181447" cy="367213"/>
           </a:xfrm>
           <a:prstGeom prst="rect">
             <a:avLst/>
@@ -27049,20 +31382,20 @@
           <a:p>
             <a:pPr algn="l">
               <a:lnSpc>
-                <a:spcPct val="124000"/>
+                <a:spcPct val="115000"/>
               </a:lnSpc>
               <a:spcAft>
                 <a:spcPts val="600"/>
               </a:spcAft>
             </a:pPr>
             <a:r>
-              <a:rPr sz="1650" b="1" i="0">
+              <a:rPr sz="1716" b="1" i="0">
                 <a:solidFill>
                   <a:srgbClr val="E4572E"/>
                 </a:solidFill>
                 <a:latin typeface="Calibri"/>
               </a:rPr>
-              <a:t>6 · How will I know if I am wrong?</a:t>
+              <a:t>Error</a:t>
             </a:r>
           </a:p>
         </p:txBody>
@@ -27075,8 +31408,8 @@
         </p:nvSpPr>
         <p:spPr>
           <a:xfrm>
-            <a:off x="6347307" y="3514311"/>
-            <a:ext cx="5158587" cy="598917"/>
+            <a:off x="6324447" y="3160824"/>
+            <a:ext cx="5181447" cy="683129"/>
           </a:xfrm>
           <a:prstGeom prst="rect">
             <a:avLst/>
@@ -27091,20 +31424,20 @@
           <a:p>
             <a:pPr algn="l">
               <a:lnSpc>
-                <a:spcPct val="124000"/>
+                <a:spcPct val="118000"/>
               </a:lnSpc>
               <a:spcAft>
                 <a:spcPts val="600"/>
               </a:spcAft>
             </a:pPr>
             <a:r>
-              <a:rPr sz="1386" b="0" i="0">
-                <a:solidFill>
-                  <a:srgbClr val="334657"/>
-                </a:solidFill>
-                <a:latin typeface="Calibri"/>
-              </a:rPr>
-              <a:t>You need cases the model has never seen. Decide now how you will hold some back.</a:t>
+              <a:rPr sz="1584" b="0" i="0">
+                <a:solidFill>
+                  <a:srgbClr val="1C3144"/>
+                </a:solidFill>
+                <a:latin typeface="Calibri"/>
+              </a:rPr>
+              <a:t>The distance between the prediction and the truth. Measuring it honestly is most of this course.</a:t>
             </a:r>
           </a:p>
         </p:txBody>
@@ -27117,8 +31450,8 @@
         </p:nvSpPr>
         <p:spPr>
           <a:xfrm>
-            <a:off x="6347307" y="4341828"/>
-            <a:ext cx="5158587" cy="378705"/>
+            <a:off x="6324447" y="3971969"/>
+            <a:ext cx="5181447" cy="367213"/>
           </a:xfrm>
           <a:prstGeom prst="rect">
             <a:avLst/>
@@ -27133,20 +31466,20 @@
           <a:p>
             <a:pPr algn="l">
               <a:lnSpc>
-                <a:spcPct val="124000"/>
+                <a:spcPct val="115000"/>
               </a:lnSpc>
               <a:spcAft>
                 <a:spcPts val="600"/>
               </a:spcAft>
             </a:pPr>
             <a:r>
-              <a:rPr sz="1650" b="1" i="0">
+              <a:rPr sz="1716" b="1" i="0">
                 <a:solidFill>
                   <a:srgbClr val="E4572E"/>
                 </a:solidFill>
                 <a:latin typeface="Calibri"/>
               </a:rPr>
-              <a:t>7 · What does being wrong cost?</a:t>
+              <a:t>Unseen data</a:t>
             </a:r>
           </a:p>
         </p:txBody>
@@ -27159,8 +31492,8 @@
         </p:nvSpPr>
         <p:spPr>
           <a:xfrm>
-            <a:off x="6347307" y="4729677"/>
-            <a:ext cx="5158587" cy="598917"/>
+            <a:off x="6324447" y="4339183"/>
+            <a:ext cx="5181447" cy="683129"/>
           </a:xfrm>
           <a:prstGeom prst="rect">
             <a:avLst/>
@@ -27175,104 +31508,20 @@
           <a:p>
             <a:pPr algn="l">
               <a:lnSpc>
-                <a:spcPct val="124000"/>
+                <a:spcPct val="118000"/>
               </a:lnSpc>
               <a:spcAft>
                 <a:spcPts val="600"/>
               </a:spcAft>
             </a:pPr>
             <a:r>
-              <a:rPr sz="1386" b="0" i="0">
-                <a:solidFill>
-                  <a:srgbClr val="334657"/>
-                </a:solidFill>
-                <a:latin typeface="Calibri"/>
-              </a:rPr>
-              <a:t>A false alarm and a missed failure are not equally bad. That asymmetry decides which model you pick.</a:t>
-            </a:r>
-          </a:p>
-        </p:txBody>
-      </p:sp>
-      <p:sp>
-        <p:nvSpPr>
-          <p:cNvPr id="18" name="TextBox 17"/>
-          <p:cNvSpPr txBox="1"/>
-          <p:nvPr/>
-        </p:nvSpPr>
-        <p:spPr>
-          <a:xfrm>
-            <a:off x="6347307" y="5557194"/>
-            <a:ext cx="5158587" cy="378705"/>
-          </a:xfrm>
-          <a:prstGeom prst="rect">
-            <a:avLst/>
-          </a:prstGeom>
-          <a:noFill/>
-        </p:spPr>
-        <p:txBody>
-          <a:bodyPr wrap="square" lIns="0" rIns="0" tIns="0" bIns="0" anchor="t">
-            <a:spAutoFit/>
-          </a:bodyPr>
-          <a:lstStyle/>
-          <a:p>
-            <a:pPr algn="l">
-              <a:lnSpc>
-                <a:spcPct val="124000"/>
-              </a:lnSpc>
-              <a:spcAft>
-                <a:spcPts val="600"/>
-              </a:spcAft>
-            </a:pPr>
-            <a:r>
-              <a:rPr sz="1650" b="1" i="0">
-                <a:solidFill>
-                  <a:srgbClr val="E4572E"/>
-                </a:solidFill>
-                <a:latin typeface="Calibri"/>
-              </a:rPr>
-              <a:t>8 · Do today's conditions still resemble the data?</a:t>
-            </a:r>
-          </a:p>
-        </p:txBody>
-      </p:sp>
-      <p:sp>
-        <p:nvSpPr>
-          <p:cNvPr id="19" name="TextBox 18"/>
-          <p:cNvSpPr txBox="1"/>
-          <p:nvPr/>
-        </p:nvSpPr>
-        <p:spPr>
-          <a:xfrm>
-            <a:off x="6347307" y="5945043"/>
-            <a:ext cx="5158587" cy="598917"/>
-          </a:xfrm>
-          <a:prstGeom prst="rect">
-            <a:avLst/>
-          </a:prstGeom>
-          <a:noFill/>
-        </p:spPr>
-        <p:txBody>
-          <a:bodyPr wrap="square" lIns="0" rIns="0" tIns="0" bIns="0" anchor="t">
-            <a:spAutoFit/>
-          </a:bodyPr>
-          <a:lstStyle/>
-          <a:p>
-            <a:pPr algn="l">
-              <a:lnSpc>
-                <a:spcPct val="124000"/>
-              </a:lnSpc>
-              <a:spcAft>
-                <a:spcPts val="600"/>
-              </a:spcAft>
-            </a:pPr>
-            <a:r>
-              <a:rPr sz="1386" b="0" i="0">
-                <a:solidFill>
-                  <a:srgbClr val="334657"/>
-                </a:solidFill>
-                <a:latin typeface="Calibri"/>
-              </a:rPr>
-              <a:t>If the process, material or plant has changed, the model may be quietly obsolete.</a:t>
+              <a:rPr sz="1584" b="0" i="0">
+                <a:solidFill>
+                  <a:srgbClr val="1C3144"/>
+                </a:solidFill>
+                <a:latin typeface="Calibri"/>
+              </a:rPr>
+              <a:t>Cases the model was not shown while it was learning. The only fair test.</a:t>
             </a:r>
           </a:p>
         </p:txBody>
@@ -27297,6 +31546,1128 @@
       <p:grpSpPr/>
       <p:sp>
         <p:nvSpPr>
+          <p:cNvPr id="2" name="TextBox 1"/>
+          <p:cNvSpPr txBox="1"/>
+          <p:nvPr/>
+        </p:nvSpPr>
+        <p:spPr>
+          <a:xfrm>
+            <a:off x="685800" y="566928"/>
+            <a:ext cx="10820095" cy="292608"/>
+          </a:xfrm>
+          <a:prstGeom prst="rect">
+            <a:avLst/>
+          </a:prstGeom>
+          <a:noFill/>
+        </p:spPr>
+        <p:txBody>
+          <a:bodyPr wrap="square" lIns="0" rIns="0" tIns="0" bIns="0" anchor="t">
+            <a:spAutoFit/>
+          </a:bodyPr>
+          <a:lstStyle/>
+          <a:p>
+            <a:pPr algn="l">
+              <a:spcAft>
+                <a:spcPts val="600"/>
+              </a:spcAft>
+            </a:pPr>
+            <a:r>
+              <a:rPr sz="1584" b="1" i="0">
+                <a:solidFill>
+                  <a:srgbClr val="E4572E"/>
+                </a:solidFill>
+                <a:latin typeface="Calibri"/>
+              </a:rPr>
+              <a:t>GLOSSARY</a:t>
+            </a:r>
+          </a:p>
+        </p:txBody>
+      </p:sp>
+      <p:sp>
+        <p:nvSpPr>
+          <p:cNvPr id="3" name="TextBox 2"/>
+          <p:cNvSpPr txBox="1"/>
+          <p:nvPr/>
+        </p:nvSpPr>
+        <p:spPr>
+          <a:xfrm>
+            <a:off x="685800" y="950976"/>
+            <a:ext cx="10820095" cy="777240"/>
+          </a:xfrm>
+          <a:prstGeom prst="rect">
+            <a:avLst/>
+          </a:prstGeom>
+          <a:noFill/>
+        </p:spPr>
+        <p:txBody>
+          <a:bodyPr wrap="square" lIns="0" rIns="0" tIns="0" bIns="0" anchor="t">
+            <a:spAutoFit/>
+          </a:bodyPr>
+          <a:lstStyle/>
+          <a:p>
+            <a:pPr algn="l">
+              <a:lnSpc>
+                <a:spcPct val="100000"/>
+              </a:lnSpc>
+              <a:spcAft>
+                <a:spcPts val="600"/>
+              </a:spcAft>
+            </a:pPr>
+            <a:r>
+              <a:rPr sz="3200" b="1" i="0">
+                <a:solidFill>
+                  <a:srgbClr val="1C3144"/>
+                </a:solidFill>
+                <a:latin typeface="Cambria"/>
+              </a:rPr>
+              <a:t>Every word we used today (3 of 3)</a:t>
+            </a:r>
+          </a:p>
+        </p:txBody>
+      </p:sp>
+      <p:sp>
+        <p:nvSpPr>
+          <p:cNvPr id="4" name="TextBox 3"/>
+          <p:cNvSpPr txBox="1"/>
+          <p:nvPr/>
+        </p:nvSpPr>
+        <p:spPr>
+          <a:xfrm>
+            <a:off x="685800" y="1911095"/>
+            <a:ext cx="5181447" cy="367213"/>
+          </a:xfrm>
+          <a:prstGeom prst="rect">
+            <a:avLst/>
+          </a:prstGeom>
+          <a:noFill/>
+        </p:spPr>
+        <p:txBody>
+          <a:bodyPr wrap="square" lIns="0" rIns="0" tIns="0" bIns="0" anchor="t">
+            <a:spAutoFit/>
+          </a:bodyPr>
+          <a:lstStyle/>
+          <a:p>
+            <a:pPr algn="l">
+              <a:lnSpc>
+                <a:spcPct val="115000"/>
+              </a:lnSpc>
+              <a:spcAft>
+                <a:spcPts val="600"/>
+              </a:spcAft>
+            </a:pPr>
+            <a:r>
+              <a:rPr sz="1716" b="1" i="0">
+                <a:solidFill>
+                  <a:srgbClr val="E4572E"/>
+                </a:solidFill>
+                <a:latin typeface="Calibri"/>
+              </a:rPr>
+              <a:t>Data leakage</a:t>
+            </a:r>
+          </a:p>
+        </p:txBody>
+      </p:sp>
+      <p:sp>
+        <p:nvSpPr>
+          <p:cNvPr id="5" name="TextBox 4"/>
+          <p:cNvSpPr txBox="1"/>
+          <p:nvPr/>
+        </p:nvSpPr>
+        <p:spPr>
+          <a:xfrm>
+            <a:off x="685800" y="2278309"/>
+            <a:ext cx="5181447" cy="978973"/>
+          </a:xfrm>
+          <a:prstGeom prst="rect">
+            <a:avLst/>
+          </a:prstGeom>
+          <a:noFill/>
+        </p:spPr>
+        <p:txBody>
+          <a:bodyPr wrap="square" lIns="0" rIns="0" tIns="0" bIns="0" anchor="t">
+            <a:spAutoFit/>
+          </a:bodyPr>
+          <a:lstStyle/>
+          <a:p>
+            <a:pPr algn="l">
+              <a:lnSpc>
+                <a:spcPct val="118000"/>
+              </a:lnSpc>
+              <a:spcAft>
+                <a:spcPts val="600"/>
+              </a:spcAft>
+            </a:pPr>
+            <a:r>
+              <a:rPr sz="1584" b="0" i="0">
+                <a:solidFill>
+                  <a:srgbClr val="1C3144"/>
+                </a:solidFill>
+                <a:latin typeface="Calibri"/>
+              </a:rPr>
+              <a:t>Accidentally giving the model information it would not have in real use — usually something only known after the outcome. Week 10.</a:t>
+            </a:r>
+          </a:p>
+        </p:txBody>
+      </p:sp>
+      <p:sp>
+        <p:nvSpPr>
+          <p:cNvPr id="6" name="TextBox 5"/>
+          <p:cNvSpPr txBox="1"/>
+          <p:nvPr/>
+        </p:nvSpPr>
+        <p:spPr>
+          <a:xfrm>
+            <a:off x="685800" y="3385299"/>
+            <a:ext cx="5181447" cy="367213"/>
+          </a:xfrm>
+          <a:prstGeom prst="rect">
+            <a:avLst/>
+          </a:prstGeom>
+          <a:noFill/>
+        </p:spPr>
+        <p:txBody>
+          <a:bodyPr wrap="square" lIns="0" rIns="0" tIns="0" bIns="0" anchor="t">
+            <a:spAutoFit/>
+          </a:bodyPr>
+          <a:lstStyle/>
+          <a:p>
+            <a:pPr algn="l">
+              <a:lnSpc>
+                <a:spcPct val="115000"/>
+              </a:lnSpc>
+              <a:spcAft>
+                <a:spcPts val="600"/>
+              </a:spcAft>
+            </a:pPr>
+            <a:r>
+              <a:rPr sz="1716" b="1" i="0">
+                <a:solidFill>
+                  <a:srgbClr val="E4572E"/>
+                </a:solidFill>
+                <a:latin typeface="Calibri"/>
+              </a:rPr>
+              <a:t>Generalisation</a:t>
+            </a:r>
+          </a:p>
+        </p:txBody>
+      </p:sp>
+      <p:sp>
+        <p:nvSpPr>
+          <p:cNvPr id="7" name="TextBox 6"/>
+          <p:cNvSpPr txBox="1"/>
+          <p:nvPr/>
+        </p:nvSpPr>
+        <p:spPr>
+          <a:xfrm>
+            <a:off x="685800" y="3752513"/>
+            <a:ext cx="5181447" cy="683129"/>
+          </a:xfrm>
+          <a:prstGeom prst="rect">
+            <a:avLst/>
+          </a:prstGeom>
+          <a:noFill/>
+        </p:spPr>
+        <p:txBody>
+          <a:bodyPr wrap="square" lIns="0" rIns="0" tIns="0" bIns="0" anchor="t">
+            <a:spAutoFit/>
+          </a:bodyPr>
+          <a:lstStyle/>
+          <a:p>
+            <a:pPr algn="l">
+              <a:lnSpc>
+                <a:spcPct val="118000"/>
+              </a:lnSpc>
+              <a:spcAft>
+                <a:spcPts val="600"/>
+              </a:spcAft>
+            </a:pPr>
+            <a:r>
+              <a:rPr sz="1584" b="0" i="0">
+                <a:solidFill>
+                  <a:srgbClr val="1C3144"/>
+                </a:solidFill>
+                <a:latin typeface="Calibri"/>
+              </a:rPr>
+              <a:t>Whether a rule learned from past cases still works on new ones.</a:t>
+            </a:r>
+          </a:p>
+        </p:txBody>
+      </p:sp>
+      <p:sp>
+        <p:nvSpPr>
+          <p:cNvPr id="8" name="TextBox 7"/>
+          <p:cNvSpPr txBox="1"/>
+          <p:nvPr/>
+        </p:nvSpPr>
+        <p:spPr>
+          <a:xfrm>
+            <a:off x="685800" y="4563658"/>
+            <a:ext cx="5181447" cy="367213"/>
+          </a:xfrm>
+          <a:prstGeom prst="rect">
+            <a:avLst/>
+          </a:prstGeom>
+          <a:noFill/>
+        </p:spPr>
+        <p:txBody>
+          <a:bodyPr wrap="square" lIns="0" rIns="0" tIns="0" bIns="0" anchor="t">
+            <a:spAutoFit/>
+          </a:bodyPr>
+          <a:lstStyle/>
+          <a:p>
+            <a:pPr algn="l">
+              <a:lnSpc>
+                <a:spcPct val="115000"/>
+              </a:lnSpc>
+              <a:spcAft>
+                <a:spcPts val="600"/>
+              </a:spcAft>
+            </a:pPr>
+            <a:r>
+              <a:rPr sz="1716" b="1" i="0">
+                <a:solidFill>
+                  <a:srgbClr val="E4572E"/>
+                </a:solidFill>
+                <a:latin typeface="Calibri"/>
+              </a:rPr>
+              <a:t>Association vs cause</a:t>
+            </a:r>
+          </a:p>
+        </p:txBody>
+      </p:sp>
+      <p:sp>
+        <p:nvSpPr>
+          <p:cNvPr id="9" name="TextBox 8"/>
+          <p:cNvSpPr txBox="1"/>
+          <p:nvPr/>
+        </p:nvSpPr>
+        <p:spPr>
+          <a:xfrm>
+            <a:off x="685800" y="4930872"/>
+            <a:ext cx="5181447" cy="683129"/>
+          </a:xfrm>
+          <a:prstGeom prst="rect">
+            <a:avLst/>
+          </a:prstGeom>
+          <a:noFill/>
+        </p:spPr>
+        <p:txBody>
+          <a:bodyPr wrap="square" lIns="0" rIns="0" tIns="0" bIns="0" anchor="t">
+            <a:spAutoFit/>
+          </a:bodyPr>
+          <a:lstStyle/>
+          <a:p>
+            <a:pPr algn="l">
+              <a:lnSpc>
+                <a:spcPct val="118000"/>
+              </a:lnSpc>
+              <a:spcAft>
+                <a:spcPts val="600"/>
+              </a:spcAft>
+            </a:pPr>
+            <a:r>
+              <a:rPr sz="1584" b="0" i="0">
+                <a:solidFill>
+                  <a:srgbClr val="1C3144"/>
+                </a:solidFill>
+                <a:latin typeface="Calibri"/>
+              </a:rPr>
+              <a:t>A model learns which columns move together. It knows nothing about mechanism.</a:t>
+            </a:r>
+          </a:p>
+        </p:txBody>
+      </p:sp>
+    </p:spTree>
+  </p:cSld>
+  <p:clrMapOvr>
+    <a:masterClrMapping/>
+  </p:clrMapOvr>
+</p:sld>
+</file>
+
+<file path=ppt/slides/slide55.xml><?xml version="1.0" encoding="utf-8"?>
+<p:sld xmlns:a="http://schemas.openxmlformats.org/drawingml/2006/main" xmlns:p="http://schemas.openxmlformats.org/presentationml/2006/main" xmlns:r="http://schemas.openxmlformats.org/officeDocument/2006/relationships">
+  <p:cSld>
+    <p:spTree>
+      <p:nvGrpSpPr>
+        <p:cNvPr id="1" name=""/>
+        <p:cNvGrpSpPr/>
+        <p:nvPr/>
+      </p:nvGrpSpPr>
+      <p:grpSpPr/>
+      <p:sp>
+        <p:nvSpPr>
+          <p:cNvPr id="2" name="TextBox 1"/>
+          <p:cNvSpPr txBox="1"/>
+          <p:nvPr/>
+        </p:nvSpPr>
+        <p:spPr>
+          <a:xfrm>
+            <a:off x="685800" y="566928"/>
+            <a:ext cx="10820095" cy="292608"/>
+          </a:xfrm>
+          <a:prstGeom prst="rect">
+            <a:avLst/>
+          </a:prstGeom>
+          <a:noFill/>
+        </p:spPr>
+        <p:txBody>
+          <a:bodyPr wrap="square" lIns="0" rIns="0" tIns="0" bIns="0" anchor="t">
+            <a:spAutoFit/>
+          </a:bodyPr>
+          <a:lstStyle/>
+          <a:p>
+            <a:pPr algn="l">
+              <a:spcAft>
+                <a:spcPts val="600"/>
+              </a:spcAft>
+            </a:pPr>
+            <a:r>
+              <a:rPr sz="1584" b="1" i="0">
+                <a:solidFill>
+                  <a:srgbClr val="E4572E"/>
+                </a:solidFill>
+                <a:latin typeface="Calibri"/>
+              </a:rPr>
+              <a:t>CHEAT SHEET — KEEP THIS SLIDE</a:t>
+            </a:r>
+          </a:p>
+        </p:txBody>
+      </p:sp>
+      <p:sp>
+        <p:nvSpPr>
+          <p:cNvPr id="3" name="TextBox 2"/>
+          <p:cNvSpPr txBox="1"/>
+          <p:nvPr/>
+        </p:nvSpPr>
+        <p:spPr>
+          <a:xfrm>
+            <a:off x="685800" y="950976"/>
+            <a:ext cx="10820095" cy="777240"/>
+          </a:xfrm>
+          <a:prstGeom prst="rect">
+            <a:avLst/>
+          </a:prstGeom>
+          <a:noFill/>
+        </p:spPr>
+        <p:txBody>
+          <a:bodyPr wrap="square" lIns="0" rIns="0" tIns="0" bIns="0" anchor="t">
+            <a:spAutoFit/>
+          </a:bodyPr>
+          <a:lstStyle/>
+          <a:p>
+            <a:pPr algn="l">
+              <a:lnSpc>
+                <a:spcPct val="100000"/>
+              </a:lnSpc>
+              <a:spcAft>
+                <a:spcPts val="600"/>
+              </a:spcAft>
+            </a:pPr>
+            <a:r>
+              <a:rPr sz="3200" b="1" i="0">
+                <a:solidFill>
+                  <a:srgbClr val="1C3144"/>
+                </a:solidFill>
+                <a:latin typeface="Cambria"/>
+              </a:rPr>
+              <a:t>Eight questions to ask about any data problem</a:t>
+            </a:r>
+          </a:p>
+        </p:txBody>
+      </p:sp>
+      <p:sp>
+        <p:nvSpPr>
+          <p:cNvPr id="4" name="TextBox 3"/>
+          <p:cNvSpPr txBox="1"/>
+          <p:nvPr/>
+        </p:nvSpPr>
+        <p:spPr>
+          <a:xfrm>
+            <a:off x="685800" y="1911095"/>
+            <a:ext cx="5158587" cy="378705"/>
+          </a:xfrm>
+          <a:prstGeom prst="rect">
+            <a:avLst/>
+          </a:prstGeom>
+          <a:noFill/>
+        </p:spPr>
+        <p:txBody>
+          <a:bodyPr wrap="square" lIns="0" rIns="0" tIns="0" bIns="0" anchor="t">
+            <a:spAutoFit/>
+          </a:bodyPr>
+          <a:lstStyle/>
+          <a:p>
+            <a:pPr algn="l">
+              <a:lnSpc>
+                <a:spcPct val="124000"/>
+              </a:lnSpc>
+              <a:spcAft>
+                <a:spcPts val="600"/>
+              </a:spcAft>
+            </a:pPr>
+            <a:r>
+              <a:rPr sz="1650" b="1" i="0">
+                <a:solidFill>
+                  <a:srgbClr val="E4572E"/>
+                </a:solidFill>
+                <a:latin typeface="Calibri"/>
+              </a:rPr>
+              <a:t>1 · What exactly am I predicting?</a:t>
+            </a:r>
+          </a:p>
+        </p:txBody>
+      </p:sp>
+      <p:sp>
+        <p:nvSpPr>
+          <p:cNvPr id="5" name="TextBox 4"/>
+          <p:cNvSpPr txBox="1"/>
+          <p:nvPr/>
+        </p:nvSpPr>
+        <p:spPr>
+          <a:xfrm>
+            <a:off x="685800" y="2298945"/>
+            <a:ext cx="5158587" cy="598917"/>
+          </a:xfrm>
+          <a:prstGeom prst="rect">
+            <a:avLst/>
+          </a:prstGeom>
+          <a:noFill/>
+        </p:spPr>
+        <p:txBody>
+          <a:bodyPr wrap="square" lIns="0" rIns="0" tIns="0" bIns="0" anchor="t">
+            <a:spAutoFit/>
+          </a:bodyPr>
+          <a:lstStyle/>
+          <a:p>
+            <a:pPr algn="l">
+              <a:lnSpc>
+                <a:spcPct val="124000"/>
+              </a:lnSpc>
+              <a:spcAft>
+                <a:spcPts val="600"/>
+              </a:spcAft>
+            </a:pPr>
+            <a:r>
+              <a:rPr sz="1386" b="0" i="0">
+                <a:solidFill>
+                  <a:srgbClr val="334657"/>
+                </a:solidFill>
+                <a:latin typeface="Calibri"/>
+              </a:rPr>
+              <a:t>Name the target column and its unit. If you cannot, you do not have a problem yet.</a:t>
+            </a:r>
+          </a:p>
+        </p:txBody>
+      </p:sp>
+      <p:sp>
+        <p:nvSpPr>
+          <p:cNvPr id="6" name="TextBox 5"/>
+          <p:cNvSpPr txBox="1"/>
+          <p:nvPr/>
+        </p:nvSpPr>
+        <p:spPr>
+          <a:xfrm>
+            <a:off x="685800" y="3126462"/>
+            <a:ext cx="5158587" cy="378705"/>
+          </a:xfrm>
+          <a:prstGeom prst="rect">
+            <a:avLst/>
+          </a:prstGeom>
+          <a:noFill/>
+        </p:spPr>
+        <p:txBody>
+          <a:bodyPr wrap="square" lIns="0" rIns="0" tIns="0" bIns="0" anchor="t">
+            <a:spAutoFit/>
+          </a:bodyPr>
+          <a:lstStyle/>
+          <a:p>
+            <a:pPr algn="l">
+              <a:lnSpc>
+                <a:spcPct val="124000"/>
+              </a:lnSpc>
+              <a:spcAft>
+                <a:spcPts val="600"/>
+              </a:spcAft>
+            </a:pPr>
+            <a:r>
+              <a:rPr sz="1650" b="1" i="0">
+                <a:solidFill>
+                  <a:srgbClr val="E4572E"/>
+                </a:solidFill>
+                <a:latin typeface="Calibri"/>
+              </a:rPr>
+              <a:t>2 · Is it a number or a category?</a:t>
+            </a:r>
+          </a:p>
+        </p:txBody>
+      </p:sp>
+      <p:sp>
+        <p:nvSpPr>
+          <p:cNvPr id="7" name="TextBox 6"/>
+          <p:cNvSpPr txBox="1"/>
+          <p:nvPr/>
+        </p:nvSpPr>
+        <p:spPr>
+          <a:xfrm>
+            <a:off x="685800" y="3514311"/>
+            <a:ext cx="5158587" cy="598917"/>
+          </a:xfrm>
+          <a:prstGeom prst="rect">
+            <a:avLst/>
+          </a:prstGeom>
+          <a:noFill/>
+        </p:spPr>
+        <p:txBody>
+          <a:bodyPr wrap="square" lIns="0" rIns="0" tIns="0" bIns="0" anchor="t">
+            <a:spAutoFit/>
+          </a:bodyPr>
+          <a:lstStyle/>
+          <a:p>
+            <a:pPr algn="l">
+              <a:lnSpc>
+                <a:spcPct val="124000"/>
+              </a:lnSpc>
+              <a:spcAft>
+                <a:spcPts val="600"/>
+              </a:spcAft>
+            </a:pPr>
+            <a:r>
+              <a:rPr sz="1386" b="0" i="0">
+                <a:solidFill>
+                  <a:srgbClr val="334657"/>
+                </a:solidFill>
+                <a:latin typeface="Calibri"/>
+              </a:rPr>
+              <a:t>What would the answer look like written down? A quantity with a unit means regression; a word means classification.</a:t>
+            </a:r>
+          </a:p>
+        </p:txBody>
+      </p:sp>
+      <p:sp>
+        <p:nvSpPr>
+          <p:cNvPr id="8" name="TextBox 7"/>
+          <p:cNvSpPr txBox="1"/>
+          <p:nvPr/>
+        </p:nvSpPr>
+        <p:spPr>
+          <a:xfrm>
+            <a:off x="685800" y="4341828"/>
+            <a:ext cx="5158587" cy="378705"/>
+          </a:xfrm>
+          <a:prstGeom prst="rect">
+            <a:avLst/>
+          </a:prstGeom>
+          <a:noFill/>
+        </p:spPr>
+        <p:txBody>
+          <a:bodyPr wrap="square" lIns="0" rIns="0" tIns="0" bIns="0" anchor="t">
+            <a:spAutoFit/>
+          </a:bodyPr>
+          <a:lstStyle/>
+          <a:p>
+            <a:pPr algn="l">
+              <a:lnSpc>
+                <a:spcPct val="124000"/>
+              </a:lnSpc>
+              <a:spcAft>
+                <a:spcPts val="600"/>
+              </a:spcAft>
+            </a:pPr>
+            <a:r>
+              <a:rPr sz="1650" b="1" i="0">
+                <a:solidFill>
+                  <a:srgbClr val="E4572E"/>
+                </a:solidFill>
+                <a:latin typeface="Calibri"/>
+              </a:rPr>
+              <a:t>3 · What do I know beforehand?</a:t>
+            </a:r>
+          </a:p>
+        </p:txBody>
+      </p:sp>
+      <p:sp>
+        <p:nvSpPr>
+          <p:cNvPr id="9" name="TextBox 8"/>
+          <p:cNvSpPr txBox="1"/>
+          <p:nvPr/>
+        </p:nvSpPr>
+        <p:spPr>
+          <a:xfrm>
+            <a:off x="685800" y="4729677"/>
+            <a:ext cx="5158587" cy="598917"/>
+          </a:xfrm>
+          <a:prstGeom prst="rect">
+            <a:avLst/>
+          </a:prstGeom>
+          <a:noFill/>
+        </p:spPr>
+        <p:txBody>
+          <a:bodyPr wrap="square" lIns="0" rIns="0" tIns="0" bIns="0" anchor="t">
+            <a:spAutoFit/>
+          </a:bodyPr>
+          <a:lstStyle/>
+          <a:p>
+            <a:pPr algn="l">
+              <a:lnSpc>
+                <a:spcPct val="124000"/>
+              </a:lnSpc>
+              <a:spcAft>
+                <a:spcPts val="600"/>
+              </a:spcAft>
+            </a:pPr>
+            <a:r>
+              <a:rPr sz="1386" b="0" i="0">
+                <a:solidFill>
+                  <a:srgbClr val="334657"/>
+                </a:solidFill>
+                <a:latin typeface="Calibri"/>
+              </a:rPr>
+              <a:t>List the features. Check every one: would I really have this before the outcome?</a:t>
+            </a:r>
+          </a:p>
+        </p:txBody>
+      </p:sp>
+      <p:sp>
+        <p:nvSpPr>
+          <p:cNvPr id="10" name="TextBox 9"/>
+          <p:cNvSpPr txBox="1"/>
+          <p:nvPr/>
+        </p:nvSpPr>
+        <p:spPr>
+          <a:xfrm>
+            <a:off x="685800" y="5557194"/>
+            <a:ext cx="5158587" cy="378705"/>
+          </a:xfrm>
+          <a:prstGeom prst="rect">
+            <a:avLst/>
+          </a:prstGeom>
+          <a:noFill/>
+        </p:spPr>
+        <p:txBody>
+          <a:bodyPr wrap="square" lIns="0" rIns="0" tIns="0" bIns="0" anchor="t">
+            <a:spAutoFit/>
+          </a:bodyPr>
+          <a:lstStyle/>
+          <a:p>
+            <a:pPr algn="l">
+              <a:lnSpc>
+                <a:spcPct val="124000"/>
+              </a:lnSpc>
+              <a:spcAft>
+                <a:spcPts val="600"/>
+              </a:spcAft>
+            </a:pPr>
+            <a:r>
+              <a:rPr sz="1650" b="1" i="0">
+                <a:solidFill>
+                  <a:srgbClr val="E4572E"/>
+                </a:solidFill>
+                <a:latin typeface="Calibri"/>
+              </a:rPr>
+              <a:t>4 · Where does the data come from?</a:t>
+            </a:r>
+          </a:p>
+        </p:txBody>
+      </p:sp>
+      <p:sp>
+        <p:nvSpPr>
+          <p:cNvPr id="11" name="TextBox 10"/>
+          <p:cNvSpPr txBox="1"/>
+          <p:nvPr/>
+        </p:nvSpPr>
+        <p:spPr>
+          <a:xfrm>
+            <a:off x="685800" y="5945043"/>
+            <a:ext cx="5158587" cy="598917"/>
+          </a:xfrm>
+          <a:prstGeom prst="rect">
+            <a:avLst/>
+          </a:prstGeom>
+          <a:noFill/>
+        </p:spPr>
+        <p:txBody>
+          <a:bodyPr wrap="square" lIns="0" rIns="0" tIns="0" bIns="0" anchor="t">
+            <a:spAutoFit/>
+          </a:bodyPr>
+          <a:lstStyle/>
+          <a:p>
+            <a:pPr algn="l">
+              <a:lnSpc>
+                <a:spcPct val="124000"/>
+              </a:lnSpc>
+              <a:spcAft>
+                <a:spcPts val="600"/>
+              </a:spcAft>
+            </a:pPr>
+            <a:r>
+              <a:rPr sz="1386" b="0" i="0">
+                <a:solidFill>
+                  <a:srgbClr val="334657"/>
+                </a:solidFill>
+                <a:latin typeface="Calibri"/>
+              </a:rPr>
+              <a:t>Who measured it, how often, over what period, and is it actually kept anywhere?</a:t>
+            </a:r>
+          </a:p>
+        </p:txBody>
+      </p:sp>
+      <p:sp>
+        <p:nvSpPr>
+          <p:cNvPr id="12" name="TextBox 11"/>
+          <p:cNvSpPr txBox="1"/>
+          <p:nvPr/>
+        </p:nvSpPr>
+        <p:spPr>
+          <a:xfrm>
+            <a:off x="6347307" y="1911095"/>
+            <a:ext cx="5158587" cy="378705"/>
+          </a:xfrm>
+          <a:prstGeom prst="rect">
+            <a:avLst/>
+          </a:prstGeom>
+          <a:noFill/>
+        </p:spPr>
+        <p:txBody>
+          <a:bodyPr wrap="square" lIns="0" rIns="0" tIns="0" bIns="0" anchor="t">
+            <a:spAutoFit/>
+          </a:bodyPr>
+          <a:lstStyle/>
+          <a:p>
+            <a:pPr algn="l">
+              <a:lnSpc>
+                <a:spcPct val="124000"/>
+              </a:lnSpc>
+              <a:spcAft>
+                <a:spcPts val="600"/>
+              </a:spcAft>
+            </a:pPr>
+            <a:r>
+              <a:rPr sz="1650" b="1" i="0">
+                <a:solidFill>
+                  <a:srgbClr val="E4572E"/>
+                </a:solidFill>
+                <a:latin typeface="Calibri"/>
+              </a:rPr>
+              <a:t>5 · Would a rule or an equation do this better?</a:t>
+            </a:r>
+          </a:p>
+        </p:txBody>
+      </p:sp>
+      <p:sp>
+        <p:nvSpPr>
+          <p:cNvPr id="13" name="TextBox 12"/>
+          <p:cNvSpPr txBox="1"/>
+          <p:nvPr/>
+        </p:nvSpPr>
+        <p:spPr>
+          <a:xfrm>
+            <a:off x="6347307" y="2298945"/>
+            <a:ext cx="5158587" cy="598917"/>
+          </a:xfrm>
+          <a:prstGeom prst="rect">
+            <a:avLst/>
+          </a:prstGeom>
+          <a:noFill/>
+        </p:spPr>
+        <p:txBody>
+          <a:bodyPr wrap="square" lIns="0" rIns="0" tIns="0" bIns="0" anchor="t">
+            <a:spAutoFit/>
+          </a:bodyPr>
+          <a:lstStyle/>
+          <a:p>
+            <a:pPr algn="l">
+              <a:lnSpc>
+                <a:spcPct val="124000"/>
+              </a:lnSpc>
+              <a:spcAft>
+                <a:spcPts val="600"/>
+              </a:spcAft>
+            </a:pPr>
+            <a:r>
+              <a:rPr sz="1386" b="0" i="0">
+                <a:solidFill>
+                  <a:srgbClr val="334657"/>
+                </a:solidFill>
+                <a:latin typeface="Calibri"/>
+              </a:rPr>
+              <a:t>If a code of practice or a validated formula answers it, use that instead.</a:t>
+            </a:r>
+          </a:p>
+        </p:txBody>
+      </p:sp>
+      <p:sp>
+        <p:nvSpPr>
+          <p:cNvPr id="14" name="TextBox 13"/>
+          <p:cNvSpPr txBox="1"/>
+          <p:nvPr/>
+        </p:nvSpPr>
+        <p:spPr>
+          <a:xfrm>
+            <a:off x="6347307" y="3126462"/>
+            <a:ext cx="5158587" cy="378705"/>
+          </a:xfrm>
+          <a:prstGeom prst="rect">
+            <a:avLst/>
+          </a:prstGeom>
+          <a:noFill/>
+        </p:spPr>
+        <p:txBody>
+          <a:bodyPr wrap="square" lIns="0" rIns="0" tIns="0" bIns="0" anchor="t">
+            <a:spAutoFit/>
+          </a:bodyPr>
+          <a:lstStyle/>
+          <a:p>
+            <a:pPr algn="l">
+              <a:lnSpc>
+                <a:spcPct val="124000"/>
+              </a:lnSpc>
+              <a:spcAft>
+                <a:spcPts val="600"/>
+              </a:spcAft>
+            </a:pPr>
+            <a:r>
+              <a:rPr sz="1650" b="1" i="0">
+                <a:solidFill>
+                  <a:srgbClr val="E4572E"/>
+                </a:solidFill>
+                <a:latin typeface="Calibri"/>
+              </a:rPr>
+              <a:t>6 · How will I know if I am wrong?</a:t>
+            </a:r>
+          </a:p>
+        </p:txBody>
+      </p:sp>
+      <p:sp>
+        <p:nvSpPr>
+          <p:cNvPr id="15" name="TextBox 14"/>
+          <p:cNvSpPr txBox="1"/>
+          <p:nvPr/>
+        </p:nvSpPr>
+        <p:spPr>
+          <a:xfrm>
+            <a:off x="6347307" y="3514311"/>
+            <a:ext cx="5158587" cy="598917"/>
+          </a:xfrm>
+          <a:prstGeom prst="rect">
+            <a:avLst/>
+          </a:prstGeom>
+          <a:noFill/>
+        </p:spPr>
+        <p:txBody>
+          <a:bodyPr wrap="square" lIns="0" rIns="0" tIns="0" bIns="0" anchor="t">
+            <a:spAutoFit/>
+          </a:bodyPr>
+          <a:lstStyle/>
+          <a:p>
+            <a:pPr algn="l">
+              <a:lnSpc>
+                <a:spcPct val="124000"/>
+              </a:lnSpc>
+              <a:spcAft>
+                <a:spcPts val="600"/>
+              </a:spcAft>
+            </a:pPr>
+            <a:r>
+              <a:rPr sz="1386" b="0" i="0">
+                <a:solidFill>
+                  <a:srgbClr val="334657"/>
+                </a:solidFill>
+                <a:latin typeface="Calibri"/>
+              </a:rPr>
+              <a:t>You need cases the model has never seen. Decide now how you will hold some back.</a:t>
+            </a:r>
+          </a:p>
+        </p:txBody>
+      </p:sp>
+      <p:sp>
+        <p:nvSpPr>
+          <p:cNvPr id="16" name="TextBox 15"/>
+          <p:cNvSpPr txBox="1"/>
+          <p:nvPr/>
+        </p:nvSpPr>
+        <p:spPr>
+          <a:xfrm>
+            <a:off x="6347307" y="4341828"/>
+            <a:ext cx="5158587" cy="378705"/>
+          </a:xfrm>
+          <a:prstGeom prst="rect">
+            <a:avLst/>
+          </a:prstGeom>
+          <a:noFill/>
+        </p:spPr>
+        <p:txBody>
+          <a:bodyPr wrap="square" lIns="0" rIns="0" tIns="0" bIns="0" anchor="t">
+            <a:spAutoFit/>
+          </a:bodyPr>
+          <a:lstStyle/>
+          <a:p>
+            <a:pPr algn="l">
+              <a:lnSpc>
+                <a:spcPct val="124000"/>
+              </a:lnSpc>
+              <a:spcAft>
+                <a:spcPts val="600"/>
+              </a:spcAft>
+            </a:pPr>
+            <a:r>
+              <a:rPr sz="1650" b="1" i="0">
+                <a:solidFill>
+                  <a:srgbClr val="E4572E"/>
+                </a:solidFill>
+                <a:latin typeface="Calibri"/>
+              </a:rPr>
+              <a:t>7 · What does being wrong cost?</a:t>
+            </a:r>
+          </a:p>
+        </p:txBody>
+      </p:sp>
+      <p:sp>
+        <p:nvSpPr>
+          <p:cNvPr id="17" name="TextBox 16"/>
+          <p:cNvSpPr txBox="1"/>
+          <p:nvPr/>
+        </p:nvSpPr>
+        <p:spPr>
+          <a:xfrm>
+            <a:off x="6347307" y="4729677"/>
+            <a:ext cx="5158587" cy="598917"/>
+          </a:xfrm>
+          <a:prstGeom prst="rect">
+            <a:avLst/>
+          </a:prstGeom>
+          <a:noFill/>
+        </p:spPr>
+        <p:txBody>
+          <a:bodyPr wrap="square" lIns="0" rIns="0" tIns="0" bIns="0" anchor="t">
+            <a:spAutoFit/>
+          </a:bodyPr>
+          <a:lstStyle/>
+          <a:p>
+            <a:pPr algn="l">
+              <a:lnSpc>
+                <a:spcPct val="124000"/>
+              </a:lnSpc>
+              <a:spcAft>
+                <a:spcPts val="600"/>
+              </a:spcAft>
+            </a:pPr>
+            <a:r>
+              <a:rPr sz="1386" b="0" i="0">
+                <a:solidFill>
+                  <a:srgbClr val="334657"/>
+                </a:solidFill>
+                <a:latin typeface="Calibri"/>
+              </a:rPr>
+              <a:t>A false alarm and a missed failure are not equally bad. That asymmetry decides which model you pick.</a:t>
+            </a:r>
+          </a:p>
+        </p:txBody>
+      </p:sp>
+      <p:sp>
+        <p:nvSpPr>
+          <p:cNvPr id="18" name="TextBox 17"/>
+          <p:cNvSpPr txBox="1"/>
+          <p:nvPr/>
+        </p:nvSpPr>
+        <p:spPr>
+          <a:xfrm>
+            <a:off x="6347307" y="5557194"/>
+            <a:ext cx="5158587" cy="378705"/>
+          </a:xfrm>
+          <a:prstGeom prst="rect">
+            <a:avLst/>
+          </a:prstGeom>
+          <a:noFill/>
+        </p:spPr>
+        <p:txBody>
+          <a:bodyPr wrap="square" lIns="0" rIns="0" tIns="0" bIns="0" anchor="t">
+            <a:spAutoFit/>
+          </a:bodyPr>
+          <a:lstStyle/>
+          <a:p>
+            <a:pPr algn="l">
+              <a:lnSpc>
+                <a:spcPct val="124000"/>
+              </a:lnSpc>
+              <a:spcAft>
+                <a:spcPts val="600"/>
+              </a:spcAft>
+            </a:pPr>
+            <a:r>
+              <a:rPr sz="1650" b="1" i="0">
+                <a:solidFill>
+                  <a:srgbClr val="E4572E"/>
+                </a:solidFill>
+                <a:latin typeface="Calibri"/>
+              </a:rPr>
+              <a:t>8 · Do today's conditions still resemble the data?</a:t>
+            </a:r>
+          </a:p>
+        </p:txBody>
+      </p:sp>
+      <p:sp>
+        <p:nvSpPr>
+          <p:cNvPr id="19" name="TextBox 18"/>
+          <p:cNvSpPr txBox="1"/>
+          <p:nvPr/>
+        </p:nvSpPr>
+        <p:spPr>
+          <a:xfrm>
+            <a:off x="6347307" y="5945043"/>
+            <a:ext cx="5158587" cy="598917"/>
+          </a:xfrm>
+          <a:prstGeom prst="rect">
+            <a:avLst/>
+          </a:prstGeom>
+          <a:noFill/>
+        </p:spPr>
+        <p:txBody>
+          <a:bodyPr wrap="square" lIns="0" rIns="0" tIns="0" bIns="0" anchor="t">
+            <a:spAutoFit/>
+          </a:bodyPr>
+          <a:lstStyle/>
+          <a:p>
+            <a:pPr algn="l">
+              <a:lnSpc>
+                <a:spcPct val="124000"/>
+              </a:lnSpc>
+              <a:spcAft>
+                <a:spcPts val="600"/>
+              </a:spcAft>
+            </a:pPr>
+            <a:r>
+              <a:rPr sz="1386" b="0" i="0">
+                <a:solidFill>
+                  <a:srgbClr val="334657"/>
+                </a:solidFill>
+                <a:latin typeface="Calibri"/>
+              </a:rPr>
+              <a:t>If the process, material or plant has changed, the model may be quietly obsolete.</a:t>
+            </a:r>
+          </a:p>
+        </p:txBody>
+      </p:sp>
+    </p:spTree>
+  </p:cSld>
+  <p:clrMapOvr>
+    <a:masterClrMapping/>
+  </p:clrMapOvr>
+</p:sld>
+</file>
+
+<file path=ppt/slides/slide56.xml><?xml version="1.0" encoding="utf-8"?>
+<p:sld xmlns:a="http://schemas.openxmlformats.org/drawingml/2006/main" xmlns:p="http://schemas.openxmlformats.org/presentationml/2006/main" xmlns:r="http://schemas.openxmlformats.org/officeDocument/2006/relationships">
+  <p:cSld>
+    <p:spTree>
+      <p:nvGrpSpPr>
+        <p:cNvPr id="1" name=""/>
+        <p:cNvGrpSpPr/>
+        <p:nvPr/>
+      </p:nvGrpSpPr>
+      <p:grpSpPr/>
+      <p:sp>
+        <p:nvSpPr>
           <p:cNvPr id="2" name="Rectangle 1"/>
           <p:cNvSpPr/>
           <p:nvPr/>
@@ -27562,7 +32933,7 @@
                 </a:solidFill>
                 <a:latin typeface="Calibri"/>
               </a:rPr>
-              <a:t>Scan the code. First box is your registration number, off your card.</a:t>
+              <a:t>Enter your own Student Registration Number exactly as recorded.</a:t>
             </a:r>
           </a:p>
         </p:txBody>
@@ -27734,7 +33105,7 @@
                 </a:solidFill>
                 <a:latin typeface="Calibri"/>
               </a:rPr>
-              <a:t>Open for 48 hours if the network fails, then it closes itself.</a:t>
+              <a:t>Open for 24 hours from lecturer activation, then it closes.</a:t>
             </a:r>
           </a:p>
         </p:txBody>
@@ -27987,7 +33358,7 @@
 </p:sld>
 </file>
 
-<file path=ppt/slides/slide55.xml><?xml version="1.0" encoding="utf-8"?>
+<file path=ppt/slides/slide57.xml><?xml version="1.0" encoding="utf-8"?>
 <p:sld xmlns:a="http://schemas.openxmlformats.org/drawingml/2006/main" xmlns:p="http://schemas.openxmlformats.org/presentationml/2006/main" xmlns:r="http://schemas.openxmlformats.org/officeDocument/2006/relationships">
   <p:cSld>
     <p:spTree>

--- a/IUEA_Teaching_Plan/decks/CML3113_Week01_Mining_Petroleum.pptx
+++ b/IUEA_Teaching_Plan/decks/CML3113_Week01_Mining_Petroleum.pptx
@@ -558,27 +558,27 @@
           <a:lstStyle/>
           <a:p>
             <a:r>
-              <a:t>TEACHING PURPOSE</a:t>
-            </a:r>
-          </a:p>
-          <a:p>
-            <a:r>
               <a:t>AI, machine learning</a:t>
             </a:r>
           </a:p>
           <a:p>
             <a:r>
+              <a:t>CML3113, Week 1, slide 1</a:t>
+            </a:r>
+          </a:p>
+          <a:p>
+            <a:r>
               <a:t/>
             </a:r>
           </a:p>
           <a:p>
             <a:r>
-              <a:t>LECTURER CUE</a:t>
-            </a:r>
-          </a:p>
-          <a:p>
-            <a:r>
-              <a:t>Today runs entirely on paper. You will not touch a computer, so nothing you do this session depends on owning a laptop or having a connection. By the end you will have answered a real engineering question from twelve rows of a real dataset with a pencil, and measured how wrong you were.</a:t>
+              <a:t>Explanation to give</a:t>
+            </a:r>
+          </a:p>
+          <a:p>
+            <a:r>
+              <a:t>Start with an engineering decision, then introduce learning from examples. No code is needed today.</a:t>
             </a:r>
           </a:p>
           <a:p>
@@ -588,12 +588,12 @@
           </a:p>
           <a:p>
             <a:r>
-              <a:t>EXPLAIN IN ORDINARY WORDS</a:t>
-            </a:r>
-          </a:p>
-          <a:p>
-            <a:r>
-              <a:t>A feature is an input available when predicting. The target is the answer to learn from. Regression predicts a number; classification predicts a category. Learning patterns does not by itself establish cause.</a:t>
+              <a:t>Worked illustration / lecturer answer</a:t>
+            </a:r>
+          </a:p>
+          <a:p>
+            <a:r>
+              <a:t>A numerical quantity such as days until servicing is a regression target. A label such as service due is a classification target.</a:t>
             </a:r>
           </a:p>
           <a:p>
@@ -603,12 +603,12 @@
           </a:p>
           <a:p>
             <a:r>
-              <a:t>CHECK AND EXPECTED ANSWER</a:t>
-            </a:r>
-          </a:p>
-          <a:p>
-            <a:r>
-              <a:t>Predicting concrete strength: regression. Predicting pass/fail: classification. Is a later test result available before that test? No.</a:t>
+              <a:t>Misconception to address</a:t>
+            </a:r>
+          </a:p>
+          <a:p>
+            <a:r>
+              <a:t>Use this as an orientation to the lesson. Terms and syntax will be unpacked on their own slides; students do not need to know them in advance.</a:t>
             </a:r>
           </a:p>
           <a:p>
@@ -618,27 +618,12 @@
           </a:p>
           <a:p>
             <a:r>
-              <a:t>IF LEARNERS ARE STUCK</a:t>
-            </a:r>
-          </a:p>
-          <a:p>
-            <a:r>
-              <a:t>Describe the engineering decision in everyday language, then label one row, an input and its answer. Compare with a rule you could write directly.</a:t>
-            </a:r>
-          </a:p>
-          <a:p>
-            <a:r>
-              <a:t/>
-            </a:r>
-          </a:p>
-          <a:p>
-            <a:r>
-              <a:t>NEXT</a:t>
-            </a:r>
-          </a:p>
-          <a:p>
-            <a:r>
-              <a:t>Jotham Martin Wambi. Move on after a learner can explain the current example or required action.</a:t>
+              <a:t>Continue to</a:t>
+            </a:r>
+          </a:p>
+          <a:p>
+            <a:r>
+              <a:t>Jotham Martin Wambi</a:t>
             </a:r>
           </a:p>
         </p:txBody>
@@ -708,12 +693,12 @@
           <a:lstStyle/>
           <a:p>
             <a:r>
-              <a:t>TEACHING PURPOSE</a:t>
-            </a:r>
-          </a:p>
-          <a:p>
-            <a:r>
-              <a:t>The whole field, start to finish</a:t>
+              <a:t>Machine learning topics</a:t>
+            </a:r>
+          </a:p>
+          <a:p>
+            <a:r>
+              <a:t>CML3113, Week 1, slide 10</a:t>
             </a:r>
           </a:p>
           <a:p>
@@ -723,12 +708,12 @@
           </a:p>
           <a:p>
             <a:r>
-              <a:t>CONNECT</a:t>
-            </a:r>
-          </a:p>
-          <a:p>
-            <a:r>
-              <a:t>Build on the preceding slide: What I expect, and what you can expect back.</a:t>
+              <a:t>Explanation to give</a:t>
+            </a:r>
+          </a:p>
+          <a:p>
+            <a:r>
+              <a:t>Use the terminology to locate the course, not as vocabulary to memorise immediately. AI is the broad field; machine learning develops predictive rules from examples; deep learning is a family of machine-learning methods using neural networks.</a:t>
             </a:r>
           </a:p>
           <a:p>
@@ -738,12 +723,12 @@
           </a:p>
           <a:p>
             <a:r>
-              <a:t>LECTURER CUE</a:t>
-            </a:r>
-          </a:p>
-          <a:p>
-            <a:r>
-              <a:t>This segment hands you the map of the field before any of it is taught, so that every later week has somewhere to sit rather than arriving from nowhere. The structure follows the public roadmap.sh Machine Learning roadmap, which is the map the profession itself uses, so you can check this course against something written outside this room.</a:t>
+              <a:t>Worked illustration / lecturer answer</a:t>
+            </a:r>
+          </a:p>
+          <a:p>
+            <a:r>
+              <a:t>A fixed threshold alarm follows an explicitly supplied rule. A fault classifier fitted from labelled historical readings learns a rule from data. Both may support an engineering system, but only the second learns from examples.</a:t>
             </a:r>
           </a:p>
           <a:p>
@@ -753,12 +738,27 @@
           </a:p>
           <a:p>
             <a:r>
-              <a:t>NEXT</a:t>
-            </a:r>
-          </a:p>
-          <a:p>
-            <a:r>
-              <a:t>The machine learning roadmap. Move on after a learner can explain the current example or required action.</a:t>
+              <a:t>Misconception to address</a:t>
+            </a:r>
+          </a:p>
+          <a:p>
+            <a:r>
+              <a:t>The boundaries of AI are not perfectly sharp. Avoid claiming every automated action learns. Advanced roadmap topics are context, not prerequisites students must master today.</a:t>
+            </a:r>
+          </a:p>
+          <a:p>
+            <a:r>
+              <a:t/>
+            </a:r>
+          </a:p>
+          <a:p>
+            <a:r>
+              <a:t>Continue to</a:t>
+            </a:r>
+          </a:p>
+          <a:p>
+            <a:r>
+              <a:t>The machine learning roadmap</a:t>
             </a:r>
           </a:p>
         </p:txBody>
@@ -828,27 +828,27 @@
           <a:lstStyle/>
           <a:p>
             <a:r>
-              <a:t>TEACHING PURPOSE</a:t>
-            </a:r>
-          </a:p>
-          <a:p>
-            <a:r>
               <a:t>Every word we used today (1 of 3)</a:t>
             </a:r>
           </a:p>
           <a:p>
             <a:r>
+              <a:t>CML3113, Week 1, slide 52</a:t>
+            </a:r>
+          </a:p>
+          <a:p>
+            <a:r>
               <a:t/>
             </a:r>
           </a:p>
           <a:p>
             <a:r>
-              <a:t>CONNECT</a:t>
-            </a:r>
-          </a:p>
-          <a:p>
-            <a:r>
-              <a:t>Build on the preceding slide: How did you do?.</a:t>
+              <a:t>Explanation to give</a:t>
+            </a:r>
+          </a:p>
+          <a:p>
+            <a:r>
+              <a:t>Use the terminology to locate the course, not as vocabulary to memorise immediately. AI is the broad field; machine learning develops predictive rules from examples; deep learning is a family of machine-learning methods using neural networks.</a:t>
             </a:r>
           </a:p>
           <a:p>
@@ -858,12 +858,7 @@
           </a:p>
           <a:p>
             <a:r>
-              <a:t>EXPLAIN IN ORDINARY WORDS</a:t>
-            </a:r>
-          </a:p>
-          <a:p>
-            <a:r>
-              <a:t>A cleaning decision needs evidence, a stated rule and a before/after check. Similar rows may be genuine repeated events. Reconciliation compares totals built under the same definitions.</a:t>
+              <a:t>Contrast who supplies the decision rule. In conventional programming, the developer writes the rule. In supervised learning, the training examples contain inputs and known answers from which a fitting procedure estimates a rule.</a:t>
             </a:r>
           </a:p>
           <a:p>
@@ -873,12 +868,7 @@
           </a:p>
           <a:p>
             <a:r>
-              <a:t>CHECK AND EXPECTED ANSWER</a:t>
-            </a:r>
-          </a:p>
-          <a:p>
-            <a:r>
-              <a:t>May we delete every repeated amount? No. Check the row identifier and the table grain first.</a:t>
+              <a:t>Data science includes finding and examining data, correcting documented defects, analysing patterns and communicating justified conclusions. A prediction model is one possible tool within that work.</a:t>
             </a:r>
           </a:p>
           <a:p>
@@ -888,12 +878,12 @@
           </a:p>
           <a:p>
             <a:r>
-              <a:t>IF LEARNERS ARE STUCK</a:t>
-            </a:r>
-          </a:p>
-          <a:p>
-            <a:r>
-              <a:t>Keep raw data, record counts before and after each action, then explain any remaining difference instead of forcing totals to agree.</a:t>
+              <a:t>Worked illustration / lecturer answer</a:t>
+            </a:r>
+          </a:p>
+          <a:p>
+            <a:r>
+              <a:t>A fixed threshold alarm follows an explicitly supplied rule. A fault classifier fitted from labelled historical readings learns a rule from data. Both may support an engineering system, but only the second learns from examples.</a:t>
             </a:r>
           </a:p>
           <a:p>
@@ -903,12 +893,47 @@
           </a:p>
           <a:p>
             <a:r>
-              <a:t>NEXT</a:t>
-            </a:r>
-          </a:p>
-          <a:p>
-            <a:r>
-              <a:t>Every word we used today (2 of 3). Move on after a learner can explain the current example or required action.</a:t>
+              <a:t>If a verified formula calculates area from length and width, use it. If many interacting readings affect an outcome and suitable labelled examples exist, a learned predictor may be worth evaluating.</a:t>
+            </a:r>
+          </a:p>
+          <a:p>
+            <a:r>
+              <a:t/>
+            </a:r>
+          </a:p>
+          <a:p>
+            <a:r>
+              <a:t>Before predicting energy use, check whether meter readings use the same unit and time interval. Discovering that half the readings are missing is already a meaningful data finding.</a:t>
+            </a:r>
+          </a:p>
+          <a:p>
+            <a:r>
+              <a:t/>
+            </a:r>
+          </a:p>
+          <a:p>
+            <a:r>
+              <a:t>Misconception to address</a:t>
+            </a:r>
+          </a:p>
+          <a:p>
+            <a:r>
+              <a:t>Use this page for revision. Connect each word to the concrete example just taught; do not introduce all the definitions as new material in one block.</a:t>
+            </a:r>
+          </a:p>
+          <a:p>
+            <a:r>
+              <a:t/>
+            </a:r>
+          </a:p>
+          <a:p>
+            <a:r>
+              <a:t>Continue to</a:t>
+            </a:r>
+          </a:p>
+          <a:p>
+            <a:r>
+              <a:t>Every word we used today (2 of 3)</a:t>
             </a:r>
           </a:p>
         </p:txBody>
@@ -978,27 +1003,27 @@
           <a:lstStyle/>
           <a:p>
             <a:r>
-              <a:t>TEACHING PURPOSE</a:t>
-            </a:r>
-          </a:p>
-          <a:p>
-            <a:r>
               <a:t>Every word we used today (2 of 3)</a:t>
             </a:r>
           </a:p>
           <a:p>
             <a:r>
+              <a:t>CML3113, Week 1, slide 53</a:t>
+            </a:r>
+          </a:p>
+          <a:p>
+            <a:r>
               <a:t/>
             </a:r>
           </a:p>
           <a:p>
             <a:r>
-              <a:t>CONNECT</a:t>
-            </a:r>
-          </a:p>
-          <a:p>
-            <a:r>
-              <a:t>Build on the preceding slide: Every word we used today (1 of 3).</a:t>
+              <a:t>Explanation to give</a:t>
+            </a:r>
+          </a:p>
+          <a:p>
+            <a:r>
+              <a:t>while tests a condition before each iteration. Unlike for over a fixed list, it needs a route that eventually makes the condition False. Trace both the test and the state update.</a:t>
             </a:r>
           </a:p>
           <a:p>
@@ -1008,12 +1033,12 @@
           </a:p>
           <a:p>
             <a:r>
-              <a:t>EXPLAIN IN ORDINARY WORDS</a:t>
-            </a:r>
-          </a:p>
-          <a:p>
-            <a:r>
-              <a:t>A feature is an input available when predicting. The target is the answer to learn from. Regression predicts a number; classification predicts a category. Learning patterns does not by itself establish cause.</a:t>
+              <a:t>Worked illustration / lecturer answer</a:t>
+            </a:r>
+          </a:p>
+          <a:p>
+            <a:r>
+              <a:t>With count = 0 and while count &lt; 3, print then increment yields 0, 1 and 2. The next test sees count 3 and stops before printing it.</a:t>
             </a:r>
           </a:p>
           <a:p>
@@ -1023,12 +1048,12 @@
           </a:p>
           <a:p>
             <a:r>
-              <a:t>CHECK AND EXPECTED ANSWER</a:t>
-            </a:r>
-          </a:p>
-          <a:p>
-            <a:r>
-              <a:t>Predicting concrete strength: regression. Predicting pass/fail: classification. Is a later test result available before that test? No.</a:t>
+              <a:t>Misconception to address</a:t>
+            </a:r>
+          </a:p>
+          <a:p>
+            <a:r>
+              <a:t>Use this page for revision. Connect each word to the concrete example just taught; do not introduce all the definitions as new material in one block.</a:t>
             </a:r>
           </a:p>
           <a:p>
@@ -1038,27 +1063,12 @@
           </a:p>
           <a:p>
             <a:r>
-              <a:t>IF LEARNERS ARE STUCK</a:t>
-            </a:r>
-          </a:p>
-          <a:p>
-            <a:r>
-              <a:t>Describe the engineering decision in everyday language, then label one row, an input and its answer. Compare with a rule you could write directly.</a:t>
-            </a:r>
-          </a:p>
-          <a:p>
-            <a:r>
-              <a:t/>
-            </a:r>
-          </a:p>
-          <a:p>
-            <a:r>
-              <a:t>NEXT</a:t>
-            </a:r>
-          </a:p>
-          <a:p>
-            <a:r>
-              <a:t>Every word we used today (3 of 3). Move on after a learner can explain the current example or required action.</a:t>
+              <a:t>Continue to</a:t>
+            </a:r>
+          </a:p>
+          <a:p>
+            <a:r>
+              <a:t>Every word we used today (3 of 3)</a:t>
             </a:r>
           </a:p>
         </p:txBody>
@@ -1128,27 +1138,27 @@
           <a:lstStyle/>
           <a:p>
             <a:r>
-              <a:t>TEACHING PURPOSE</a:t>
-            </a:r>
-          </a:p>
-          <a:p>
-            <a:r>
               <a:t>The machine learning roadmap</a:t>
             </a:r>
           </a:p>
           <a:p>
             <a:r>
+              <a:t>CML3113, Week 1, slide 11</a:t>
+            </a:r>
+          </a:p>
+          <a:p>
+            <a:r>
               <a:t/>
             </a:r>
           </a:p>
           <a:p>
             <a:r>
-              <a:t>CONNECT</a:t>
-            </a:r>
-          </a:p>
-          <a:p>
-            <a:r>
-              <a:t>Build on the preceding slide: The whole field, start to finish.</a:t>
+              <a:t>Explanation to give</a:t>
+            </a:r>
+          </a:p>
+          <a:p>
+            <a:r>
+              <a:t>Use the terminology to locate the course, not as vocabulary to memorise immediately. AI is the broad field; machine learning develops predictive rules from examples; deep learning is a family of machine-learning methods using neural networks.</a:t>
             </a:r>
           </a:p>
           <a:p>
@@ -1158,12 +1168,12 @@
           </a:p>
           <a:p>
             <a:r>
-              <a:t>LECTURER CUE</a:t>
-            </a:r>
-          </a:p>
-          <a:p>
-            <a:r>
-              <a:t>Fifteen stages, from Python to transformers. By December you will have covered stages 1 to 9. Most of the individual terms on the figure mean nothing to you today and that is expected — what to take from it is the shape of the field and where this course stops. The interactive version is at roadmap.sh/machine-learning, and it is worth an evening of clicking around.</a:t>
+              <a:t>Worked illustration / lecturer answer</a:t>
+            </a:r>
+          </a:p>
+          <a:p>
+            <a:r>
+              <a:t>A fixed threshold alarm follows an explicitly supplied rule. A fault classifier fitted from labelled historical readings learns a rule from data. Both may support an engineering system, but only the second learns from examples.</a:t>
             </a:r>
           </a:p>
           <a:p>
@@ -1173,12 +1183,12 @@
           </a:p>
           <a:p>
             <a:r>
-              <a:t>EXPLAIN IN ORDINARY WORDS</a:t>
-            </a:r>
-          </a:p>
-          <a:p>
-            <a:r>
-              <a:t>A feature is an input available when predicting. The target is the answer to learn from. Regression predicts a number; classification predicts a category. Learning patterns does not by itself establish cause.</a:t>
+              <a:t>Misconception to address</a:t>
+            </a:r>
+          </a:p>
+          <a:p>
+            <a:r>
+              <a:t>The boundaries of AI are not perfectly sharp. Avoid claiming every automated action learns. Advanced roadmap topics are context, not prerequisites students must master today.</a:t>
             </a:r>
           </a:p>
           <a:p>
@@ -1188,42 +1198,12 @@
           </a:p>
           <a:p>
             <a:r>
-              <a:t>CHECK AND EXPECTED ANSWER</a:t>
-            </a:r>
-          </a:p>
-          <a:p>
-            <a:r>
-              <a:t>Predicting concrete strength: regression. Predicting pass/fail: classification. Is a later test result available before that test? No.</a:t>
-            </a:r>
-          </a:p>
-          <a:p>
-            <a:r>
-              <a:t/>
-            </a:r>
-          </a:p>
-          <a:p>
-            <a:r>
-              <a:t>IF LEARNERS ARE STUCK</a:t>
-            </a:r>
-          </a:p>
-          <a:p>
-            <a:r>
-              <a:t>Describe the engineering decision in everyday language, then label one row, an input and its answer. Compare with a rule you could write directly.</a:t>
-            </a:r>
-          </a:p>
-          <a:p>
-            <a:r>
-              <a:t/>
-            </a:r>
-          </a:p>
-          <a:p>
-            <a:r>
-              <a:t>NEXT</a:t>
-            </a:r>
-          </a:p>
-          <a:p>
-            <a:r>
-              <a:t>Stage 2 is the one that matters to you. Move on after a learner can explain the current example or required action.</a:t>
+              <a:t>Continue to</a:t>
+            </a:r>
+          </a:p>
+          <a:p>
+            <a:r>
+              <a:t>Mathematics and programming foundations</a:t>
             </a:r>
           </a:p>
         </p:txBody>
@@ -1293,12 +1273,12 @@
           <a:lstStyle/>
           <a:p>
             <a:r>
-              <a:t>TEACHING PURPOSE</a:t>
-            </a:r>
-          </a:p>
-          <a:p>
-            <a:r>
-              <a:t>Stage 2 is the one that matters to you</a:t>
+              <a:t>Mathematics and programming foundations</a:t>
+            </a:r>
+          </a:p>
+          <a:p>
+            <a:r>
+              <a:t>CML3113, Week 1, slide 12</a:t>
             </a:r>
           </a:p>
           <a:p>
@@ -1308,12 +1288,12 @@
           </a:p>
           <a:p>
             <a:r>
-              <a:t>CONNECT</a:t>
-            </a:r>
-          </a:p>
-          <a:p>
-            <a:r>
-              <a:t>Build on the preceding slide: The machine learning roadmap.</a:t>
+              <a:t>Explanation to give</a:t>
+            </a:r>
+          </a:p>
+          <a:p>
+            <a:r>
+              <a:t>Acknowledge previous engineering mathematics without assuming every student recalls it. Explain each mathematical operation at the point it is used and connect it to a physical quantity.</a:t>
             </a:r>
           </a:p>
           <a:p>
@@ -1323,12 +1303,12 @@
           </a:p>
           <a:p>
             <a:r>
-              <a:t>LECTURER CUE</a:t>
-            </a:r>
-          </a:p>
-          <a:p>
-            <a:r>
-              <a:t>The mathematics stage — calculus, linear algebra, statistics, probability — is the one most people entering this field find hardest, and you did it in Years 1 and 2. What you are missing is stages 1 and 3, Python and the data libraries, which Weeks 2 to 6 cover in five weeks of work. The expensive prerequisite is already behind you.</a:t>
+              <a:t>Worked illustration / lecturer answer</a:t>
+            </a:r>
+          </a:p>
+          <a:p>
+            <a:r>
+              <a:t>Before a mean calculation, show total divided by count on three readings. Before a matrix appears, draw rows and columns. Before a percentage, show the fraction and multiplication by 100.</a:t>
             </a:r>
           </a:p>
           <a:p>
@@ -1338,12 +1318,12 @@
           </a:p>
           <a:p>
             <a:r>
-              <a:t>EXPLAIN IN ORDINARY WORDS</a:t>
-            </a:r>
-          </a:p>
-          <a:p>
-            <a:r>
-              <a:t>A probability-like score and a class decision are different outputs. A threshold turns a score into an action. Lowering a warning threshold usually raises both detections and false alarms.</a:t>
+              <a:t>Misconception to address</a:t>
+            </a:r>
+          </a:p>
+          <a:p>
+            <a:r>
+              <a:t>Do not tell struggling beginners that the programming is easy or that they should already know the prerequisites. Use their engineering context as a bridge and supply the missing explanation.</a:t>
             </a:r>
           </a:p>
           <a:p>
@@ -1353,42 +1333,12 @@
           </a:p>
           <a:p>
             <a:r>
-              <a:t>CHECK AND EXPECTED ANSWER</a:t>
-            </a:r>
-          </a:p>
-          <a:p>
-            <a:r>
-              <a:t>At a rule of score &gt;= 0.5, what happens at 0.5? It is positive. With &gt; 0.5 it would not be.</a:t>
-            </a:r>
-          </a:p>
-          <a:p>
-            <a:r>
-              <a:t/>
-            </a:r>
-          </a:p>
-          <a:p>
-            <a:r>
-              <a:t>IF LEARNERS ARE STUCK</a:t>
-            </a:r>
-          </a:p>
-          <a:p>
-            <a:r>
-              <a:t>Mark three scores below, at and above the boundary. Do not promise the score is well calibrated without checking.</a:t>
-            </a:r>
-          </a:p>
-          <a:p>
-            <a:r>
-              <a:t/>
-            </a:r>
-          </a:p>
-          <a:p>
-            <a:r>
-              <a:t>NEXT</a:t>
-            </a:r>
-          </a:p>
-          <a:p>
-            <a:r>
-              <a:t>Where this course sits, honestly. Move on after a learner can explain the current example or required action.</a:t>
+              <a:t>Continue to</a:t>
+            </a:r>
+          </a:p>
+          <a:p>
+            <a:r>
+              <a:t>Topics covered in this course</a:t>
             </a:r>
           </a:p>
         </p:txBody>
@@ -1458,12 +1408,12 @@
           <a:lstStyle/>
           <a:p>
             <a:r>
-              <a:t>TEACHING PURPOSE</a:t>
-            </a:r>
-          </a:p>
-          <a:p>
-            <a:r>
-              <a:t>Where this course sits, honestly</a:t>
+              <a:t>Topics covered in this course</a:t>
+            </a:r>
+          </a:p>
+          <a:p>
+            <a:r>
+              <a:t>CML3113, Week 1, slide 13</a:t>
             </a:r>
           </a:p>
           <a:p>
@@ -1473,12 +1423,12 @@
           </a:p>
           <a:p>
             <a:r>
-              <a:t>CONNECT</a:t>
-            </a:r>
-          </a:p>
-          <a:p>
-            <a:r>
-              <a:t>Build on the preceding slide: Stage 2 is the one that matters to you.</a:t>
+              <a:t>Explanation to give</a:t>
+            </a:r>
+          </a:p>
+          <a:p>
+            <a:r>
+              <a:t>Use the terminology to locate the course, not as vocabulary to memorise immediately. AI is the broad field; machine learning develops predictive rules from examples; deep learning is a family of machine-learning methods using neural networks.</a:t>
             </a:r>
           </a:p>
           <a:p>
@@ -1488,12 +1438,12 @@
           </a:p>
           <a:p>
             <a:r>
-              <a:t>LECTURER CUE</a:t>
-            </a:r>
-          </a:p>
-          <a:p>
-            <a:r>
-              <a:t>The grey stages sit outside this course: reinforcement learning, full MLOps and most of the advanced language-model material. If you want to go after them later, roadmap.sh publishes separate roadmaps for the AI engineer, the data scientist, MLOps and AI agents, and any of the four is a reasonable next step after December.</a:t>
+              <a:t>Worked illustration / lecturer answer</a:t>
+            </a:r>
+          </a:p>
+          <a:p>
+            <a:r>
+              <a:t>A fixed threshold alarm follows an explicitly supplied rule. A fault classifier fitted from labelled historical readings learns a rule from data. Both may support an engineering system, but only the second learns from examples.</a:t>
             </a:r>
           </a:p>
           <a:p>
@@ -1503,12 +1453,27 @@
           </a:p>
           <a:p>
             <a:r>
-              <a:t>NEXT</a:t>
-            </a:r>
-          </a:p>
-          <a:p>
-            <a:r>
-              <a:t>Four jobs this field splits into. Move on after a learner can explain the current example or required action.</a:t>
+              <a:t>Misconception to address</a:t>
+            </a:r>
+          </a:p>
+          <a:p>
+            <a:r>
+              <a:t>The boundaries of AI are not perfectly sharp. Avoid claiming every automated action learns. Advanced roadmap topics are context, not prerequisites students must master today.</a:t>
+            </a:r>
+          </a:p>
+          <a:p>
+            <a:r>
+              <a:t/>
+            </a:r>
+          </a:p>
+          <a:p>
+            <a:r>
+              <a:t>Continue to</a:t>
+            </a:r>
+          </a:p>
+          <a:p>
+            <a:r>
+              <a:t>Four jobs this field splits into</a:t>
             </a:r>
           </a:p>
         </p:txBody>
@@ -1578,27 +1543,27 @@
           <a:lstStyle/>
           <a:p>
             <a:r>
-              <a:t>TEACHING PURPOSE</a:t>
-            </a:r>
-          </a:p>
-          <a:p>
-            <a:r>
               <a:t>Four jobs this field splits into</a:t>
             </a:r>
           </a:p>
           <a:p>
             <a:r>
+              <a:t>CML3113, Week 1, slide 14</a:t>
+            </a:r>
+          </a:p>
+          <a:p>
+            <a:r>
               <a:t/>
             </a:r>
           </a:p>
           <a:p>
             <a:r>
-              <a:t>CONNECT</a:t>
-            </a:r>
-          </a:p>
-          <a:p>
-            <a:r>
-              <a:t>Build on the preceding slide: Where this course sits, honestly.</a:t>
+              <a:t>Explanation to give</a:t>
+            </a:r>
+          </a:p>
+          <a:p>
+            <a:r>
+              <a:t>Explain the sequence as increasing independence: first run and understand code, then inspect data, then build and evaluate a modest predictor, and finally communicate its limits.</a:t>
             </a:r>
           </a:p>
           <a:p>
@@ -1608,12 +1573,12 @@
           </a:p>
           <a:p>
             <a:r>
-              <a:t>LECTURER CUE</a:t>
-            </a:r>
-          </a:p>
-          <a:p>
-            <a:r>
-              <a:t>Four different roadmaps and four different careers. This course points at the first one, applied inside your own engineering discipline. A computer science graduate will beat you at general machine learning, and that contest is avoidable: a civil engineer who can model concrete strength, or a mining engineer who can predict concentrate quality, is competing in a much smaller field.</a:t>
+              <a:t>Worked illustration / lecturer answer</a:t>
+            </a:r>
+          </a:p>
+          <a:p>
+            <a:r>
+              <a:t>A learner should eventually be able to say what each input represents, reproduce the result from the files and defend why the chosen evaluation matches the intended use.</a:t>
             </a:r>
           </a:p>
           <a:p>
@@ -1623,12 +1588,12 @@
           </a:p>
           <a:p>
             <a:r>
-              <a:t>EXPLAIN IN ORDINARY WORDS</a:t>
-            </a:r>
-          </a:p>
-          <a:p>
-            <a:r>
-              <a:t>A feature is an input available when predicting. The target is the answer to learn from. Regression predicts a number; classification predicts a category. Learning patterns does not by itself establish cause.</a:t>
+              <a:t>Misconception to address</a:t>
+            </a:r>
+          </a:p>
+          <a:p>
+            <a:r>
+              <a:t>The roadmap is not a promise of professional mastery of every listed field in one semester. Point to the current week's small, observable goal.</a:t>
             </a:r>
           </a:p>
           <a:p>
@@ -1638,42 +1603,12 @@
           </a:p>
           <a:p>
             <a:r>
-              <a:t>CHECK AND EXPECTED ANSWER</a:t>
-            </a:r>
-          </a:p>
-          <a:p>
-            <a:r>
-              <a:t>Predicting concrete strength: regression. Predicting pass/fail: classification. Is a later test result available before that test? No.</a:t>
-            </a:r>
-          </a:p>
-          <a:p>
-            <a:r>
-              <a:t/>
-            </a:r>
-          </a:p>
-          <a:p>
-            <a:r>
-              <a:t>IF LEARNERS ARE STUCK</a:t>
-            </a:r>
-          </a:p>
-          <a:p>
-            <a:r>
-              <a:t>Describe the engineering decision in everyday language, then label one row, an input and its answer. Compare with a rule you could write directly.</a:t>
-            </a:r>
-          </a:p>
-          <a:p>
-            <a:r>
-              <a:t/>
-            </a:r>
-          </a:p>
-          <a:p>
-            <a:r>
-              <a:t>NEXT</a:t>
-            </a:r>
-          </a:p>
-          <a:p>
-            <a:r>
-              <a:t>What this course is actually about. Move on after a learner can explain the current example or required action.</a:t>
+              <a:t>Continue to</a:t>
+            </a:r>
+          </a:p>
+          <a:p>
+            <a:r>
+              <a:t>Machine learning in engineering</a:t>
             </a:r>
           </a:p>
         </p:txBody>
@@ -1743,12 +1678,12 @@
           <a:lstStyle/>
           <a:p>
             <a:r>
-              <a:t>TEACHING PURPOSE</a:t>
-            </a:r>
-          </a:p>
-          <a:p>
-            <a:r>
-              <a:t>What this course is actually about</a:t>
+              <a:t>Machine learning in engineering</a:t>
+            </a:r>
+          </a:p>
+          <a:p>
+            <a:r>
+              <a:t>CML3113, Week 1, slide 15</a:t>
             </a:r>
           </a:p>
           <a:p>
@@ -1758,12 +1693,12 @@
           </a:p>
           <a:p>
             <a:r>
-              <a:t>CONNECT</a:t>
-            </a:r>
-          </a:p>
-          <a:p>
-            <a:r>
-              <a:t>Build on the preceding slide: Four jobs this field splits into.</a:t>
+              <a:t>Explanation to give</a:t>
+            </a:r>
+          </a:p>
+          <a:p>
+            <a:r>
+              <a:t>Orient students to this particular lesson: explain what they will see demonstrated, which file they will use and what they must retain for revision. Keep the transition short enough to preserve explanation time.</a:t>
             </a:r>
           </a:p>
           <a:p>
@@ -1773,12 +1708,12 @@
           </a:p>
           <a:p>
             <a:r>
-              <a:t>LECTURER CUE</a:t>
-            </a:r>
-          </a:p>
-          <a:p>
-            <a:r>
-              <a:t>Three words — artificial intelligence, machine learning, data science — get used interchangeably in job adverts, papers and vendor brochures. Fifteen minutes here is what lets you read those documents without being misled by them.</a:t>
+              <a:t>Worked illustration / lecturer answer</a:t>
+            </a:r>
+          </a:p>
+          <a:p>
+            <a:r>
+              <a:t>Open the next worked example on the projector and name its input and intended result. Demonstrate it yourself before asking students to interpret a result. Use remaining summary and glossary pages for independent revision.</a:t>
             </a:r>
           </a:p>
           <a:p>
@@ -1788,12 +1723,27 @@
           </a:p>
           <a:p>
             <a:r>
-              <a:t>NEXT</a:t>
-            </a:r>
-          </a:p>
-          <a:p>
-            <a:r>
-              <a:t>The words, and how they nest. Move on after a learner can explain the current example or required action.</a:t>
+              <a:t>Misconception to address</a:t>
+            </a:r>
+          </a:p>
+          <a:p>
+            <a:r>
+              <a:t>The historical slide's timed group activity is not a requirement to stop for partner work. Use a lecturer-led walkthrough in the current limited class time.</a:t>
+            </a:r>
+          </a:p>
+          <a:p>
+            <a:r>
+              <a:t/>
+            </a:r>
+          </a:p>
+          <a:p>
+            <a:r>
+              <a:t>Continue to</a:t>
+            </a:r>
+          </a:p>
+          <a:p>
+            <a:r>
+              <a:t>The words, and how they nest</a:t>
             </a:r>
           </a:p>
         </p:txBody>
@@ -1863,27 +1813,27 @@
           <a:lstStyle/>
           <a:p>
             <a:r>
-              <a:t>TEACHING PURPOSE</a:t>
-            </a:r>
-          </a:p>
-          <a:p>
-            <a:r>
               <a:t>The words, and how they nest</a:t>
             </a:r>
           </a:p>
           <a:p>
             <a:r>
+              <a:t>CML3113, Week 1, slide 16</a:t>
+            </a:r>
+          </a:p>
+          <a:p>
+            <a:r>
               <a:t/>
             </a:r>
           </a:p>
           <a:p>
             <a:r>
-              <a:t>CONNECT</a:t>
-            </a:r>
-          </a:p>
-          <a:p>
-            <a:r>
-              <a:t>Build on the preceding slide: What this course is actually about.</a:t>
+              <a:t>Explanation to give</a:t>
+            </a:r>
+          </a:p>
+          <a:p>
+            <a:r>
+              <a:t>Use the terminology to locate the course, not as vocabulary to memorise immediately. AI is the broad field; machine learning develops predictive rules from examples; deep learning is a family of machine-learning methods using neural networks.</a:t>
             </a:r>
           </a:p>
           <a:p>
@@ -1893,12 +1843,12 @@
           </a:p>
           <a:p>
             <a:r>
-              <a:t>LECTURER CUE</a:t>
-            </a:r>
-          </a:p>
-          <a:p>
-            <a:r>
-              <a:t>Each term is contained by the one before it. Data science is the odd one out: it overlaps all of them and is contained by none, because it is the craft of getting an answer out of data at all — finding it, cleaning it, questioning it, presenting it. Most of your semester goes into the data science ring, and the modelling turns out to be the small part.</a:t>
+              <a:t>Worked illustration / lecturer answer</a:t>
+            </a:r>
+          </a:p>
+          <a:p>
+            <a:r>
+              <a:t>A fixed threshold alarm follows an explicitly supplied rule. A fault classifier fitted from labelled historical readings learns a rule from data. Both may support an engineering system, but only the second learns from examples.</a:t>
             </a:r>
           </a:p>
           <a:p>
@@ -1908,12 +1858,12 @@
           </a:p>
           <a:p>
             <a:r>
-              <a:t>EXPLAIN IN ORDINARY WORDS</a:t>
-            </a:r>
-          </a:p>
-          <a:p>
-            <a:r>
-              <a:t>A cleaning decision needs evidence, a stated rule and a before/after check. Similar rows may be genuine repeated events. Reconciliation compares totals built under the same definitions.</a:t>
+              <a:t>Misconception to address</a:t>
+            </a:r>
+          </a:p>
+          <a:p>
+            <a:r>
+              <a:t>The boundaries of AI are not perfectly sharp. Avoid claiming every automated action learns. Advanced roadmap topics are context, not prerequisites students must master today.</a:t>
             </a:r>
           </a:p>
           <a:p>
@@ -1923,42 +1873,12 @@
           </a:p>
           <a:p>
             <a:r>
-              <a:t>CHECK AND EXPECTED ANSWER</a:t>
-            </a:r>
-          </a:p>
-          <a:p>
-            <a:r>
-              <a:t>May we delete every repeated amount? No. Check the row identifier and the table grain first.</a:t>
-            </a:r>
-          </a:p>
-          <a:p>
-            <a:r>
-              <a:t/>
-            </a:r>
-          </a:p>
-          <a:p>
-            <a:r>
-              <a:t>IF LEARNERS ARE STUCK</a:t>
-            </a:r>
-          </a:p>
-          <a:p>
-            <a:r>
-              <a:t>Keep raw data, record counts before and after each action, then explain any remaining difference instead of forcing totals to agree.</a:t>
-            </a:r>
-          </a:p>
-          <a:p>
-            <a:r>
-              <a:t/>
-            </a:r>
-          </a:p>
-          <a:p>
-            <a:r>
-              <a:t>NEXT</a:t>
-            </a:r>
-          </a:p>
-          <a:p>
-            <a:r>
-              <a:t>Artificial intelligence. Move on after a learner can explain the current example or required action.</a:t>
+              <a:t>Continue to</a:t>
+            </a:r>
+          </a:p>
+          <a:p>
+            <a:r>
+              <a:t>Artificial intelligence</a:t>
             </a:r>
           </a:p>
         </p:txBody>
@@ -2028,27 +1948,27 @@
           <a:lstStyle/>
           <a:p>
             <a:r>
-              <a:t>TEACHING PURPOSE</a:t>
-            </a:r>
-          </a:p>
-          <a:p>
-            <a:r>
               <a:t>Artificial intelligence</a:t>
             </a:r>
           </a:p>
           <a:p>
             <a:r>
+              <a:t>CML3113, Week 1, slide 17</a:t>
+            </a:r>
+          </a:p>
+          <a:p>
+            <a:r>
               <a:t/>
             </a:r>
           </a:p>
           <a:p>
             <a:r>
-              <a:t>CONNECT</a:t>
-            </a:r>
-          </a:p>
-          <a:p>
-            <a:r>
-              <a:t>Build on the preceding slide: The words, and how they nest.</a:t>
+              <a:t>Explanation to give</a:t>
+            </a:r>
+          </a:p>
+          <a:p>
+            <a:r>
+              <a:t>Use the terminology to locate the course, not as vocabulary to memorise immediately. AI is the broad field; machine learning develops predictive rules from examples; deep learning is a family of machine-learning methods using neural networks.</a:t>
             </a:r>
           </a:p>
           <a:p>
@@ -2058,12 +1978,12 @@
           </a:p>
           <a:p>
             <a:r>
-              <a:t>LECTURER CUE</a:t>
-            </a:r>
-          </a:p>
-          <a:p>
-            <a:r>
-              <a:t>A thermostat follows one fixed rule and has no capacity to do better, which puts it outside the definition. A spam filter that improves as it sees more mail sits inside it. Whether any of this is 'really' intelligent is a genuine open question in the field; here the word is a label for an area of work.</a:t>
+              <a:t>Worked illustration / lecturer answer</a:t>
+            </a:r>
+          </a:p>
+          <a:p>
+            <a:r>
+              <a:t>A fixed threshold alarm follows an explicitly supplied rule. A fault classifier fitted from labelled historical readings learns a rule from data. Both may support an engineering system, but only the second learns from examples.</a:t>
             </a:r>
           </a:p>
           <a:p>
@@ -2073,12 +1993,12 @@
           </a:p>
           <a:p>
             <a:r>
-              <a:t>EXPLAIN IN ORDINARY WORDS</a:t>
-            </a:r>
-          </a:p>
-          <a:p>
-            <a:r>
-              <a:t>A feature is an input available when predicting. The target is the answer to learn from. Regression predicts a number; classification predicts a category. Learning patterns does not by itself establish cause.</a:t>
+              <a:t>Misconception to address</a:t>
+            </a:r>
+          </a:p>
+          <a:p>
+            <a:r>
+              <a:t>The boundaries of AI are not perfectly sharp. Avoid claiming every automated action learns. Advanced roadmap topics are context, not prerequisites students must master today.</a:t>
             </a:r>
           </a:p>
           <a:p>
@@ -2088,42 +2008,12 @@
           </a:p>
           <a:p>
             <a:r>
-              <a:t>CHECK AND EXPECTED ANSWER</a:t>
-            </a:r>
-          </a:p>
-          <a:p>
-            <a:r>
-              <a:t>Predicting concrete strength: regression. Predicting pass/fail: classification. Is a later test result available before that test? No.</a:t>
-            </a:r>
-          </a:p>
-          <a:p>
-            <a:r>
-              <a:t/>
-            </a:r>
-          </a:p>
-          <a:p>
-            <a:r>
-              <a:t>IF LEARNERS ARE STUCK</a:t>
-            </a:r>
-          </a:p>
-          <a:p>
-            <a:r>
-              <a:t>Describe the engineering decision in everyday language, then label one row, an input and its answer. Compare with a rule you could write directly.</a:t>
-            </a:r>
-          </a:p>
-          <a:p>
-            <a:r>
-              <a:t/>
-            </a:r>
-          </a:p>
-          <a:p>
-            <a:r>
-              <a:t>NEXT</a:t>
-            </a:r>
-          </a:p>
-          <a:p>
-            <a:r>
-              <a:t>Machine learning. Move on after a learner can explain the current example or required action.</a:t>
+              <a:t>Continue to</a:t>
+            </a:r>
+          </a:p>
+          <a:p>
+            <a:r>
+              <a:t>Machine learning</a:t>
             </a:r>
           </a:p>
         </p:txBody>
@@ -2193,27 +2083,27 @@
           <a:lstStyle/>
           <a:p>
             <a:r>
-              <a:t>TEACHING PURPOSE</a:t>
-            </a:r>
-          </a:p>
-          <a:p>
-            <a:r>
               <a:t>Machine learning</a:t>
             </a:r>
           </a:p>
           <a:p>
             <a:r>
+              <a:t>CML3113, Week 1, slide 18</a:t>
+            </a:r>
+          </a:p>
+          <a:p>
+            <a:r>
               <a:t/>
             </a:r>
           </a:p>
           <a:p>
             <a:r>
-              <a:t>CONNECT</a:t>
-            </a:r>
-          </a:p>
-          <a:p>
-            <a:r>
-              <a:t>Build on the preceding slide: Artificial intelligence.</a:t>
+              <a:t>Explanation to give</a:t>
+            </a:r>
+          </a:p>
+          <a:p>
+            <a:r>
+              <a:t>Contrast who supplies the decision rule. In conventional programming, the developer writes the rule. In supervised learning, the training examples contain inputs and known answers from which a fitting procedure estimates a rule.</a:t>
             </a:r>
           </a:p>
           <a:p>
@@ -2223,12 +2113,12 @@
           </a:p>
           <a:p>
             <a:r>
-              <a:t>LECTURER CUE</a:t>
-            </a:r>
-          </a:p>
-          <a:p>
-            <a:r>
-              <a:t>This is the definition the rest of the course rests on. Note the last step of the example: the computer infers a relationship and you then decide whether to trust it. That step is the easy one to skip, and Weeks 10 to 14 are entirely about it.</a:t>
+              <a:t>Worked illustration / lecturer answer</a:t>
+            </a:r>
+          </a:p>
+          <a:p>
+            <a:r>
+              <a:t>If a verified formula calculates area from length and width, use it. If many interacting readings affect an outcome and suitable labelled examples exist, a learned predictor may be worth evaluating.</a:t>
             </a:r>
           </a:p>
           <a:p>
@@ -2238,12 +2128,12 @@
           </a:p>
           <a:p>
             <a:r>
-              <a:t>EXPLAIN IN ORDINARY WORDS</a:t>
-            </a:r>
-          </a:p>
-          <a:p>
-            <a:r>
-              <a:t>A feature is an input available when predicting. The target is the answer to learn from. Regression predicts a number; classification predicts a category. Learning patterns does not by itself establish cause.</a:t>
+              <a:t>Misconception to address</a:t>
+            </a:r>
+          </a:p>
+          <a:p>
+            <a:r>
+              <a:t>The computer does not infer a trustworthy rule merely because data exists. Independent evaluation and domain checks still decide whether to use it.</a:t>
             </a:r>
           </a:p>
           <a:p>
@@ -2253,42 +2143,12 @@
           </a:p>
           <a:p>
             <a:r>
-              <a:t>CHECK AND EXPECTED ANSWER</a:t>
-            </a:r>
-          </a:p>
-          <a:p>
-            <a:r>
-              <a:t>Predicting concrete strength: regression. Predicting pass/fail: classification. Is a later test result available before that test? No.</a:t>
-            </a:r>
-          </a:p>
-          <a:p>
-            <a:r>
-              <a:t/>
-            </a:r>
-          </a:p>
-          <a:p>
-            <a:r>
-              <a:t>IF LEARNERS ARE STUCK</a:t>
-            </a:r>
-          </a:p>
-          <a:p>
-            <a:r>
-              <a:t>Describe the engineering decision in everyday language, then label one row, an input and its answer. Compare with a rule you could write directly.</a:t>
-            </a:r>
-          </a:p>
-          <a:p>
-            <a:r>
-              <a:t/>
-            </a:r>
-          </a:p>
-          <a:p>
-            <a:r>
-              <a:t>NEXT</a:t>
-            </a:r>
-          </a:p>
-          <a:p>
-            <a:r>
-              <a:t>Data science. Move on after a learner can explain the current example or required action.</a:t>
+              <a:t>Continue to</a:t>
+            </a:r>
+          </a:p>
+          <a:p>
+            <a:r>
+              <a:t>Data science</a:t>
             </a:r>
           </a:p>
         </p:txBody>
@@ -2358,27 +2218,27 @@
           <a:lstStyle/>
           <a:p>
             <a:r>
-              <a:t>TEACHING PURPOSE</a:t>
-            </a:r>
-          </a:p>
-          <a:p>
-            <a:r>
               <a:t>Data science</a:t>
             </a:r>
           </a:p>
           <a:p>
             <a:r>
+              <a:t>CML3113, Week 1, slide 19</a:t>
+            </a:r>
+          </a:p>
+          <a:p>
+            <a:r>
               <a:t/>
             </a:r>
           </a:p>
           <a:p>
             <a:r>
-              <a:t>CONNECT</a:t>
-            </a:r>
-          </a:p>
-          <a:p>
-            <a:r>
-              <a:t>Build on the preceding slide: Machine learning.</a:t>
+              <a:t>Explanation to give</a:t>
+            </a:r>
+          </a:p>
+          <a:p>
+            <a:r>
+              <a:t>Data science includes finding and examining data, correcting documented defects, analysing patterns and communicating justified conclusions. A prediction model is one possible tool within that work.</a:t>
             </a:r>
           </a:p>
           <a:p>
@@ -2388,12 +2248,12 @@
           </a:p>
           <a:p>
             <a:r>
-              <a:t>LECTURER CUE</a:t>
-            </a:r>
-          </a:p>
-          <a:p>
-            <a:r>
-              <a:t>In industry the split is roughly eighty per cent getting data into a usable state and twenty per cent modelling. An engineer with clean data beats a better algorithm with dirty data. The missing-assay example on this slide is a real Week 6 exercise: you will be handed records with a large part of one column absent and asked whether they are missing at random and what that does to your conclusion.</a:t>
+              <a:t>Worked illustration / lecturer answer</a:t>
+            </a:r>
+          </a:p>
+          <a:p>
+            <a:r>
+              <a:t>Before predicting energy use, check whether meter readings use the same unit and time interval. Discovering that half the readings are missing is already a meaningful data finding.</a:t>
             </a:r>
           </a:p>
           <a:p>
@@ -2403,12 +2263,12 @@
           </a:p>
           <a:p>
             <a:r>
-              <a:t>EXPLAIN IN ORDINARY WORDS</a:t>
-            </a:r>
-          </a:p>
-          <a:p>
-            <a:r>
-              <a:t>Missing means not recorded, not automatically zero. Decide why it is missing and document the rule. Fitted fill values must come from training data when evaluating a model.</a:t>
+              <a:t>Misconception to address</a:t>
+            </a:r>
+          </a:p>
+          <a:p>
+            <a:r>
+              <a:t>A project can answer a useful question without machine learning. Do not insert a model when a well-supported descriptive analysis answers the question.</a:t>
             </a:r>
           </a:p>
           <a:p>
@@ -2418,42 +2278,12 @@
           </a:p>
           <a:p>
             <a:r>
-              <a:t>CHECK AND EXPECTED ANSWER</a:t>
-            </a:r>
-          </a:p>
-          <a:p>
-            <a:r>
-              <a:t>Is an unrecorded energy reading evidence of zero consumption? No.</a:t>
-            </a:r>
-          </a:p>
-          <a:p>
-            <a:r>
-              <a:t/>
-            </a:r>
-          </a:p>
-          <a:p>
-            <a:r>
-              <a:t>IF LEARNERS ARE STUCK</a:t>
-            </a:r>
-          </a:p>
-          <a:p>
-            <a:r>
-              <a:t>Use three rows: a recorded zero, a recorded positive value and a blank. Explain their different meanings before cleaning.</a:t>
-            </a:r>
-          </a:p>
-          <a:p>
-            <a:r>
-              <a:t/>
-            </a:r>
-          </a:p>
-          <a:p>
-            <a:r>
-              <a:t>NEXT</a:t>
-            </a:r>
-          </a:p>
-          <a:p>
-            <a:r>
-              <a:t>Two ways to make a computer decide. Move on after a learner can explain the current example or required action.</a:t>
+              <a:t>Continue to</a:t>
+            </a:r>
+          </a:p>
+          <a:p>
+            <a:r>
+              <a:t>Two ways to make a computer decide</a:t>
             </a:r>
           </a:p>
         </p:txBody>
@@ -2523,27 +2353,27 @@
           <a:lstStyle/>
           <a:p>
             <a:r>
-              <a:t>TEACHING PURPOSE</a:t>
-            </a:r>
-          </a:p>
-          <a:p>
-            <a:r>
               <a:t>Jotham Martin Wambi</a:t>
             </a:r>
           </a:p>
           <a:p>
             <a:r>
+              <a:t>CML3113, Week 1, slide 2</a:t>
+            </a:r>
+          </a:p>
+          <a:p>
+            <a:r>
               <a:t/>
             </a:r>
           </a:p>
           <a:p>
             <a:r>
-              <a:t>CONNECT</a:t>
-            </a:r>
-          </a:p>
-          <a:p>
-            <a:r>
-              <a:t>Build on the preceding slide: AI, machine learning.</a:t>
+              <a:t>Explanation to give</a:t>
+            </a:r>
+          </a:p>
+          <a:p>
+            <a:r>
+              <a:t>Introduce your applied data and teaching work briefly, then link it to what beginners will learn in this course.</a:t>
             </a:r>
           </a:p>
           <a:p>
@@ -2553,32 +2383,12 @@
           </a:p>
           <a:p>
             <a:r>
-              <a:t>LECTURER CUE</a:t>
-            </a:r>
-          </a:p>
-          <a:p>
-            <a:r>
-              <a:t>A short introduction, and there is a reason for it beyond courtesy.</a:t>
-            </a:r>
-          </a:p>
-          <a:p>
-            <a:r>
-              <a:t>First, so that you know what you can ask me for. The work on the right is where my experience actually is: sensor data and predictive maintenance, language models over documents, and getting models into something a colleague can use. If your project heads in one of those directions I can help you in detail. If it heads somewhere I know less well, I will tell you that rather than guess.</a:t>
-            </a:r>
-          </a:p>
-          <a:p>
-            <a:r>
-              <a:t>Second, because of the route rather than the titles. I read economics and information technology as undergraduate degrees, and my first seven years of work were in banking, tax and product management, none of which involved building a model. Nobody starts where this field expects them to start, and the engineering degree you are already halfway through is a better foundation for machine learning than most computing degrees, for reasons we come to in the roadmap segment.</a:t>
-            </a:r>
-          </a:p>
-          <a:p>
-            <a:r>
-              <a:t>Third, so the claims in this course are checkable. Where I tell you a technique behaves a certain way, it is usually because I have watched it fail somewhere first.</a:t>
-            </a:r>
-          </a:p>
-          <a:p>
-            <a:r>
-              <a:t>The contact details are real. Use them.</a:t>
+              <a:t>Worked illustration / lecturer answer</a:t>
+            </a:r>
+          </a:p>
+          <a:p>
+            <a:r>
+              <a:t>Use the formally accurate affiliation: incoming PhD student in Applied Informatics, Osaka Metropolitan University, Japan, April 2027 intake. The acceptance precedes enrolment. The master’s institution is Yamaguchi University, Japan.</a:t>
             </a:r>
           </a:p>
           <a:p>
@@ -2588,12 +2398,12 @@
           </a:p>
           <a:p>
             <a:r>
-              <a:t>EXPLAIN IN ORDINARY WORDS</a:t>
-            </a:r>
-          </a:p>
-          <a:p>
-            <a:r>
-              <a:t>A condition is a True/False question. Python executes the matching indented branch. = assigns; == compares. &gt;= includes the boundary, while &gt; excludes it.</a:t>
+              <a:t>Misconception to address</a:t>
+            </a:r>
+          </a:p>
+          <a:p>
+            <a:r>
+              <a:t>The older visible “PhD student” wording predates the clarified enrolment status. Do not describe yourself as already enrolled for the December 2026 period.</a:t>
             </a:r>
           </a:p>
           <a:p>
@@ -2603,42 +2413,12 @@
           </a:p>
           <a:p>
             <a:r>
-              <a:t>CHECK AND EXPECTED ANSWER</a:t>
-            </a:r>
-          </a:p>
-          <a:p>
-            <a:r>
-              <a:t>With value 30, is value &gt;= 30 true? Yes. Is value &gt; 30 true? No.</a:t>
-            </a:r>
-          </a:p>
-          <a:p>
-            <a:r>
-              <a:t/>
-            </a:r>
-          </a:p>
-          <a:p>
-            <a:r>
-              <a:t>IF LEARNERS ARE STUCK</a:t>
-            </a:r>
-          </a:p>
-          <a:p>
-            <a:r>
-              <a:t>Try one value below, at and above the boundary before running the code.</a:t>
-            </a:r>
-          </a:p>
-          <a:p>
-            <a:r>
-              <a:t/>
-            </a:r>
-          </a:p>
-          <a:p>
-            <a:r>
-              <a:t>NEXT</a:t>
-            </a:r>
-          </a:p>
-          <a:p>
-            <a:r>
-              <a:t>By the end of today you can…. Move on after a learner can explain the current example or required action.</a:t>
+              <a:t>Continue to</a:t>
+            </a:r>
+          </a:p>
+          <a:p>
+            <a:r>
+              <a:t>By the end of today you can…</a:t>
             </a:r>
           </a:p>
         </p:txBody>
@@ -2708,27 +2488,27 @@
           <a:lstStyle/>
           <a:p>
             <a:r>
-              <a:t>TEACHING PURPOSE</a:t>
-            </a:r>
-          </a:p>
-          <a:p>
-            <a:r>
               <a:t>Two ways to make a computer decide</a:t>
             </a:r>
           </a:p>
           <a:p>
             <a:r>
+              <a:t>CML3113, Week 1, slide 20</a:t>
+            </a:r>
+          </a:p>
+          <a:p>
+            <a:r>
               <a:t/>
             </a:r>
           </a:p>
           <a:p>
             <a:r>
-              <a:t>CONNECT</a:t>
-            </a:r>
-          </a:p>
-          <a:p>
-            <a:r>
-              <a:t>Build on the preceding slide: Data science.</a:t>
+              <a:t>Explanation to give</a:t>
+            </a:r>
+          </a:p>
+          <a:p>
+            <a:r>
+              <a:t>Contrast who supplies the decision rule. In conventional programming, the developer writes the rule. In supervised learning, the training examples contain inputs and known answers from which a fitting procedure estimates a rule.</a:t>
             </a:r>
           </a:p>
           <a:p>
@@ -2738,12 +2518,12 @@
           </a:p>
           <a:p>
             <a:r>
-              <a:t>LECTURER CUE</a:t>
-            </a:r>
-          </a:p>
-          <a:p>
-            <a:r>
-              <a:t>The core teaching segment of the session: the difference between writing a rule and inferring one from examples, plus the vocabulary for talking about a table of data. Everything from Week 5 onwards assumes both.</a:t>
+              <a:t>Worked illustration / lecturer answer</a:t>
+            </a:r>
+          </a:p>
+          <a:p>
+            <a:r>
+              <a:t>If a verified formula calculates area from length and width, use it. If many interacting readings affect an outcome and suitable labelled examples exist, a learned predictor may be worth evaluating.</a:t>
             </a:r>
           </a:p>
           <a:p>
@@ -2753,12 +2533,27 @@
           </a:p>
           <a:p>
             <a:r>
-              <a:t>NEXT</a:t>
-            </a:r>
-          </a:p>
-          <a:p>
-            <a:r>
-              <a:t>"The silica assay takes an hour to come back from the laboratory. Can we know it now, from the process variables we already measure?". Move on after a learner can explain the current example or required action.</a:t>
+              <a:t>Misconception to address</a:t>
+            </a:r>
+          </a:p>
+          <a:p>
+            <a:r>
+              <a:t>The computer does not infer a trustworthy rule merely because data exists. Independent evaluation and domain checks still decide whether to use it.</a:t>
+            </a:r>
+          </a:p>
+          <a:p>
+            <a:r>
+              <a:t/>
+            </a:r>
+          </a:p>
+          <a:p>
+            <a:r>
+              <a:t>Continue to</a:t>
+            </a:r>
+          </a:p>
+          <a:p>
+            <a:r>
+              <a:t>"The silica assay takes an hour to come back from the laboratory. Can we know it now, from the process variables we already measure?"</a:t>
             </a:r>
           </a:p>
         </p:txBody>
@@ -2828,27 +2623,27 @@
           <a:lstStyle/>
           <a:p>
             <a:r>
-              <a:t>TEACHING PURPOSE</a:t>
-            </a:r>
-          </a:p>
-          <a:p>
-            <a:r>
               <a:t>"The silica assay takes an hour to come back from the laboratory. Can we know it now, from the process variables we already measure?"</a:t>
             </a:r>
           </a:p>
           <a:p>
             <a:r>
+              <a:t>CML3113, Week 1, slide 21</a:t>
+            </a:r>
+          </a:p>
+          <a:p>
+            <a:r>
               <a:t/>
             </a:r>
           </a:p>
           <a:p>
             <a:r>
-              <a:t>CONNECT</a:t>
-            </a:r>
-          </a:p>
-          <a:p>
-            <a:r>
-              <a:t>Build on the preceding slide: Two ways to make a computer decide.</a:t>
+              <a:t>Explanation to give</a:t>
+            </a:r>
+          </a:p>
+          <a:p>
+            <a:r>
+              <a:t>Explain assignment as evaluating the right side and attaching the name on the left to that result. The name can later refer to a different value. Read the equals sign as “assign”, rather than as a mathematical claim that lasts forever.</a:t>
             </a:r>
           </a:p>
           <a:p>
@@ -2858,12 +2653,12 @@
           </a:p>
           <a:p>
             <a:r>
-              <a:t>LECTURER CUE</a:t>
-            </a:r>
-          </a:p>
-          <a:p>
-            <a:r>
-              <a:t>Sit with the question before any answer arrives. Two honest first reactions are 'you cannot' and 'there must be a formula somewhere', and both are useful. The hands-on prediction exercise shows what a third answer looks like.</a:t>
+              <a:t>Worked illustration / lecturer answer</a:t>
+            </a:r>
+          </a:p>
+          <a:p>
+            <a:r>
+              <a:t>length_m = 4 makes length_m refer to 4. length_m = 6 replaces that association. Printing length_m now displays 6; the name does not remember a history of both values.</a:t>
             </a:r>
           </a:p>
           <a:p>
@@ -2873,12 +2668,12 @@
           </a:p>
           <a:p>
             <a:r>
-              <a:t>EXPLAIN IN ORDINARY WORDS</a:t>
-            </a:r>
-          </a:p>
-          <a:p>
-            <a:r>
-              <a:t>A value is a piece of information. A variable is a name referring to a value. In length_m = 5, Python evaluates the right side and binds that result to the name on the left.</a:t>
+              <a:t>Misconception to address</a:t>
+            </a:r>
+          </a:p>
+          <a:p>
+            <a:r>
+              <a:t>Changing text in a notebook cell changes the instructions. The runtime value changes only when that cell executes.</a:t>
             </a:r>
           </a:p>
           <a:p>
@@ -2888,42 +2683,12 @@
           </a:p>
           <a:p>
             <a:r>
-              <a:t>CHECK AND EXPECTED ANSWER</a:t>
-            </a:r>
-          </a:p>
-          <a:p>
-            <a:r>
-              <a:t>After x=3 then x=5, what does print(x) display? 5. The earlier value is not added automatically.</a:t>
-            </a:r>
-          </a:p>
-          <a:p>
-            <a:r>
-              <a:t/>
-            </a:r>
-          </a:p>
-          <a:p>
-            <a:r>
-              <a:t>IF LEARNERS ARE STUCK</a:t>
-            </a:r>
-          </a:p>
-          <a:p>
-            <a:r>
-              <a:t>Write the name on a card and the current value beside it. Distinguish number 3 from quoted text "3".</a:t>
-            </a:r>
-          </a:p>
-          <a:p>
-            <a:r>
-              <a:t/>
-            </a:r>
-          </a:p>
-          <a:p>
-            <a:r>
-              <a:t>NEXT</a:t>
-            </a:r>
-          </a:p>
-          <a:p>
-            <a:r>
-              <a:t>Traditional programming, and machine learning. Move on after a learner can explain the current example or required action.</a:t>
+              <a:t>Continue to</a:t>
+            </a:r>
+          </a:p>
+          <a:p>
+            <a:r>
+              <a:t>Traditional programming, and machine learning</a:t>
             </a:r>
           </a:p>
         </p:txBody>
@@ -2993,27 +2758,27 @@
           <a:lstStyle/>
           <a:p>
             <a:r>
-              <a:t>TEACHING PURPOSE</a:t>
-            </a:r>
-          </a:p>
-          <a:p>
-            <a:r>
               <a:t>Traditional programming, and machine learning</a:t>
             </a:r>
           </a:p>
           <a:p>
             <a:r>
+              <a:t>CML3113, Week 1, slide 22</a:t>
+            </a:r>
+          </a:p>
+          <a:p>
+            <a:r>
               <a:t/>
             </a:r>
           </a:p>
           <a:p>
             <a:r>
-              <a:t>CONNECT</a:t>
-            </a:r>
-          </a:p>
-          <a:p>
-            <a:r>
-              <a:t>Build on the preceding slide: "The silica assay takes an hour to come back from the laboratory. Can we know it now, from the process variables we already measure?".</a:t>
+              <a:t>Explanation to give</a:t>
+            </a:r>
+          </a:p>
+          <a:p>
+            <a:r>
+              <a:t>Contrast who supplies the decision rule. In conventional programming, the developer writes the rule. In supervised learning, the training examples contain inputs and known answers from which a fitting procedure estimates a rule.</a:t>
             </a:r>
           </a:p>
           <a:p>
@@ -3023,12 +2788,12 @@
           </a:p>
           <a:p>
             <a:r>
-              <a:t>LECTURER CUE</a:t>
-            </a:r>
-          </a:p>
-          <a:p>
-            <a:r>
-              <a:t>A worked case from your own discipline: IF the pulp pH falls below 9.0 THEN alarm the operator — Process engineering gives you that set point. No data is needed to write the rule. That belongs firmly in the left-hand column. The right-hand column earns its place when there is no threshold in any code of practice and no formula to look up, and you have examples of past cases instead. Neither column is better; the useful question is whether you already know the rule for the problem in front of you.</a:t>
+              <a:t>Worked illustration / lecturer answer</a:t>
+            </a:r>
+          </a:p>
+          <a:p>
+            <a:r>
+              <a:t>If a verified formula calculates area from length and width, use it. If many interacting readings affect an outcome and suitable labelled examples exist, a learned predictor may be worth evaluating.</a:t>
             </a:r>
           </a:p>
           <a:p>
@@ -3038,12 +2803,12 @@
           </a:p>
           <a:p>
             <a:r>
-              <a:t>EXPLAIN IN ORDINARY WORDS</a:t>
-            </a:r>
-          </a:p>
-          <a:p>
-            <a:r>
-              <a:t>A feature is an input available when predicting. The target is the answer to learn from. Regression predicts a number; classification predicts a category. Learning patterns does not by itself establish cause.</a:t>
+              <a:t>Misconception to address</a:t>
+            </a:r>
+          </a:p>
+          <a:p>
+            <a:r>
+              <a:t>The computer does not infer a trustworthy rule merely because data exists. Independent evaluation and domain checks still decide whether to use it.</a:t>
             </a:r>
           </a:p>
           <a:p>
@@ -3053,42 +2818,12 @@
           </a:p>
           <a:p>
             <a:r>
-              <a:t>CHECK AND EXPECTED ANSWER</a:t>
-            </a:r>
-          </a:p>
-          <a:p>
-            <a:r>
-              <a:t>Predicting concrete strength: regression. Predicting pass/fail: classification. Is a later test result available before that test? No.</a:t>
-            </a:r>
-          </a:p>
-          <a:p>
-            <a:r>
-              <a:t/>
-            </a:r>
-          </a:p>
-          <a:p>
-            <a:r>
-              <a:t>IF LEARNERS ARE STUCK</a:t>
-            </a:r>
-          </a:p>
-          <a:p>
-            <a:r>
-              <a:t>Describe the engineering decision in everyday language, then label one row, an input and its answer. Compare with a rule you could write directly.</a:t>
-            </a:r>
-          </a:p>
-          <a:p>
-            <a:r>
-              <a:t/>
-            </a:r>
-          </a:p>
-          <a:p>
-            <a:r>
-              <a:t>NEXT</a:t>
-            </a:r>
-          </a:p>
-          <a:p>
-            <a:r>
-              <a:t>When to write the rule, and when to learn it from data. Move on after a learner can explain the current example or required action.</a:t>
+              <a:t>Continue to</a:t>
+            </a:r>
+          </a:p>
+          <a:p>
+            <a:r>
+              <a:t>When to write the rule, and when to learn it from data</a:t>
             </a:r>
           </a:p>
         </p:txBody>
@@ -3158,27 +2893,27 @@
           <a:lstStyle/>
           <a:p>
             <a:r>
-              <a:t>TEACHING PURPOSE</a:t>
-            </a:r>
-          </a:p>
-          <a:p>
-            <a:r>
               <a:t>When to write the rule, and when to learn it from data</a:t>
             </a:r>
           </a:p>
           <a:p>
             <a:r>
+              <a:t>CML3113, Week 1, slide 23</a:t>
+            </a:r>
+          </a:p>
+          <a:p>
+            <a:r>
               <a:t/>
             </a:r>
           </a:p>
           <a:p>
             <a:r>
-              <a:t>CONNECT</a:t>
-            </a:r>
-          </a:p>
-          <a:p>
-            <a:r>
-              <a:t>Build on the preceding slide: Traditional programming, and machine learning.</a:t>
+              <a:t>Explanation to give</a:t>
+            </a:r>
+          </a:p>
+          <a:p>
+            <a:r>
+              <a:t>Contrast who supplies the decision rule. In conventional programming, the developer writes the rule. In supervised learning, the training examples contain inputs and known answers from which a fitting procedure estimates a rule.</a:t>
             </a:r>
           </a:p>
           <a:p>
@@ -3188,12 +2923,12 @@
           </a:p>
           <a:p>
             <a:r>
-              <a:t>LECTURER CUE</a:t>
-            </a:r>
-          </a:p>
-          <a:p>
-            <a:r>
-              <a:t>Most of engineering stays in the left-hand column and that is the correct place for it. The third item on the left is the one that decides real projects: a model whose decision cannot be explained line by line often cannot be used at all, whatever its accuracy on test data. That constraint returns in Week 12.</a:t>
+              <a:t>Worked illustration / lecturer answer</a:t>
+            </a:r>
+          </a:p>
+          <a:p>
+            <a:r>
+              <a:t>If a verified formula calculates area from length and width, use it. If many interacting readings affect an outcome and suitable labelled examples exist, a learned predictor may be worth evaluating.</a:t>
             </a:r>
           </a:p>
           <a:p>
@@ -3203,12 +2938,12 @@
           </a:p>
           <a:p>
             <a:r>
-              <a:t>EXPLAIN IN ORDINARY WORDS</a:t>
-            </a:r>
-          </a:p>
-          <a:p>
-            <a:r>
-              <a:t>A value is a piece of information. A variable is a name referring to a value. In length_m = 5, Python evaluates the right side and binds that result to the name on the left.</a:t>
+              <a:t>Misconception to address</a:t>
+            </a:r>
+          </a:p>
+          <a:p>
+            <a:r>
+              <a:t>The computer does not infer a trustworthy rule merely because data exists. Independent evaluation and domain checks still decide whether to use it.</a:t>
             </a:r>
           </a:p>
           <a:p>
@@ -3218,42 +2953,12 @@
           </a:p>
           <a:p>
             <a:r>
-              <a:t>CHECK AND EXPECTED ANSWER</a:t>
-            </a:r>
-          </a:p>
-          <a:p>
-            <a:r>
-              <a:t>After x=3 then x=5, what does print(x) display? 5. The earlier value is not added automatically.</a:t>
-            </a:r>
-          </a:p>
-          <a:p>
-            <a:r>
-              <a:t/>
-            </a:r>
-          </a:p>
-          <a:p>
-            <a:r>
-              <a:t>IF LEARNERS ARE STUCK</a:t>
-            </a:r>
-          </a:p>
-          <a:p>
-            <a:r>
-              <a:t>Write the name on a card and the current value beside it. Distinguish number 3 from quoted text "3".</a:t>
-            </a:r>
-          </a:p>
-          <a:p>
-            <a:r>
-              <a:t/>
-            </a:r>
-          </a:p>
-          <a:p>
-            <a:r>
-              <a:t>NEXT</a:t>
-            </a:r>
-          </a:p>
-          <a:p>
-            <a:r>
-              <a:t>What we actually mean by 'data'. Move on after a learner can explain the current example or required action.</a:t>
+              <a:t>Continue to</a:t>
+            </a:r>
+          </a:p>
+          <a:p>
+            <a:r>
+              <a:t>Data, features and targets</a:t>
             </a:r>
           </a:p>
         </p:txBody>
@@ -3323,12 +3028,12 @@
           <a:lstStyle/>
           <a:p>
             <a:r>
-              <a:t>TEACHING PURPOSE</a:t>
-            </a:r>
-          </a:p>
-          <a:p>
-            <a:r>
-              <a:t>What we actually mean by 'data'</a:t>
+              <a:t>Data, features and targets</a:t>
+            </a:r>
+          </a:p>
+          <a:p>
+            <a:r>
+              <a:t>CML3113, Week 1, slide 24</a:t>
             </a:r>
           </a:p>
           <a:p>
@@ -3338,12 +3043,12 @@
           </a:p>
           <a:p>
             <a:r>
-              <a:t>CONNECT</a:t>
-            </a:r>
-          </a:p>
-          <a:p>
-            <a:r>
-              <a:t>Build on the preceding slide: When to write the rule, and when to learn it from data.</a:t>
+              <a:t>Explanation to give</a:t>
+            </a:r>
+          </a:p>
+          <a:p>
+            <a:r>
+              <a:t>A feature is information available when making a prediction. The target is the answer recorded for training examples. One observation pairs its features with its own target.</a:t>
             </a:r>
           </a:p>
           <a:p>
@@ -3353,12 +3058,12 @@
           </a:p>
           <a:p>
             <a:r>
-              <a:t>LECTURER CUE</a:t>
-            </a:r>
-          </a:p>
-          <a:p>
-            <a:r>
-              <a:t>This is the picture to fix in your head, because every dataset you meet this semester has this shape. One row is one example. The feature columns hold what you know beforehand and the target column holds the thing you want to predict. Worth thinking about: the target of one problem can be a feature of another. Curing temperature is the target if you are studying an oven and a feature if you are predicting strength.</a:t>
+              <a:t>Worked illustration / lecturer answer</a:t>
+            </a:r>
+          </a:p>
+          <a:p>
+            <a:r>
+              <a:t>To predict tomorrow's cooling load, today's available weather information may be a feature. Tomorrow's measured cooling load becomes a target later. It cannot also be an input available now.</a:t>
             </a:r>
           </a:p>
           <a:p>
@@ -3368,12 +3073,12 @@
           </a:p>
           <a:p>
             <a:r>
-              <a:t>EXPLAIN IN ORDINARY WORDS</a:t>
-            </a:r>
-          </a:p>
-          <a:p>
-            <a:r>
-              <a:t>A feature is an input available when predicting. The target is the answer to learn from. Regression predicts a number; classification predicts a category. Learning patterns does not by itself establish cause.</a:t>
+              <a:t>Misconception to address</a:t>
+            </a:r>
+          </a:p>
+          <a:p>
+            <a:r>
+              <a:t>Information recorded after the decision can leak the answer. An identifier or row number is not automatically a meaningful predictor.</a:t>
             </a:r>
           </a:p>
           <a:p>
@@ -3383,42 +3088,12 @@
           </a:p>
           <a:p>
             <a:r>
-              <a:t>CHECK AND EXPECTED ANSWER</a:t>
-            </a:r>
-          </a:p>
-          <a:p>
-            <a:r>
-              <a:t>Predicting concrete strength: regression. Predicting pass/fail: classification. Is a later test result available before that test? No.</a:t>
-            </a:r>
-          </a:p>
-          <a:p>
-            <a:r>
-              <a:t/>
-            </a:r>
-          </a:p>
-          <a:p>
-            <a:r>
-              <a:t>IF LEARNERS ARE STUCK</a:t>
-            </a:r>
-          </a:p>
-          <a:p>
-            <a:r>
-              <a:t>Describe the engineering decision in everyday language, then label one row, an input and its answer. Compare with a rule you could write directly.</a:t>
-            </a:r>
-          </a:p>
-          <a:p>
-            <a:r>
-              <a:t/>
-            </a:r>
-          </a:p>
-          <a:p>
-            <a:r>
-              <a:t>NEXT</a:t>
-            </a:r>
-          </a:p>
-          <a:p>
-            <a:r>
-              <a:t>Feature, and target. Move on after a learner can explain the current example or required action.</a:t>
+              <a:t>Continue to</a:t>
+            </a:r>
+          </a:p>
+          <a:p>
+            <a:r>
+              <a:t>Feature, and target</a:t>
             </a:r>
           </a:p>
         </p:txBody>
@@ -3488,27 +3163,27 @@
           <a:lstStyle/>
           <a:p>
             <a:r>
-              <a:t>TEACHING PURPOSE</a:t>
-            </a:r>
-          </a:p>
-          <a:p>
-            <a:r>
               <a:t>Feature, and target</a:t>
             </a:r>
           </a:p>
           <a:p>
             <a:r>
+              <a:t>CML3113, Week 1, slide 25</a:t>
+            </a:r>
+          </a:p>
+          <a:p>
+            <a:r>
               <a:t/>
             </a:r>
           </a:p>
           <a:p>
             <a:r>
-              <a:t>CONNECT</a:t>
-            </a:r>
-          </a:p>
-          <a:p>
-            <a:r>
-              <a:t>Build on the preceding slide: What we actually mean by 'data'.</a:t>
+              <a:t>Explanation to give</a:t>
+            </a:r>
+          </a:p>
+          <a:p>
+            <a:r>
+              <a:t>A feature is information available when making a prediction. The target is the answer recorded for training examples. One observation pairs its features with its own target.</a:t>
             </a:r>
           </a:p>
           <a:p>
@@ -3518,12 +3193,12 @@
           </a:p>
           <a:p>
             <a:r>
-              <a:t>LECTURER CUE</a:t>
-            </a:r>
-          </a:p>
-          <a:p>
-            <a:r>
-              <a:t>The 'association is not a cause' line is the seed of correlation versus causation, which arrives properly in Week 8. One error to start watching for now: including a column that is only known after the target is known. That is data leakage, it is the most destructive mistake in applied machine learning, and Week 10 is a full session on it.</a:t>
+              <a:t>Worked illustration / lecturer answer</a:t>
+            </a:r>
+          </a:p>
+          <a:p>
+            <a:r>
+              <a:t>To predict tomorrow's cooling load, today's available weather information may be a feature. Tomorrow's measured cooling load becomes a target later. It cannot also be an input available now.</a:t>
             </a:r>
           </a:p>
           <a:p>
@@ -3533,12 +3208,12 @@
           </a:p>
           <a:p>
             <a:r>
-              <a:t>EXPLAIN IN ORDINARY WORDS</a:t>
-            </a:r>
-          </a:p>
-          <a:p>
-            <a:r>
-              <a:t>A feature is an input available when predicting. The target is the answer to learn from. Regression predicts a number; classification predicts a category. Learning patterns does not by itself establish cause.</a:t>
+              <a:t>Misconception to address</a:t>
+            </a:r>
+          </a:p>
+          <a:p>
+            <a:r>
+              <a:t>Information recorded after the decision can leak the answer. An identifier or row number is not automatically a meaningful predictor.</a:t>
             </a:r>
           </a:p>
           <a:p>
@@ -3548,42 +3223,12 @@
           </a:p>
           <a:p>
             <a:r>
-              <a:t>CHECK AND EXPECTED ANSWER</a:t>
-            </a:r>
-          </a:p>
-          <a:p>
-            <a:r>
-              <a:t>Predicting concrete strength: regression. Predicting pass/fail: classification. Is a later test result available before that test? No.</a:t>
-            </a:r>
-          </a:p>
-          <a:p>
-            <a:r>
-              <a:t/>
-            </a:r>
-          </a:p>
-          <a:p>
-            <a:r>
-              <a:t>IF LEARNERS ARE STUCK</a:t>
-            </a:r>
-          </a:p>
-          <a:p>
-            <a:r>
-              <a:t>Describe the engineering decision in everyday language, then label one row, an input and its answer. Compare with a rule you could write directly.</a:t>
-            </a:r>
-          </a:p>
-          <a:p>
-            <a:r>
-              <a:t/>
-            </a:r>
-          </a:p>
-          <a:p>
-            <a:r>
-              <a:t>NEXT</a:t>
-            </a:r>
-          </a:p>
-          <a:p>
-            <a:r>
-              <a:t>Can you answer these?. Move on after a learner can explain the current example or required action.</a:t>
+              <a:t>Continue to</a:t>
+            </a:r>
+          </a:p>
+          <a:p>
+            <a:r>
+              <a:t>Can you answer these?</a:t>
             </a:r>
           </a:p>
         </p:txBody>
@@ -3653,27 +3298,27 @@
           <a:lstStyle/>
           <a:p>
             <a:r>
-              <a:t>TEACHING PURPOSE</a:t>
-            </a:r>
-          </a:p>
-          <a:p>
-            <a:r>
               <a:t>Can you answer these?</a:t>
             </a:r>
           </a:p>
           <a:p>
             <a:r>
+              <a:t>CML3113, Week 1, slide 26</a:t>
+            </a:r>
+          </a:p>
+          <a:p>
+            <a:r>
               <a:t/>
             </a:r>
           </a:p>
           <a:p>
             <a:r>
-              <a:t>CONNECT</a:t>
-            </a:r>
-          </a:p>
-          <a:p>
-            <a:r>
-              <a:t>Build on the preceding slide: Feature, and target.</a:t>
+              <a:t>Explanation to give</a:t>
+            </a:r>
+          </a:p>
+          <a:p>
+            <a:r>
+              <a:t>Explain each answer in relation to the question rather than giving only its letter or label.</a:t>
             </a:r>
           </a:p>
           <a:p>
@@ -3683,12 +3328,62 @@
           </a:p>
           <a:p>
             <a:r>
-              <a:t>LECTURER CUE</a:t>
-            </a:r>
-          </a:p>
-          <a:p>
-            <a:r>
-              <a:t>Write something for each of the three before you turn to the answers. Question B is deliberately hard for Week 1 — noticing that the repair column can only be filled in after the failure has happened is enough at this stage, even if you cannot yet name what is wrong with using it.</a:t>
+              <a:t>Worked illustration / lecturer answer</a:t>
+            </a:r>
+          </a:p>
+          <a:p>
+            <a:r>
+              <a:t>ANSWERS</a:t>
+            </a:r>
+          </a:p>
+          <a:p>
+            <a:r>
+              <a:t>How did you do?</a:t>
+            </a:r>
+          </a:p>
+          <a:p>
+            <a:r>
+              <a:t>A</a:t>
+            </a:r>
+          </a:p>
+          <a:p>
+            <a:r>
+              <a:t>Feature or target?</a:t>
+            </a:r>
+          </a:p>
+          <a:p>
+            <a:r>
+              <a:t>The target. It is the thing you want to predict. Everything measured beforehand is a feature.</a:t>
+            </a:r>
+          </a:p>
+          <a:p>
+            <a:r>
+              <a:t>B</a:t>
+            </a:r>
+          </a:p>
+          <a:p>
+            <a:r>
+              <a:t>The repair column?</a:t>
+            </a:r>
+          </a:p>
+          <a:p>
+            <a:r>
+              <a:t>No. The repair is recorded after the failure, so it is unavailable at prediction time. Including it would give misleading test results. This is data leakage.</a:t>
+            </a:r>
+          </a:p>
+          <a:p>
+            <a:r>
+              <a:t>C</a:t>
+            </a:r>
+          </a:p>
+          <a:p>
+            <a:r>
+              <a:t>A rule you already know?</a:t>
+            </a:r>
+          </a:p>
+          <a:p>
+            <a:r>
+              <a:t>Anything with a formula or a code threshold: Contained metal is tonnage times grade. That is arithmetic; there is nothing to predict. If a validated equation exists, use the equation.</a:t>
             </a:r>
           </a:p>
           <a:p>
@@ -3698,12 +3393,12 @@
           </a:p>
           <a:p>
             <a:r>
-              <a:t>EXPLAIN IN ORDINARY WORDS</a:t>
-            </a:r>
-          </a:p>
-          <a:p>
-            <a:r>
-              <a:t>A feature is an input available when predicting. The target is the answer to learn from. Regression predicts a number; classification predicts a category. Learning patterns does not by itself establish cause.</a:t>
+              <a:t>Misconception to address</a:t>
+            </a:r>
+          </a:p>
+          <a:p>
+            <a:r>
+              <a:t>Use a short lecturer-led walkthrough or individual thought time. Do not require partner work to unlock the explanation.</a:t>
             </a:r>
           </a:p>
           <a:p>
@@ -3713,112 +3408,12 @@
           </a:p>
           <a:p>
             <a:r>
-              <a:t>CHECK AND EXPECTED ANSWER</a:t>
-            </a:r>
-          </a:p>
-          <a:p>
-            <a:r>
-              <a:t>Predicting concrete strength: regression. Predicting pass/fail: classification. Is a later test result available before that test? No.</a:t>
-            </a:r>
-          </a:p>
-          <a:p>
-            <a:r>
-              <a:t/>
-            </a:r>
-          </a:p>
-          <a:p>
-            <a:r>
-              <a:t>IF LEARNERS ARE STUCK</a:t>
-            </a:r>
-          </a:p>
-          <a:p>
-            <a:r>
-              <a:t>Describe the engineering decision in everyday language, then label one row, an input and its answer. Compare with a rule you could write directly.</a:t>
-            </a:r>
-          </a:p>
-          <a:p>
-            <a:r>
-              <a:t/>
-            </a:r>
-          </a:p>
-          <a:p>
-            <a:r>
-              <a:t>DISCUSSION KEY FOR THIS SLIDE</a:t>
-            </a:r>
-          </a:p>
-          <a:p>
-            <a:r>
-              <a:t>ANSWERS</a:t>
+              <a:t>Continue to</a:t>
             </a:r>
           </a:p>
           <a:p>
             <a:r>
               <a:t>How did you do?</a:t>
-            </a:r>
-          </a:p>
-          <a:p>
-            <a:r>
-              <a:t>A</a:t>
-            </a:r>
-          </a:p>
-          <a:p>
-            <a:r>
-              <a:t>Feature or target?</a:t>
-            </a:r>
-          </a:p>
-          <a:p>
-            <a:r>
-              <a:t>The target. It is the thing you want to predict. Everything measured beforehand is a feature.</a:t>
-            </a:r>
-          </a:p>
-          <a:p>
-            <a:r>
-              <a:t>B</a:t>
-            </a:r>
-          </a:p>
-          <a:p>
-            <a:r>
-              <a:t>The repair column?</a:t>
-            </a:r>
-          </a:p>
-          <a:p>
-            <a:r>
-              <a:t>No. You only know what repair was done AFTER the failure, so it cannot help you predict the failure. Include it and your model will look brilliant in testing and be useless in service. This is called data leakage and we spend a whole session on it in Week 10.</a:t>
-            </a:r>
-          </a:p>
-          <a:p>
-            <a:r>
-              <a:t>C</a:t>
-            </a:r>
-          </a:p>
-          <a:p>
-            <a:r>
-              <a:t>A rule you already know?</a:t>
-            </a:r>
-          </a:p>
-          <a:p>
-            <a:r>
-              <a:t>Anything with a formula or a code threshold: Contained metal is tonnage times grade. That is arithmetic; there is nothing to predict. If a validated equation exists, use the equation.</a:t>
-            </a:r>
-          </a:p>
-          <a:p>
-            <a:r>
-              <a:t>Let learners attempt first; use this to explain the reasoning, not just reveal the answer.</a:t>
-            </a:r>
-          </a:p>
-          <a:p>
-            <a:r>
-              <a:t/>
-            </a:r>
-          </a:p>
-          <a:p>
-            <a:r>
-              <a:t>NEXT</a:t>
-            </a:r>
-          </a:p>
-          <a:p>
-            <a:r>
-              <a:t>How did you do?. Move on after a learner can explain the current example or required action.</a:t>
             </a:r>
           </a:p>
         </p:txBody>
@@ -3888,27 +3483,27 @@
           <a:lstStyle/>
           <a:p>
             <a:r>
-              <a:t>TEACHING PURPOSE</a:t>
-            </a:r>
-          </a:p>
-          <a:p>
-            <a:r>
               <a:t>How did you do?</a:t>
             </a:r>
           </a:p>
           <a:p>
             <a:r>
+              <a:t>CML3113, Week 1, slide 27</a:t>
+            </a:r>
+          </a:p>
+          <a:p>
+            <a:r>
               <a:t/>
             </a:r>
           </a:p>
           <a:p>
             <a:r>
-              <a:t>CONNECT</a:t>
-            </a:r>
-          </a:p>
-          <a:p>
-            <a:r>
-              <a:t>Build on the preceding slide: Can you answer these?.</a:t>
+              <a:t>Explanation to give</a:t>
+            </a:r>
+          </a:p>
+          <a:p>
+            <a:r>
+              <a:t>For each answer on this slide, identify the deciding feature of the question: timing of the input, kind of target, run order or operation requested.</a:t>
             </a:r>
           </a:p>
           <a:p>
@@ -3918,12 +3513,37 @@
           </a:p>
           <a:p>
             <a:r>
-              <a:t>LECTURER CUE</a:t>
-            </a:r>
-          </a:p>
-          <a:p>
-            <a:r>
-              <a:t>Getting B wrong is normal; professional teams ship this bug regularly and only find it when the model reaches service. The name for it is data leakage. The timing test in answer B — could I know this column before the outcome? — is the one habit to carry out of this slide.</a:t>
+              <a:t>Worked illustration / lecturer answer</a:t>
+            </a:r>
+          </a:p>
+          <a:p>
+            <a:r>
+              <a:t>Feature or target?</a:t>
+            </a:r>
+          </a:p>
+          <a:p>
+            <a:r>
+              <a:t>The target. It is the thing you want to predict. Everything measured beforehand is a feature.</a:t>
+            </a:r>
+          </a:p>
+          <a:p>
+            <a:r>
+              <a:t>The repair column?</a:t>
+            </a:r>
+          </a:p>
+          <a:p>
+            <a:r>
+              <a:t>No. The repair is recorded after the failure, so it is unavailable at prediction time. Including it would give misleading test results. This is data leakage.</a:t>
+            </a:r>
+          </a:p>
+          <a:p>
+            <a:r>
+              <a:t>A rule you already know?</a:t>
+            </a:r>
+          </a:p>
+          <a:p>
+            <a:r>
+              <a:t>Anything with a formula or a code threshold: Contained metal is tonnage times grade. That is arithmetic; there is nothing to predict. If a validated equation exists, use the equation.</a:t>
             </a:r>
           </a:p>
           <a:p>
@@ -3933,12 +3553,12 @@
           </a:p>
           <a:p>
             <a:r>
-              <a:t>EXPLAIN IN ORDINARY WORDS</a:t>
-            </a:r>
-          </a:p>
-          <a:p>
-            <a:r>
-              <a:t>Training fits rules. Validation helps choose among rules. The final test estimates performance after choices are fixed. Information that would be unavailable at the real prediction time must stay out of the inputs.</a:t>
+              <a:t>Misconception to address</a:t>
+            </a:r>
+          </a:p>
+          <a:p>
+            <a:r>
+              <a:t>If a student gives a different engineering example, check its reasoning and timing rather than requiring identical wording to the printed example.</a:t>
             </a:r>
           </a:p>
           <a:p>
@@ -3948,42 +3568,12 @@
           </a:p>
           <a:p>
             <a:r>
-              <a:t>CHECK AND EXPECTED ANSWER</a:t>
-            </a:r>
-          </a:p>
-          <a:p>
-            <a:r>
-              <a:t>May two readings of the same machine appear on both sides when evaluating new machines? No; split by machine. For forecasting, train on the past and evaluate later time.</a:t>
-            </a:r>
-          </a:p>
-          <a:p>
-            <a:r>
-              <a:t/>
-            </a:r>
-          </a:p>
-          <a:p>
-            <a:r>
-              <a:t>IF LEARNERS ARE STUCK</a:t>
-            </a:r>
-          </a:p>
-          <a:p>
-            <a:r>
-              <a:t>Use three envelopes. Keep the final-test envelope closed while selecting features or settings.</a:t>
-            </a:r>
-          </a:p>
-          <a:p>
-            <a:r>
-              <a:t/>
-            </a:r>
-          </a:p>
-          <a:p>
-            <a:r>
-              <a:t>NEXT</a:t>
-            </a:r>
-          </a:p>
-          <a:p>
-            <a:r>
-              <a:t>Hands on: predict case 13. Move on after a learner can explain the current example or required action.</a:t>
+              <a:t>Continue to</a:t>
+            </a:r>
+          </a:p>
+          <a:p>
+            <a:r>
+              <a:t>Hands on: predict case 13</a:t>
             </a:r>
           </a:p>
         </p:txBody>
@@ -4053,27 +3643,27 @@
           <a:lstStyle/>
           <a:p>
             <a:r>
-              <a:t>TEACHING PURPOSE</a:t>
-            </a:r>
-          </a:p>
-          <a:p>
-            <a:r>
               <a:t>Hands on: predict case 13</a:t>
             </a:r>
           </a:p>
           <a:p>
             <a:r>
+              <a:t>CML3113, Week 1, slide 28</a:t>
+            </a:r>
+          </a:p>
+          <a:p>
+            <a:r>
               <a:t/>
             </a:r>
           </a:p>
           <a:p>
             <a:r>
-              <a:t>CONNECT</a:t>
-            </a:r>
-          </a:p>
-          <a:p>
-            <a:r>
-              <a:t>Build on the preceding slide: How did you do?.</a:t>
+              <a:t>Explanation to give</a:t>
+            </a:r>
+          </a:p>
+          <a:p>
+            <a:r>
+              <a:t>Explain this as a small manual demonstration of learning from examples. Use known rows to propose a rule, write a prediction before revealing the held-out answer, then measure the difference honestly.</a:t>
             </a:r>
           </a:p>
           <a:p>
@@ -4083,12 +3673,12 @@
           </a:p>
           <a:p>
             <a:r>
-              <a:t>LECTURER CUE</a:t>
-            </a:r>
-          </a:p>
-          <a:p>
-            <a:r>
-              <a:t>Teams of four or five, formed now and kept for the rest of the semester. You are about to do machine learning by hand, on paper, before anybody writes a line of code.</a:t>
+              <a:t>Worked illustration / lecturer answer</a:t>
+            </a:r>
+          </a:p>
+          <a:p>
+            <a:r>
+              <a:t>Locate cases with nearby feature values and compare their outcomes. Explain why a between-neighbours estimate is plausible and what it ignores. Use the actual handout's values rather than inventing the hidden case result.</a:t>
             </a:r>
           </a:p>
           <a:p>
@@ -4098,12 +3688,12 @@
           </a:p>
           <a:p>
             <a:r>
-              <a:t>EXPLAIN IN ORDINARY WORDS</a:t>
-            </a:r>
-          </a:p>
-          <a:p>
-            <a:r>
-              <a:t>A feature is an input available when predicting. The target is the answer to learn from. Regression predicts a number; classification predicts a category. Learning patterns does not by itself establish cause.</a:t>
+              <a:t>Misconception to address</a:t>
+            </a:r>
+          </a:p>
+          <a:p>
+            <a:r>
+              <a:t>One held-out case illustrates evaluation but is insufficient evidence of general reliability. Do not revise a prediction after seeing the answer and describe it as the original estimate.</a:t>
             </a:r>
           </a:p>
           <a:p>
@@ -4113,42 +3703,12 @@
           </a:p>
           <a:p>
             <a:r>
-              <a:t>CHECK AND EXPECTED ANSWER</a:t>
-            </a:r>
-          </a:p>
-          <a:p>
-            <a:r>
-              <a:t>Predicting concrete strength: regression. Predicting pass/fail: classification. Is a later test result available before that test? No.</a:t>
-            </a:r>
-          </a:p>
-          <a:p>
-            <a:r>
-              <a:t/>
-            </a:r>
-          </a:p>
-          <a:p>
-            <a:r>
-              <a:t>IF LEARNERS ARE STUCK</a:t>
-            </a:r>
-          </a:p>
-          <a:p>
-            <a:r>
-              <a:t>Describe the engineering decision in everyday language, then label one row, an input and its answer. Compare with a rule you could write directly.</a:t>
-            </a:r>
-          </a:p>
-          <a:p>
-            <a:r>
-              <a:t/>
-            </a:r>
-          </a:p>
-          <a:p>
-            <a:r>
-              <a:t>NEXT</a:t>
-            </a:r>
-          </a:p>
-          <a:p>
-            <a:r>
-              <a:t>Your task. Move on after a learner can explain the current example or required action.</a:t>
+              <a:t>Continue to</a:t>
+            </a:r>
+          </a:p>
+          <a:p>
+            <a:r>
+              <a:t>Your task</a:t>
             </a:r>
           </a:p>
         </p:txBody>
@@ -4218,27 +3778,27 @@
           <a:lstStyle/>
           <a:p>
             <a:r>
-              <a:t>TEACHING PURPOSE</a:t>
-            </a:r>
-          </a:p>
-          <a:p>
-            <a:r>
               <a:t>Your task</a:t>
             </a:r>
           </a:p>
           <a:p>
             <a:r>
+              <a:t>CML3113, Week 1, slide 29</a:t>
+            </a:r>
+          </a:p>
+          <a:p>
+            <a:r>
               <a:t/>
             </a:r>
           </a:p>
           <a:p>
             <a:r>
-              <a:t>CONNECT</a:t>
-            </a:r>
-          </a:p>
-          <a:p>
-            <a:r>
-              <a:t>Build on the preceding slide: Hands on: predict case 13.</a:t>
+              <a:t>Explanation to give</a:t>
+            </a:r>
+          </a:p>
+          <a:p>
+            <a:r>
+              <a:t>Explain this as a small manual demonstration of learning from examples. Use known rows to propose a rule, write a prediction before revealing the held-out answer, then measure the difference honestly.</a:t>
             </a:r>
           </a:p>
           <a:p>
@@ -4248,12 +3808,12 @@
           </a:p>
           <a:p>
             <a:r>
-              <a:t>LECTURER CUE</a:t>
-            </a:r>
-          </a:p>
-          <a:p>
-            <a:r>
-              <a:t>The number your team predicts matters far less than the sentence saying how you got it, so write the reasoning down. The next three slides give names to whatever method you used, and that only works if you can still see what you did. If you are stuck, start with one question: which single column seems to move with the outcome, and why that one?</a:t>
+              <a:t>Worked illustration / lecturer answer</a:t>
+            </a:r>
+          </a:p>
+          <a:p>
+            <a:r>
+              <a:t>Locate cases with nearby feature values and compare their outcomes. Explain why a between-neighbours estimate is plausible and what it ignores. Use the actual handout's values rather than inventing the hidden case result.</a:t>
             </a:r>
           </a:p>
           <a:p>
@@ -4263,12 +3823,12 @@
           </a:p>
           <a:p>
             <a:r>
-              <a:t>EXPLAIN IN ORDINARY WORDS</a:t>
-            </a:r>
-          </a:p>
-          <a:p>
-            <a:r>
-              <a:t>A feature is an input available when predicting. The target is the answer to learn from. Regression predicts a number; classification predicts a category. Learning patterns does not by itself establish cause.</a:t>
+              <a:t>Misconception to address</a:t>
+            </a:r>
+          </a:p>
+          <a:p>
+            <a:r>
+              <a:t>One held-out case illustrates evaluation but is insufficient evidence of general reliability. Do not revise a prediction after seeing the answer and describe it as the original estimate.</a:t>
             </a:r>
           </a:p>
           <a:p>
@@ -4278,42 +3838,12 @@
           </a:p>
           <a:p>
             <a:r>
-              <a:t>CHECK AND EXPECTED ANSWER</a:t>
-            </a:r>
-          </a:p>
-          <a:p>
-            <a:r>
-              <a:t>Predicting concrete strength: regression. Predicting pass/fail: classification. Is a later test result available before that test? No.</a:t>
-            </a:r>
-          </a:p>
-          <a:p>
-            <a:r>
-              <a:t/>
-            </a:r>
-          </a:p>
-          <a:p>
-            <a:r>
-              <a:t>IF LEARNERS ARE STUCK</a:t>
-            </a:r>
-          </a:p>
-          <a:p>
-            <a:r>
-              <a:t>Describe the engineering decision in everyday language, then label one row, an input and its answer. Compare with a rule you could write directly.</a:t>
-            </a:r>
-          </a:p>
-          <a:p>
-            <a:r>
-              <a:t/>
-            </a:r>
-          </a:p>
-          <a:p>
-            <a:r>
-              <a:t>NEXT</a:t>
-            </a:r>
-          </a:p>
-          <a:p>
-            <a:r>
-              <a:t>Reading the pattern from twelve cases. Move on after a learner can explain the current example or required action.</a:t>
+              <a:t>Continue to</a:t>
+            </a:r>
+          </a:p>
+          <a:p>
+            <a:r>
+              <a:t>Reading the pattern from twelve cases</a:t>
             </a:r>
           </a:p>
         </p:txBody>
@@ -4383,27 +3913,27 @@
           <a:lstStyle/>
           <a:p>
             <a:r>
-              <a:t>TEACHING PURPOSE</a:t>
-            </a:r>
-          </a:p>
-          <a:p>
-            <a:r>
               <a:t>By the end of today you can…</a:t>
             </a:r>
           </a:p>
           <a:p>
             <a:r>
+              <a:t>CML3113, Week 1, slide 3</a:t>
+            </a:r>
+          </a:p>
+          <a:p>
+            <a:r>
               <a:t/>
             </a:r>
           </a:p>
           <a:p>
             <a:r>
-              <a:t>CONNECT</a:t>
-            </a:r>
-          </a:p>
-          <a:p>
-            <a:r>
-              <a:t>Build on the preceding slide: Jotham Martin Wambi.</a:t>
+              <a:t>Explanation to give</a:t>
+            </a:r>
+          </a:p>
+          <a:p>
+            <a:r>
+              <a:t>Start with an engineering decision, then introduce learning from examples. No code is needed today.</a:t>
             </a:r>
           </a:p>
           <a:p>
@@ -4413,12 +3943,12 @@
           </a:p>
           <a:p>
             <a:r>
-              <a:t>LECTURER CUE</a:t>
-            </a:r>
-          </a:p>
-          <a:p>
-            <a:r>
-              <a:t>Seven objectives, and they are the whole session. Nothing is hidden behind them and there is no reading list you are expected to have done. Mark yourself against each one at the end of the session; whatever you cannot claim is what to revise before Week 2.</a:t>
+              <a:t>Worked illustration / lecturer answer</a:t>
+            </a:r>
+          </a:p>
+          <a:p>
+            <a:r>
+              <a:t>A numerical quantity such as days until servicing is a regression target. A label such as service due is a classification target.</a:t>
             </a:r>
           </a:p>
           <a:p>
@@ -4428,12 +3958,12 @@
           </a:p>
           <a:p>
             <a:r>
-              <a:t>EXPLAIN IN ORDINARY WORDS</a:t>
-            </a:r>
-          </a:p>
-          <a:p>
-            <a:r>
-              <a:t>A feature is an input available when predicting. The target is the answer to learn from. Regression predicts a number; classification predicts a category. Learning patterns does not by itself establish cause.</a:t>
+              <a:t>Misconception to address</a:t>
+            </a:r>
+          </a:p>
+          <a:p>
+            <a:r>
+              <a:t>Use the outcomes listed on this slide to check understanding through the small examples, rather than asking only whether everybody understands.</a:t>
             </a:r>
           </a:p>
           <a:p>
@@ -4443,42 +3973,12 @@
           </a:p>
           <a:p>
             <a:r>
-              <a:t>CHECK AND EXPECTED ANSWER</a:t>
-            </a:r>
-          </a:p>
-          <a:p>
-            <a:r>
-              <a:t>Predicting concrete strength: regression. Predicting pass/fail: classification. Is a later test result available before that test? No.</a:t>
-            </a:r>
-          </a:p>
-          <a:p>
-            <a:r>
-              <a:t/>
-            </a:r>
-          </a:p>
-          <a:p>
-            <a:r>
-              <a:t>IF LEARNERS ARE STUCK</a:t>
-            </a:r>
-          </a:p>
-          <a:p>
-            <a:r>
-              <a:t>Describe the engineering decision in everyday language, then label one row, an input and its answer. Compare with a rule you could write directly.</a:t>
-            </a:r>
-          </a:p>
-          <a:p>
-            <a:r>
-              <a:t/>
-            </a:r>
-          </a:p>
-          <a:p>
-            <a:r>
-              <a:t>NEXT</a:t>
-            </a:r>
-          </a:p>
-          <a:p>
-            <a:r>
-              <a:t>How every session this semester is shaped. Move on after a learner can explain the current example or required action.</a:t>
+              <a:t>Continue to</a:t>
+            </a:r>
+          </a:p>
+          <a:p>
+            <a:r>
+              <a:t>How every session this semester is shaped</a:t>
             </a:r>
           </a:p>
         </p:txBody>
@@ -4548,27 +4048,27 @@
           <a:lstStyle/>
           <a:p>
             <a:r>
-              <a:t>TEACHING PURPOSE</a:t>
-            </a:r>
-          </a:p>
-          <a:p>
-            <a:r>
               <a:t>Reading the pattern from twelve cases</a:t>
             </a:r>
           </a:p>
           <a:p>
             <a:r>
+              <a:t>CML3113, Week 1, slide 30</a:t>
+            </a:r>
+          </a:p>
+          <a:p>
+            <a:r>
               <a:t/>
             </a:r>
           </a:p>
           <a:p>
             <a:r>
-              <a:t>CONNECT</a:t>
-            </a:r>
-          </a:p>
-          <a:p>
-            <a:r>
-              <a:t>Build on the preceding slide: Your task.</a:t>
+              <a:t>Explanation to give</a:t>
+            </a:r>
+          </a:p>
+          <a:p>
+            <a:r>
+              <a:t>Explain this as a small manual demonstration of learning from examples. Use known rows to propose a rule, write a prediction before revealing the held-out answer, then measure the difference honestly.</a:t>
             </a:r>
           </a:p>
           <a:p>
@@ -4578,12 +4078,12 @@
           </a:p>
           <a:p>
             <a:r>
-              <a:t>LECTURER CUE</a:t>
-            </a:r>
-          </a:p>
-          <a:p>
-            <a:r>
-              <a:t>There is no single right method, and this is one line of thinking that works. Step five is what separates an engineer from a calculator: how confident am I, and what would change my mind? The two practical tests, in Weeks 7 and 14, assess that step far more heavily than the arithmetic.</a:t>
+              <a:t>Worked illustration / lecturer answer</a:t>
+            </a:r>
+          </a:p>
+          <a:p>
+            <a:r>
+              <a:t>Locate cases with nearby feature values and compare their outcomes. Explain why a between-neighbours estimate is plausible and what it ignores. Use the actual handout's values rather than inventing the hidden case result.</a:t>
             </a:r>
           </a:p>
           <a:p>
@@ -4593,12 +4093,27 @@
           </a:p>
           <a:p>
             <a:r>
-              <a:t>NEXT</a:t>
-            </a:r>
-          </a:p>
-          <a:p>
-            <a:r>
-              <a:t>The answer, and your error. Move on after a learner can explain the current example or required action.</a:t>
+              <a:t>Misconception to address</a:t>
+            </a:r>
+          </a:p>
+          <a:p>
+            <a:r>
+              <a:t>One held-out case illustrates evaluation but is insufficient evidence of general reliability. Do not revise a prediction after seeing the answer and describe it as the original estimate.</a:t>
+            </a:r>
+          </a:p>
+          <a:p>
+            <a:r>
+              <a:t/>
+            </a:r>
+          </a:p>
+          <a:p>
+            <a:r>
+              <a:t>Continue to</a:t>
+            </a:r>
+          </a:p>
+          <a:p>
+            <a:r>
+              <a:t>The answer, and your error</a:t>
             </a:r>
           </a:p>
         </p:txBody>
@@ -4668,27 +4183,27 @@
           <a:lstStyle/>
           <a:p>
             <a:r>
-              <a:t>TEACHING PURPOSE</a:t>
-            </a:r>
-          </a:p>
-          <a:p>
-            <a:r>
               <a:t>The answer, and your error</a:t>
             </a:r>
           </a:p>
           <a:p>
             <a:r>
+              <a:t>CML3113, Week 1, slide 31</a:t>
+            </a:r>
+          </a:p>
+          <a:p>
+            <a:r>
               <a:t/>
             </a:r>
           </a:p>
           <a:p>
             <a:r>
-              <a:t>CONNECT</a:t>
-            </a:r>
-          </a:p>
-          <a:p>
-            <a:r>
-              <a:t>Build on the preceding slide: Reading the pattern from twelve cases.</a:t>
+              <a:t>Explanation to give</a:t>
+            </a:r>
+          </a:p>
+          <a:p>
+            <a:r>
+              <a:t>Explain this as a small manual demonstration of learning from examples. Use known rows to propose a rule, write a prediction before revealing the held-out answer, then measure the difference honestly.</a:t>
             </a:r>
           </a:p>
           <a:p>
@@ -4698,12 +4213,12 @@
           </a:p>
           <a:p>
             <a:r>
-              <a:t>LECTURER CUE</a:t>
-            </a:r>
-          </a:p>
-          <a:p>
-            <a:r>
-              <a:t>The spread of team answers is the teaching point. Several different reasonable methods produced several different numbers, so being reasonable is not enough on its own — you need a way to measure which method is better. One case cannot tell you that, which is what Week 8 sets up.</a:t>
+              <a:t>Worked illustration / lecturer answer</a:t>
+            </a:r>
+          </a:p>
+          <a:p>
+            <a:r>
+              <a:t>Locate cases with nearby feature values and compare their outcomes. Explain why a between-neighbours estimate is plausible and what it ignores. Use the actual handout's values rather than inventing the hidden case result.</a:t>
             </a:r>
           </a:p>
           <a:p>
@@ -4713,12 +4228,27 @@
           </a:p>
           <a:p>
             <a:r>
-              <a:t>NEXT</a:t>
-            </a:r>
-          </a:p>
-          <a:p>
-            <a:r>
-              <a:t>You just did every step of a machine learning project. Move on after a learner can explain the current example or required action.</a:t>
+              <a:t>Misconception to address</a:t>
+            </a:r>
+          </a:p>
+          <a:p>
+            <a:r>
+              <a:t>One held-out case illustrates evaluation but is insufficient evidence of general reliability. Do not revise a prediction after seeing the answer and describe it as the original estimate.</a:t>
+            </a:r>
+          </a:p>
+          <a:p>
+            <a:r>
+              <a:t/>
+            </a:r>
+          </a:p>
+          <a:p>
+            <a:r>
+              <a:t>Continue to</a:t>
+            </a:r>
+          </a:p>
+          <a:p>
+            <a:r>
+              <a:t>Steps in a prediction task</a:t>
             </a:r>
           </a:p>
         </p:txBody>
@@ -4788,12 +4318,12 @@
           <a:lstStyle/>
           <a:p>
             <a:r>
-              <a:t>TEACHING PURPOSE</a:t>
-            </a:r>
-          </a:p>
-          <a:p>
-            <a:r>
-              <a:t>You just did every step of a machine learning project</a:t>
+              <a:t>Steps in a prediction task</a:t>
+            </a:r>
+          </a:p>
+          <a:p>
+            <a:r>
+              <a:t>CML3113, Week 1, slide 32</a:t>
             </a:r>
           </a:p>
           <a:p>
@@ -4803,12 +4333,12 @@
           </a:p>
           <a:p>
             <a:r>
-              <a:t>CONNECT</a:t>
-            </a:r>
-          </a:p>
-          <a:p>
-            <a:r>
-              <a:t>Build on the preceding slide: The answer, and your error.</a:t>
+              <a:t>Explanation to give</a:t>
+            </a:r>
+          </a:p>
+          <a:p>
+            <a:r>
+              <a:t>Translate each action into its technical name only after describing the action. Reading records is exploration, forming a relationship is fitting, applying it to a new case is prediction and comparing against truth is evaluation.</a:t>
             </a:r>
           </a:p>
           <a:p>
@@ -4818,12 +4348,12 @@
           </a:p>
           <a:p>
             <a:r>
-              <a:t>LECTURER CUE</a:t>
-            </a:r>
-          </a:p>
-          <a:p>
-            <a:r>
-              <a:t>The syllabus for the rest of the semester is largely a set of names for what you just did with a pencil. The fourth pair is the one to dwell on: you predicted a case that was not in front of you when you formed the rule. That is generalisation, and everything in Week 10 follows from it.</a:t>
+              <a:t>Worked illustration / lecturer answer</a:t>
+            </a:r>
+          </a:p>
+          <a:p>
+            <a:r>
+              <a:t>In the paper example, the twelve labelled rows teach the provisional rule. The held-out case checks that rule. Later Python code makes these same actions repeatable on more records.</a:t>
             </a:r>
           </a:p>
           <a:p>
@@ -4833,12 +4363,12 @@
           </a:p>
           <a:p>
             <a:r>
-              <a:t>EXPLAIN IN ORDINARY WORDS</a:t>
-            </a:r>
-          </a:p>
-          <a:p>
-            <a:r>
-              <a:t>A feature is an input available when predicting. The target is the answer to learn from. Regression predicts a number; classification predicts a category. Learning patterns does not by itself establish cause.</a:t>
+              <a:t>Misconception to address</a:t>
+            </a:r>
+          </a:p>
+          <a:p>
+            <a:r>
+              <a:t>Finding a pattern in the training examples is not the final success criterion. Keep asking how the rule behaves on unseen, relevant observations.</a:t>
             </a:r>
           </a:p>
           <a:p>
@@ -4848,42 +4378,12 @@
           </a:p>
           <a:p>
             <a:r>
-              <a:t>CHECK AND EXPECTED ANSWER</a:t>
-            </a:r>
-          </a:p>
-          <a:p>
-            <a:r>
-              <a:t>Predicting concrete strength: regression. Predicting pass/fail: classification. Is a later test result available before that test? No.</a:t>
-            </a:r>
-          </a:p>
-          <a:p>
-            <a:r>
-              <a:t/>
-            </a:r>
-          </a:p>
-          <a:p>
-            <a:r>
-              <a:t>IF LEARNERS ARE STUCK</a:t>
-            </a:r>
-          </a:p>
-          <a:p>
-            <a:r>
-              <a:t>Describe the engineering decision in everyday language, then label one row, an input and its answer. Compare with a rule you could write directly.</a:t>
-            </a:r>
-          </a:p>
-          <a:p>
-            <a:r>
-              <a:t/>
-            </a:r>
-          </a:p>
-          <a:p>
-            <a:r>
-              <a:t>NEXT</a:t>
-            </a:r>
-          </a:p>
-          <a:p>
-            <a:r>
-              <a:t>Break. Move on after a learner can explain the current example or required action.</a:t>
+              <a:t>Continue to</a:t>
+            </a:r>
+          </a:p>
+          <a:p>
+            <a:r>
+              <a:t>Break</a:t>
             </a:r>
           </a:p>
         </p:txBody>
@@ -4953,27 +4453,27 @@
           <a:lstStyle/>
           <a:p>
             <a:r>
-              <a:t>TEACHING PURPOSE</a:t>
-            </a:r>
-          </a:p>
-          <a:p>
-            <a:r>
               <a:t>Break</a:t>
             </a:r>
           </a:p>
           <a:p>
             <a:r>
+              <a:t>CML3113, Week 1, slide 33</a:t>
+            </a:r>
+          </a:p>
+          <a:p>
+            <a:r>
               <a:t/>
             </a:r>
           </a:p>
           <a:p>
             <a:r>
-              <a:t>CONNECT</a:t>
-            </a:r>
-          </a:p>
-          <a:p>
-            <a:r>
-              <a:t>Build on the preceding slide: You just did every step of a machine learning project.</a:t>
+              <a:t>Explanation to give</a:t>
+            </a:r>
+          </a:p>
+          <a:p>
+            <a:r>
+              <a:t>Announce the actual return time based on the clock now, rather than leaving “ten minutes” ambiguous.</a:t>
             </a:r>
           </a:p>
           <a:p>
@@ -4983,12 +4483,12 @@
           </a:p>
           <a:p>
             <a:r>
-              <a:t>LECTURER CUE</a:t>
-            </a:r>
-          </a:p>
-          <a:p>
-            <a:r>
-              <a:t>Ten minutes. The challenge segment after the break is the longest single working block of the session, so use the time.</a:t>
+              <a:t>Worked illustration / lecturer answer</a:t>
+            </a:r>
+          </a:p>
+          <a:p>
+            <a:r>
+              <a:t>Save the current notebook before the break. On return, continue at the next topic named in the deck.</a:t>
             </a:r>
           </a:p>
           <a:p>
@@ -4998,12 +4498,27 @@
           </a:p>
           <a:p>
             <a:r>
-              <a:t>NEXT</a:t>
-            </a:r>
-          </a:p>
-          <a:p>
-            <a:r>
-              <a:t>Two kinds of question. Move on after a learner can explain the current example or required action.</a:t>
+              <a:t>Misconception to address</a:t>
+            </a:r>
+          </a:p>
+          <a:p>
+            <a:r>
+              <a:t>No new assessment or group task is assigned by this divider.</a:t>
+            </a:r>
+          </a:p>
+          <a:p>
+            <a:r>
+              <a:t/>
+            </a:r>
+          </a:p>
+          <a:p>
+            <a:r>
+              <a:t>Continue to</a:t>
+            </a:r>
+          </a:p>
+          <a:p>
+            <a:r>
+              <a:t>Two kinds of question</a:t>
             </a:r>
           </a:p>
         </p:txBody>
@@ -5073,27 +4588,27 @@
           <a:lstStyle/>
           <a:p>
             <a:r>
-              <a:t>TEACHING PURPOSE</a:t>
-            </a:r>
-          </a:p>
-          <a:p>
-            <a:r>
               <a:t>Two kinds of question</a:t>
             </a:r>
           </a:p>
           <a:p>
             <a:r>
+              <a:t>CML3113, Week 1, slide 34</a:t>
+            </a:r>
+          </a:p>
+          <a:p>
+            <a:r>
               <a:t/>
             </a:r>
           </a:p>
           <a:p>
             <a:r>
-              <a:t>CONNECT</a:t>
-            </a:r>
-          </a:p>
-          <a:p>
-            <a:r>
-              <a:t>Build on the preceding slide: Break.</a:t>
+              <a:t>Explanation to give</a:t>
+            </a:r>
+          </a:p>
+          <a:p>
+            <a:r>
+              <a:t>This divider introduces Regression and classification. Classify the task by the answer the system must produce. Regression predicts a quantity with a meaningful numerical scale. Classification predicts a category, even if the labels are encoded as numbers.</a:t>
             </a:r>
           </a:p>
           <a:p>
@@ -5103,12 +4618,12 @@
           </a:p>
           <a:p>
             <a:r>
-              <a:t>LECTURER CUE</a:t>
-            </a:r>
-          </a:p>
-          <a:p>
-            <a:r>
-              <a:t>A short segment carrying one distinction that decides which method you reach for all semester. It needs to be automatic by Week 8, when you start fitting models to both kinds of problem.</a:t>
+              <a:t>Worked illustration / lecturer answer</a:t>
+            </a:r>
+          </a:p>
+          <a:p>
+            <a:r>
+              <a:t>Predicting days until servicing is regression. Predicting whether servicing is due is classification. A code of 0 for normal and 1 for warning still represents categories.</a:t>
             </a:r>
           </a:p>
           <a:p>
@@ -5118,12 +4633,12 @@
           </a:p>
           <a:p>
             <a:r>
-              <a:t>EXPLAIN IN ORDINARY WORDS</a:t>
-            </a:r>
-          </a:p>
-          <a:p>
-            <a:r>
-              <a:t>An observation describes the data. A finding answers a defined question with evidence. A recommendation adds an action, its justification and limits.</a:t>
+              <a:t>Misconception to address</a:t>
+            </a:r>
+          </a:p>
+          <a:p>
+            <a:r>
+              <a:t>Keep this transition brief. The detailed demonstration follows; do not add another activity before students have seen it.</a:t>
             </a:r>
           </a:p>
           <a:p>
@@ -5133,42 +4648,12 @@
           </a:p>
           <a:p>
             <a:r>
-              <a:t>CHECK AND EXPECTED ANSWER</a:t>
-            </a:r>
-          </a:p>
-          <a:p>
-            <a:r>
-              <a:t>Does a difference between two groups prove one caused the other? No. Other differences or selection may explain it.</a:t>
-            </a:r>
-          </a:p>
-          <a:p>
-            <a:r>
-              <a:t/>
-            </a:r>
-          </a:p>
-          <a:p>
-            <a:r>
-              <a:t>IF LEARNERS ARE STUCK</a:t>
-            </a:r>
-          </a:p>
-          <a:p>
-            <a:r>
-              <a:t>Ask for the population, time period, number and comparison. Then ask what additional evidence could change the recommendation.</a:t>
-            </a:r>
-          </a:p>
-          <a:p>
-            <a:r>
-              <a:t/>
-            </a:r>
-          </a:p>
-          <a:p>
-            <a:r>
-              <a:t>NEXT</a:t>
-            </a:r>
-          </a:p>
-          <a:p>
-            <a:r>
-              <a:t>Regression and classification. Move on after a learner can explain the current example or required action.</a:t>
+              <a:t>Continue to</a:t>
+            </a:r>
+          </a:p>
+          <a:p>
+            <a:r>
+              <a:t>Regression and classification</a:t>
             </a:r>
           </a:p>
         </p:txBody>
@@ -5238,27 +4723,27 @@
           <a:lstStyle/>
           <a:p>
             <a:r>
-              <a:t>TEACHING PURPOSE</a:t>
-            </a:r>
-          </a:p>
-          <a:p>
-            <a:r>
               <a:t>Regression and classification</a:t>
             </a:r>
           </a:p>
           <a:p>
             <a:r>
+              <a:t>CML3113, Week 1, slide 35</a:t>
+            </a:r>
+          </a:p>
+          <a:p>
+            <a:r>
               <a:t/>
             </a:r>
           </a:p>
           <a:p>
             <a:r>
-              <a:t>CONNECT</a:t>
-            </a:r>
-          </a:p>
-          <a:p>
-            <a:r>
-              <a:t>Build on the preceding slide: Two kinds of question.</a:t>
+              <a:t>Explanation to give</a:t>
+            </a:r>
+          </a:p>
+          <a:p>
+            <a:r>
+              <a:t>Classify the task by the answer the system must produce. Regression predicts a quantity with a meaningful numerical scale. Classification predicts a category, even if the labels are encoded as numbers.</a:t>
             </a:r>
           </a:p>
           <a:p>
@@ -5268,12 +4753,12 @@
           </a:p>
           <a:p>
             <a:r>
-              <a:t>LECTURER CUE</a:t>
-            </a:r>
-          </a:p>
-          <a:p>
-            <a:r>
-              <a:t>The point that is easy to miss: the SAME dataset can pose either question. Take the target on the left and band it — ore or waste; or lithology: sandstone, shale, limestone — and the regression problem has become a classification problem. Banding is an engineering decision with consequences, because it throws away the distance between two values inside the same band, and it comes back in Week 9 when you start choosing how to measure performance.</a:t>
+              <a:t>Worked illustration / lecturer answer</a:t>
+            </a:r>
+          </a:p>
+          <a:p>
+            <a:r>
+              <a:t>Predicting days until servicing is regression. Predicting whether servicing is due is classification. A code of 0 for normal and 1 for warning still represents categories.</a:t>
             </a:r>
           </a:p>
           <a:p>
@@ -5283,12 +4768,12 @@
           </a:p>
           <a:p>
             <a:r>
-              <a:t>EXPLAIN IN ORDINARY WORDS</a:t>
-            </a:r>
-          </a:p>
-          <a:p>
-            <a:r>
-              <a:t>A feature is an input available when predicting. The target is the answer to learn from. Regression predicts a number; classification predicts a category. Learning patterns does not by itself establish cause.</a:t>
+              <a:t>Misconception to address</a:t>
+            </a:r>
+          </a:p>
+          <a:p>
+            <a:r>
+              <a:t>Do not choose regression just because the dataset contains numbers. Name the target and explain what a prediction means.</a:t>
             </a:r>
           </a:p>
           <a:p>
@@ -5298,42 +4783,12 @@
           </a:p>
           <a:p>
             <a:r>
-              <a:t>CHECK AND EXPECTED ANSWER</a:t>
-            </a:r>
-          </a:p>
-          <a:p>
-            <a:r>
-              <a:t>Predicting concrete strength: regression. Predicting pass/fail: classification. Is a later test result available before that test? No.</a:t>
-            </a:r>
-          </a:p>
-          <a:p>
-            <a:r>
-              <a:t/>
-            </a:r>
-          </a:p>
-          <a:p>
-            <a:r>
-              <a:t>IF LEARNERS ARE STUCK</a:t>
-            </a:r>
-          </a:p>
-          <a:p>
-            <a:r>
-              <a:t>Describe the engineering decision in everyday language, then label one row, an input and its answer. Compare with a rule you could write directly.</a:t>
-            </a:r>
-          </a:p>
-          <a:p>
-            <a:r>
-              <a:t/>
-            </a:r>
-          </a:p>
-          <a:p>
-            <a:r>
-              <a:t>NEXT</a:t>
-            </a:r>
-          </a:p>
-          <a:p>
-            <a:r>
-              <a:t>Regression, and classification. Move on after a learner can explain the current example or required action.</a:t>
+              <a:t>Continue to</a:t>
+            </a:r>
+          </a:p>
+          <a:p>
+            <a:r>
+              <a:t>Regression, and classification</a:t>
             </a:r>
           </a:p>
         </p:txBody>
@@ -5403,27 +4858,27 @@
           <a:lstStyle/>
           <a:p>
             <a:r>
-              <a:t>TEACHING PURPOSE</a:t>
-            </a:r>
-          </a:p>
-          <a:p>
-            <a:r>
               <a:t>Regression, and classification</a:t>
             </a:r>
           </a:p>
           <a:p>
             <a:r>
+              <a:t>CML3113, Week 1, slide 36</a:t>
+            </a:r>
+          </a:p>
+          <a:p>
+            <a:r>
               <a:t/>
             </a:r>
           </a:p>
           <a:p>
             <a:r>
-              <a:t>CONNECT</a:t>
-            </a:r>
-          </a:p>
-          <a:p>
-            <a:r>
-              <a:t>Build on the preceding slide: Regression and classification.</a:t>
+              <a:t>Explanation to give</a:t>
+            </a:r>
+          </a:p>
+          <a:p>
+            <a:r>
+              <a:t>Classify the task by the answer the system must produce. Regression predicts a quantity with a meaningful numerical scale. Classification predicts a category, even if the labels are encoded as numbers.</a:t>
             </a:r>
           </a:p>
           <a:p>
@@ -5433,12 +4888,12 @@
           </a:p>
           <a:p>
             <a:r>
-              <a:t>LECTURER CUE</a:t>
-            </a:r>
-          </a:p>
-          <a:p>
-            <a:r>
-              <a:t>Carry the test as a habit: what would the answer look like written down? A quantity with a unit means regression. A word or a label means classification. That question resolves almost every case you will meet, and it is faster than trying to remember the definitions.</a:t>
+              <a:t>Worked illustration / lecturer answer</a:t>
+            </a:r>
+          </a:p>
+          <a:p>
+            <a:r>
+              <a:t>Predicting days until servicing is regression. Predicting whether servicing is due is classification. A code of 0 for normal and 1 for warning still represents categories.</a:t>
             </a:r>
           </a:p>
           <a:p>
@@ -5448,12 +4903,12 @@
           </a:p>
           <a:p>
             <a:r>
-              <a:t>EXPLAIN IN ORDINARY WORDS</a:t>
-            </a:r>
-          </a:p>
-          <a:p>
-            <a:r>
-              <a:t>A feature is an input available when predicting. The target is the answer to learn from. Regression predicts a number; classification predicts a category. Learning patterns does not by itself establish cause.</a:t>
+              <a:t>Misconception to address</a:t>
+            </a:r>
+          </a:p>
+          <a:p>
+            <a:r>
+              <a:t>Do not choose regression just because the dataset contains numbers. Name the target and explain what a prediction means.</a:t>
             </a:r>
           </a:p>
           <a:p>
@@ -5463,42 +4918,12 @@
           </a:p>
           <a:p>
             <a:r>
-              <a:t>CHECK AND EXPECTED ANSWER</a:t>
-            </a:r>
-          </a:p>
-          <a:p>
-            <a:r>
-              <a:t>Predicting concrete strength: regression. Predicting pass/fail: classification. Is a later test result available before that test? No.</a:t>
-            </a:r>
-          </a:p>
-          <a:p>
-            <a:r>
-              <a:t/>
-            </a:r>
-          </a:p>
-          <a:p>
-            <a:r>
-              <a:t>IF LEARNERS ARE STUCK</a:t>
-            </a:r>
-          </a:p>
-          <a:p>
-            <a:r>
-              <a:t>Describe the engineering decision in everyday language, then label one row, an input and its answer. Compare with a rule you could write directly.</a:t>
-            </a:r>
-          </a:p>
-          <a:p>
-            <a:r>
-              <a:t/>
-            </a:r>
-          </a:p>
-          <a:p>
-            <a:r>
-              <a:t>NEXT</a:t>
-            </a:r>
-          </a:p>
-          <a:p>
-            <a:r>
-              <a:t>Can you answer these?. Move on after a learner can explain the current example or required action.</a:t>
+              <a:t>Continue to</a:t>
+            </a:r>
+          </a:p>
+          <a:p>
+            <a:r>
+              <a:t>Can you answer these?</a:t>
             </a:r>
           </a:p>
         </p:txBody>
@@ -5568,27 +4993,27 @@
           <a:lstStyle/>
           <a:p>
             <a:r>
-              <a:t>TEACHING PURPOSE</a:t>
-            </a:r>
-          </a:p>
-          <a:p>
-            <a:r>
               <a:t>Can you answer these?</a:t>
             </a:r>
           </a:p>
           <a:p>
             <a:r>
+              <a:t>CML3113, Week 1, slide 37</a:t>
+            </a:r>
+          </a:p>
+          <a:p>
+            <a:r>
               <a:t/>
             </a:r>
           </a:p>
           <a:p>
             <a:r>
-              <a:t>CONNECT</a:t>
-            </a:r>
-          </a:p>
-          <a:p>
-            <a:r>
-              <a:t>Build on the preceding slide: Regression, and classification.</a:t>
+              <a:t>Explanation to give</a:t>
+            </a:r>
+          </a:p>
+          <a:p>
+            <a:r>
+              <a:t>Explain each answer in relation to the question rather than giving only its letter or label.</a:t>
             </a:r>
           </a:p>
           <a:p>
@@ -5598,12 +5023,62 @@
           </a:p>
           <a:p>
             <a:r>
-              <a:t>LECTURER CUE</a:t>
-            </a:r>
-          </a:p>
-          <a:p>
-            <a:r>
-              <a:t>Question C is the interesting one. It is still classification, with five categories rather than two. Multi-class problems are harder to evaluate because one accuracy figure hides which classes you are getting wrong, and that is a Week 9 topic.</a:t>
+              <a:t>Worked illustration / lecturer answer</a:t>
+            </a:r>
+          </a:p>
+          <a:p>
+            <a:r>
+              <a:t>ANSWERS</a:t>
+            </a:r>
+          </a:p>
+          <a:p>
+            <a:r>
+              <a:t>How did you do?</a:t>
+            </a:r>
+          </a:p>
+          <a:p>
+            <a:r>
+              <a:t>A</a:t>
+            </a:r>
+          </a:p>
+          <a:p>
+            <a:r>
+              <a:t>Days until replacement?</a:t>
+            </a:r>
+          </a:p>
+          <a:p>
+            <a:r>
+              <a:t>Regression. The answer is a number with a unit — days.</a:t>
+            </a:r>
+          </a:p>
+          <a:p>
+            <a:r>
+              <a:t>B</a:t>
+            </a:r>
+          </a:p>
+          <a:p>
+            <a:r>
+              <a:t>Pass or fail?</a:t>
+            </a:r>
+          </a:p>
+          <a:p>
+            <a:r>
+              <a:t>Classification. Two categories, so it is called binary classification.</a:t>
+            </a:r>
+          </a:p>
+          <a:p>
+            <a:r>
+              <a:t>C</a:t>
+            </a:r>
+          </a:p>
+          <a:p>
+            <a:r>
+              <a:t>Which of five fault types?</a:t>
+            </a:r>
+          </a:p>
+          <a:p>
+            <a:r>
+              <a:t>Still classification, but multi-class rather than binary. It is harder: with five classes there are far more ways to be wrong, and a single accuracy figure hides which ones you get wrong. Week 9.</a:t>
             </a:r>
           </a:p>
           <a:p>
@@ -5613,12 +5088,12 @@
           </a:p>
           <a:p>
             <a:r>
-              <a:t>EXPLAIN IN ORDINARY WORDS</a:t>
-            </a:r>
-          </a:p>
-          <a:p>
-            <a:r>
-              <a:t>A feature is an input available when predicting. The target is the answer to learn from. Regression predicts a number; classification predicts a category. Learning patterns does not by itself establish cause.</a:t>
+              <a:t>Misconception to address</a:t>
+            </a:r>
+          </a:p>
+          <a:p>
+            <a:r>
+              <a:t>Use a short lecturer-led walkthrough or individual thought time. Do not require partner work to unlock the explanation.</a:t>
             </a:r>
           </a:p>
           <a:p>
@@ -5628,112 +5103,12 @@
           </a:p>
           <a:p>
             <a:r>
-              <a:t>CHECK AND EXPECTED ANSWER</a:t>
-            </a:r>
-          </a:p>
-          <a:p>
-            <a:r>
-              <a:t>Predicting concrete strength: regression. Predicting pass/fail: classification. Is a later test result available before that test? No.</a:t>
-            </a:r>
-          </a:p>
-          <a:p>
-            <a:r>
-              <a:t/>
-            </a:r>
-          </a:p>
-          <a:p>
-            <a:r>
-              <a:t>IF LEARNERS ARE STUCK</a:t>
-            </a:r>
-          </a:p>
-          <a:p>
-            <a:r>
-              <a:t>Describe the engineering decision in everyday language, then label one row, an input and its answer. Compare with a rule you could write directly.</a:t>
-            </a:r>
-          </a:p>
-          <a:p>
-            <a:r>
-              <a:t/>
-            </a:r>
-          </a:p>
-          <a:p>
-            <a:r>
-              <a:t>DISCUSSION KEY FOR THIS SLIDE</a:t>
-            </a:r>
-          </a:p>
-          <a:p>
-            <a:r>
-              <a:t>ANSWERS</a:t>
+              <a:t>Continue to</a:t>
             </a:r>
           </a:p>
           <a:p>
             <a:r>
               <a:t>How did you do?</a:t>
-            </a:r>
-          </a:p>
-          <a:p>
-            <a:r>
-              <a:t>A</a:t>
-            </a:r>
-          </a:p>
-          <a:p>
-            <a:r>
-              <a:t>Days until replacement?</a:t>
-            </a:r>
-          </a:p>
-          <a:p>
-            <a:r>
-              <a:t>Regression. The answer is a number with a unit — days.</a:t>
-            </a:r>
-          </a:p>
-          <a:p>
-            <a:r>
-              <a:t>B</a:t>
-            </a:r>
-          </a:p>
-          <a:p>
-            <a:r>
-              <a:t>Pass or fail?</a:t>
-            </a:r>
-          </a:p>
-          <a:p>
-            <a:r>
-              <a:t>Classification. Two categories, so it is called binary classification.</a:t>
-            </a:r>
-          </a:p>
-          <a:p>
-            <a:r>
-              <a:t>C</a:t>
-            </a:r>
-          </a:p>
-          <a:p>
-            <a:r>
-              <a:t>Which of five fault types?</a:t>
-            </a:r>
-          </a:p>
-          <a:p>
-            <a:r>
-              <a:t>Still classification, but multi-class rather than binary. It is harder: with five classes there are far more ways to be wrong, and a single accuracy figure hides which ones you get wrong. Week 9.</a:t>
-            </a:r>
-          </a:p>
-          <a:p>
-            <a:r>
-              <a:t>Let learners attempt first; use this to explain the reasoning, not just reveal the answer.</a:t>
-            </a:r>
-          </a:p>
-          <a:p>
-            <a:r>
-              <a:t/>
-            </a:r>
-          </a:p>
-          <a:p>
-            <a:r>
-              <a:t>NEXT</a:t>
-            </a:r>
-          </a:p>
-          <a:p>
-            <a:r>
-              <a:t>How did you do?. Move on after a learner can explain the current example or required action.</a:t>
             </a:r>
           </a:p>
         </p:txBody>
@@ -5803,27 +5178,27 @@
           <a:lstStyle/>
           <a:p>
             <a:r>
-              <a:t>TEACHING PURPOSE</a:t>
-            </a:r>
-          </a:p>
-          <a:p>
-            <a:r>
               <a:t>How did you do?</a:t>
             </a:r>
           </a:p>
           <a:p>
             <a:r>
+              <a:t>CML3113, Week 1, slide 38</a:t>
+            </a:r>
+          </a:p>
+          <a:p>
+            <a:r>
               <a:t/>
             </a:r>
           </a:p>
           <a:p>
             <a:r>
-              <a:t>CONNECT</a:t>
-            </a:r>
-          </a:p>
-          <a:p>
-            <a:r>
-              <a:t>Build on the preceding slide: Can you answer these?.</a:t>
+              <a:t>Explanation to give</a:t>
+            </a:r>
+          </a:p>
+          <a:p>
+            <a:r>
+              <a:t>For each answer on this slide, identify the deciding feature of the question: timing of the input, kind of target, run order or operation requested.</a:t>
             </a:r>
           </a:p>
           <a:p>
@@ -5833,12 +5208,37 @@
           </a:p>
           <a:p>
             <a:r>
-              <a:t>LECTURER CUE</a:t>
-            </a:r>
-          </a:p>
-          <a:p>
-            <a:r>
-              <a:t>You now have vocabulary you can use immediately: binary classification for two categories, multi-class for three or more. The distinction starts to matter as soon as you begin measuring performance in Week 9, because the same accuracy figure means different things in the two cases.</a:t>
+              <a:t>Worked illustration / lecturer answer</a:t>
+            </a:r>
+          </a:p>
+          <a:p>
+            <a:r>
+              <a:t>Days until replacement?</a:t>
+            </a:r>
+          </a:p>
+          <a:p>
+            <a:r>
+              <a:t>Regression. The answer is a number with a unit — days.</a:t>
+            </a:r>
+          </a:p>
+          <a:p>
+            <a:r>
+              <a:t>Pass or fail?</a:t>
+            </a:r>
+          </a:p>
+          <a:p>
+            <a:r>
+              <a:t>Classification. Two categories, so it is called binary classification.</a:t>
+            </a:r>
+          </a:p>
+          <a:p>
+            <a:r>
+              <a:t>Which of five fault types?</a:t>
+            </a:r>
+          </a:p>
+          <a:p>
+            <a:r>
+              <a:t>Still classification, but multi-class rather than binary. It is harder: with five classes there are far more ways to be wrong, and a single accuracy figure hides which ones you get wrong. Week 9.</a:t>
             </a:r>
           </a:p>
           <a:p>
@@ -5848,12 +5248,12 @@
           </a:p>
           <a:p>
             <a:r>
-              <a:t>EXPLAIN IN ORDINARY WORDS</a:t>
-            </a:r>
-          </a:p>
-          <a:p>
-            <a:r>
-              <a:t>Read each quantity and unit before using a formula. Python calculates numbers but does not enforce physical units. Parentheses specify which operation happens first.</a:t>
+              <a:t>Misconception to address</a:t>
+            </a:r>
+          </a:p>
+          <a:p>
+            <a:r>
+              <a:t>If a student gives a different engineering example, check its reasoning and timing rather than requiring identical wording to the printed example.</a:t>
             </a:r>
           </a:p>
           <a:p>
@@ -5863,42 +5263,12 @@
           </a:p>
           <a:p>
             <a:r>
-              <a:t>CHECK AND EXPECTED ANSWER</a:t>
-            </a:r>
-          </a:p>
-          <a:p>
-            <a:r>
-              <a:t>What is 5 m times 3 m? 15 square metres. What is 7/2 in Python? 3.5; 7//2 is 3.</a:t>
-            </a:r>
-          </a:p>
-          <a:p>
-            <a:r>
-              <a:t/>
-            </a:r>
-          </a:p>
-          <a:p>
-            <a:r>
-              <a:t>IF LEARNERS ARE STUCK</a:t>
-            </a:r>
-          </a:p>
-          <a:p>
-            <a:r>
-              <a:t>Write the formula and units on paper, substitute small values, then translate it to Python. Check zero denominators and the issued sign convention.</a:t>
-            </a:r>
-          </a:p>
-          <a:p>
-            <a:r>
-              <a:t/>
-            </a:r>
-          </a:p>
-          <a:p>
-            <a:r>
-              <a:t>NEXT</a:t>
-            </a:r>
-          </a:p>
-          <a:p>
-            <a:r>
-              <a:t>What machine learning cannot do. Move on after a learner can explain the current example or required action.</a:t>
+              <a:t>Continue to</a:t>
+            </a:r>
+          </a:p>
+          <a:p>
+            <a:r>
+              <a:t>What machine learning cannot do</a:t>
             </a:r>
           </a:p>
         </p:txBody>
@@ -5968,27 +5338,27 @@
           <a:lstStyle/>
           <a:p>
             <a:r>
-              <a:t>TEACHING PURPOSE</a:t>
-            </a:r>
-          </a:p>
-          <a:p>
-            <a:r>
               <a:t>What machine learning cannot do</a:t>
             </a:r>
           </a:p>
           <a:p>
             <a:r>
+              <a:t>CML3113, Week 1, slide 39</a:t>
+            </a:r>
+          </a:p>
+          <a:p>
+            <a:r>
               <a:t/>
             </a:r>
           </a:p>
           <a:p>
             <a:r>
-              <a:t>CONNECT</a:t>
-            </a:r>
-          </a:p>
-          <a:p>
-            <a:r>
-              <a:t>Build on the preceding slide: How did you do?.</a:t>
+              <a:t>Explanation to give</a:t>
+            </a:r>
+          </a:p>
+          <a:p>
+            <a:r>
+              <a:t>This divider introduces Four limits, and none of them go away. Review whether usable observations exist, whether inputs contain predictive information, whether a validated rule already solves the problem and whether future conditions resemble the data.</a:t>
             </a:r>
           </a:p>
           <a:p>
@@ -5998,12 +5368,12 @@
           </a:p>
           <a:p>
             <a:r>
-              <a:t>LECTURER CUE</a:t>
-            </a:r>
-          </a:p>
-          <a:p>
-            <a:r>
-              <a:t>Four honest limits, so that you can recognise in advance when data will not help. This is also your protection against being sold a technique that cannot work on the problem you have.</a:t>
+              <a:t>Worked illustration / lecturer answer</a:t>
+            </a:r>
+          </a:p>
+          <a:p>
+            <a:r>
+              <a:t>Changing an equipment supplier may alter measurement behaviour and invalidate an older fitted relationship. A model trained only at one site needs evidence before use at another.</a:t>
             </a:r>
           </a:p>
           <a:p>
@@ -6013,12 +5383,12 @@
           </a:p>
           <a:p>
             <a:r>
-              <a:t>EXPLAIN IN ORDINARY WORDS</a:t>
-            </a:r>
-          </a:p>
-          <a:p>
-            <a:r>
-              <a:t>A feature is an input available when predicting. The target is the answer to learn from. Regression predicts a number; classification predicts a category. Learning patterns does not by itself establish cause.</a:t>
+              <a:t>Misconception to address</a:t>
+            </a:r>
+          </a:p>
+          <a:p>
+            <a:r>
+              <a:t>Keep this transition brief. The detailed demonstration follows; do not add another activity before students have seen it.</a:t>
             </a:r>
           </a:p>
           <a:p>
@@ -6028,42 +5398,12 @@
           </a:p>
           <a:p>
             <a:r>
-              <a:t>CHECK AND EXPECTED ANSWER</a:t>
-            </a:r>
-          </a:p>
-          <a:p>
-            <a:r>
-              <a:t>Predicting concrete strength: regression. Predicting pass/fail: classification. Is a later test result available before that test? No.</a:t>
-            </a:r>
-          </a:p>
-          <a:p>
-            <a:r>
-              <a:t/>
-            </a:r>
-          </a:p>
-          <a:p>
-            <a:r>
-              <a:t>IF LEARNERS ARE STUCK</a:t>
-            </a:r>
-          </a:p>
-          <a:p>
-            <a:r>
-              <a:t>Describe the engineering decision in everyday language, then label one row, an input and its answer. Compare with a rule you could write directly.</a:t>
-            </a:r>
-          </a:p>
-          <a:p>
-            <a:r>
-              <a:t/>
-            </a:r>
-          </a:p>
-          <a:p>
-            <a:r>
-              <a:t>NEXT</a:t>
-            </a:r>
-          </a:p>
-          <a:p>
-            <a:r>
-              <a:t>Four limits, and none of them go away. Move on after a learner can explain the current example or required action.</a:t>
+              <a:t>Continue to</a:t>
+            </a:r>
+          </a:p>
+          <a:p>
+            <a:r>
+              <a:t>Four limits, and none of them go away</a:t>
             </a:r>
           </a:p>
         </p:txBody>
@@ -6133,27 +5473,27 @@
           <a:lstStyle/>
           <a:p>
             <a:r>
-              <a:t>TEACHING PURPOSE</a:t>
-            </a:r>
-          </a:p>
-          <a:p>
-            <a:r>
               <a:t>How every session this semester is shaped</a:t>
             </a:r>
           </a:p>
           <a:p>
             <a:r>
+              <a:t>CML3113, Week 1, slide 4</a:t>
+            </a:r>
+          </a:p>
+          <a:p>
+            <a:r>
               <a:t/>
             </a:r>
           </a:p>
           <a:p>
             <a:r>
-              <a:t>CONNECT</a:t>
-            </a:r>
-          </a:p>
-          <a:p>
-            <a:r>
-              <a:t>Build on the preceding slide: By the end of today you can….</a:t>
+              <a:t>Explanation to give</a:t>
+            </a:r>
+          </a:p>
+          <a:p>
+            <a:r>
+              <a:t>Orient students to this particular lesson: explain what they will see demonstrated, which file they will use and what they must retain for revision. Keep the transition short enough to preserve explanation time.</a:t>
             </a:r>
           </a:p>
           <a:p>
@@ -6163,12 +5503,12 @@
           </a:p>
           <a:p>
             <a:r>
-              <a:t>LECTURER CUE</a:t>
-            </a:r>
-          </a:p>
-          <a:p>
-            <a:r>
-              <a:t>Every session this semester has the same shape: eleven segments across three hours, with no block of talking longer than 25 minutes and roughly half the time spent working rather than listening. That is why attendance matters more here than on a lecture course — the practical and challenge segments cannot be read off a deck afterwards. There is a 10-minute break at the midpoint.</a:t>
+              <a:t>Worked illustration / lecturer answer</a:t>
+            </a:r>
+          </a:p>
+          <a:p>
+            <a:r>
+              <a:t>Open the next worked example on the projector and name its input and intended result. Demonstrate it yourself before asking students to interpret a result. Use remaining summary and glossary pages for independent revision.</a:t>
             </a:r>
           </a:p>
           <a:p>
@@ -6178,12 +5518,27 @@
           </a:p>
           <a:p>
             <a:r>
-              <a:t>NEXT</a:t>
-            </a:r>
-          </a:p>
-          <a:p>
-            <a:r>
-              <a:t>Where this semester goes. Move on after a learner can explain the current example or required action.</a:t>
+              <a:t>Misconception to address</a:t>
+            </a:r>
+          </a:p>
+          <a:p>
+            <a:r>
+              <a:t>The historical slide's timed group activity is not a requirement to stop for partner work. Use a lecturer-led walkthrough in the current limited class time.</a:t>
+            </a:r>
+          </a:p>
+          <a:p>
+            <a:r>
+              <a:t/>
+            </a:r>
+          </a:p>
+          <a:p>
+            <a:r>
+              <a:t>Continue to</a:t>
+            </a:r>
+          </a:p>
+          <a:p>
+            <a:r>
+              <a:t>Where this semester goes</a:t>
             </a:r>
           </a:p>
         </p:txBody>
@@ -6253,27 +5608,27 @@
           <a:lstStyle/>
           <a:p>
             <a:r>
-              <a:t>TEACHING PURPOSE</a:t>
-            </a:r>
-          </a:p>
-          <a:p>
-            <a:r>
               <a:t>Four limits, and none of them go away</a:t>
             </a:r>
           </a:p>
           <a:p>
             <a:r>
+              <a:t>CML3113, Week 1, slide 40</a:t>
+            </a:r>
+          </a:p>
+          <a:p>
+            <a:r>
               <a:t/>
             </a:r>
           </a:p>
           <a:p>
             <a:r>
-              <a:t>CONNECT</a:t>
-            </a:r>
-          </a:p>
-          <a:p>
-            <a:r>
-              <a:t>Build on the preceding slide: What machine learning cannot do.</a:t>
+              <a:t>Explanation to give</a:t>
+            </a:r>
+          </a:p>
+          <a:p>
+            <a:r>
+              <a:t>Review whether usable observations exist, whether inputs contain predictive information, whether a validated rule already solves the problem and whether future conditions resemble the data.</a:t>
             </a:r>
           </a:p>
           <a:p>
@@ -6283,12 +5638,12 @@
           </a:p>
           <a:p>
             <a:r>
-              <a:t>LECTURER CUE</a:t>
-            </a:r>
-          </a:p>
-          <a:p>
-            <a:r>
-              <a:t>The caption is the sentence to remember. A machine learning method will always return an answer and will never tell you that the question was unanswerable. Judging that is your job, and it is the reason a trained engineer is still needed after the code runs.</a:t>
+              <a:t>Worked illustration / lecturer answer</a:t>
+            </a:r>
+          </a:p>
+          <a:p>
+            <a:r>
+              <a:t>Changing an equipment supplier may alter measurement behaviour and invalidate an older fitted relationship. A model trained only at one site needs evidence before use at another.</a:t>
             </a:r>
           </a:p>
           <a:p>
@@ -6298,12 +5653,12 @@
           </a:p>
           <a:p>
             <a:r>
-              <a:t>EXPLAIN IN ORDINARY WORDS</a:t>
-            </a:r>
-          </a:p>
-          <a:p>
-            <a:r>
-              <a:t>Missing means not recorded, not automatically zero. Decide why it is missing and document the rule. Fitted fill values must come from training data when evaluating a model.</a:t>
+              <a:t>Misconception to address</a:t>
+            </a:r>
+          </a:p>
+          <a:p>
+            <a:r>
+              <a:t>Models can fail, abstain or be designed to flag uncertainty; avoid the absolute claim that they always return an answer and never signal a problem. The engineer still evaluates suitability.</a:t>
             </a:r>
           </a:p>
           <a:p>
@@ -6313,42 +5668,12 @@
           </a:p>
           <a:p>
             <a:r>
-              <a:t>CHECK AND EXPECTED ANSWER</a:t>
-            </a:r>
-          </a:p>
-          <a:p>
-            <a:r>
-              <a:t>Is an unrecorded energy reading evidence of zero consumption? No.</a:t>
-            </a:r>
-          </a:p>
-          <a:p>
-            <a:r>
-              <a:t/>
-            </a:r>
-          </a:p>
-          <a:p>
-            <a:r>
-              <a:t>IF LEARNERS ARE STUCK</a:t>
-            </a:r>
-          </a:p>
-          <a:p>
-            <a:r>
-              <a:t>Use three rows: a recorded zero, a recorded positive value and a blank. Explain their different meanings before cleaning.</a:t>
-            </a:r>
-          </a:p>
-          <a:p>
-            <a:r>
-              <a:t/>
-            </a:r>
-          </a:p>
-          <a:p>
-            <a:r>
-              <a:t>NEXT</a:t>
-            </a:r>
-          </a:p>
-          <a:p>
-            <a:r>
-              <a:t>The same four limits, in your own discipline. Move on after a learner can explain the current example or required action.</a:t>
+              <a:t>Continue to</a:t>
+            </a:r>
+          </a:p>
+          <a:p>
+            <a:r>
+              <a:t>The same four limits, in your own discipline</a:t>
             </a:r>
           </a:p>
         </p:txBody>
@@ -6418,27 +5743,27 @@
           <a:lstStyle/>
           <a:p>
             <a:r>
-              <a:t>TEACHING PURPOSE</a:t>
-            </a:r>
-          </a:p>
-          <a:p>
-            <a:r>
               <a:t>The same four limits, in your own discipline</a:t>
             </a:r>
           </a:p>
           <a:p>
             <a:r>
+              <a:t>CML3113, Week 1, slide 41</a:t>
+            </a:r>
+          </a:p>
+          <a:p>
+            <a:r>
               <a:t/>
             </a:r>
           </a:p>
           <a:p>
             <a:r>
-              <a:t>CONNECT</a:t>
-            </a:r>
-          </a:p>
-          <a:p>
-            <a:r>
-              <a:t>Build on the preceding slide: Four limits, and none of them go away.</a:t>
+              <a:t>Explanation to give</a:t>
+            </a:r>
+          </a:p>
+          <a:p>
+            <a:r>
+              <a:t>Review whether usable observations exist, whether inputs contain predictive information, whether a validated rule already solves the problem and whether future conditions resemble the data.</a:t>
             </a:r>
           </a:p>
           <a:p>
@@ -6448,12 +5773,12 @@
           </a:p>
           <a:p>
             <a:r>
-              <a:t>LECTURER CUE</a:t>
-            </a:r>
-          </a:p>
-          <a:p>
-            <a:r>
-              <a:t>Every project in Week 9 has to survive these four questions before it is approved. A team that cannot answer them has picked a technique and gone looking for somewhere to use it, which is the most common way a student project fails.</a:t>
+              <a:t>Worked illustration / lecturer answer</a:t>
+            </a:r>
+          </a:p>
+          <a:p>
+            <a:r>
+              <a:t>Changing an equipment supplier may alter measurement behaviour and invalidate an older fitted relationship. A model trained only at one site needs evidence before use at another.</a:t>
             </a:r>
           </a:p>
           <a:p>
@@ -6463,12 +5788,12 @@
           </a:p>
           <a:p>
             <a:r>
-              <a:t>EXPLAIN IN ORDINARY WORDS</a:t>
-            </a:r>
-          </a:p>
-          <a:p>
-            <a:r>
-              <a:t>Read each quantity and unit before using a formula. Python calculates numbers but does not enforce physical units. Parentheses specify which operation happens first.</a:t>
+              <a:t>Misconception to address</a:t>
+            </a:r>
+          </a:p>
+          <a:p>
+            <a:r>
+              <a:t>Models can fail, abstain or be designed to flag uncertainty; avoid the absolute claim that they always return an answer and never signal a problem. The engineer still evaluates suitability.</a:t>
             </a:r>
           </a:p>
           <a:p>
@@ -6478,42 +5803,12 @@
           </a:p>
           <a:p>
             <a:r>
-              <a:t>CHECK AND EXPECTED ANSWER</a:t>
-            </a:r>
-          </a:p>
-          <a:p>
-            <a:r>
-              <a:t>What is 5 m times 3 m? 15 square metres. What is 7/2 in Python? 3.5; 7//2 is 3.</a:t>
-            </a:r>
-          </a:p>
-          <a:p>
-            <a:r>
-              <a:t/>
-            </a:r>
-          </a:p>
-          <a:p>
-            <a:r>
-              <a:t>IF LEARNERS ARE STUCK</a:t>
-            </a:r>
-          </a:p>
-          <a:p>
-            <a:r>
-              <a:t>Write the formula and units on paper, substitute small values, then translate it to Python. Check zero denominators and the issued sign convention.</a:t>
-            </a:r>
-          </a:p>
-          <a:p>
-            <a:r>
-              <a:t/>
-            </a:r>
-          </a:p>
-          <a:p>
-            <a:r>
-              <a:t>NEXT</a:t>
-            </a:r>
-          </a:p>
-          <a:p>
-            <a:r>
-              <a:t>Challenge: the Problem Hunt. Move on after a learner can explain the current example or required action.</a:t>
+              <a:t>Continue to</a:t>
+            </a:r>
+          </a:p>
+          <a:p>
+            <a:r>
+              <a:t>Challenge: the Problem Hunt</a:t>
             </a:r>
           </a:p>
         </p:txBody>
@@ -6583,27 +5878,27 @@
           <a:lstStyle/>
           <a:p>
             <a:r>
-              <a:t>TEACHING PURPOSE</a:t>
-            </a:r>
-          </a:p>
-          <a:p>
-            <a:r>
               <a:t>Challenge: the Problem Hunt</a:t>
             </a:r>
           </a:p>
           <a:p>
             <a:r>
+              <a:t>CML3113, Week 1, slide 42</a:t>
+            </a:r>
+          </a:p>
+          <a:p>
+            <a:r>
               <a:t/>
             </a:r>
           </a:p>
           <a:p>
             <a:r>
-              <a:t>CONNECT</a:t>
-            </a:r>
-          </a:p>
-          <a:p>
-            <a:r>
-              <a:t>Build on the preceding slide: The same four limits, in your own discipline.</a:t>
+              <a:t>Explanation to give</a:t>
+            </a:r>
+          </a:p>
+          <a:p>
+            <a:r>
+              <a:t>Start from a decision somebody needs to make. Name the answer required, the information available beforehand, where examples could come from and what a mistake would cost.</a:t>
             </a:r>
           </a:p>
           <a:p>
@@ -6613,12 +5908,12 @@
           </a:p>
           <a:p>
             <a:r>
-              <a:t>LECTURER CUE</a:t>
-            </a:r>
-          </a:p>
-          <a:p>
-            <a:r>
-              <a:t>In this segment you get a problem and no method, and the questions you are asked will not be answered for you. Proceeding without instructions is the skill being practised, and roughly one segment of every session this semester works this way.</a:t>
+              <a:t>Worked illustration / lecturer answer</a:t>
+            </a:r>
+          </a:p>
+          <a:p>
+            <a:r>
+              <a:t>“Predict energy consumption for next week to plan a budget” names a target, horizon and decision. “Use AI in buildings” is too broad to determine data or success criteria.</a:t>
             </a:r>
           </a:p>
           <a:p>
@@ -6628,12 +5923,12 @@
           </a:p>
           <a:p>
             <a:r>
-              <a:t>EXPLAIN IN ORDINARY WORDS</a:t>
-            </a:r>
-          </a:p>
-          <a:p>
-            <a:r>
-              <a:t>An observation describes the data. A finding answers a defined question with evidence. A recommendation adds an action, its justification and limits.</a:t>
+              <a:t>Misconception to address</a:t>
+            </a:r>
+          </a:p>
+          <a:p>
+            <a:r>
+              <a:t>A proposed dataset is not automatically appropriate because its title sounds relevant. Check what one row means and when its fields become available.</a:t>
             </a:r>
           </a:p>
           <a:p>
@@ -6643,42 +5938,12 @@
           </a:p>
           <a:p>
             <a:r>
-              <a:t>CHECK AND EXPECTED ANSWER</a:t>
-            </a:r>
-          </a:p>
-          <a:p>
-            <a:r>
-              <a:t>Does a difference between two groups prove one caused the other? No. Other differences or selection may explain it.</a:t>
-            </a:r>
-          </a:p>
-          <a:p>
-            <a:r>
-              <a:t/>
-            </a:r>
-          </a:p>
-          <a:p>
-            <a:r>
-              <a:t>IF LEARNERS ARE STUCK</a:t>
-            </a:r>
-          </a:p>
-          <a:p>
-            <a:r>
-              <a:t>Ask for the population, time period, number and comparison. Then ask what additional evidence could change the recommendation.</a:t>
-            </a:r>
-          </a:p>
-          <a:p>
-            <a:r>
-              <a:t/>
-            </a:r>
-          </a:p>
-          <a:p>
-            <a:r>
-              <a:t>NEXT</a:t>
-            </a:r>
-          </a:p>
-          <a:p>
-            <a:r>
-              <a:t>Problem Hunt. Move on after a learner can explain the current example or required action.</a:t>
+              <a:t>Continue to</a:t>
+            </a:r>
+          </a:p>
+          <a:p>
+            <a:r>
+              <a:t>Problem Hunt</a:t>
             </a:r>
           </a:p>
         </p:txBody>
@@ -6748,27 +6013,27 @@
           <a:lstStyle/>
           <a:p>
             <a:r>
-              <a:t>TEACHING PURPOSE</a:t>
-            </a:r>
-          </a:p>
-          <a:p>
-            <a:r>
               <a:t>Problem Hunt</a:t>
             </a:r>
           </a:p>
           <a:p>
             <a:r>
+              <a:t>CML3113, Week 1, slide 43</a:t>
+            </a:r>
+          </a:p>
+          <a:p>
+            <a:r>
               <a:t/>
             </a:r>
           </a:p>
           <a:p>
             <a:r>
-              <a:t>CONNECT</a:t>
-            </a:r>
-          </a:p>
-          <a:p>
-            <a:r>
-              <a:t>Build on the preceding slide: Challenge: the Problem Hunt.</a:t>
+              <a:t>Explanation to give</a:t>
+            </a:r>
+          </a:p>
+          <a:p>
+            <a:r>
+              <a:t>Start from a decision somebody needs to make. Name the answer required, the information available beforehand, where examples could come from and what a mistake would cost.</a:t>
             </a:r>
           </a:p>
           <a:p>
@@ -6778,12 +6043,12 @@
           </a:p>
           <a:p>
             <a:r>
-              <a:t>LECTURER CUE</a:t>
-            </a:r>
-          </a:p>
-          <a:p>
-            <a:r>
-              <a:t>The rejections carry more weight than the acceptances. A team that can say clearly why something is NOT a machine learning problem has understood the session, and the six questions on the slide are the ones to argue each placement against. Keep your sheet: the class list of problems built in this segment is what teams draw on when they choose projects in Week 9.</a:t>
+              <a:t>Worked illustration / lecturer answer</a:t>
+            </a:r>
+          </a:p>
+          <a:p>
+            <a:r>
+              <a:t>“Predict energy consumption for next week to plan a budget” names a target, horizon and decision. “Use AI in buildings” is too broad to determine data or success criteria.</a:t>
             </a:r>
           </a:p>
           <a:p>
@@ -6793,12 +6058,12 @@
           </a:p>
           <a:p>
             <a:r>
-              <a:t>EXPLAIN IN ORDINARY WORDS</a:t>
-            </a:r>
-          </a:p>
-          <a:p>
-            <a:r>
-              <a:t>A list keeps items in order. Python positions start at zero. In [2,4,6], position 0 contains 2 and position 2 contains 6. A slice excludes its stop position.</a:t>
+              <a:t>Misconception to address</a:t>
+            </a:r>
+          </a:p>
+          <a:p>
+            <a:r>
+              <a:t>A proposed dataset is not automatically appropriate because its title sounds relevant. Check what one row means and when its fields become available.</a:t>
             </a:r>
           </a:p>
           <a:p>
@@ -6808,42 +6073,12 @@
           </a:p>
           <a:p>
             <a:r>
-              <a:t>CHECK AND EXPECTED ANSWER</a:t>
-            </a:r>
-          </a:p>
-          <a:p>
-            <a:r>
-              <a:t>What is [2,4,6][1]? 4. Is there a position 3? No.</a:t>
-            </a:r>
-          </a:p>
-          <a:p>
-            <a:r>
-              <a:t/>
-            </a:r>
-          </a:p>
-          <a:p>
-            <a:r>
-              <a:t>IF LEARNERS ARE STUCK</a:t>
-            </a:r>
-          </a:p>
-          <a:p>
-            <a:r>
-              <a:t>Draw three numbered boxes starting at zero. Keep the position separate from the value stored in it.</a:t>
-            </a:r>
-          </a:p>
-          <a:p>
-            <a:r>
-              <a:t/>
-            </a:r>
-          </a:p>
-          <a:p>
-            <a:r>
-              <a:t>NEXT</a:t>
-            </a:r>
-          </a:p>
-          <a:p>
-            <a:r>
-              <a:t>How your team works, all semester. Move on after a learner can explain the current example or required action.</a:t>
+              <a:t>Continue to</a:t>
+            </a:r>
+          </a:p>
+          <a:p>
+            <a:r>
+              <a:t>How your team works, all semester</a:t>
             </a:r>
           </a:p>
         </p:txBody>
@@ -6913,27 +6148,27 @@
           <a:lstStyle/>
           <a:p>
             <a:r>
-              <a:t>TEACHING PURPOSE</a:t>
-            </a:r>
-          </a:p>
-          <a:p>
-            <a:r>
               <a:t>How your team works, all semester</a:t>
             </a:r>
           </a:p>
           <a:p>
             <a:r>
+              <a:t>CML3113, Week 1, slide 44</a:t>
+            </a:r>
+          </a:p>
+          <a:p>
+            <a:r>
               <a:t/>
             </a:r>
           </a:p>
           <a:p>
             <a:r>
-              <a:t>CONNECT</a:t>
-            </a:r>
-          </a:p>
-          <a:p>
-            <a:r>
-              <a:t>Build on the preceding slide: Problem Hunt.</a:t>
+              <a:t>Explanation to give</a:t>
+            </a:r>
+          </a:p>
+          <a:p>
+            <a:r>
+              <a:t>Distinguish individual evidence from team project work. Students must understand their own submissions, keep identifiable contributions and read the published rubric before beginning.</a:t>
             </a:r>
           </a:p>
           <a:p>
@@ -6943,12 +6178,12 @@
           </a:p>
           <a:p>
             <a:r>
-              <a:t>LECTURER CUE</a:t>
-            </a:r>
-          </a:p>
-          <a:p>
-            <a:r>
-              <a:t>Sign the team charter before you leave: names, contact details, a weekly meeting slot, and what you will do if somebody stops contributing. Agreeing that in Week 1 is far easier than agreeing it in November, and the charter is the document your contribution log gets read against.</a:t>
+              <a:t>Worked illustration / lecturer answer</a:t>
+            </a:r>
+          </a:p>
+          <a:p>
+            <a:r>
+              <a:t>For a shared project, a useful contribution entry names the cleaned file, chart or evaluation cell the learner produced and the decision they explained. A weekly notebook is submitted through its own assessment form.</a:t>
             </a:r>
           </a:p>
           <a:p>
@@ -6958,12 +6193,12 @@
           </a:p>
           <a:p>
             <a:r>
-              <a:t>EXPLAIN IN ORDINARY WORDS</a:t>
-            </a:r>
-          </a:p>
-          <a:p>
-            <a:r>
-              <a:t>A repository is the project folder and recorded history. A commit records a chosen change; uploading or pushing shares it. A README tells someone else how to run the work.</a:t>
+              <a:t>Misconception to address</a:t>
+            </a:r>
+          </a:p>
+          <a:p>
+            <a:r>
+              <a:t>Do not infer contribution only from the number of commits. Verify the substance of the work. The practical tests include typed reasoning even though there is no traditional written examination.</a:t>
             </a:r>
           </a:p>
           <a:p>
@@ -6973,42 +6208,12 @@
           </a:p>
           <a:p>
             <a:r>
-              <a:t>CHECK AND EXPECTED ANSWER</a:t>
-            </a:r>
-          </a:p>
-          <a:p>
-            <a:r>
-              <a:t>Does saving to GitHub hand in the assignment? No; submission requires the correct form and its confirmation.</a:t>
-            </a:r>
-          </a:p>
-          <a:p>
-            <a:r>
-              <a:t/>
-            </a:r>
-          </a:p>
-          <a:p>
-            <a:r>
-              <a:t>IF LEARNERS ARE STUCK</a:t>
-            </a:r>
-          </a:p>
-          <a:p>
-            <a:r>
-              <a:t>Ask a partner to follow only the README. It should identify the data, files, run order and expected result. Keep secrets out of the repository.</a:t>
-            </a:r>
-          </a:p>
-          <a:p>
-            <a:r>
-              <a:t/>
-            </a:r>
-          </a:p>
-          <a:p>
-            <a:r>
-              <a:t>NEXT</a:t>
-            </a:r>
-          </a:p>
-          <a:p>
-            <a:r>
-              <a:t>Gallery walk, and what you owe me. Move on after a learner can explain the current example or required action.</a:t>
+              <a:t>Continue to</a:t>
+            </a:r>
+          </a:p>
+          <a:p>
+            <a:r>
+              <a:t>Gallery walk, and what you owe me</a:t>
             </a:r>
           </a:p>
         </p:txBody>
@@ -7078,27 +6283,27 @@
           <a:lstStyle/>
           <a:p>
             <a:r>
-              <a:t>TEACHING PURPOSE</a:t>
-            </a:r>
-          </a:p>
-          <a:p>
-            <a:r>
               <a:t>Gallery walk, and what you owe me</a:t>
             </a:r>
           </a:p>
           <a:p>
             <a:r>
+              <a:t>CML3113, Week 1, slide 45</a:t>
+            </a:r>
+          </a:p>
+          <a:p>
+            <a:r>
               <a:t/>
             </a:r>
           </a:p>
           <a:p>
             <a:r>
-              <a:t>CONNECT</a:t>
-            </a:r>
-          </a:p>
-          <a:p>
-            <a:r>
-              <a:t>Build on the preceding slide: How your team works, all semester.</a:t>
+              <a:t>Explanation to give</a:t>
+            </a:r>
+          </a:p>
+          <a:p>
+            <a:r>
+              <a:t>Use this handover to state A1 clearly: three candidate problems and one justified selection, written as a short report.</a:t>
             </a:r>
           </a:p>
           <a:p>
@@ -7108,12 +6313,12 @@
           </a:p>
           <a:p>
             <a:r>
-              <a:t>LECTURER CUE</a:t>
-            </a:r>
-          </a:p>
-          <a:p>
-            <a:r>
-              <a:t>Gallery walk: your team visits two other teams' boards and writes one question on each sheet. Questions only, no verdicts. This is the first peer review of the semester, and in Week 13 peer review is graded.</a:t>
+              <a:t>Worked illustration / lecturer answer</a:t>
+            </a:r>
+          </a:p>
+          <a:p>
+            <a:r>
+              <a:t>Each problem identifies its inputs, target, possible data source and limitation. Submit one DOCX or selectable-text PDF through the A1 form. Account setup prepares for Week 2 and is separate from the report.</a:t>
             </a:r>
           </a:p>
           <a:p>
@@ -7123,12 +6328,27 @@
           </a:p>
           <a:p>
             <a:r>
-              <a:t>NEXT</a:t>
-            </a:r>
-          </a:p>
-          <a:p>
-            <a:r>
-              <a:t>Before Week 2. Move on after a learner can explain the current example or required action.</a:t>
+              <a:t>Misconception to address</a:t>
+            </a:r>
+          </a:p>
+          <a:p>
+            <a:r>
+              <a:t>Read the live deadline, including any catch-up extension. The historical gallery walk is optional; explain one sample problem directly when class time is limited.</a:t>
+            </a:r>
+          </a:p>
+          <a:p>
+            <a:r>
+              <a:t/>
+            </a:r>
+          </a:p>
+          <a:p>
+            <a:r>
+              <a:t>Continue to</a:t>
+            </a:r>
+          </a:p>
+          <a:p>
+            <a:r>
+              <a:t>Before Week 2</a:t>
             </a:r>
           </a:p>
         </p:txBody>
@@ -7198,27 +6418,27 @@
           <a:lstStyle/>
           <a:p>
             <a:r>
-              <a:t>TEACHING PURPOSE</a:t>
-            </a:r>
-          </a:p>
-          <a:p>
-            <a:r>
               <a:t>Before Week 2</a:t>
             </a:r>
           </a:p>
           <a:p>
             <a:r>
+              <a:t>CML3113, Week 1, slide 46</a:t>
+            </a:r>
+          </a:p>
+          <a:p>
+            <a:r>
               <a:t/>
             </a:r>
           </a:p>
           <a:p>
             <a:r>
-              <a:t>CONNECT</a:t>
-            </a:r>
-          </a:p>
-          <a:p>
-            <a:r>
-              <a:t>Build on the preceding slide: Gallery walk, and what you owe me.</a:t>
+              <a:t>Explanation to give</a:t>
+            </a:r>
+          </a:p>
+          <a:p>
+            <a:r>
+              <a:t>Use this handover to state A1 clearly: three candidate problems and one justified selection, written as a short report.</a:t>
             </a:r>
           </a:p>
           <a:p>
@@ -7228,12 +6448,12 @@
           </a:p>
           <a:p>
             <a:r>
-              <a:t>LECTURER CUE</a:t>
-            </a:r>
-          </a:p>
-          <a:p>
-            <a:r>
-              <a:t>The 'not solvable' item is the most valuable part of A1, because it forces you to use the four limits rather than remember them. Take the instruction not to install anything seriously: the course runs in Google Colab, and a Python installation you set up at home creates a problem that cannot be diagnosed in class.</a:t>
+              <a:t>Worked illustration / lecturer answer</a:t>
+            </a:r>
+          </a:p>
+          <a:p>
+            <a:r>
+              <a:t>Each problem identifies its inputs, target, possible data source and limitation. Submit one DOCX or selectable-text PDF through the A1 form. Account setup prepares for Week 2 and is separate from the report.</a:t>
             </a:r>
           </a:p>
           <a:p>
@@ -7243,12 +6463,12 @@
           </a:p>
           <a:p>
             <a:r>
-              <a:t>EXPLAIN IN ORDINARY WORDS</a:t>
-            </a:r>
-          </a:p>
-          <a:p>
-            <a:r>
-              <a:t>A notebook contains code cells and explanatory text cells. The runtime remembers values from cells that actually ran, which may differ from their visual order.</a:t>
+              <a:t>Misconception to address</a:t>
+            </a:r>
+          </a:p>
+          <a:p>
+            <a:r>
+              <a:t>Read the live deadline, including any catch-up extension. The historical gallery walk is optional; explain one sample problem directly when class time is limited.</a:t>
             </a:r>
           </a:p>
           <a:p>
@@ -7258,72 +6478,12 @@
           </a:p>
           <a:p>
             <a:r>
-              <a:t>CHECK AND EXPECTED ANSWER</a:t>
-            </a:r>
-          </a:p>
-          <a:p>
-            <a:r>
-              <a:t>Does editing a cell update a value already stored in memory? No; the cell must run.</a:t>
-            </a:r>
-          </a:p>
-          <a:p>
-            <a:r>
-              <a:t/>
-            </a:r>
-          </a:p>
-          <a:p>
-            <a:r>
-              <a:t>IF LEARNERS ARE STUCK</a:t>
-            </a:r>
-          </a:p>
-          <a:p>
-            <a:r>
-              <a:t>Outside an assessment restriction, restart and run from the top after loading data. Fix the first error before later cells; save the successful notebook.</a:t>
-            </a:r>
-          </a:p>
-          <a:p>
-            <a:r>
-              <a:t/>
-            </a:r>
-          </a:p>
-          <a:p>
-            <a:r>
-              <a:t>ASSIGNMENT HANDOVER</a:t>
-            </a:r>
-          </a:p>
-          <a:p>
-            <a:r>
-              <a:t>Open the matching public student guide and show the exact starter filename, required outputs and upload set. Ask one learner to repeat what to submit and where. IUEA Student Registration Number is required freeform text; learners enter their own number. A saved repository is not a submitted form. Read the live deadline and keep the submission confirmation. Do not release an assessment that is still awaiting grading validation.</a:t>
-            </a:r>
-          </a:p>
-          <a:p>
-            <a:r>
-              <a:t/>
-            </a:r>
-          </a:p>
-          <a:p>
-            <a:r>
-              <a:t>A1 CATCH-UP</a:t>
-            </a:r>
-          </a:p>
-          <a:p>
-            <a:r>
-              <a:t>The original Week 1 schedule has been superseded for catch-up collection. Use the current cohort A1 form deadline, aligned with its Week 2 assignment upload. Quiz 1 is separate and gets 24 hours from its own activation.</a:t>
-            </a:r>
-          </a:p>
-          <a:p>
-            <a:r>
-              <a:t/>
-            </a:r>
-          </a:p>
-          <a:p>
-            <a:r>
-              <a:t>NEXT</a:t>
-            </a:r>
-          </a:p>
-          <a:p>
-            <a:r>
-              <a:t>Watch this before Week 2. Move on after a learner can explain the current example or required action.</a:t>
+              <a:t>Continue to</a:t>
+            </a:r>
+          </a:p>
+          <a:p>
+            <a:r>
+              <a:t>Watch this before Week 2</a:t>
             </a:r>
           </a:p>
         </p:txBody>
@@ -7393,27 +6553,27 @@
           <a:lstStyle/>
           <a:p>
             <a:r>
-              <a:t>TEACHING PURPOSE</a:t>
-            </a:r>
-          </a:p>
-          <a:p>
-            <a:r>
               <a:t>Watch this before Week 2</a:t>
             </a:r>
           </a:p>
           <a:p>
             <a:r>
+              <a:t>CML3113, Week 1, slide 47</a:t>
+            </a:r>
+          </a:p>
+          <a:p>
+            <a:r>
               <a:t/>
             </a:r>
           </a:p>
           <a:p>
             <a:r>
-              <a:t>CONNECT</a:t>
-            </a:r>
-          </a:p>
-          <a:p>
-            <a:r>
-              <a:t>Build on the preceding slide: Before Week 2.</a:t>
+              <a:t>Explanation to give</a:t>
+            </a:r>
+          </a:p>
+          <a:p>
+            <a:r>
+              <a:t>Give the viewing question before playing the excerpt: Explain the distinction or mechanism named on this video slide using one example from today.</a:t>
             </a:r>
           </a:p>
           <a:p>
@@ -7423,12 +6583,12 @@
           </a:p>
           <a:p>
             <a:r>
-              <a:t>LECTURER CUE</a:t>
-            </a:r>
-          </a:p>
-          <a:p>
-            <a:r>
-              <a:t>Watch for where he draws the boundaries between the four terms, and whether they match the nested diagram from today. If they differ, raise it next week — the field genuinely does not fully agree on this. Two optional extras: StatQuest, 'A Gentle Introduction to Machine Learning', https://www.youtube.com/watch?v=Gv9_4yMHFhI, whose author Josh Starmer is the spine of Weeks 8 to 12; and if you have ninety seconds only, Fireship, 'Machine Learning Explained in 100 Seconds', https://www.youtube.com/watch?v=PeMlggyqz0Y</a:t>
+              <a:t>Worked illustration / lecturer answer</a:t>
+            </a:r>
+          </a:p>
+          <a:p>
+            <a:r>
+              <a:t>Use the adjacent worked example as the explanation if the video cannot load. Pause after the relevant example and connect its terms to the names and units already used in this lesson. Preview the displayed link and excerpt before class.</a:t>
             </a:r>
           </a:p>
           <a:p>
@@ -7438,12 +6598,12 @@
           </a:p>
           <a:p>
             <a:r>
-              <a:t>EXPLAIN IN ORDINARY WORDS</a:t>
-            </a:r>
-          </a:p>
-          <a:p>
-            <a:r>
-              <a:t>A feature is an input available when predicting. The target is the answer to learn from. Regression predicts a number; classification predicts a category. Learning patterns does not by itself establish cause.</a:t>
+              <a:t>Misconception to address</a:t>
+            </a:r>
+          </a:p>
+          <a:p>
+            <a:r>
+              <a:t>The video is supporting revision, not a replacement for defining the symbols or a requirement to watch a full tutorial during limited class time.</a:t>
             </a:r>
           </a:p>
           <a:p>
@@ -7453,12 +6613,17 @@
           </a:p>
           <a:p>
             <a:r>
-              <a:t>CHECK AND EXPECTED ANSWER</a:t>
-            </a:r>
-          </a:p>
-          <a:p>
-            <a:r>
-              <a:t>Predicting concrete strength: regression. Predicting pass/fail: classification. Is a later test result available before that test? No.</a:t>
+              <a:t>Reference / existing resource</a:t>
+            </a:r>
+          </a:p>
+          <a:p>
+            <a:r>
+              <a:t>https://www.youtube.com/watch?v=Gv9_4yMHFhI,</a:t>
+            </a:r>
+          </a:p>
+          <a:p>
+            <a:r>
+              <a:t>https://www.youtube.com/watch?v=PeMlggyqz0Y</a:t>
             </a:r>
           </a:p>
           <a:p>
@@ -7468,42 +6633,12 @@
           </a:p>
           <a:p>
             <a:r>
-              <a:t>IF LEARNERS ARE STUCK</a:t>
-            </a:r>
-          </a:p>
-          <a:p>
-            <a:r>
-              <a:t>Describe the engineering decision in everyday language, then label one row, an input and its answer. Compare with a rule you could write directly.</a:t>
-            </a:r>
-          </a:p>
-          <a:p>
-            <a:r>
-              <a:t/>
-            </a:r>
-          </a:p>
-          <a:p>
-            <a:r>
-              <a:t>VIDEO ROUTINE</a:t>
-            </a:r>
-          </a:p>
-          <a:p>
-            <a:r>
-              <a:t>Preview the exact link and stated excerpt before class. State the viewing question first, pause after the example, and ask a learner to explain it. If access fails, use the adjacent worked example and discussion rather than spend class time troubleshooting streaming.</a:t>
-            </a:r>
-          </a:p>
-          <a:p>
-            <a:r>
-              <a:t/>
-            </a:r>
-          </a:p>
-          <a:p>
-            <a:r>
-              <a:t>NEXT</a:t>
-            </a:r>
-          </a:p>
-          <a:p>
-            <a:r>
-              <a:t>Revision material. Move on after a learner can explain the current example or required action.</a:t>
+              <a:t>Continue to</a:t>
+            </a:r>
+          </a:p>
+          <a:p>
+            <a:r>
+              <a:t>Revision material</a:t>
             </a:r>
           </a:p>
         </p:txBody>
@@ -7573,27 +6708,27 @@
           <a:lstStyle/>
           <a:p>
             <a:r>
-              <a:t>TEACHING PURPOSE</a:t>
-            </a:r>
-          </a:p>
-          <a:p>
-            <a:r>
               <a:t>Revision material</a:t>
             </a:r>
           </a:p>
           <a:p>
             <a:r>
+              <a:t>CML3113, Week 1, slide 48</a:t>
+            </a:r>
+          </a:p>
+          <a:p>
+            <a:r>
               <a:t/>
             </a:r>
           </a:p>
           <a:p>
             <a:r>
-              <a:t>CONNECT</a:t>
-            </a:r>
-          </a:p>
-          <a:p>
-            <a:r>
-              <a:t>Build on the preceding slide: Watch this before Week 2.</a:t>
+              <a:t>Explanation to give</a:t>
+            </a:r>
+          </a:p>
+          <a:p>
+            <a:r>
+              <a:t>Orient students to this particular lesson: explain what they will see demonstrated, which file they will use and what they must retain for revision. Keep the transition short enough to preserve explanation time.</a:t>
             </a:r>
           </a:p>
           <a:p>
@@ -7603,12 +6738,12 @@
           </a:p>
           <a:p>
             <a:r>
-              <a:t>LECTURER CUE</a:t>
-            </a:r>
-          </a:p>
-          <a:p>
-            <a:r>
-              <a:t>Everything from here on is revision material rather than presented content: a summary, a self-test with worked answers, an eighteen-term glossary and a one-page reference sheet. It is written to be studied from in your own time.</a:t>
+              <a:t>Worked illustration / lecturer answer</a:t>
+            </a:r>
+          </a:p>
+          <a:p>
+            <a:r>
+              <a:t>Open the next worked example on the projector and name its input and intended result. Demonstrate it yourself before asking students to interpret a result. Use remaining summary and glossary pages for independent revision.</a:t>
             </a:r>
           </a:p>
           <a:p>
@@ -7618,12 +6753,27 @@
           </a:p>
           <a:p>
             <a:r>
-              <a:t>NEXT</a:t>
-            </a:r>
-          </a:p>
-          <a:p>
-            <a:r>
-              <a:t>What you should take away. Move on after a learner can explain the current example or required action.</a:t>
+              <a:t>Misconception to address</a:t>
+            </a:r>
+          </a:p>
+          <a:p>
+            <a:r>
+              <a:t>The historical slide's timed group activity is not a requirement to stop for partner work. Use a lecturer-led walkthrough in the current limited class time.</a:t>
+            </a:r>
+          </a:p>
+          <a:p>
+            <a:r>
+              <a:t/>
+            </a:r>
+          </a:p>
+          <a:p>
+            <a:r>
+              <a:t>Continue to</a:t>
+            </a:r>
+          </a:p>
+          <a:p>
+            <a:r>
+              <a:t>What you should take away</a:t>
             </a:r>
           </a:p>
         </p:txBody>
@@ -7693,27 +6843,27 @@
           <a:lstStyle/>
           <a:p>
             <a:r>
-              <a:t>TEACHING PURPOSE</a:t>
-            </a:r>
-          </a:p>
-          <a:p>
-            <a:r>
               <a:t>What you should take away</a:t>
             </a:r>
           </a:p>
           <a:p>
             <a:r>
+              <a:t>CML3113, Week 1, slide 49</a:t>
+            </a:r>
+          </a:p>
+          <a:p>
+            <a:r>
               <a:t/>
             </a:r>
           </a:p>
           <a:p>
             <a:r>
-              <a:t>CONNECT</a:t>
-            </a:r>
-          </a:p>
-          <a:p>
-            <a:r>
-              <a:t>Build on the preceding slide: Revision material.</a:t>
+              <a:t>Explanation to give</a:t>
+            </a:r>
+          </a:p>
+          <a:p>
+            <a:r>
+              <a:t>Start with an engineering decision, then introduce learning from examples. No code is needed today.</a:t>
             </a:r>
           </a:p>
           <a:p>
@@ -7723,12 +6873,12 @@
           </a:p>
           <a:p>
             <a:r>
-              <a:t>LECTURER CUE</a:t>
-            </a:r>
-          </a:p>
-          <a:p>
-            <a:r>
-              <a:t>Seven statements covering the whole session. If any of them reads as new to you, go back to the slide it came from before Week 2 rather than after it.</a:t>
+              <a:t>Worked illustration / lecturer answer</a:t>
+            </a:r>
+          </a:p>
+          <a:p>
+            <a:r>
+              <a:t>A numerical quantity such as days until servicing is a regression target. A label such as service due is a classification target.</a:t>
             </a:r>
           </a:p>
           <a:p>
@@ -7738,12 +6888,12 @@
           </a:p>
           <a:p>
             <a:r>
-              <a:t>EXPLAIN IN ORDINARY WORDS</a:t>
-            </a:r>
-          </a:p>
-          <a:p>
-            <a:r>
-              <a:t>Missing means not recorded, not automatically zero. Decide why it is missing and document the rule. Fitted fill values must come from training data when evaluating a model.</a:t>
+              <a:t>Misconception to address</a:t>
+            </a:r>
+          </a:p>
+          <a:p>
+            <a:r>
+              <a:t>Use the outcomes listed on this slide to check understanding through the small examples, rather than asking only whether everybody understands.</a:t>
             </a:r>
           </a:p>
           <a:p>
@@ -7753,42 +6903,12 @@
           </a:p>
           <a:p>
             <a:r>
-              <a:t>CHECK AND EXPECTED ANSWER</a:t>
-            </a:r>
-          </a:p>
-          <a:p>
-            <a:r>
-              <a:t>Is an unrecorded energy reading evidence of zero consumption? No.</a:t>
-            </a:r>
-          </a:p>
-          <a:p>
-            <a:r>
-              <a:t/>
-            </a:r>
-          </a:p>
-          <a:p>
-            <a:r>
-              <a:t>IF LEARNERS ARE STUCK</a:t>
-            </a:r>
-          </a:p>
-          <a:p>
-            <a:r>
-              <a:t>Use three rows: a recorded zero, a recorded positive value and a blank. Explain their different meanings before cleaning.</a:t>
-            </a:r>
-          </a:p>
-          <a:p>
-            <a:r>
-              <a:t/>
-            </a:r>
-          </a:p>
-          <a:p>
-            <a:r>
-              <a:t>NEXT</a:t>
-            </a:r>
-          </a:p>
-          <a:p>
-            <a:r>
-              <a:t>Self-test — try these before you look. Move on after a learner can explain the current example or required action.</a:t>
+              <a:t>Continue to</a:t>
+            </a:r>
+          </a:p>
+          <a:p>
+            <a:r>
+              <a:t>Self-test — try these before you look</a:t>
             </a:r>
           </a:p>
         </p:txBody>
@@ -7858,27 +6978,27 @@
           <a:lstStyle/>
           <a:p>
             <a:r>
-              <a:t>TEACHING PURPOSE</a:t>
-            </a:r>
-          </a:p>
-          <a:p>
-            <a:r>
               <a:t>Where this semester goes</a:t>
             </a:r>
           </a:p>
           <a:p>
             <a:r>
+              <a:t>CML3113, Week 1, slide 5</a:t>
+            </a:r>
+          </a:p>
+          <a:p>
+            <a:r>
               <a:t/>
             </a:r>
           </a:p>
           <a:p>
             <a:r>
-              <a:t>CONNECT</a:t>
-            </a:r>
-          </a:p>
-          <a:p>
-            <a:r>
-              <a:t>Build on the preceding slide: How every session this semester is shaped.</a:t>
+              <a:t>Explanation to give</a:t>
+            </a:r>
+          </a:p>
+          <a:p>
+            <a:r>
+              <a:t>Explain the sequence as increasing independence: first run and understand code, then inspect data, then build and evaluate a modest predictor, and finally communicate its limits.</a:t>
             </a:r>
           </a:p>
           <a:p>
@@ -7888,12 +7008,12 @@
           </a:p>
           <a:p>
             <a:r>
-              <a:t>LECTURER CUE</a:t>
-            </a:r>
-          </a:p>
-          <a:p>
-            <a:r>
-              <a:t>Fifteen weeks. Weeks 7 and 14 are practical tests where you are given data you have never seen and asked what you make of it, and the project runs from Week 9 to the last session. There is nothing to memorise in this course, which surprises most students who arrive expecting to revise definitions.</a:t>
+              <a:t>Worked illustration / lecturer answer</a:t>
+            </a:r>
+          </a:p>
+          <a:p>
+            <a:r>
+              <a:t>A learner should eventually be able to say what each input represents, reproduce the result from the files and defend why the chosen evaluation matches the intended use.</a:t>
             </a:r>
           </a:p>
           <a:p>
@@ -7903,12 +7023,27 @@
           </a:p>
           <a:p>
             <a:r>
-              <a:t>NEXT</a:t>
-            </a:r>
-          </a:p>
-          <a:p>
-            <a:r>
-              <a:t>What you will be able to say by December. Move on after a learner can explain the current example or required action.</a:t>
+              <a:t>Misconception to address</a:t>
+            </a:r>
+          </a:p>
+          <a:p>
+            <a:r>
+              <a:t>The roadmap is not a promise of professional mastery of every listed field in one semester. Point to the current week's small, observable goal.</a:t>
+            </a:r>
+          </a:p>
+          <a:p>
+            <a:r>
+              <a:t/>
+            </a:r>
+          </a:p>
+          <a:p>
+            <a:r>
+              <a:t>Continue to</a:t>
+            </a:r>
+          </a:p>
+          <a:p>
+            <a:r>
+              <a:t>What you will be able to say by December</a:t>
             </a:r>
           </a:p>
         </p:txBody>
@@ -7978,27 +7113,27 @@
           <a:lstStyle/>
           <a:p>
             <a:r>
-              <a:t>TEACHING PURPOSE</a:t>
-            </a:r>
-          </a:p>
-          <a:p>
-            <a:r>
               <a:t>Self-test — try these before you look</a:t>
             </a:r>
           </a:p>
           <a:p>
             <a:r>
+              <a:t>CML3113, Week 1, slide 50</a:t>
+            </a:r>
+          </a:p>
+          <a:p>
+            <a:r>
               <a:t/>
             </a:r>
           </a:p>
           <a:p>
             <a:r>
-              <a:t>CONNECT</a:t>
-            </a:r>
-          </a:p>
-          <a:p>
-            <a:r>
-              <a:t>Build on the preceding slide: What you should take away.</a:t>
+              <a:t>Explanation to give</a:t>
+            </a:r>
+          </a:p>
+          <a:p>
+            <a:r>
+              <a:t>Explain each answer in relation to the question rather than giving only its letter or label.</a:t>
             </a:r>
           </a:p>
           <a:p>
@@ -8008,12 +7143,92 @@
           </a:p>
           <a:p>
             <a:r>
-              <a:t>LECTURER CUE</a:t>
-            </a:r>
-          </a:p>
-          <a:p>
-            <a:r>
-              <a:t>Optional revision, best attempted with a pencil before you look at the next slide. Question D is a Week 10 idea planted early: anything that notices the circularity of testing a model on cases it has already seen is a good answer at this stage.</a:t>
+              <a:t>Worked illustration / lecturer answer</a:t>
+            </a:r>
+          </a:p>
+          <a:p>
+            <a:r>
+              <a:t>ANSWERS</a:t>
+            </a:r>
+          </a:p>
+          <a:p>
+            <a:r>
+              <a:t>How did you do?</a:t>
+            </a:r>
+          </a:p>
+          <a:p>
+            <a:r>
+              <a:t>A</a:t>
+            </a:r>
+          </a:p>
+          <a:p>
+            <a:r>
+              <a:t>Three questions before agreeing to 'use AI'?</a:t>
+            </a:r>
+          </a:p>
+          <a:p>
+            <a:r>
+              <a:t>What value do you want to predict? Which recorded data can help? Is an established equation suitable? Resolve these questions before choosing a model.</a:t>
+            </a:r>
+          </a:p>
+          <a:p>
+            <a:r>
+              <a:t>B</a:t>
+            </a:r>
+          </a:p>
+          <a:p>
+            <a:r>
+              <a:t>Features and target in a repair table?</a:t>
+            </a:r>
+          </a:p>
+          <a:p>
+            <a:r>
+              <a:t>The target is whatever you want to predict — say time to next failure. Features are everything known BEFORE that: operating hours, load, temperature. The test is timing: anything only known afterwards cannot be a feature.</a:t>
+            </a:r>
+          </a:p>
+          <a:p>
+            <a:r>
+              <a:t>C</a:t>
+            </a:r>
+          </a:p>
+          <a:p>
+            <a:r>
+              <a:t>One of each from your discipline?</a:t>
+            </a:r>
+          </a:p>
+          <a:p>
+            <a:r>
+              <a:t>Regression: any quantity with a unit — silica in the concentrate in percentage points. Classification: ore or waste; or lithology: sandstone, shale, limestone.</a:t>
+            </a:r>
+          </a:p>
+          <a:p>
+            <a:r>
+              <a:t>D</a:t>
+            </a:r>
+          </a:p>
+          <a:p>
+            <a:r>
+              <a:t>Why is a good fit on seen data not evidence?</a:t>
+            </a:r>
+          </a:p>
+          <a:p>
+            <a:r>
+              <a:t>A model may memorise its training examples. Evaluate it on separate examples to check whether it predicts new cases well.</a:t>
+            </a:r>
+          </a:p>
+          <a:p>
+            <a:r>
+              <a:t>E</a:t>
+            </a:r>
+          </a:p>
+          <a:p>
+            <a:r>
+              <a:t>What else before acting?</a:t>
+            </a:r>
+          </a:p>
+          <a:p>
+            <a:r>
+              <a:t>How large the error is in engineering terms and whether that is tolerable; what it costs when the model is wrong; and whether today's conditions still resemble the data it learned from.</a:t>
             </a:r>
           </a:p>
           <a:p>
@@ -8023,12 +7238,12 @@
           </a:p>
           <a:p>
             <a:r>
-              <a:t>EXPLAIN IN ORDINARY WORDS</a:t>
-            </a:r>
-          </a:p>
-          <a:p>
-            <a:r>
-              <a:t>A percentage is out of one hundred. Moving from 10% to 15% is an increase of 5 percentage points, but 50% relative to the original 10%.</a:t>
+              <a:t>Misconception to address</a:t>
+            </a:r>
+          </a:p>
+          <a:p>
+            <a:r>
+              <a:t>Use a short lecturer-led walkthrough or individual thought time. Do not require partner work to unlock the explanation.</a:t>
             </a:r>
           </a:p>
           <a:p>
@@ -8038,142 +7253,12 @@
           </a:p>
           <a:p>
             <a:r>
-              <a:t>CHECK AND EXPECTED ANSWER</a:t>
-            </a:r>
-          </a:p>
-          <a:p>
-            <a:r>
-              <a:t>From 20% to 25%: how many percentage points? 5. Relative increase? 25%.</a:t>
-            </a:r>
-          </a:p>
-          <a:p>
-            <a:r>
-              <a:t/>
-            </a:r>
-          </a:p>
-          <a:p>
-            <a:r>
-              <a:t>IF LEARNERS ARE STUCK</a:t>
-            </a:r>
-          </a:p>
-          <a:p>
-            <a:r>
-              <a:t>Write the subtraction and the division separately; label their different units.</a:t>
-            </a:r>
-          </a:p>
-          <a:p>
-            <a:r>
-              <a:t/>
-            </a:r>
-          </a:p>
-          <a:p>
-            <a:r>
-              <a:t>DISCUSSION KEY FOR THIS SLIDE</a:t>
-            </a:r>
-          </a:p>
-          <a:p>
-            <a:r>
-              <a:t>ANSWERS</a:t>
+              <a:t>Continue to</a:t>
             </a:r>
           </a:p>
           <a:p>
             <a:r>
               <a:t>How did you do?</a:t>
-            </a:r>
-          </a:p>
-          <a:p>
-            <a:r>
-              <a:t>A</a:t>
-            </a:r>
-          </a:p>
-          <a:p>
-            <a:r>
-              <a:t>Three questions before agreeing to 'use AI'?</a:t>
-            </a:r>
-          </a:p>
-          <a:p>
-            <a:r>
-              <a:t>What exactly are we predicting? What data exists, who measured it, and is it kept? And would a rule or an equation we already have do this better? If any of those has no answer, stop.</a:t>
-            </a:r>
-          </a:p>
-          <a:p>
-            <a:r>
-              <a:t>B</a:t>
-            </a:r>
-          </a:p>
-          <a:p>
-            <a:r>
-              <a:t>Features and target in a repair table?</a:t>
-            </a:r>
-          </a:p>
-          <a:p>
-            <a:r>
-              <a:t>The target is whatever you want to predict — say time to next failure. Features are everything known BEFORE that: operating hours, load, temperature. The test is timing: anything only known afterwards cannot be a feature.</a:t>
-            </a:r>
-          </a:p>
-          <a:p>
-            <a:r>
-              <a:t>C</a:t>
-            </a:r>
-          </a:p>
-          <a:p>
-            <a:r>
-              <a:t>One of each from your discipline?</a:t>
-            </a:r>
-          </a:p>
-          <a:p>
-            <a:r>
-              <a:t>Regression: any quantity with a unit — silica in the concentrate in percentage points. Classification: ore or waste; or lithology: sandstone, shale, limestone.</a:t>
-            </a:r>
-          </a:p>
-          <a:p>
-            <a:r>
-              <a:t>D</a:t>
-            </a:r>
-          </a:p>
-          <a:p>
-            <a:r>
-              <a:t>Why is a good fit on seen data not evidence?</a:t>
-            </a:r>
-          </a:p>
-          <a:p>
-            <a:r>
-              <a:t>Because the model could simply have memorised those cases. The only honest test is performance on examples it has never seen — exactly what you did with case 13. This is the whole subject of Week 10.</a:t>
-            </a:r>
-          </a:p>
-          <a:p>
-            <a:r>
-              <a:t>E</a:t>
-            </a:r>
-          </a:p>
-          <a:p>
-            <a:r>
-              <a:t>What else before acting?</a:t>
-            </a:r>
-          </a:p>
-          <a:p>
-            <a:r>
-              <a:t>How large the error is in engineering terms and whether that is tolerable; what it costs when the model is wrong; and whether today's conditions still resemble the data it learned from.</a:t>
-            </a:r>
-          </a:p>
-          <a:p>
-            <a:r>
-              <a:t>Let learners attempt first; use this to explain the reasoning, not just reveal the answer.</a:t>
-            </a:r>
-          </a:p>
-          <a:p>
-            <a:r>
-              <a:t/>
-            </a:r>
-          </a:p>
-          <a:p>
-            <a:r>
-              <a:t>NEXT</a:t>
-            </a:r>
-          </a:p>
-          <a:p>
-            <a:r>
-              <a:t>How did you do?. Move on after a learner can explain the current example or required action.</a:t>
             </a:r>
           </a:p>
         </p:txBody>
@@ -8243,27 +7328,27 @@
           <a:lstStyle/>
           <a:p>
             <a:r>
-              <a:t>TEACHING PURPOSE</a:t>
-            </a:r>
-          </a:p>
-          <a:p>
-            <a:r>
               <a:t>How did you do?</a:t>
             </a:r>
           </a:p>
           <a:p>
             <a:r>
+              <a:t>CML3113, Week 1, slide 51</a:t>
+            </a:r>
+          </a:p>
+          <a:p>
+            <a:r>
               <a:t/>
             </a:r>
           </a:p>
           <a:p>
             <a:r>
-              <a:t>CONNECT</a:t>
-            </a:r>
-          </a:p>
-          <a:p>
-            <a:r>
-              <a:t>Build on the preceding slide: Self-test — try these before you look.</a:t>
+              <a:t>Explanation to give</a:t>
+            </a:r>
+          </a:p>
+          <a:p>
+            <a:r>
+              <a:t>For each answer on this slide, identify the deciding feature of the question: timing of the input, kind of target, run order or operation requested.</a:t>
             </a:r>
           </a:p>
           <a:p>
@@ -8273,12 +7358,57 @@
           </a:p>
           <a:p>
             <a:r>
-              <a:t>LECTURER CUE</a:t>
-            </a:r>
-          </a:p>
-          <a:p>
-            <a:r>
-              <a:t>Answer D is the most important idea in the course. A model can simply memorise the cases it was shown, so good performance on those cases is no evidence of anything. The only honest test is data the model has never seen, which is exactly what case 13 was for you.</a:t>
+              <a:t>Worked illustration / lecturer answer</a:t>
+            </a:r>
+          </a:p>
+          <a:p>
+            <a:r>
+              <a:t>Three questions before agreeing to 'use AI'?</a:t>
+            </a:r>
+          </a:p>
+          <a:p>
+            <a:r>
+              <a:t>What value do you want to predict? Which recorded data can help? Is an established equation suitable? Resolve these questions before choosing a model.</a:t>
+            </a:r>
+          </a:p>
+          <a:p>
+            <a:r>
+              <a:t>Features and target in a repair table?</a:t>
+            </a:r>
+          </a:p>
+          <a:p>
+            <a:r>
+              <a:t>The target is whatever you want to predict — say time to next failure. Features are everything known BEFORE that: operating hours, load, temperature. The test is timing: anything only known afterwards cannot be a feature.</a:t>
+            </a:r>
+          </a:p>
+          <a:p>
+            <a:r>
+              <a:t>One of each from your discipline?</a:t>
+            </a:r>
+          </a:p>
+          <a:p>
+            <a:r>
+              <a:t>Regression: any quantity with a unit — silica in the concentrate in percentage points. Classification: ore or waste; or lithology: sandstone, shale, limestone.</a:t>
+            </a:r>
+          </a:p>
+          <a:p>
+            <a:r>
+              <a:t>Why is a good fit on seen data not evidence?</a:t>
+            </a:r>
+          </a:p>
+          <a:p>
+            <a:r>
+              <a:t>A model may memorise its training examples. Evaluate it on separate examples to check whether it predicts new cases well.</a:t>
+            </a:r>
+          </a:p>
+          <a:p>
+            <a:r>
+              <a:t>What else before acting?</a:t>
+            </a:r>
+          </a:p>
+          <a:p>
+            <a:r>
+              <a:t>How large the error is in engineering terms and whether that is tolerable; what it costs when the model is wrong; and whether today's conditions still resemble the data it learned from.</a:t>
             </a:r>
           </a:p>
           <a:p>
@@ -8288,12 +7418,12 @@
           </a:p>
           <a:p>
             <a:r>
-              <a:t>EXPLAIN IN ORDINARY WORDS</a:t>
-            </a:r>
-          </a:p>
-          <a:p>
-            <a:r>
-              <a:t>A percentage is out of one hundred. Moving from 10% to 15% is an increase of 5 percentage points, but 50% relative to the original 10%.</a:t>
+              <a:t>Misconception to address</a:t>
+            </a:r>
+          </a:p>
+          <a:p>
+            <a:r>
+              <a:t>If a student gives a different engineering example, check its reasoning and timing rather than requiring identical wording to the printed example.</a:t>
             </a:r>
           </a:p>
           <a:p>
@@ -8303,42 +7433,12 @@
           </a:p>
           <a:p>
             <a:r>
-              <a:t>CHECK AND EXPECTED ANSWER</a:t>
-            </a:r>
-          </a:p>
-          <a:p>
-            <a:r>
-              <a:t>From 20% to 25%: how many percentage points? 5. Relative increase? 25%.</a:t>
-            </a:r>
-          </a:p>
-          <a:p>
-            <a:r>
-              <a:t/>
-            </a:r>
-          </a:p>
-          <a:p>
-            <a:r>
-              <a:t>IF LEARNERS ARE STUCK</a:t>
-            </a:r>
-          </a:p>
-          <a:p>
-            <a:r>
-              <a:t>Write the subtraction and the division separately; label their different units.</a:t>
-            </a:r>
-          </a:p>
-          <a:p>
-            <a:r>
-              <a:t/>
-            </a:r>
-          </a:p>
-          <a:p>
-            <a:r>
-              <a:t>NEXT</a:t>
-            </a:r>
-          </a:p>
-          <a:p>
-            <a:r>
-              <a:t>Every word we used today (1 of 3). Move on after a learner can explain the current example or required action.</a:t>
+              <a:t>Continue to</a:t>
+            </a:r>
+          </a:p>
+          <a:p>
+            <a:r>
+              <a:t>Every word we used today (1 of 3)</a:t>
             </a:r>
           </a:p>
         </p:txBody>
@@ -8408,27 +7508,27 @@
           <a:lstStyle/>
           <a:p>
             <a:r>
-              <a:t>TEACHING PURPOSE</a:t>
-            </a:r>
-          </a:p>
-          <a:p>
-            <a:r>
               <a:t>Every word we used today (3 of 3)</a:t>
             </a:r>
           </a:p>
           <a:p>
             <a:r>
+              <a:t>CML3113, Week 1, slide 54</a:t>
+            </a:r>
+          </a:p>
+          <a:p>
+            <a:r>
               <a:t/>
             </a:r>
           </a:p>
           <a:p>
             <a:r>
-              <a:t>CONNECT</a:t>
-            </a:r>
-          </a:p>
-          <a:p>
-            <a:r>
-              <a:t>Build on the preceding slide: Every word we used today (2 of 3).</a:t>
+              <a:t>Explanation to give</a:t>
+            </a:r>
+          </a:p>
+          <a:p>
+            <a:r>
+              <a:t>If the intended use is new equipment, keep all observations from each equipment ID together in one partition. Otherwise near-related records can make evaluation look easier than deployment.</a:t>
             </a:r>
           </a:p>
           <a:p>
@@ -8438,12 +7538,7 @@
           </a:p>
           <a:p>
             <a:r>
-              <a:t>LECTURER CUE</a:t>
-            </a:r>
-          </a:p>
-          <a:p>
-            <a:r>
-              <a:t>Eighteen terms. If you can define all eighteen by Week 3 you are ahead of the schedule, and these exact words appear in the weekly quizzes. The last two entries, generalisation and association versus cause, are forward references; they are printed here so the words are familiar when they arrive properly in Weeks 8 and 10.</a:t>
+              <a:t>Generalisation means working on relevant observations not used to learn the model. Overfitting captures training-specific detail; underfitting misses useful structure even in training.</a:t>
             </a:r>
           </a:p>
           <a:p>
@@ -8453,12 +7548,12 @@
           </a:p>
           <a:p>
             <a:r>
-              <a:t>EXPLAIN IN ORDINARY WORDS</a:t>
-            </a:r>
-          </a:p>
-          <a:p>
-            <a:r>
-              <a:t>Training fits rules. Validation helps choose among rules. The final test estimates performance after choices are fixed. Information that would be unavailable at the real prediction time must stay out of the inputs.</a:t>
+              <a:t>Worked illustration / lecturer answer</a:t>
+            </a:r>
+          </a:p>
+          <a:p>
+            <a:r>
+              <a:t>Equipment A recorded on Monday and Tuesday belongs in one partition under a group split. Splitting those two rows across train and validation lets the model see the same equipment on both sides.</a:t>
             </a:r>
           </a:p>
           <a:p>
@@ -8468,12 +7563,7 @@
           </a:p>
           <a:p>
             <a:r>
-              <a:t>CHECK AND EXPECTED ANSWER</a:t>
-            </a:r>
-          </a:p>
-          <a:p>
-            <a:r>
-              <a:t>May two readings of the same machine appear on both sides when evaluating new machines? No; split by machine. For forecasting, train on the past and evaluate later time.</a:t>
+              <a:t>A very deep tree may memorise noisy training readings. A constant baseline may miss a clear trend. Compare training and validation errors to diagnose these possibilities.</a:t>
             </a:r>
           </a:p>
           <a:p>
@@ -8483,12 +7573,12 @@
           </a:p>
           <a:p>
             <a:r>
-              <a:t>IF LEARNERS ARE STUCK</a:t>
-            </a:r>
-          </a:p>
-          <a:p>
-            <a:r>
-              <a:t>Use three envelopes. Keep the final-test envelope closed while selecting features or settings.</a:t>
+              <a:t>Misconception to address</a:t>
+            </a:r>
+          </a:p>
+          <a:p>
+            <a:r>
+              <a:t>Use this page for revision. Connect each word to the concrete example just taught; do not introduce all the definitions as new material in one block.</a:t>
             </a:r>
           </a:p>
           <a:p>
@@ -8498,12 +7588,12 @@
           </a:p>
           <a:p>
             <a:r>
-              <a:t>NEXT</a:t>
-            </a:r>
-          </a:p>
-          <a:p>
-            <a:r>
-              <a:t>Eight questions to ask about any data problem. Move on after a learner can explain the current example or required action.</a:t>
+              <a:t>Continue to</a:t>
+            </a:r>
+          </a:p>
+          <a:p>
+            <a:r>
+              <a:t>Eight questions to ask about any data problem</a:t>
             </a:r>
           </a:p>
         </p:txBody>
@@ -8573,27 +7663,27 @@
           <a:lstStyle/>
           <a:p>
             <a:r>
-              <a:t>TEACHING PURPOSE</a:t>
-            </a:r>
-          </a:p>
-          <a:p>
-            <a:r>
               <a:t>Eight questions to ask about any data problem</a:t>
             </a:r>
           </a:p>
           <a:p>
             <a:r>
+              <a:t>CML3113, Week 1, slide 55</a:t>
+            </a:r>
+          </a:p>
+          <a:p>
+            <a:r>
               <a:t/>
             </a:r>
           </a:p>
           <a:p>
             <a:r>
-              <a:t>CONNECT</a:t>
-            </a:r>
-          </a:p>
-          <a:p>
-            <a:r>
-              <a:t>Build on the preceding slide: Every word we used today (3 of 3).</a:t>
+              <a:t>Explanation to give</a:t>
+            </a:r>
+          </a:p>
+          <a:p>
+            <a:r>
+              <a:t>Start from a decision somebody needs to make. Name the answer required, the information available beforehand, where examples could come from and what a mistake would cost.</a:t>
             </a:r>
           </a:p>
           <a:p>
@@ -8603,12 +7693,12 @@
           </a:p>
           <a:p>
             <a:r>
-              <a:t>LECTURER CUE</a:t>
-            </a:r>
-          </a:p>
-          <a:p>
-            <a:r>
-              <a:t>These eight questions are the spine of the whole course. Every project milestone from Week 9 onwards is assessed against some subset of them, and this is the page worth having in front of you in the Week 14 practical test.</a:t>
+              <a:t>Worked illustration / lecturer answer</a:t>
+            </a:r>
+          </a:p>
+          <a:p>
+            <a:r>
+              <a:t>“Predict energy consumption for next week to plan a budget” names a target, horizon and decision. “Use AI in buildings” is too broad to determine data or success criteria.</a:t>
             </a:r>
           </a:p>
           <a:p>
@@ -8618,12 +7708,12 @@
           </a:p>
           <a:p>
             <a:r>
-              <a:t>EXPLAIN IN ORDINARY WORDS</a:t>
-            </a:r>
-          </a:p>
-          <a:p>
-            <a:r>
-              <a:t>An observation describes the data. A finding answers a defined question with evidence. A recommendation adds an action, its justification and limits.</a:t>
+              <a:t>Misconception to address</a:t>
+            </a:r>
+          </a:p>
+          <a:p>
+            <a:r>
+              <a:t>A proposed dataset is not automatically appropriate because its title sounds relevant. Check what one row means and when its fields become available.</a:t>
             </a:r>
           </a:p>
           <a:p>
@@ -8633,42 +7723,12 @@
           </a:p>
           <a:p>
             <a:r>
-              <a:t>CHECK AND EXPECTED ANSWER</a:t>
-            </a:r>
-          </a:p>
-          <a:p>
-            <a:r>
-              <a:t>Does a difference between two groups prove one caused the other? No. Other differences or selection may explain it.</a:t>
-            </a:r>
-          </a:p>
-          <a:p>
-            <a:r>
-              <a:t/>
-            </a:r>
-          </a:p>
-          <a:p>
-            <a:r>
-              <a:t>IF LEARNERS ARE STUCK</a:t>
-            </a:r>
-          </a:p>
-          <a:p>
-            <a:r>
-              <a:t>Ask for the population, time period, number and comparison. Then ask what additional evidence could change the recommendation.</a:t>
-            </a:r>
-          </a:p>
-          <a:p>
-            <a:r>
-              <a:t/>
-            </a:r>
-          </a:p>
-          <a:p>
-            <a:r>
-              <a:t>NEXT</a:t>
-            </a:r>
-          </a:p>
-          <a:p>
-            <a:r>
-              <a:t>Five questions,. Move on after a learner can explain the current example or required action.</a:t>
+              <a:t>Continue to</a:t>
+            </a:r>
+          </a:p>
+          <a:p>
+            <a:r>
+              <a:t>Five questions,</a:t>
             </a:r>
           </a:p>
         </p:txBody>
@@ -8738,27 +7798,27 @@
           <a:lstStyle/>
           <a:p>
             <a:r>
-              <a:t>TEACHING PURPOSE</a:t>
-            </a:r>
-          </a:p>
-          <a:p>
-            <a:r>
               <a:t>Five questions,</a:t>
             </a:r>
           </a:p>
           <a:p>
             <a:r>
+              <a:t>CML3113, Week 1, slide 56</a:t>
+            </a:r>
+          </a:p>
+          <a:p>
+            <a:r>
               <a:t/>
             </a:r>
           </a:p>
           <a:p>
             <a:r>
-              <a:t>CONNECT</a:t>
-            </a:r>
-          </a:p>
-          <a:p>
-            <a:r>
-              <a:t>Build on the preceding slide: Eight questions to ask about any data problem.</a:t>
+              <a:t>Explanation to give</a:t>
+            </a:r>
+          </a:p>
+          <a:p>
+            <a:r>
+              <a:t>This is the CML3113 Week 1 quiz. The student link opens the response form; it does not activate its window. In Quiz Controls use open_W1_CML3113 when ready and read the logged closing time.</a:t>
             </a:r>
           </a:p>
           <a:p>
@@ -8768,17 +7828,12 @@
           </a:p>
           <a:p>
             <a:r>
-              <a:t>LECTURER CUE</a:t>
-            </a:r>
-          </a:p>
-          <a:p>
-            <a:r>
-              <a:t>The last five minutes of every teaching session. Five questions, one per cent, and you see your score as you submit.</a:t>
-            </a:r>
-          </a:p>
-          <a:p>
-            <a:r>
-              <a:t>Nothing on it can be answered without reading what it shows you, so there is nothing to revise for it beyond having done the session. Twelve run across the semester and the best ten count.</a:t>
+              <a:t>Worked illustration / lecturer answer</a:t>
+            </a:r>
+          </a:p>
+          <a:p>
+            <a:r>
+              <a:t>Explain the distinction between the expected answering time and availability: five minutes of questions can still be available for 24 hours after activation. Enter the learner’s own Student Registration Number and use the registered Google account.</a:t>
             </a:r>
           </a:p>
           <a:p>
@@ -8788,12 +7843,12 @@
           </a:p>
           <a:p>
             <a:r>
-              <a:t>EXPLAIN IN ORDINARY WORDS</a:t>
-            </a:r>
-          </a:p>
-          <a:p>
-            <a:r>
-              <a:t>An observation describes the data. A finding answers a defined question with evidence. A recommendation adds an action, its justification and limits.</a:t>
+              <a:t>Misconception to address</a:t>
+            </a:r>
+          </a:p>
+          <a:p>
+            <a:r>
+              <a:t>Read the exact live cutoff before announcing it. Do not promise a new attempt to somebody who already submitted. Quiz catch-up and assignment uploads are separate forms.</a:t>
             </a:r>
           </a:p>
           <a:p>
@@ -8803,57 +7858,12 @@
           </a:p>
           <a:p>
             <a:r>
-              <a:t>CHECK AND EXPECTED ANSWER</a:t>
-            </a:r>
-          </a:p>
-          <a:p>
-            <a:r>
-              <a:t>Does a difference between two groups prove one caused the other? No. Other differences or selection may explain it.</a:t>
-            </a:r>
-          </a:p>
-          <a:p>
-            <a:r>
-              <a:t/>
-            </a:r>
-          </a:p>
-          <a:p>
-            <a:r>
-              <a:t>IF LEARNERS ARE STUCK</a:t>
-            </a:r>
-          </a:p>
-          <a:p>
-            <a:r>
-              <a:t>Ask for the population, time period, number and comparison. Then ask what additional evidence could change the recommendation.</a:t>
-            </a:r>
-          </a:p>
-          <a:p>
-            <a:r>
-              <a:t/>
-            </a:r>
-          </a:p>
-          <a:p>
-            <a:r>
-              <a:t>QUIZ OPERATION</a:t>
-            </a:r>
-          </a:p>
-          <a:p>
-            <a:r>
-              <a:t>Opening the student link does not activate the quiz. In Quiz Controls run the matching open_W&lt;week&gt;_&lt;cohort&gt; function once when ready. Announce the logged closing time: 24 hours after activation. Five minutes describes expected answering time, not the availability window. Quiz 1 and Quiz 2 require separate activation when collecting catch-up work.</a:t>
-            </a:r>
-          </a:p>
-          <a:p>
-            <a:r>
-              <a:t/>
-            </a:r>
-          </a:p>
-          <a:p>
-            <a:r>
-              <a:t>NEXT</a:t>
-            </a:r>
-          </a:p>
-          <a:p>
-            <a:r>
-              <a:t>You have already done. Move on after a learner can explain the current example or required action.</a:t>
+              <a:t>Continue to</a:t>
+            </a:r>
+          </a:p>
+          <a:p>
+            <a:r>
+              <a:t>You have already done</a:t>
             </a:r>
           </a:p>
         </p:txBody>
@@ -8923,27 +7933,27 @@
           <a:lstStyle/>
           <a:p>
             <a:r>
-              <a:t>TEACHING PURPOSE</a:t>
-            </a:r>
-          </a:p>
-          <a:p>
-            <a:r>
               <a:t>You have already done</a:t>
             </a:r>
           </a:p>
           <a:p>
             <a:r>
+              <a:t>CML3113, Week 1, slide 57</a:t>
+            </a:r>
+          </a:p>
+          <a:p>
+            <a:r>
               <a:t/>
             </a:r>
           </a:p>
           <a:p>
             <a:r>
-              <a:t>CONNECT</a:t>
-            </a:r>
-          </a:p>
-          <a:p>
-            <a:r>
-              <a:t>Build on the preceding slide: Five questions,.</a:t>
+              <a:t>Explanation to give</a:t>
+            </a:r>
+          </a:p>
+          <a:p>
+            <a:r>
+              <a:t>Translate each action into its technical name only after describing the action. Reading records is exploration, forming a relationship is fitting, applying it to a new case is prediction and comparing against truth is evaluation.</a:t>
             </a:r>
           </a:p>
           <a:p>
@@ -8953,12 +7963,12 @@
           </a:p>
           <a:p>
             <a:r>
-              <a:t>LECTURER CUE</a:t>
-            </a:r>
-          </a:p>
-          <a:p>
-            <a:r>
-              <a:t>Before next week: A1 due at the start of the session, a GitHub account and a Google account created, the video watched, and nothing installed. Week 2 needs a browser and nothing else.</a:t>
+              <a:t>Worked illustration / lecturer answer</a:t>
+            </a:r>
+          </a:p>
+          <a:p>
+            <a:r>
+              <a:t>In the paper example, the twelve labelled rows teach the provisional rule. The held-out case checks that rule. Later Python code makes these same actions repeatable on more records.</a:t>
             </a:r>
           </a:p>
           <a:p>
@@ -8968,42 +7978,12 @@
           </a:p>
           <a:p>
             <a:r>
-              <a:t>EXPLAIN IN ORDINARY WORDS</a:t>
-            </a:r>
-          </a:p>
-          <a:p>
-            <a:r>
-              <a:t>A notebook contains code cells and explanatory text cells. The runtime remembers values from cells that actually ran, which may differ from their visual order.</a:t>
-            </a:r>
-          </a:p>
-          <a:p>
-            <a:r>
-              <a:t/>
-            </a:r>
-          </a:p>
-          <a:p>
-            <a:r>
-              <a:t>CHECK AND EXPECTED ANSWER</a:t>
-            </a:r>
-          </a:p>
-          <a:p>
-            <a:r>
-              <a:t>Does editing a cell update a value already stored in memory? No; the cell must run.</a:t>
-            </a:r>
-          </a:p>
-          <a:p>
-            <a:r>
-              <a:t/>
-            </a:r>
-          </a:p>
-          <a:p>
-            <a:r>
-              <a:t>IF LEARNERS ARE STUCK</a:t>
-            </a:r>
-          </a:p>
-          <a:p>
-            <a:r>
-              <a:t>Outside an assessment restriction, restart and run from the top after loading data. Fix the first error before later cells; save the successful notebook.</a:t>
+              <a:t>Misconception to address</a:t>
+            </a:r>
+          </a:p>
+          <a:p>
+            <a:r>
+              <a:t>Finding a pattern in the training examples is not the final success criterion. Keep asking how the rule behaves on unseen, relevant observations.</a:t>
             </a:r>
           </a:p>
         </p:txBody>
@@ -9073,27 +8053,27 @@
           <a:lstStyle/>
           <a:p>
             <a:r>
-              <a:t>TEACHING PURPOSE</a:t>
-            </a:r>
-          </a:p>
-          <a:p>
-            <a:r>
               <a:t>What you will be able to say by December</a:t>
             </a:r>
           </a:p>
           <a:p>
             <a:r>
+              <a:t>CML3113, Week 1, slide 6</a:t>
+            </a:r>
+          </a:p>
+          <a:p>
+            <a:r>
               <a:t/>
             </a:r>
           </a:p>
           <a:p>
             <a:r>
-              <a:t>CONNECT</a:t>
-            </a:r>
-          </a:p>
-          <a:p>
-            <a:r>
-              <a:t>Build on the preceding slide: Where this semester goes.</a:t>
+              <a:t>Explanation to give</a:t>
+            </a:r>
+          </a:p>
+          <a:p>
+            <a:r>
+              <a:t>Explain the sequence as increasing independence: first run and understand code, then inspect data, then build and evaluate a modest predictor, and finally communicate its limits.</a:t>
             </a:r>
           </a:p>
           <a:p>
@@ -9103,12 +8083,12 @@
           </a:p>
           <a:p>
             <a:r>
-              <a:t>LECTURER CUE</a:t>
-            </a:r>
-          </a:p>
-          <a:p>
-            <a:r>
-              <a:t>Six steps, from knowing what a dataset is to saying 'here is a model I built and here is how I know it works'. Most of you cannot do step two today and all of you can reach step six by December. The students who get there are the ones who do the weekly deliverable every week, and the difference is visible by about Week 6.</a:t>
+              <a:t>Worked illustration / lecturer answer</a:t>
+            </a:r>
+          </a:p>
+          <a:p>
+            <a:r>
+              <a:t>A learner should eventually be able to say what each input represents, reproduce the result from the files and defend why the chosen evaluation matches the intended use.</a:t>
             </a:r>
           </a:p>
           <a:p>
@@ -9118,12 +8098,27 @@
           </a:p>
           <a:p>
             <a:r>
-              <a:t>NEXT</a:t>
-            </a:r>
-          </a:p>
-          <a:p>
-            <a:r>
-              <a:t>Welcome, and how this course works. Move on after a learner can explain the current example or required action.</a:t>
+              <a:t>Misconception to address</a:t>
+            </a:r>
+          </a:p>
+          <a:p>
+            <a:r>
+              <a:t>The roadmap is not a promise of professional mastery of every listed field in one semester. Point to the current week's small, observable goal.</a:t>
+            </a:r>
+          </a:p>
+          <a:p>
+            <a:r>
+              <a:t/>
+            </a:r>
+          </a:p>
+          <a:p>
+            <a:r>
+              <a:t>Continue to</a:t>
+            </a:r>
+          </a:p>
+          <a:p>
+            <a:r>
+              <a:t>Welcome, and how this course works</a:t>
             </a:r>
           </a:p>
         </p:txBody>
@@ -9193,27 +8188,27 @@
           <a:lstStyle/>
           <a:p>
             <a:r>
-              <a:t>TEACHING PURPOSE</a:t>
-            </a:r>
-          </a:p>
-          <a:p>
-            <a:r>
               <a:t>Welcome, and how this course works</a:t>
             </a:r>
           </a:p>
           <a:p>
             <a:r>
+              <a:t>CML3113, Week 1, slide 7</a:t>
+            </a:r>
+          </a:p>
+          <a:p>
+            <a:r>
               <a:t/>
             </a:r>
           </a:p>
           <a:p>
             <a:r>
-              <a:t>CONNECT</a:t>
-            </a:r>
-          </a:p>
-          <a:p>
-            <a:r>
-              <a:t>Build on the preceding slide: What you will be able to say by December.</a:t>
+              <a:t>Explanation to give</a:t>
+            </a:r>
+          </a:p>
+          <a:p>
+            <a:r>
+              <a:t>Distinguish individual evidence from team project work. Students must understand their own submissions, keep identifiable contributions and read the published rubric before beginning.</a:t>
             </a:r>
           </a:p>
           <a:p>
@@ -9223,12 +8218,12 @@
           </a:p>
           <a:p>
             <a:r>
-              <a:t>LECTURER CUE</a:t>
-            </a:r>
-          </a:p>
-          <a:p>
-            <a:r>
-              <a:t>Fifteen minutes on how the course works: the promise, the assessment, and what is expected on both sides. Everything after this segment is engineering.</a:t>
+              <a:t>Worked illustration / lecturer answer</a:t>
+            </a:r>
+          </a:p>
+          <a:p>
+            <a:r>
+              <a:t>For a shared project, a useful contribution entry names the cleaned file, chart or evaluation cell the learner produced and the decision they explained. A weekly notebook is submitted through its own assessment form.</a:t>
             </a:r>
           </a:p>
           <a:p>
@@ -9238,12 +8233,27 @@
           </a:p>
           <a:p>
             <a:r>
-              <a:t>NEXT</a:t>
-            </a:r>
-          </a:p>
-          <a:p>
-            <a:r>
-              <a:t>How you are assessed. Move on after a learner can explain the current example or required action.</a:t>
+              <a:t>Misconception to address</a:t>
+            </a:r>
+          </a:p>
+          <a:p>
+            <a:r>
+              <a:t>Do not infer contribution only from the number of commits. Verify the substance of the work. The practical tests include typed reasoning even though there is no traditional written examination.</a:t>
+            </a:r>
+          </a:p>
+          <a:p>
+            <a:r>
+              <a:t/>
+            </a:r>
+          </a:p>
+          <a:p>
+            <a:r>
+              <a:t>Continue to</a:t>
+            </a:r>
+          </a:p>
+          <a:p>
+            <a:r>
+              <a:t>How you are assessed</a:t>
             </a:r>
           </a:p>
         </p:txBody>
@@ -9313,27 +8323,27 @@
           <a:lstStyle/>
           <a:p>
             <a:r>
-              <a:t>TEACHING PURPOSE</a:t>
-            </a:r>
-          </a:p>
-          <a:p>
-            <a:r>
               <a:t>How you are assessed</a:t>
             </a:r>
           </a:p>
           <a:p>
             <a:r>
+              <a:t>CML3113, Week 1, slide 8</a:t>
+            </a:r>
+          </a:p>
+          <a:p>
+            <a:r>
               <a:t/>
             </a:r>
           </a:p>
           <a:p>
             <a:r>
-              <a:t>CONNECT</a:t>
-            </a:r>
-          </a:p>
-          <a:p>
-            <a:r>
-              <a:t>Build on the preceding slide: Welcome, and how this course works.</a:t>
+              <a:t>Explanation to give</a:t>
+            </a:r>
+          </a:p>
+          <a:p>
+            <a:r>
+              <a:t>Distinguish individual evidence from team project work. Students must understand their own submissions, keep identifiable contributions and read the published rubric before beginning.</a:t>
             </a:r>
           </a:p>
           <a:p>
@@ -9343,12 +8353,12 @@
           </a:p>
           <a:p>
             <a:r>
-              <a:t>LECTURER CUE</a:t>
-            </a:r>
-          </a:p>
-          <a:p>
-            <a:r>
-              <a:t>Two details the figure does not carry. Every teaching session ends with a five-minute quiz of five questions, taken on your phone by QR code, auto-marked, and you have your score before you leave the room. There are twelve of them and the best ten count, one per cent each, so missing two costs you nothing and there are no resits to arrange. The two practical tests run offline on lab machines with no internet and no AI assistants. AI tools are permitted and taught in the coursework provided you declare what you used, because the mark follows what you can explain.</a:t>
+              <a:t>Worked illustration / lecturer answer</a:t>
+            </a:r>
+          </a:p>
+          <a:p>
+            <a:r>
+              <a:t>For a shared project, a useful contribution entry names the cleaned file, chart or evaluation cell the learner produced and the decision they explained. A weekly notebook is submitted through its own assessment form.</a:t>
             </a:r>
           </a:p>
           <a:p>
@@ -9358,12 +8368,27 @@
           </a:p>
           <a:p>
             <a:r>
-              <a:t>NEXT</a:t>
-            </a:r>
-          </a:p>
-          <a:p>
-            <a:r>
-              <a:t>What I expect, and what you can expect back. Move on after a learner can explain the current example or required action.</a:t>
+              <a:t>Misconception to address</a:t>
+            </a:r>
+          </a:p>
+          <a:p>
+            <a:r>
+              <a:t>Do not infer contribution only from the number of commits. Verify the substance of the work. The practical tests include typed reasoning even though there is no traditional written examination.</a:t>
+            </a:r>
+          </a:p>
+          <a:p>
+            <a:r>
+              <a:t/>
+            </a:r>
+          </a:p>
+          <a:p>
+            <a:r>
+              <a:t>Continue to</a:t>
+            </a:r>
+          </a:p>
+          <a:p>
+            <a:r>
+              <a:t>What I expect, and what you can expect back</a:t>
             </a:r>
           </a:p>
         </p:txBody>
@@ -9433,27 +8458,27 @@
           <a:lstStyle/>
           <a:p>
             <a:r>
-              <a:t>TEACHING PURPOSE</a:t>
-            </a:r>
-          </a:p>
-          <a:p>
-            <a:r>
               <a:t>What I expect, and what you can expect back</a:t>
             </a:r>
           </a:p>
           <a:p>
             <a:r>
+              <a:t>CML3113, Week 1, slide 9</a:t>
+            </a:r>
+          </a:p>
+          <a:p>
+            <a:r>
               <a:t/>
             </a:r>
           </a:p>
           <a:p>
             <a:r>
-              <a:t>CONNECT</a:t>
-            </a:r>
-          </a:p>
-          <a:p>
-            <a:r>
-              <a:t>Build on the preceding slide: How you are assessed.</a:t>
+              <a:t>Explanation to give</a:t>
+            </a:r>
+          </a:p>
+          <a:p>
+            <a:r>
+              <a:t>Distinguish individual evidence from team project work. Students must understand their own submissions, keep identifiable contributions and read the published rubric before beginning.</a:t>
             </a:r>
           </a:p>
           <a:p>
@@ -9463,12 +8488,12 @@
           </a:p>
           <a:p>
             <a:r>
-              <a:t>LECTURER CUE</a:t>
-            </a:r>
-          </a:p>
-          <a:p>
-            <a:r>
-              <a:t>The 'ask well' item is the one that changes how much you get out of the semester. Bring the error message, what you already tried, and what you expected to happen; assembling those three things solves the problem outright often enough to be worth the effort every time. If you are stuck for more than five minutes in a practical, put your hand up rather than sitting quietly.</a:t>
+              <a:t>Worked illustration / lecturer answer</a:t>
+            </a:r>
+          </a:p>
+          <a:p>
+            <a:r>
+              <a:t>For a shared project, a useful contribution entry names the cleaned file, chart or evaluation cell the learner produced and the decision they explained. A weekly notebook is submitted through its own assessment form.</a:t>
             </a:r>
           </a:p>
           <a:p>
@@ -9478,12 +8503,27 @@
           </a:p>
           <a:p>
             <a:r>
-              <a:t>NEXT</a:t>
-            </a:r>
-          </a:p>
-          <a:p>
-            <a:r>
-              <a:t>The whole field, start to finish. Move on after a learner can explain the current example or required action.</a:t>
+              <a:t>Misconception to address</a:t>
+            </a:r>
+          </a:p>
+          <a:p>
+            <a:r>
+              <a:t>Do not infer contribution only from the number of commits. Verify the substance of the work. The practical tests include typed reasoning even though there is no traditional written examination.</a:t>
+            </a:r>
+          </a:p>
+          <a:p>
+            <a:r>
+              <a:t/>
+            </a:r>
+          </a:p>
+          <a:p>
+            <a:r>
+              <a:t>Continue to</a:t>
+            </a:r>
+          </a:p>
+          <a:p>
+            <a:r>
+              <a:t>Machine learning topics</a:t>
             </a:r>
           </a:p>
         </p:txBody>
@@ -12773,7 +11813,7 @@
 </file>
 
 <file path=ppt/slides/slide10.xml><?xml version="1.0" encoding="utf-8"?>
-<p:sld xmlns:a="http://schemas.openxmlformats.org/drawingml/2006/main" xmlns:p="http://schemas.openxmlformats.org/presentationml/2006/main" xmlns:r="http://schemas.openxmlformats.org/officeDocument/2006/relationships">
+<p:sld xmlns:a="http://schemas.openxmlformats.org/drawingml/2006/main" xmlns:p="http://schemas.openxmlformats.org/presentationml/2006/main">
   <p:cSld>
     <p:spTree>
       <p:nvGrpSpPr>
@@ -12902,7 +11942,7 @@
                 </a:solidFill>
                 <a:latin typeface="Cambria"/>
               </a:rPr>
-              <a:t>The whole field, start to finish</a:t>
+              <a:t>Machine learning topics</a:t>
             </a:r>
           </a:p>
         </p:txBody>
@@ -12997,7 +12037,7 @@
                 </a:solidFill>
                 <a:latin typeface="Calibri"/>
               </a:rPr>
-              <a:t>Before we teach you any of it, here is the entire territory — and exactly which parts of it this course covers, which parts Semester 2 covers, and which parts we do not touch.</a:t>
+              <a:t>This roadmap shows Semester 1, Semester 2 and topics outside this course.</a:t>
             </a:r>
           </a:p>
         </p:txBody>
@@ -13176,7 +12216,7 @@
 </file>
 
 <file path=ppt/slides/slide12.xml><?xml version="1.0" encoding="utf-8"?>
-<p:sld xmlns:a="http://schemas.openxmlformats.org/drawingml/2006/main" xmlns:p="http://schemas.openxmlformats.org/presentationml/2006/main" xmlns:r="http://schemas.openxmlformats.org/officeDocument/2006/relationships">
+<p:sld xmlns:a="http://schemas.openxmlformats.org/drawingml/2006/main" xmlns:p="http://schemas.openxmlformats.org/presentationml/2006/main">
   <p:cSld>
     <p:spTree>
       <p:nvGrpSpPr>
@@ -13219,7 +12259,7 @@
                 </a:solidFill>
                 <a:latin typeface="Calibri"/>
               </a:rPr>
-              <a:t>WHERE YOU ALREADY ARE</a:t>
+              <a:t>FOUNDATIONS</a:t>
             </a:r>
           </a:p>
         </p:txBody>
@@ -13261,7 +12301,7 @@
                 </a:solidFill>
                 <a:latin typeface="Cambria"/>
               </a:rPr>
-              <a:t>Stage 2 is the one that matters to you</a:t>
+              <a:t>Mathematics and programming foundations</a:t>
             </a:r>
           </a:p>
         </p:txBody>
@@ -13303,7 +12343,7 @@
                 </a:solidFill>
                 <a:latin typeface="Calibri"/>
               </a:rPr>
-              <a:t>You already have the mathematics</a:t>
+              <a:t>Mathematics used in machine learning</a:t>
             </a:r>
           </a:p>
         </p:txBody>
@@ -13345,7 +12385,7 @@
                 </a:solidFill>
                 <a:latin typeface="Calibri"/>
               </a:rPr>
-              <a:t>The roadmap puts calculus, linear algebra, statistics and probability as a major stage — for most people entering this field from computing, it is the hardest one.</a:t>
+              <a:t>The roadmap includes calculus, linear algebra, statistics and probability. Each supports a different part of building or evaluating a model.</a:t>
             </a:r>
           </a:p>
         </p:txBody>
@@ -13387,7 +12427,7 @@
                 </a:solidFill>
                 <a:latin typeface="Calibri"/>
               </a:rPr>
-              <a:t>You did it in Years 1 and 2. Derivatives, matrices, distributions, hypothesis tests. You are not starting from zero on the roadmap; you are starting from stage 3 with stage 2 already behind you.</a:t>
+              <a:t>We introduce the mathematics needed for each topic, including averages, matrices and probability. Earlier mathematics courses may help, but each example includes the steps.</a:t>
             </a:r>
           </a:p>
         </p:txBody>
@@ -13429,7 +12469,7 @@
                 </a:solidFill>
                 <a:latin typeface="Calibri"/>
               </a:rPr>
-              <a:t>What you are missing is the programming, and that is the easier half</a:t>
+              <a:t>Programming foundations</a:t>
             </a:r>
           </a:p>
         </p:txBody>
@@ -13471,7 +12511,7 @@
                 </a:solidFill>
                 <a:latin typeface="Calibri"/>
               </a:rPr>
-              <a:t>Stages 1 and 3 — Python and the data libraries — are five weeks of work. The mathematics took you two years; Weeks 2 to 6 cover the five.</a:t>
+              <a:t>Weeks 2–6 introduce Python, data libraries and data preparation through worked examples.</a:t>
             </a:r>
           </a:p>
         </p:txBody>
@@ -13513,7 +12553,7 @@
                 </a:solidFill>
                 <a:latin typeface="Calibri"/>
               </a:rPr>
-              <a:t>Which is why an engineer is well placed here</a:t>
+              <a:t>Applying engineering knowledge</a:t>
             </a:r>
           </a:p>
         </p:txBody>
@@ -13555,7 +12595,7 @@
                 </a:solidFill>
                 <a:latin typeface="Calibri"/>
               </a:rPr>
-              <a:t>The people who struggle in this field are usually strong programmers with no domain knowledge and shaky mathematics. You are the reverse, and the reverse is more useful.</a:t>
+              <a:t>This course introduces programming through engineering examples.</a:t>
             </a:r>
           </a:p>
         </p:txBody>
@@ -13597,7 +12637,7 @@
                 </a:solidFill>
                 <a:latin typeface="Calibri"/>
               </a:rPr>
-              <a:t>An engineer who can do this in their own discipline is rarer, and harder to replace, than a generalist who can do it in none.</a:t>
+              <a:t>Engineering knowledge helps you check units, judge whether a result is plausible and recognise limits in the data.</a:t>
             </a:r>
           </a:p>
         </p:txBody>
@@ -13696,7 +12736,7 @@
                 </a:solidFill>
                 <a:latin typeface="Cambria"/>
               </a:rPr>
-              <a:t>Where this course sits, honestly</a:t>
+              <a:t>Topics covered in this course</a:t>
             </a:r>
           </a:p>
         </p:txBody>
@@ -13762,7 +12802,7 @@
                 </a:solidFill>
                 <a:latin typeface="Calibri"/>
               </a:rPr>
-              <a:t>The grey is what we do not teach. Reinforcement learning, full MLOps and most of the advanced language-model material are outside this course. I would rather you knew that now than discovered it in December.</a:t>
+              <a:t>Grey marks topics outside this course, including reinforcement learning, full MLOps and most advanced language-model topics.</a:t>
             </a:r>
           </a:p>
         </p:txBody>
@@ -13941,7 +12981,7 @@
 </file>
 
 <file path=ppt/slides/slide15.xml><?xml version="1.0" encoding="utf-8"?>
-<p:sld xmlns:a="http://schemas.openxmlformats.org/drawingml/2006/main" xmlns:p="http://schemas.openxmlformats.org/presentationml/2006/main" xmlns:r="http://schemas.openxmlformats.org/officeDocument/2006/relationships">
+<p:sld xmlns:a="http://schemas.openxmlformats.org/drawingml/2006/main" xmlns:p="http://schemas.openxmlformats.org/presentationml/2006/main">
   <p:cSld>
     <p:spTree>
       <p:nvGrpSpPr>
@@ -14070,7 +13110,7 @@
                 </a:solidFill>
                 <a:latin typeface="Cambria"/>
               </a:rPr>
-              <a:t>What this course is actually about</a:t>
+              <a:t>Machine learning in engineering</a:t>
             </a:r>
           </a:p>
         </p:txBody>
@@ -15463,7 +14503,7 @@
 </file>
 
 <file path=ppt/slides/slide2.xml><?xml version="1.0" encoding="utf-8"?>
-<p:sld xmlns:a="http://schemas.openxmlformats.org/drawingml/2006/main" xmlns:p="http://schemas.openxmlformats.org/presentationml/2006/main" xmlns:r="http://schemas.openxmlformats.org/officeDocument/2006/relationships">
+<p:sld xmlns:a="http://schemas.openxmlformats.org/drawingml/2006/main" xmlns:p="http://schemas.openxmlformats.org/presentationml/2006/main">
   <p:cSld>
     <p:spTree>
       <p:nvGrpSpPr>
@@ -15807,7 +14847,7 @@
                 </a:solidFill>
                 <a:latin typeface="Calibri"/>
               </a:rPr>
-              <a:t>PhD student in Applied Informatics
+              <a:t>Incoming PhD student (April 2027)
 Osaka Metropolitan University, Japan</a:t>
             </a:r>
           </a:p>
@@ -16596,7 +15636,7 @@
 </file>
 
 <file path=ppt/slides/slide20.xml><?xml version="1.0" encoding="utf-8"?>
-<p:sld xmlns:a="http://schemas.openxmlformats.org/drawingml/2006/main" xmlns:p="http://schemas.openxmlformats.org/presentationml/2006/main" xmlns:r="http://schemas.openxmlformats.org/officeDocument/2006/relationships">
+<p:sld xmlns:a="http://schemas.openxmlformats.org/drawingml/2006/main" xmlns:p="http://schemas.openxmlformats.org/presentationml/2006/main">
   <p:cSld>
     <p:spTree>
       <p:nvGrpSpPr>
@@ -16820,7 +15860,7 @@
                 </a:solidFill>
                 <a:latin typeface="Calibri"/>
               </a:rPr>
-              <a:t>The actual idea of the course, and the vocabulary you need to talk about data.</a:t>
+              <a:t>Learning patterns from data and using them to make predictions.</a:t>
             </a:r>
           </a:p>
         </p:txBody>
@@ -17184,7 +16224,7 @@
 </file>
 
 <file path=ppt/slides/slide23.xml><?xml version="1.0" encoding="utf-8"?>
-<p:sld xmlns:a="http://schemas.openxmlformats.org/drawingml/2006/main" xmlns:p="http://schemas.openxmlformats.org/presentationml/2006/main" xmlns:r="http://schemas.openxmlformats.org/officeDocument/2006/relationships">
+<p:sld xmlns:a="http://schemas.openxmlformats.org/drawingml/2006/main" xmlns:p="http://schemas.openxmlformats.org/presentationml/2006/main">
   <p:cSld>
     <p:spTree>
       <p:nvGrpSpPr>
@@ -17647,7 +16687,7 @@
                 </a:solidFill>
                 <a:latin typeface="Calibri"/>
               </a:rPr>
-              <a:t>An approximate answer now is worth more than an exact answer later — which is exactly the case in the question we opened with.</a:t>
+              <a:t>An early estimate can help with planning if its error is small enough for the decision.</a:t>
             </a:r>
           </a:p>
         </p:txBody>
@@ -17788,7 +16828,7 @@
                 </a:solidFill>
                 <a:latin typeface="Cambria"/>
               </a:rPr>
-              <a:t>What we actually mean by 'data'</a:t>
+              <a:t>Data, features and targets</a:t>
             </a:r>
           </a:p>
         </p:txBody>
@@ -17854,7 +16894,7 @@
                 </a:solidFill>
                 <a:latin typeface="Calibri"/>
               </a:rPr>
-              <a:t>This is the single most important picture in today's session. Every dataset you meet this semester has this shape: one row per example, feature columns for what you know beforehand, and one target column for the thing you want to predict.</a:t>
+              <a:t>In this example, each row describes one case. Feature columns contain the inputs available before prediction. The target column contains the value to predict.</a:t>
             </a:r>
           </a:p>
         </p:txBody>
@@ -18664,7 +17704,7 @@
 </file>
 
 <file path=ppt/slides/slide27.xml><?xml version="1.0" encoding="utf-8"?>
-<p:sld xmlns:a="http://schemas.openxmlformats.org/drawingml/2006/main" xmlns:p="http://schemas.openxmlformats.org/presentationml/2006/main" xmlns:r="http://schemas.openxmlformats.org/officeDocument/2006/relationships">
+<p:sld xmlns:a="http://schemas.openxmlformats.org/drawingml/2006/main" xmlns:p="http://schemas.openxmlformats.org/presentationml/2006/main">
   <p:cSld>
     <p:spTree>
       <p:nvGrpSpPr>
@@ -19017,7 +18057,7 @@
                 </a:solidFill>
                 <a:latin typeface="Calibri"/>
               </a:rPr>
-              <a:t>No. You only know what repair was done AFTER the failure, so it cannot help you predict the failure. Include it and your model will look brilliant in testing and be useless in service. This is called data leakage and we spend a whole session on it in Week 10.</a:t>
+              <a:t>No. The repair is recorded after the failure, so it is unavailable at prediction time. Including it would give misleading test results. This is data leakage.</a:t>
             </a:r>
           </a:p>
         </p:txBody>
@@ -19165,7 +18205,7 @@
 </file>
 
 <file path=ppt/slides/slide28.xml><?xml version="1.0" encoding="utf-8"?>
-<p:sld xmlns:a="http://schemas.openxmlformats.org/drawingml/2006/main" xmlns:p="http://schemas.openxmlformats.org/presentationml/2006/main" xmlns:r="http://schemas.openxmlformats.org/officeDocument/2006/relationships">
+<p:sld xmlns:a="http://schemas.openxmlformats.org/drawingml/2006/main" xmlns:p="http://schemas.openxmlformats.org/presentationml/2006/main">
   <p:cSld>
     <p:spTree>
       <p:nvGrpSpPr>
@@ -19389,7 +18429,7 @@
                 </a:solidFill>
                 <a:latin typeface="Calibri"/>
               </a:rPr>
-              <a:t>You are going to do machine learning by hand, on paper, before anybody writes a line of code. Teams of four or five — form them now.</a:t>
+              <a:t>Use the twelve rows of data to predict a value for the new case. Write your prediction and explain which rows helped you choose it.</a:t>
             </a:r>
           </a:p>
         </p:txBody>
@@ -19554,7 +18594,7 @@
                 </a:solidFill>
                 <a:latin typeface="Calibri"/>
               </a:rPr>
-              <a:t>Twelve cases, each with its features and its known outcome. Case 13 has features but the outcome is hidden. In your team: predict it, write the number down, and write one sentence saying how you decided. Fifteen minutes.</a:t>
+              <a:t>Twelve cases show their inputs and measured outcomes. Case 13 shows only its inputs. Predict its outcome and write one sentence explaining your choice.</a:t>
             </a:r>
           </a:p>
         </p:txBody>
@@ -20368,7 +19408,7 @@
 </file>
 
 <file path=ppt/slides/slide30.xml><?xml version="1.0" encoding="utf-8"?>
-<p:sld xmlns:a="http://schemas.openxmlformats.org/drawingml/2006/main" xmlns:p="http://schemas.openxmlformats.org/presentationml/2006/main" xmlns:r="http://schemas.openxmlformats.org/officeDocument/2006/relationships">
+<p:sld xmlns:a="http://schemas.openxmlformats.org/drawingml/2006/main" xmlns:p="http://schemas.openxmlformats.org/presentationml/2006/main">
   <p:cSld>
     <p:spTree>
       <p:nvGrpSpPr>
@@ -20495,7 +19535,7 @@
                 </a:solidFill>
                 <a:latin typeface="Calibri"/>
               </a:rPr>
-              <a:t>There is no single right method. This is one line of thinking that works, and it is close to what most teams arrive at.</a:t>
+              <a:t>One approach is to compare cases with similar inputs. Follow the steps below.</a:t>
             </a:r>
           </a:p>
         </p:txBody>
@@ -21282,7 +20322,7 @@
                 </a:solidFill>
                 <a:latin typeface="Calibri"/>
               </a:rPr>
-              <a:t>That is genuinely the whole idea. You found a pattern in examples and used it on a case you had never seen — which is exactly what every algorithm in this course does.</a:t>
+              <a:t>You used a pattern in known examples to predict an unknown value. Comparing that prediction with the measured value tells you how large the error was.</a:t>
             </a:r>
           </a:p>
         </p:txBody>
@@ -21447,7 +20487,7 @@
                 </a:solidFill>
                 <a:latin typeface="Calibri"/>
               </a:rPr>
-              <a:t>The star is the true value. The distance between your guess and the star is your ERROR — and measuring that distance honestly is what most of this course is about. The dashed line is the pattern you were sensing without being able to write it down.</a:t>
+              <a:t>The star marks the measured value. Its distance from your prediction is the prediction error. The dashed line shows a possible pattern in the data.</a:t>
             </a:r>
           </a:p>
         </p:txBody>
@@ -21461,7 +20501,7 @@
 </file>
 
 <file path=ppt/slides/slide32.xml><?xml version="1.0" encoding="utf-8"?>
-<p:sld xmlns:a="http://schemas.openxmlformats.org/drawingml/2006/main" xmlns:p="http://schemas.openxmlformats.org/presentationml/2006/main" xmlns:r="http://schemas.openxmlformats.org/officeDocument/2006/relationships">
+<p:sld xmlns:a="http://schemas.openxmlformats.org/drawingml/2006/main" xmlns:p="http://schemas.openxmlformats.org/presentationml/2006/main">
   <p:cSld>
     <p:spTree>
       <p:nvGrpSpPr>
@@ -21546,7 +20586,7 @@
                 </a:solidFill>
                 <a:latin typeface="Cambria"/>
               </a:rPr>
-              <a:t>You just did every step of a machine learning project</a:t>
+              <a:t>Steps in a prediction task</a:t>
             </a:r>
           </a:p>
         </p:txBody>
@@ -21798,7 +20838,7 @@
                 </a:solidFill>
                 <a:latin typeface="Calibri"/>
               </a:rPr>
-              <a:t>You compared your answer with the truth.</a:t>
+              <a:t>You compared your prediction with the measured value.</a:t>
             </a:r>
           </a:p>
         </p:txBody>
@@ -22008,7 +21048,7 @@
                 </a:solidFill>
                 <a:latin typeface="Calibri"/>
               </a:rPr>
-              <a:t>You predicted on unseen data — the single most important idea in the course. Week 8 and Week 10.</a:t>
+              <a:t>You predicted a value for a case that was not used to find the pattern.</a:t>
             </a:r>
           </a:p>
         </p:txBody>
@@ -22050,7 +21090,7 @@
                 </a:solidFill>
                 <a:latin typeface="Calibri"/>
               </a:rPr>
-              <a:t>You evaluated the error. That is Week 10, and it is where engineers earn their keep.</a:t>
+              <a:t>You measured the prediction error. Week 10 covers model evaluation.</a:t>
             </a:r>
           </a:p>
         </p:txBody>
@@ -23943,7 +22983,7 @@
 </file>
 
 <file path=ppt/slides/slide39.xml><?xml version="1.0" encoding="utf-8"?>
-<p:sld xmlns:a="http://schemas.openxmlformats.org/drawingml/2006/main" xmlns:p="http://schemas.openxmlformats.org/presentationml/2006/main" xmlns:r="http://schemas.openxmlformats.org/officeDocument/2006/relationships">
+<p:sld xmlns:a="http://schemas.openxmlformats.org/drawingml/2006/main" xmlns:p="http://schemas.openxmlformats.org/presentationml/2006/main">
   <p:cSld>
     <p:spTree>
       <p:nvGrpSpPr>
@@ -24167,7 +23207,7 @@
                 </a:solidFill>
                 <a:latin typeface="Calibri"/>
               </a:rPr>
-              <a:t>Four honest limits. This segment is here to protect you from being sold something.</a:t>
+              <a:t>Four limitations to consider when using machine learning.</a:t>
             </a:r>
           </a:p>
         </p:txBody>
@@ -24497,7 +23537,7 @@
                 </a:solidFill>
                 <a:latin typeface="Calibri"/>
               </a:rPr>
-              <a:t>A machine learning method will always give you an answer. It will never tell you that the question was unanswerable. That is your job.</a:t>
+              <a:t>A model can produce a prediction even when the data are unsuitable. Check whether the inputs and evaluation support its intended use.</a:t>
             </a:r>
           </a:p>
         </p:txBody>
@@ -25030,7 +24070,7 @@
 </file>
 
 <file path=ppt/slides/slide42.xml><?xml version="1.0" encoding="utf-8"?>
-<p:sld xmlns:a="http://schemas.openxmlformats.org/drawingml/2006/main" xmlns:p="http://schemas.openxmlformats.org/presentationml/2006/main" xmlns:r="http://schemas.openxmlformats.org/officeDocument/2006/relationships">
+<p:sld xmlns:a="http://schemas.openxmlformats.org/drawingml/2006/main" xmlns:p="http://schemas.openxmlformats.org/presentationml/2006/main">
   <p:cSld>
     <p:spTree>
       <p:nvGrpSpPr>
@@ -25254,7 +24294,7 @@
                 </a:solidFill>
                 <a:latin typeface="Calibri"/>
               </a:rPr>
-              <a:t>You get a problem and no method. I will ask you questions and answer none. This is how roughly one segment of every session works.</a:t>
+              <a:t>Read the problem and identify the information available. Use the worked example to plan your first step.</a:t>
             </a:r>
           </a:p>
         </p:txBody>
@@ -25268,7 +24308,7 @@
 </file>
 
 <file path=ppt/slides/slide43.xml><?xml version="1.0" encoding="utf-8"?>
-<p:sld xmlns:a="http://schemas.openxmlformats.org/drawingml/2006/main" xmlns:p="http://schemas.openxmlformats.org/presentationml/2006/main" xmlns:r="http://schemas.openxmlformats.org/officeDocument/2006/relationships">
+<p:sld xmlns:a="http://schemas.openxmlformats.org/drawingml/2006/main" xmlns:p="http://schemas.openxmlformats.org/presentationml/2006/main">
   <p:cSld>
     <p:spTree>
       <p:nvGrpSpPr>
@@ -25440,7 +24480,7 @@
                 </a:solidFill>
                 <a:latin typeface="Calibri"/>
               </a:rPr>
-              <a:t>In your team, list six problems from exploration, ore and reservoir characterisation, production and equipment health where data might help.</a:t>
+              <a:t>List three problems from exploration, ore and reservoir characterisation, production and equipment health where data might help.</a:t>
             </a:r>
           </a:p>
           <a:p>
@@ -25459,7 +24499,7 @@
                 </a:solidFill>
                 <a:latin typeface="Calibri"/>
               </a:rPr>
-              <a:t>Then sort all six into: predict a NUMBER, predict a CATEGORY, or NOT a machine learning problem — and justify every placement, including the rejections.</a:t>
+              <a:t>Classify each problem: predict a number, predict a category or use another method. Explain your choice.</a:t>
             </a:r>
           </a:p>
           <a:p>
@@ -25478,7 +24518,7 @@
                 </a:solidFill>
                 <a:latin typeface="Calibri"/>
               </a:rPr>
-              <a:t>Thirty minutes. No template, no worked example, no help from me.</a:t>
+              <a:t>Use the worked example as a guide. Write down your assumptions and explain your answer.</a:t>
             </a:r>
           </a:p>
         </p:txBody>
@@ -25559,7 +24599,7 @@
                 </a:solidFill>
                 <a:latin typeface="Calibri"/>
               </a:rPr>
-              <a:t>What are you actually trying to find?</a:t>
+              <a:t>What do you want to predict?</a:t>
             </a:r>
           </a:p>
         </p:txBody>
@@ -25783,7 +24823,7 @@
 </file>
 
 <file path=ppt/slides/slide44.xml><?xml version="1.0" encoding="utf-8"?>
-<p:sld xmlns:a="http://schemas.openxmlformats.org/drawingml/2006/main" xmlns:p="http://schemas.openxmlformats.org/presentationml/2006/main" xmlns:r="http://schemas.openxmlformats.org/officeDocument/2006/relationships">
+<p:sld xmlns:a="http://schemas.openxmlformats.org/drawingml/2006/main" xmlns:p="http://schemas.openxmlformats.org/presentationml/2006/main">
   <p:cSld>
     <p:spTree>
       <p:nvGrpSpPr>
@@ -25910,7 +24950,7 @@
                 </a:solidFill>
                 <a:latin typeface="Calibri"/>
               </a:rPr>
-              <a:t>Teams of four or five, formed today, kept to the end</a:t>
+              <a:t>Project teams of four or five</a:t>
             </a:r>
           </a:p>
         </p:txBody>
@@ -26036,7 +25076,7 @@
                 </a:solidFill>
                 <a:latin typeface="Calibri"/>
               </a:rPr>
-              <a:t>Data analyst · machine learning engineer · domain engineer · documentation lead · presenter. Nobody does the same job twice, so nobody hides in one role.</a:t>
+              <a:t>Project roles: data analysis, modelling, engineering review, documentation and presentation. Rotate roles so each member practises different skills.</a:t>
             </a:r>
           </a:p>
         </p:txBody>
@@ -26162,7 +25202,7 @@
                 </a:solidFill>
                 <a:latin typeface="Calibri"/>
               </a:rPr>
-              <a:t>In Week 15 every student answers two unseen questions about their own team's work. That is how a team mark becomes an individual one — you cannot be carried, and you will not be dragged down.</a:t>
+              <a:t>In Week 15, each student answers two unseen questions about the team’s work. The answers contribute to individual assessment.</a:t>
             </a:r>
           </a:p>
         </p:txBody>
@@ -27140,7 +26180,7 @@
 </file>
 
 <file path=ppt/slides/slide47.xml><?xml version="1.0" encoding="utf-8"?>
-<p:sld xmlns:a="http://schemas.openxmlformats.org/drawingml/2006/main" xmlns:p="http://schemas.openxmlformats.org/presentationml/2006/main" xmlns:r="http://schemas.openxmlformats.org/officeDocument/2006/relationships">
+<p:sld xmlns:a="http://schemas.openxmlformats.org/drawingml/2006/main" xmlns:p="http://schemas.openxmlformats.org/presentationml/2006/main">
   <p:cSld>
     <p:spTree>
       <p:nvGrpSpPr>
@@ -27577,7 +26617,7 @@
                 </a:solidFill>
                 <a:latin typeface="Calibri"/>
               </a:rPr>
-              <a:t>Watch for where he draws the boundaries between the four terms, and whether they match the nested diagram we drew today. If they differ, raise it next week — the field genuinely does not fully agree on this.</a:t>
+              <a:t>Compare the video’s definitions with the diagram in this lesson. Note any terms that the speaker uses differently.</a:t>
             </a:r>
           </a:p>
         </p:txBody>
@@ -27829,7 +26869,7 @@
 </file>
 
 <file path=ppt/slides/slide49.xml><?xml version="1.0" encoding="utf-8"?>
-<p:sld xmlns:a="http://schemas.openxmlformats.org/drawingml/2006/main" xmlns:p="http://schemas.openxmlformats.org/presentationml/2006/main" xmlns:r="http://schemas.openxmlformats.org/officeDocument/2006/relationships">
+<p:sld xmlns:a="http://schemas.openxmlformats.org/drawingml/2006/main" xmlns:p="http://schemas.openxmlformats.org/presentationml/2006/main">
   <p:cSld>
     <p:spTree>
       <p:nvGrpSpPr>
@@ -28430,7 +27470,7 @@
                 </a:solidFill>
                 <a:latin typeface="Calibri"/>
               </a:rPr>
-              <a:t>Four limits never go away: no data, no signal, physics is simply better, and the future stopped resembling the past.</a:t>
+              <a:t>Check for missing data, weak predictive patterns, better physical models and changes in operating conditions.</a:t>
             </a:r>
           </a:p>
         </p:txBody>
@@ -28516,7 +27556,7 @@
                 </a:solidFill>
                 <a:latin typeface="Calibri"/>
               </a:rPr>
-              <a:t>A method will always give you an answer. It will never tell you the question was unanswerable — that judgement is the engineer's job, and it is what this course is really training.</a:t>
+              <a:t>A prediction alone does not show that a model is useful. Check the data, errors and limits of the intended use.</a:t>
             </a:r>
           </a:p>
         </p:txBody>
@@ -29308,7 +28348,7 @@
 </file>
 
 <file path=ppt/slides/slide51.xml><?xml version="1.0" encoding="utf-8"?>
-<p:sld xmlns:a="http://schemas.openxmlformats.org/drawingml/2006/main" xmlns:p="http://schemas.openxmlformats.org/presentationml/2006/main" xmlns:r="http://schemas.openxmlformats.org/officeDocument/2006/relationships">
+<p:sld xmlns:a="http://schemas.openxmlformats.org/drawingml/2006/main" xmlns:p="http://schemas.openxmlformats.org/presentationml/2006/main">
   <p:cSld>
     <p:spTree>
       <p:nvGrpSpPr>
@@ -29527,7 +28567,7 @@
                 </a:solidFill>
                 <a:latin typeface="Calibri"/>
               </a:rPr>
-              <a:t>What exactly are we predicting? What data exists, who measured it, and is it kept? And would a rule or an equation we already have do this better? If any of those has no answer, stop.</a:t>
+              <a:t>What value do you want to predict? Which recorded data can help? Is an established equation suitable? Resolve these questions before choosing a model.</a:t>
             </a:r>
           </a:p>
         </p:txBody>
@@ -29929,7 +28969,7 @@
                 </a:solidFill>
                 <a:latin typeface="Calibri"/>
               </a:rPr>
-              <a:t>Because the model could simply have memorised those cases. The only honest test is performance on examples it has never seen — exactly what you did with case 13. This is the whole subject of Week 10.</a:t>
+              <a:t>A model may memorise its training examples. Evaluate it on separate examples to check whether it predicts new cases well.</a:t>
             </a:r>
           </a:p>
         </p:txBody>
@@ -30848,7 +29888,7 @@
 </file>
 
 <file path=ppt/slides/slide53.xml><?xml version="1.0" encoding="utf-8"?>
-<p:sld xmlns:a="http://schemas.openxmlformats.org/drawingml/2006/main" xmlns:p="http://schemas.openxmlformats.org/presentationml/2006/main" xmlns:r="http://schemas.openxmlformats.org/officeDocument/2006/relationships">
+<p:sld xmlns:a="http://schemas.openxmlformats.org/drawingml/2006/main" xmlns:p="http://schemas.openxmlformats.org/presentationml/2006/main">
   <p:cSld>
     <p:spTree>
       <p:nvGrpSpPr>
@@ -31437,7 +30477,7 @@
                 </a:solidFill>
                 <a:latin typeface="Calibri"/>
               </a:rPr>
-              <a:t>The distance between the prediction and the truth. Measuring it honestly is most of this course.</a:t>
+              <a:t>Prediction error is the difference between the predicted and measured values.</a:t>
             </a:r>
           </a:p>
         </p:txBody>
@@ -33359,7 +32399,7 @@
 </file>
 
 <file path=ppt/slides/slide57.xml><?xml version="1.0" encoding="utf-8"?>
-<p:sld xmlns:a="http://schemas.openxmlformats.org/drawingml/2006/main" xmlns:p="http://schemas.openxmlformats.org/presentationml/2006/main" xmlns:r="http://schemas.openxmlformats.org/officeDocument/2006/relationships">
+<p:sld xmlns:a="http://schemas.openxmlformats.org/drawingml/2006/main" xmlns:p="http://schemas.openxmlformats.org/presentationml/2006/main">
   <p:cSld>
     <p:spTree>
       <p:nvGrpSpPr>
@@ -33549,7 +32589,7 @@
                 </a:solidFill>
                 <a:latin typeface="Calibri"/>
               </a:rPr>
-              <a:t>You answered a real engineering question today with a pencil and twelve rows of data, and you measured your own error. Everything else this semester is making that faster, more reliable, and honest about what it does not know.</a:t>
+              <a:t>Today you used twelve rows of data to make a prediction and measure its error. Later lessons use Python to repeat these calculations on larger datasets.</a:t>
             </a:r>
           </a:p>
         </p:txBody>
@@ -33588,7 +32628,7 @@
                 </a:solidFill>
                 <a:latin typeface="Calibri"/>
               </a:rPr>
-              <a:t>Next week: Colab, notebooks and version control — where the work actually happens. Bring a browser; you will install nothing.</a:t>
+              <a:t>Next week: Colab notebooks and version control. Bring a laptop with a browser.</a:t>
             </a:r>
           </a:p>
         </p:txBody>
@@ -33645,7 +32685,7 @@
                 </a:solidFill>
                 <a:latin typeface="Calibri"/>
               </a:rPr>
-              <a:t>THE PROMISE</a:t>
+              <a:t>COURSE GOALS</a:t>
             </a:r>
           </a:p>
         </p:txBody>
@@ -33753,7 +32793,7 @@
                 </a:solidFill>
                 <a:latin typeface="Calibri"/>
               </a:rPr>
-              <a:t>This is the promise of the course. Most of you cannot do step two today. All of you can get to step six by December, and the students who do are the ones who do the weekly work.</a:t>
+              <a:t>The course builds from reading data to testing a model. Weekly exercises give you practice at each stage.</a:t>
             </a:r>
           </a:p>
         </p:txBody>
@@ -33767,7 +32807,7 @@
 </file>
 
 <file path=ppt/slides/slide7.xml><?xml version="1.0" encoding="utf-8"?>
-<p:sld xmlns:a="http://schemas.openxmlformats.org/drawingml/2006/main" xmlns:p="http://schemas.openxmlformats.org/presentationml/2006/main" xmlns:r="http://schemas.openxmlformats.org/officeDocument/2006/relationships">
+<p:sld xmlns:a="http://schemas.openxmlformats.org/drawingml/2006/main" xmlns:p="http://schemas.openxmlformats.org/presentationml/2006/main">
   <p:cSld>
     <p:spTree>
       <p:nvGrpSpPr>
@@ -33991,7 +33031,7 @@
                 </a:solidFill>
                 <a:latin typeface="Calibri"/>
               </a:rPr>
-              <a:t>The promise, the assessment, and what I expect from you. Then we start on the actual engineering.</a:t>
+              <a:t>Course goals, assessment and weekly work.</a:t>
             </a:r>
           </a:p>
         </p:txBody>
@@ -34156,7 +33196,7 @@
                 </a:solidFill>
                 <a:latin typeface="Calibri"/>
               </a:rPr>
-              <a:t>No written examination anywhere in this course. Everything is practical: work with data, write and run code, build and evaluate a model, explain your reasoning. Sixty-five per cent of the mark is individual, so you cannot be carried and you cannot be dragged down.</a:t>
+              <a:t>Assessment includes code, data analysis, models and written explanations. Individual work accounts for 65% of the mark.</a:t>
             </a:r>
           </a:p>
         </p:txBody>
@@ -34170,7 +33210,7 @@
 </file>
 
 <file path=ppt/slides/slide9.xml><?xml version="1.0" encoding="utf-8"?>
-<p:sld xmlns:a="http://schemas.openxmlformats.org/drawingml/2006/main" xmlns:p="http://schemas.openxmlformats.org/presentationml/2006/main" xmlns:r="http://schemas.openxmlformats.org/officeDocument/2006/relationships">
+<p:sld xmlns:a="http://schemas.openxmlformats.org/drawingml/2006/main" xmlns:p="http://schemas.openxmlformats.org/presentationml/2006/main">
   <p:cSld>
     <p:spTree>
       <p:nvGrpSpPr>
@@ -34213,7 +33253,7 @@
                 </a:solidFill>
                 <a:latin typeface="Calibri"/>
               </a:rPr>
-              <a:t>THE DEAL</a:t>
+              <a:t>CLASS EXPECTATIONS</a:t>
             </a:r>
           </a:p>
         </p:txBody>
@@ -34423,7 +33463,7 @@
                 </a:solidFill>
                 <a:latin typeface="Calibri"/>
               </a:rPr>
-              <a:t>Ask, but ask well. Bring the error message, what you already tried, and what you expected to happen. That is not a hurdle in front of help — it is the actual professional skill.</a:t>
+              <a:t>When asking for help, include the error message, what you tried and what you expected.</a:t>
             </a:r>
           </a:p>
         </p:txBody>
@@ -34465,7 +33505,7 @@
                 </a:solidFill>
                 <a:latin typeface="Calibri"/>
               </a:rPr>
-              <a:t>Struggle before you seek rescue. In the challenge segments you are supposed to be stuck for a while.</a:t>
+              <a:t>When you get stuck, note the step that failed and ask for help.</a:t>
             </a:r>
           </a:p>
         </p:txBody>
@@ -34591,7 +33631,7 @@
                 </a:solidFill>
                 <a:latin typeface="Calibri"/>
               </a:rPr>
-              <a:t>Every dataset staged locally, so a slow connection is never your problem.</a:t>
+              <a:t>Download the lesson files before class so you can access the data without a connection.</a:t>
             </a:r>
           </a:p>
         </p:txBody>
@@ -34675,7 +33715,7 @@
                 </a:solidFill>
                 <a:latin typeface="Calibri"/>
               </a:rPr>
-              <a:t>A straight answer to 'why are we learning this?', every single time it is asked.</a:t>
+              <a:t>Ask how each topic relates to the engineering problem.</a:t>
             </a:r>
           </a:p>
         </p:txBody>

--- a/IUEA_Teaching_Plan/decks/CML3113_Week01_Mining_Petroleum.pptx
+++ b/IUEA_Teaching_Plan/decks/CML3113_Week01_Mining_Petroleum.pptx
@@ -558,7 +558,7 @@
           <ns1:lstStyle/>
           <ns1:p>
             <ns1:r>
-              <ns1:t>Begin with a decision engineers make: estimate a quantity or identify a condition from observations. Today introduces the ideas using the embedded tables and illustrations; no CSV download or Python is needed. A prediction is an estimate, not proof that an action is safe.</ns1:t>
+              <ns1:t>Welcome to week one of Machine Learning. Today's session is called AI, machine learning and the engineering problem. This course introduces machine learning through examples from mining and petroleum engineering, such as ore processing and reservoirs. We start from zero. You do not need any programming experience for today, and we will explain every new word as we meet it. Check the slide for your day, time and room.</ns1:t>
             </ns1:r>
           </ns1:p>
         </ns0:txBody>
@@ -628,7 +628,19 @@
           <ns1:lstStyle/>
           <ns1:p>
             <ns1:r>
-              <ns1:t>This is a map of later topics, not an instruction to learn them all today. A roadmap puts tools and ideas in order. Distinguish the topics taught this semester from those deferred to Semester 2.</ns1:t>
+              <ns1:t>This is the second segment, and it lasts fifteen minutes. It is about the topics of machine learning, so it is a map of the whole field.</ns1:t>
+            </ns1:r>
+          </ns1:p>
+          <ns1:p/>
+          <ns1:p>
+            <ns1:r>
+              <ns1:t>A roadmap puts ideas and tools in order. It shows what comes first, what builds on what, and where you are going. The next slide shows a roadmap with fifteen stages. Some of those stages we cover in Semester 1, some belong to Semester 2, and some this course does not teach at all.</ns1:t>
+            </ns1:r>
+          </ns1:p>
+          <ns1:p/>
+          <ns1:p>
+            <ns1:r>
+              <ns1:t>You do not need to learn every item today. Your job in this segment is to see the whole landscape once, so that each later week has a place on the map.</ns1:t>
             </ns1:r>
           </ns1:p>
         </ns0:txBody>
@@ -698,7 +710,25 @@
           <ns1:lstStyle/>
           <ns1:p>
             <ns1:r>
-              <ns1:t>Define the terms in the context of today’s table. A dataset is a collection of data; it need not always be a table. An observation is one case; a target is needed for a supervised labelled example but may be missing for a new case awaiting prediction.</ns1:t>
+              <ns1:t>This is the first of three glossary slides. It lists the words we used today with short definitions.</ns1:t>
+            </ns1:r>
+          </ns1:p>
+          <ns1:p/>
+          <ns1:p>
+            <ns1:r>
+              <ns1:t>Artificial intelligence is any machine doing something we would call intelligent. It is a goal that many techniques aim at. Machine learning is inferring a rule from examples instead of writing it yourself. Deep learning is machine learning that uses large neural networks, and it belongs to Semester 2. Data science is the craft of getting a trustworthy answer out of data.</ns1:t>
+            </ns1:r>
+          </ns1:p>
+          <ns1:p/>
+          <ns1:p>
+            <ns1:r>
+              <ns1:t>A dataset is a collection of data. In this lesson we use tables of observations. An example, also called a row or an observation, is one recorded case. In supervised learning, an example includes its observed target.</ns1:t>
+            </ns1:r>
+          </ns1:p>
+          <ns1:p/>
+          <ns1:p>
+            <ns1:r>
+              <ns1:t>A feature is a column known before the outcome. It is an input to the prediction. The target, also called the label, is the column you are trying to predict.</ns1:t>
             </ns1:r>
           </ns1:p>
         </ns0:txBody>
@@ -768,7 +798,25 @@
           <ns1:lstStyle/>
           <ns1:p>
             <ns1:r>
-              <ns1:t>Differentiate prediction, observed value and error. Binary and multiclass refer to the number of categories, not to how category labels are stored. Unseen cases must also be relevant to intended use; an unrelated held-out set is not automatically a fair evaluation.</ns1:t>
+              <ns1:t>This is the second glossary slide.</ns1:t>
+            </ns1:r>
+          </ns1:p>
+          <ns1:p/>
+          <ns1:p>
+            <ns1:r>
+              <ns1:t>Regression means predicting a number on a continuous scale. Classification means predicting which of a small set of categories a case belongs to. Binary classification has exactly two categories, such as pass or fail. Multi-class classification has three or more categories.</ns1:t>
+            </ns1:r>
+          </ns1:p>
+          <ns1:p/>
+          <ns1:p>
+            <ns1:r>
+              <ns1:t>A prediction is the model's answer for a case. The error is the difference between the predicted value and the measured value.</ns1:t>
+            </ns1:r>
+          </ns1:p>
+          <ns1:p/>
+          <ns1:p>
+            <ns1:r>
+              <ns1:t>Unseen data means cases that were not used to fit the model. To be useful, they must also be relevant to the intended use and free from leakage. If you test a model on cases that look nothing like real use, a good score tells you very little.</ns1:t>
             </ns1:r>
           </ns1:p>
         </ns0:txBody>
@@ -838,7 +886,25 @@
           <ns1:lstStyle/>
           <ns1:p>
             <ns1:r>
-              <ns1:t>Follow the highlighted route from Python to data preparation and evaluation. Explain that a roadmap is a curriculum outline. Neural networks and transformers are later topics; no understanding of their internal mathematics is assumed here.</ns1:t>
+              <ns1:t>This is the roadmap for machine learning. It has fifteen stages, running from Python at the start to transformers at the end. A transformer is the type of model behind modern chatbots, and we only meet it much later.</ns1:t>
+            </ns1:r>
+          </ns1:p>
+          <ns1:p/>
+          <ns1:p>
+            <ns1:r>
+              <ns1:t>The colours carry the meaning. Orange stages are taught in Semester 1. Green stages are taught in Semester 2. Dark blue is the stage you already have from your engineering degree. Grey marks what this course deliberately does not teach.</ns1:t>
+            </ns1:r>
+          </ns1:p>
+          <ns1:p/>
+          <ns1:p>
+            <ns1:r>
+              <ns1:t>The shape follows the public roadmap dot sh Machine Learning roadmap, which is a free guide that many learners use.</ns1:t>
+            </ns1:r>
+          </ns1:p>
+          <ns1:p/>
+          <ns1:p>
+            <ns1:r>
+              <ns1:t>The orange stages are your route this semester. You start with Python, move to preparing data, and then reach building and testing models.</ns1:t>
             </ns1:r>
           </ns1:p>
         </ns0:txBody>
@@ -908,7 +974,31 @@
           <ns1:lstStyle/>
           <ns1:p>
             <ns1:r>
-              <ns1:t>Connect each foundation to its purpose. Arithmetic expresses measurements; statistics summarises variability; vectors and matrices arrange inputs; programming repeats a calculation. The course introduces the required operations before its worked examples.</ns1:t>
+              <ns1:t>Machine learning rests on two foundations, mathematics and programming. We will meet both, and we will not assume that you have mastered either.</ns1:t>
+            </ns1:r>
+          </ns1:p>
+          <ns1:p/>
+          <ns1:p>
+            <ns1:r>
+              <ns1:t>The roadmap lists calculus, which is the mathematics of change, linear algebra, which is working with lists and tables of numbers, statistics, which is summarising data, and probability, which measures how likely something is. Each one supports a different part of building or checking a model.</ns1:t>
+            </ns1:r>
+          </ns1:p>
+          <ns1:p/>
+          <ns1:p>
+            <ns1:r>
+              <ns1:t>We introduce only the mathematics that each topic needs, such as averages, matrices and probability, and each example shows the steps. Earlier mathematics courses may help, but you can follow without them.</ns1:t>
+            </ns1:r>
+          </ns1:p>
+          <ns1:p/>
+          <ns1:p>
+            <ns1:r>
+              <ns1:t>For programming, Weeks 2 to 6 introduce Python, data libraries and data preparation through worked examples. A library is a ready made collection of code that we borrow.</ns1:t>
+            </ns1:r>
+          </ns1:p>
+          <ns1:p/>
+          <ns1:p>
+            <ns1:r>
+              <ns1:t>Your engineering knowledge matters too. It helps you check units, judge whether a result is plausible, and see the limits of the data.</ns1:t>
             </ns1:r>
           </ns1:p>
         </ns0:txBody>
@@ -978,7 +1068,19 @@
           <ns1:lstStyle/>
           <ns1:p>
             <ns1:r>
-              <ns1:t>Read the coverage boundary literally. Topics outside the highlighted route are not hidden prerequisites for weekly work. Explain MLOps only as operating and monitoring deployed models; the full subject is outside this course.</ns1:t>
+              <ns1:t>The grey boxes on the roadmap are topics outside this course. They include reinforcement learning, full MLOps and most advanced language model topics.</ns1:t>
+            </ns1:r>
+          </ns1:p>
+          <ns1:p/>
+          <ns1:p>
+            <ns1:r>
+              <ns1:t>Reinforcement learning is a way for a program to learn by trying actions and receiving rewards. MLOps is the work of running a model in production, which means watching it and updating it after it has been deployed. Language models are the systems that work with text. We touch the idea, but we do not go deep.</ns1:t>
+            </ns1:r>
+          </ns1:p>
+          <ns1:p/>
+          <ns1:p>
+            <ns1:r>
+              <ns1:t>Read this boundary literally. If a topic sits outside the highlighted route, it is not a hidden prerequisite for any weekly task. Nobody will ask you to use it in an exercise or a test. Those topics exist, and you can study them later if you wish.</ns1:t>
             </ns1:r>
           </ns1:p>
         </ns0:txBody>
@@ -1048,7 +1150,25 @@
           <ns1:lstStyle/>
           <ns1:p>
             <ns1:r>
-              <ns1:t>Different roles emphasise different work: analysis explains data, data science investigates questions, ML engineering implements prediction systems, and data engineering supplies reliable data. The course builds introductory skills, not an immediate professional qualification.</ns1:t>
+              <ns1:t>Work with data splits into four different jobs. The slide calls them four different roadmaps and four different careers.</ns1:t>
+            </ns1:r>
+          </ns1:p>
+          <ns1:p/>
+          <ns1:p>
+            <ns1:r>
+              <ns1:t>A data analyst explains what the data shows. A data scientist investigates a question using data. A machine learning engineer builds and runs prediction systems. A data engineer makes sure that reliable data arrives where it is needed.</ns1:t>
+            </ns1:r>
+          </ns1:p>
+          <ns1:p/>
+          <ns1:p>
+            <ns1:r>
+              <ns1:t>Our course aims at the job of applying data skills inside your own engineering field. That is a narrower position, and it is a strong one. You bring engineering knowledge that computer science graduates do not have.</ns1:t>
+            </ns1:r>
+          </ns1:p>
+          <ns1:p/>
+          <ns1:p>
+            <ns1:r>
+              <ns1:t>The course gives you introductory skills in this area. It is a start and it does not replace a professional qualification.</ns1:t>
             </ns1:r>
           </ns1:p>
         </ns0:txBody>
@@ -1118,7 +1238,19 @@
           <ns1:lstStyle/>
           <ns1:p>
             <ns1:r>
-              <ns1:t>Move from job titles to the engineering question shown next. Start with the decision and available observations. Choosing a model before defining the question can produce an impressive score that does not help anyone.</ns1:t>
+              <ns1:t>This is the third segment, and it takes fifteen minutes. Three words are used as if they meant the same thing, and they do not. They are artificial intelligence, machine learning and data science.</ns1:t>
+            </ns1:r>
+          </ns1:p>
+          <ns1:p/>
+          <ns1:p>
+            <ns1:r>
+              <ns1:t>In this segment we separate them, and we place engineering among them. Each gets its own slide with a definition, an example and a common confusion.</ns1:t>
+            </ns1:r>
+          </ns1:p>
+          <ns1:p/>
+          <ns1:p>
+            <ns1:r>
+              <ns1:t>When we choose a method, we start from the decision that someone needs to make, and from the observations we already have. We choose a model after that. If you pick a model first, you can reach an impressive score that helps nobody.</ns1:t>
             </ns1:r>
           </ns1:p>
         </ns0:txBody>
@@ -1188,7 +1320,19 @@
           <ns1:lstStyle/>
           <ns1:p>
             <ns1:r>
-              <ns1:t>Explain the nested picture: machine learning is an approach within AI; deep learning is a family within machine learning. Data science overlaps these but also includes finding, checking, summarising and explaining data without training a model.</ns1:t>
+              <ns1:t>Three of these ideas nest inside one another: artificial intelligence, then machine learning, then deep learning. Data science sits outside that nesting. Artificial intelligence is the biggest circle. Machine learning is an approach inside artificial intelligence. Deep learning is a family of machine learning methods, and it uses large networks of simple calculations called neural networks. So each one is contained by the one before it.</ns1:t>
+            </ns1:r>
+          </ns1:p>
+          <ns1:p/>
+          <ns1:p>
+            <ns1:r>
+              <ns1:t>Data science is the odd one out. It overlaps all of them and is contained by none of them. Data science is the craft of getting an answer out of data at all. That includes finding the data, cleaning it, questioning it and presenting it.</ns1:t>
+            </ns1:r>
+          </ns1:p>
+          <ns1:p/>
+          <ns1:p>
+            <ns1:r>
+              <ns1:t>Much of that work involves no model whatever. A person who counts missing readings, checks units, and explains a trend is doing data science, even if no predictive model is ever built.</ns1:t>
             </ns1:r>
           </ns1:p>
         </ns0:txBody>
@@ -1258,7 +1402,25 @@
           <ns1:lstStyle/>
           <ns1:p>
             <ns1:r>
-              <ns1:t>AI is the broad area of systems performing tasks associated with intelligence. A fixed rule can be part of an AI system; AI does not always mean learning. Avoid implying that the system understands a problem as a person does.</ns1:t>
+              <ns1:t>Artificial intelligence means any machine doing something that we would call intelligent. It names a goal. Many different techniques aim at that goal.</ns1:t>
+            </ns1:r>
+          </ns1:p>
+          <ns1:p/>
+          <ns1:p>
+            <ns1:r>
+              <ns1:t>For example, a chess engine is artificial intelligence. So is a spam filter, which sorts unwanted email. A thermostat is not, because it follows one fixed rule and has no notion of doing better.</ns1:t>
+            </ns1:r>
+          </ns1:p>
+          <ns1:p/>
+          <ns1:p>
+            <ns1:r>
+              <ns1:t>This is easy to confuse with machine learning. Machine learning is one particular way of achieving artificial intelligence. All machine learning is artificial intelligence. Most artificial intelligence in history was never machine learning, because it ran on rules that people wrote by hand.</ns1:t>
+            </ns1:r>
+          </ns1:p>
+          <ns1:p/>
+          <ns1:p>
+            <ns1:r>
+              <ns1:t>So the phrase artificial intelligence tells you what someone wants to achieve. It does not tell you how they do it, and it does not mean that the system understands the problem the way a person does.</ns1:t>
             </ns1:r>
           </ns1:p>
         </ns0:txBody>
@@ -1328,7 +1490,19 @@
           <ns1:lstStyle/>
           <ns1:p>
             <ns1:r>
-              <ns1:t>A learning algorithm uses examples to adjust a model’s settings. We still choose the question, inputs and evaluation. The computer does not automatically discover a valid engineering law or decide whether its own prediction is safe.</ns1:t>
+              <ns1:t>Machine learning means getting a computer to work out a rule from examples..</ns1:t>
+            </ns1:r>
+          </ns1:p>
+          <ns1:p/>
+          <ns1:p>
+            <ns1:r>
+              <ns1:t>Here is an example. You show the computer six months of process readings, taken every twenty seconds. Each reading is matched with the assay result, the laboratory measurement, that came back later. The computer looks through all of these examples and infers a relationship between the readings and the outcome. After that, you decide whether to trust it. The computer does not decide that for you.</ns1:t>
+            </ns1:r>
+          </ns1:p>
+          <ns1:p/>
+          <ns1:p>
+            <ns1:r>
+              <ns1:t>Do not confuse machine learning with automation. A script that emails a report every Monday is automation. It does exactly what it was told, and there is no learning in it at all.</ns1:t>
             </ns1:r>
           </ns1:p>
         </ns0:txBody>
@@ -1398,7 +1572,19 @@
           <ns1:lstStyle/>
           <ns1:p>
             <ns1:r>
-              <ns1:t>Data science begins before modelling and continues after it. For example, counting missing sensor readings, checking units and explaining a trend are data-science work even if no predictive model is built.</ns1:t>
+              <ns1:t>Data science is the craft of getting a trustworthy answer out of data. The steps are finding the data, cleaning it, questioning it, analysing it, and presenting it so that somebody can act.</ns1:t>
+            </ns1:r>
+          </ns1:p>
+          <ns1:p/>
+          <ns1:p>
+            <ns1:r>
+              <ns1:t>For example, you might discover that a third of your assay records are missing. You then work out whether they are missing at random, or whether there is a reason, and you decide what that does to your conclusion. No model is involved in any of this work.</ns1:t>
+            </ns1:r>
+          </ns1:p>
+          <ns1:p/>
+          <ns1:p>
+            <ns1:r>
+              <ns1:t>Do not confuse data science with machine learning. You will spend far more of this semester on data science than on machine learning. That ratio matches professional practice, where most of the effort goes into getting the data right.</ns1:t>
             </ns1:r>
           </ns1:p>
         </ns0:txBody>
@@ -1468,7 +1654,25 @@
           <ns1:lstStyle/>
           <ns1:p>
             <ns1:r>
-              <ns1:t>Introduce the tutor’s applied data work briefly. The formal status is incoming PhD student in Applied Informatics at Osaka Metropolitan University, Japan, for April 2027; enrolment has not started. The examples illustrate different applications, not identical model architectures.</ns1:t>
+              <ns1:t>I am Jotham Martin Wambi, and I will be your lecturer for this course. By training I am a data scientist and machine learning engineer, and I am a founding engineer at Magentiq AI Labs.</ns1:t>
+            </ns1:r>
+          </ns1:p>
+          <ns1:p/>
+          <ns1:p>
+            <ns1:r>
+              <ns1:t>My background is in information technology and economics, with a master's degree in technology management from Yamaguchi University in Japan. I will start a PhD at Osaka Metropolitan University in April next year. Before that I worked for eight years at Citibank, at EY and at D'isum Inc in Tokyo.</ns1:t>
+            </ns1:r>
+          </ns1:p>
+          <ns1:p/>
+          <ns1:p>
+            <ns1:r>
+              <ns1:t>Here are three systems I have helped build. Law Lens is a system that answers questions about Ugandan law and shows where each answer came from. AssetGuard predicts when a machine will fail, using vibration sensors. The third reads a live heart signal from a wearable device and recognises eleven heart conditions.</ns1:t>
+            </ns1:r>
+          </ns1:p>
+          <ns1:p/>
+          <ns1:p>
+            <ns1:r>
+              <ns1:t>All three follow the same pipeline that you will build from Week 8. We split the data, fit a model, and then score it. My contact details are on the slide.</ns1:t>
             </ns1:r>
           </ns1:p>
         </ns0:txBody>
@@ -1538,7 +1742,19 @@
           <ns1:lstStyle/>
           <ns1:p>
             <ns1:r>
-              <ns1:t>Contrast a hand-specified rule with a rule fitted from examples. Both take inputs and produce an output; what differs is how the mapping is obtained. An established equation can be the better option when its assumptions apply.</ns1:t>
+              <ns1:t>This is the fourth segment, and it takes twenty five minutes. It is about two ways to make a computer decide something. Both ways take some inputs and produce an output. What differs is how the connection between the two is found.</ns1:t>
+            </ns1:r>
+          </ns1:p>
+          <ns1:p/>
+          <ns1:p>
+            <ns1:r>
+              <ns1:t>In the first way, a person writes the rule. In the second way, the computer learns the rule from examples of inputs and the answers that went with them. Learning patterns from data and using them to make predictions is the second way.</ns1:t>
+            </ns1:r>
+          </ns1:p>
+          <ns1:p/>
+          <ns1:p>
+            <ns1:r>
+              <ns1:t>Neither way is always better. If an established equation exists and its assumptions apply, the equation can be the better choice. We will work out together when each way fits.</ns1:t>
             </ns1:r>
           </ns1:p>
         </ns0:txBody>
@@ -1608,7 +1824,19 @@
           <ns1:lstStyle/>
           <ns1:p>
             <ns1:r>
-              <ns1:t>Identify the outcome, the information available beforehand, and the time at which a prediction would be useful. If an input is known only after the outcome, it cannot support that advance prediction. The following paper example illustrates the reasoning with small embedded data.</ns1:t>
+              <ns1:t>Here is the question this course starts from. The silica assay takes an hour to come back from the laboratory. Can we know it now, from the process variables we already measure?</ns1:t>
+            </ns1:r>
+          </ns1:p>
+          <ns1:p/>
+          <ns1:p>
+            <ns1:r>
+              <ns1:t>An assay is a laboratory test that measures how much of a substance a sample contains. Silica is an impurity in the concentrate. Waiting an hour means the plant keeps running without knowing the answer.</ns1:t>
+            </ns1:r>
+          </ns1:p>
+          <ns1:p/>
+          <ns1:p>
+            <ns1:r>
+              <ns1:t>Keep that question in mind. Think about what you would need. You would need past assay results, and the process measurements taken at the same times. In twenty minutes you will answer a version of it yourself, on paper, with no computer and no formula.</ns1:t>
             </ns1:r>
           </ns1:p>
         </ns0:txBody>
@@ -1678,7 +1906,25 @@
           <ns1:lstStyle/>
           <ns1:p>
             <ns1:r>
-              <ns1:t>Trace the diagrams left to right. In conventional programming, a person supplies the rule. In supervised learning, past inputs and observed outcomes help an algorithm fit a rule. Then that fitted rule predicts outcomes for new inputs. Do not assume students have programmed before.</ns1:t>
+              <ns1:t>This slide shows the actual idea of the course. It compares two ways of working.</ns1:t>
+            </ns1:r>
+          </ns1:p>
+          <ns1:p/>
+          <ns1:p>
+            <ns1:r>
+              <ns1:t>The first is traditional programming. You work out the rule yourself and write it down. The computer takes your rule and some inputs, and it produces answers. If you know that power equals voltage times current, you can write that rule yourself.</ns1:t>
+            </ns1:r>
+          </ns1:p>
+          <ns1:p/>
+          <ns1:p>
+            <ns1:r>
+              <ns1:t>The second is machine learning. Here you do not know the rule. What you have are examples. Each example has the inputs and the answer that followed. You give both to the computer, and the computer works out a rule from them.</ns1:t>
+            </ns1:r>
+          </ns1:p>
+          <ns1:p/>
+          <ns1:p>
+            <ns1:r>
+              <ns1:t>After that, the rule it found can be used on new inputs, and it predicts the answers. So the roles are reversed. In traditional programming you supply the rule. In machine learning the computer supplies the rule, and you supply the examples.</ns1:t>
             </ns1:r>
           </ns1:p>
         </ns0:txBody>
@@ -1748,7 +1994,25 @@
           <ns1:lstStyle/>
           <ns1:p>
             <ns1:r>
-              <ns1:t>Explain the decision criteria one by one. Known equations still require valid units and assumptions. Learning from examples requires enough relevant data and evaluation on separate cases. Interpretability is a requirement to examine, not proof that every learned model is unexplainable.</ns1:t>
+              <ns1:t>How do you choose between the two ways? This slide gives you the criteria.</ns1:t>
+            </ns1:r>
+          </ns1:p>
+          <ns1:p/>
+          <ns1:p>
+            <ns1:r>
+              <ns1:t>Write the rule yourself when a code of practice, a datasheet or a validated equation already gives you the answer. Write it yourself when the relationship is simple and well understood. Write it yourself when you must explain every decision, line by line, to a client or a regulator. And write it yourself when you have little or no historical data.</ns1:t>
+            </ns1:r>
+          </ns1:p>
+          <ns1:p/>
+          <ns1:p>
+            <ns1:r>
+              <ns1:t>Let the computer infer the rule when nobody knows the rule, or it involves many variables acting on each other. Choose this when you have a reasonable number of past examples where you know both the inputs and the outcome. An early estimate can help with planning, if its error is small enough for the decision. Finally, you must be able to test the inferred rule on cases it has never seen.</ns1:t>
+            </ns1:r>
+          </ns1:p>
+          <ns1:p/>
+          <ns1:p>
+            <ns1:r>
+              <ns1:t>An equation still needs correct units and valid assumptions, so the check is always yours.</ns1:t>
             </ns1:r>
           </ns1:p>
         </ns0:txBody>
@@ -1818,7 +2082,19 @@
           <ns1:lstStyle/>
           <ns1:p>
             <ns1:r>
-              <ns1:t>Point to one complete row: it represents one observation. Read its column names and units before using any numbers. Identify candidate inputs available at prediction time, then the outcome to predict. The embedded table is the learning aid here; it is not a file students must locate.</ns1:t>
+              <ns1:t>Now we meet the vocabulary for data. Look at the table on the slide. Each row describes one case, which means one thing that was observed, such as one machine at one moment.</ns1:t>
+            </ns1:r>
+          </ns1:p>
+          <ns1:p/>
+          <ns1:p>
+            <ns1:r>
+              <ns1:t>The columns are the measurements. Some columns are the inputs. We call these the feature columns. They hold the information that we have available before we make a prediction. One column holds the value that we want to predict. We call that the target column.</ns1:t>
+            </ns1:r>
+          </ns1:p>
+          <ns1:p/>
+          <ns1:p>
+            <ns1:r>
+              <ns1:t>When you read any table, begin with the column names and the units. Then ask which columns you would really know in advance, and which one column is the answer. The table on the slide is part of the lesson, so there is no file to download or open.</ns1:t>
             </ns1:r>
           </ns1:p>
         </ns0:txBody>
@@ -1888,7 +2164,19 @@
           <ns1:lstStyle/>
           <ns1:p>
             <ns1:r>
-              <ns1:t>A feature is an input chosen for prediction; the target is the answer being predicted. Not every earlier measurement is useful, and an identifier may be only a label. Association means two quantities vary together; it does not establish that changing one causes the other.</ns1:t>
+              <ns1:t>A feature is a column whose value you know before the outcome. It is an input. The target is the column you want to predict. One row that holds all of them is called one example.</ns1:t>
+            </ns1:r>
+          </ns1:p>
+          <ns1:p/>
+          <ns1:p>
+            <ns1:r>
+              <ns1:t>In the table you just saw, iron feed grade, starch flow and pulp pH are the features. Silica in the concentrate is the target. The concentrate is the valuable material collected at the end of the process.</ns1:t>
+            </ns1:r>
+          </ns1:p>
+          <ns1:p/>
+          <ns1:p>
+            <ns1:r>
+              <ns1:t>Be careful about the word cause. A target does not have to be a cause. Starch flow is associated with concentrate quality, which means the two tend to move together. The model learns that association. It knows nothing about surface chemistry, which is how the chemicals act on the mineral surfaces.</ns1:t>
             </ns1:r>
           </ns1:p>
         </ns0:txBody>
@@ -1958,7 +2246,31 @@
           <ns1:lstStyle/>
           <ns1:p>
             <ns1:r>
-              <ns1:t>Let students identify the target and exclude the post-outcome repair information. The reason is timing: information unavailable when predicting would leak the answer. A valid fixed formula is an acceptable alternative to ML. The next slide explains these answers.</ns1:t>
+              <ns1:t>Here are three questions to try before we look at the answers. Take a minute to think about each one and write something down.</ns1:t>
+            </ns1:r>
+          </ns1:p>
+          <ns1:p/>
+          <ns1:p>
+            <ns1:r>
+              <ns1:t>Question A. Take a table of froth flotation process data. Is the silica in the concentrate a feature or the target?</ns1:t>
+            </ns1:r>
+          </ns1:p>
+          <ns1:p/>
+          <ns1:p>
+            <ns1:r>
+              <ns1:t>Question B. You want to predict how long a pump will run before it fails. You have a column that records the repair carried out afterwards. Should that column be a feature? Say why or why not. Think about when each piece of information becomes known.</ns1:t>
+            </ns1:r>
+          </ns1:p>
+          <ns1:p/>
+          <ns1:p>
+            <ns1:r>
+              <ns1:t>Question C. Give one example from your own discipline of a problem where you already know the rule, so machine learning would be the wrong tool.</ns1:t>
+            </ns1:r>
+          </ns1:p>
+          <ns1:p/>
+          <ns1:p>
+            <ns1:r>
+              <ns1:t>The answers are on the next slide. Try first, then look.</ns1:t>
             </ns1:r>
           </ns1:p>
         </ns0:txBody>
@@ -2028,7 +2340,31 @@
           <ns1:lstStyle/>
           <ns1:p>
             <ns1:r>
-              <ns1:t>Explain why the target is the requested outcome, not simply the last column. The repair-after-failure column is excluded because it would not be available beforehand. For electrical examples, Ohm’s law is V = IR; DC electrical power is P = VI. They are different relationships with different assumptions.</ns1:t>
+              <ns1:t>Let us check your answers.</ns1:t>
+            </ns1:r>
+          </ns1:p>
+          <ns1:p/>
+          <ns1:p>
+            <ns1:r>
+              <ns1:t>For A, the answer is the target. The target is the thing you want to predict. The measurements that you have available beforehand are the candidate features.</ns1:t>
+            </ns1:r>
+          </ns1:p>
+          <ns1:p/>
+          <ns1:p>
+            <ns1:r>
+              <ns1:t>For B, the repair column should not be a feature. The repair is recorded after the failure, so it is unavailable at the moment you need to predict. If you include it, your test results will look better than they should. This mistake has a name, data leakage. It means that information from the future has slipped into the inputs.</ns1:t>
+            </ns1:r>
+          </ns1:p>
+          <ns1:p/>
+          <ns1:p>
+            <ns1:r>
+              <ns1:t>For C, any problem with a formula or a code threshold works. Contained metal is tonnage times grade. That is simple arithmetic, and there is nothing to predict.</ns1:t>
+            </ns1:r>
+          </ns1:p>
+          <ns1:p/>
+          <ns1:p>
+            <ns1:r>
+              <ns1:t>If a validated equation exists, use the equation.</ns1:t>
             </ns1:r>
           </ns1:p>
         </ns0:txBody>
@@ -2098,7 +2434,25 @@
           <ns1:lstStyle/>
           <ns1:p>
             <ns1:r>
-              <ns1:t>Use the twelve embedded observations as known examples. Case 13 is withheld from the pattern-finding step. This is an individual paper exercise to practise prediction reasoning; it is not a requirement to write or train a model yet.</ns1:t>
+              <ns1:t>This is the fifth segment. It is hands on work and it takes twenty five minutes.</ns1:t>
+            </ns1:r>
+          </ns1:p>
+          <ns1:p/>
+          <ns1:p>
+            <ns1:r>
+              <ns1:t>You get a table with twelve rows. Each row is a case with its inputs and its measured outcome. A thirteenth case is also given, and for that case only the inputs are shown. Your job is to predict its outcome.</ns1:t>
+            </ns1:r>
+          </ns1:p>
+          <ns1:p/>
+          <ns1:p>
+            <ns1:r>
+              <ns1:t>Write down your prediction and explain which of the twelve rows helped you choose it. This is a paper exercise. You do not write code, and you do not train anything.</ns1:t>
+            </ns1:r>
+          </ns1:p>
+          <ns1:p/>
+          <ns1:p>
+            <ns1:r>
+              <ns1:t>The aim is a reasoned estimate. The aim is a reasoned estimate, and what we mark is the reason you give.</ns1:t>
             </ns1:r>
           </ns1:p>
         </ns0:txBody>
@@ -2168,7 +2522,25 @@
           <ns1:lstStyle/>
           <ns1:p>
             <ns1:r>
-              <ns1:t>Read the table’s headings and units first. Select similar known cases, make an estimate for case 13 and record a reason before the reveal. There is no requirement to form a team in class. The goal is an explained estimate, not guessing the exact measured answer.</ns1:t>
+              <ns1:t>Here is your task, and you have fifteen minutes for it. You work on your own.</ns1:t>
+            </ns1:r>
+          </ns1:p>
+          <ns1:p/>
+          <ns1:p>
+            <ns1:r>
+              <ns1:t>Twelve cases show their inputs and their measured outcomes. Case thirteen shows only its inputs. Predict the outcome of case thirteen, and write one sentence explaining your choice.</ns1:t>
+            </ns1:r>
+          </ns1:p>
+          <ns1:p/>
+          <ns1:p>
+            <ns1:r>
+              <ns1:t>Start by reading the column headings and the units. Then find the known cases that look most like case thirteen. Use them to make your estimate, and write your reason down before we reveal the true value.</ns1:t>
+            </ns1:r>
+          </ns1:p>
+          <ns1:p/>
+          <ns1:p>
+            <ns1:r>
+              <ns1:t>Writing your reason first matters. Afterwards you can compare what you expected with what was measured, and learn from the difference.</ns1:t>
             </ns1:r>
           </ns1:p>
         </ns0:txBody>
@@ -2238,7 +2610,25 @@
           <ns1:lstStyle/>
           <ns1:p>
             <ns1:r>
-              <ns1:t>Read the outcomes as questions learners should be able to answer by the end. Start with AI and machine learning in ordinary language; features, targets and task types are introduced later. Learners do not need those terms beforehand.</ns1:t>
+              <ns1:t>These are the seven things you should be able to do by the end of today. Read them as questions that you will be able to answer.</ns1:t>
+            </ns1:r>
+          </ns1:p>
+          <ns1:p/>
+          <ns1:p>
+            <ns1:r>
+              <ns1:t>We begin with words. You will be able to say what artificial intelligence, machine learning and data science each mean, and how they differ. Then you will explain the difference between writing a rule yourself and letting a computer work out a rule from examples.</ns1:t>
+            </ns1:r>
+          </ns1:p>
+          <ns1:p/>
+          <ns1:p>
+            <ns1:r>
+              <ns1:t>Next comes the data. You will look at a table and say which columns are the features, which are the inputs, and which column is the target, the thing we want to predict. You will also tell a regression problem, where the answer is a number, from a classification problem, where the answer is a category.</ns1:t>
+            </ns1:r>
+          </ns1:p>
+          <ns1:p/>
+          <ns1:p>
+            <ns1:r>
+              <ns1:t>Objective five asks you to name three problems in exploration, ore and reservoir characterisation, production and equipment health where data could help, and two where it could not. Objective six is to state four things machine learning cannot do, with a reason for each. Objective seven is to describe how the course is assessed and what your project will look like. Nothing today needs programming experience.</ns1:t>
             </ns1:r>
           </ns1:p>
         </ns0:txBody>
@@ -2308,7 +2698,31 @@
           <ns1:lstStyle/>
           <ns1:p>
             <ns1:r>
-              <ns1:t>Work through the five visible steps using the actual table. Interpolation estimates between neighbouring observations; it does not guarantee that the outcome lies between theirs. Explain why a second input may matter. Keep a record of the estimate before showing the measured outcome.</ns1:t>
+              <ns1:t>Let us read a pattern from the twelve cases. One approach is to compare cases that have similar inputs. Follow the five steps on the slide.</ns1:t>
+            </ns1:r>
+          </ns1:p>
+          <ns1:p/>
+          <ns1:p>
+            <ns1:r>
+              <ns1:t>Step one. Look down the columns and ask which column seems to move together with the outcome. Ignore the others for now.</ns1:t>
+            </ns1:r>
+          </ns1:p>
+          <ns1:p/>
+          <ns1:p>
+            <ns1:r>
+              <ns1:t>Step two. Find the two cases whose value in that column sits on either side of case thirteen's value. Step three. Look at their outcomes. The answer for case thirteen is probably between them. Estimating between two known points like this is called interpolation, and it is a good guess, though it is never a guarantee.</ns1:t>
+            </ns1:r>
+          </ns1:p>
+          <ns1:p/>
+          <ns1:p>
+            <ns1:r>
+              <ns1:t>Step four. Adjust for anything else you noticed, such as a second column that also seems to matter. Step five. Write the number down, write why, and ask how confident you are and what would change your mind.</ns1:t>
+            </ns1:r>
+          </ns1:p>
+          <ns1:p/>
+          <ns1:p>
+            <ns1:r>
+              <ns1:t>You have used a pattern in known examples to predict an unknown value. Comparing the prediction with the measured value tells you the size of the error.</ns1:t>
             </ns1:r>
           </ns1:p>
         </ns0:txBody>
@@ -2378,7 +2792,25 @@
           <ns1:lstStyle/>
           <ns1:p>
             <ns1:r>
-              <ns1:t>Read the star as the withheld observation and compare it with the previously recorded estimate. State the chosen signed-error convention before subtracting, and retain the measurement’s unit. Absolute error measures size without direction. One held-out case is not enough to establish reliable performance.</ns1:t>
+              <ns1:t>Here is the reveal. The chart shows the twelve known cases, and a star marks the measured value of case thirteen.</ns1:t>
+            </ns1:r>
+          </ns1:p>
+          <ns1:p/>
+          <ns1:p>
+            <ns1:r>
+              <ns1:t>The distance between your prediction and the star is the prediction error. It is the difference between what you predicted and what was measured. Keep the unit with it, because an error of three is meaningless until we know three of what. If we subtract in the same order each time. In this course we take the measured value minus the predicted value, a positive and a negative error will tell us whether we predicted too high or too low.</ns1:t>
+            </ns1:r>
+          </ns1:p>
+          <ns1:p/>
+          <ns1:p>
+            <ns1:r>
+              <ns1:t>The dashed line shows one possible pattern in the data. A line is only one kind of pattern, and other shapes are possible.</ns1:t>
+            </ns1:r>
+          </ns1:p>
+          <ns1:p/>
+          <ns1:p>
+            <ns1:r>
+              <ns1:t>One case cannot tell us how reliable a method is. With a single test we only see how it did this once. Later we will use many cases that were held back, and then the error means much more.</ns1:t>
             </ns1:r>
           </ns1:p>
         </ns0:txBody>
@@ -2448,7 +2880,25 @@
           <ns1:lstStyle/>
           <ns1:p>
             <ns1:r>
-              <ns1:t>Map the paper actions to later computing steps without claiming a computer was trained today. Looking at patterns is exploration; choosing columns is feature selection; an algorithm later fits model parameters. Separate evaluation asks whether the fitted rule works on observations it did not learn from.</ns1:t>
+              <ns1:t>Now we give names to what you just did. On the slide, the first group lists what you did, and the second group lists what it is called.</ns1:t>
+            </ns1:r>
+          </ns1:p>
+          <ns1:p/>
+          <ns1:p>
+            <ns1:r>
+              <ns1:t>You looked at the table. That is exploring the data, which we do in Weeks 5 and 6. You noticed which columns seemed to matter. That is selecting features, in Week 11. You worked out a rough rule in your head. That is proposing a model, and the Python models start in Week 8.</ns1:t>
+            </ns1:r>
+          </ns1:p>
+          <ns1:p/>
+          <ns1:p>
+            <ns1:r>
+              <ns1:t>You then applied your rule to a case that you had not seen. That is predicting for a case that was not used to find the pattern. Finally, you compared your prediction with the measured value. That is measuring the prediction error, and Week 10 covers model evaluation.</ns1:t>
+            </ns1:r>
+          </ns1:p>
+          <ns1:p/>
+          <ns1:p>
+            <ns1:r>
+              <ns1:t>So on paper, with twelve rows, you went through the same steps that a computer follows later. Nothing was trained today. Later weeks will repeat these steps in Python.</ns1:t>
             </ns1:r>
           </ns1:p>
         </ns0:txBody>
@@ -2518,7 +2968,13 @@
           <ns1:lstStyle/>
           <ns1:p>
             <ns1:r>
-              <ns1:t>Pause before introducing task types. No code or download is required for the second half of this introductory lesson.</ns1:t>
+              <ns1:t>We now take a ten minute break. Stand up, stretch and drink some water.</ns1:t>
+            </ns1:r>
+          </ns1:p>
+          <ns1:p/>
+          <ns1:p>
+            <ns1:r>
+              <ns1:t>When we come back, we move to the second half of the introduction. No computer is needed for the remaining examples, and no download or code is required. Come back on time, because we start with the two main kinds of prediction question.</ns1:t>
             </ns1:r>
           </ns1:p>
         </ns0:txBody>
@@ -2588,7 +3044,19 @@
           <ns1:lstStyle/>
           <ns1:p>
             <ns1:r>
-              <ns1:t>Explain that the kind of answer determines the task. An estimated amount is a regression target; a choice among categories is classification. Categories can be represented by numeric codes such as 0 and 1, so digits alone do not determine the task.</ns1:t>
+              <ns1:t>This is the sixth segment, and it lasts fifteen minutes. We look at two kinds of question. One is predicting a number, and the other is predicting a category. Almost everything in this course is one or the other.</ns1:t>
+            </ns1:r>
+          </ns1:p>
+          <ns1:p/>
+          <ns1:p>
+            <ns1:r>
+              <ns1:t>The kind of answer decides the task. If the answer is an amount, such as a torque or a number of days, the task is regression. If the answer is a choice from a list of labels, such as failure or no failure, the task is classification.</ns1:t>
+            </ns1:r>
+          </ns1:p>
+          <ns1:p/>
+          <ns1:p>
+            <ns1:r>
+              <ns1:t>Categories can be stored as numeric codes, like zero and one. The digits alone do not decide the task. What matters is what the answer means.</ns1:t>
             </ns1:r>
           </ns1:p>
         </ns0:txBody>
@@ -2658,7 +3126,19 @@
           <ns1:lstStyle/>
           <ns1:p>
             <ns1:r>
-              <ns1:t>The line is one possible regression model, not the definition of regression. Curved relationships are also possible. The boundary illustrates classification; it separates predicted categories. The same inputs may support different tasks depending on the target we define.</ns1:t>
+              <ns1:t>The slide shows the two shapes. In regression, the answer is a number on a continuous scale. A continuous scale means the value can be any amount between two points, such as any torque between ten and sixty newton metres. To handle this we fit a line or curve through the cases, and we read the prediction from it.</ns1:t>
+            </ns1:r>
+          </ns1:p>
+          <ns1:p/>
+          <ns1:p>
+            <ns1:r>
+              <ns1:t>In classification, the answer is one of a small set of labels. To handle this we look for a boundary that separates the labels, so that cases on one side get one label and cases on the other side get the other.</ns1:t>
+            </ns1:r>
+          </ns1:p>
+          <ns1:p/>
+          <ns1:p>
+            <ns1:r>
+              <ns1:t>The same data can often support both. If we take a column of measured temperatures, we can predict the temperature itself, which is regression, or we can predict whether it passes a safety limit, which is classification. The data stays the same. What changes is the question we ask, and so the target we choose.</ns1:t>
             </ns1:r>
           </ns1:p>
         </ns0:txBody>
@@ -2728,7 +3208,19 @@
           <ns1:lstStyle/>
           <ns1:p>
             <ns1:r>
-              <ns1:t>Ask what the output means, not only how it is written. A quantity such as torque or days is regression; a class such as failure/no failure is classification. A label encoded as 0 or 1 is still a category. Regression can also predict quantities without physical units.</ns1:t>
+              <ns1:t>Regression predicts a number on a continuous scale. Classification predicts which of a small number of categories a case belongs to.</ns1:t>
+            </ns1:r>
+          </ns1:p>
+          <ns1:p/>
+          <ns1:p>
+            <ns1:r>
+              <ns1:t>For example, a regression question is, how many per cent silica? A classification question is, ore or waste. Another is lithology, which means rock type, such as sandstone, shale or limestone.</ns1:t>
+            </ns1:r>
+          </ns1:p>
+          <ns1:p/>
+          <ns1:p>
+            <ns1:r>
+              <ns1:t>To tell them apart, ask what the answer means. Estimating a quantity is regression. Choosing a category is classification. Categories may be stored as numeric codes such as zero and one, but they are still categories.</ns1:t>
             </ns1:r>
           </ns1:p>
         </ns0:txBody>
@@ -2798,7 +3290,31 @@
           <ns1:lstStyle/>
           <ns1:p>
             <ns1:r>
-              <ns1:t>Days until replacement is a numerical quantity. Pass/fail has two classes. Five fault types give multiclass classification. Identify the target meaning before choosing a method; students can answer without knowing a model algorithm.</ns1:t>
+              <ns1:t>Here is another check. Try each one before we show the answers.</ns1:t>
+            </ns1:r>
+          </ns1:p>
+          <ns1:p/>
+          <ns1:p>
+            <ns1:r>
+              <ns1:t>Question A. You want to predict how many days until a component needs replacing. Is that regression or classification?</ns1:t>
+            </ns1:r>
+          </ns1:p>
+          <ns1:p/>
+          <ns1:p>
+            <ns1:r>
+              <ns1:t>Question B. You want to predict whether a sample passes or fails a specification. Which one is it?</ns1:t>
+            </ns1:r>
+          </ns1:p>
+          <ns1:p/>
+          <ns1:p>
+            <ns1:r>
+              <ns1:t>Question C. You want to predict which of five fault types a machine has. Which one is it, and what makes it different from the previous question?</ns1:t>
+            </ns1:r>
+          </ns1:p>
+          <ns1:p/>
+          <ns1:p>
+            <ns1:r>
+              <ns1:t>Think about what each answer would look like. Is it a quantity, or is it a choice from a list? The answers are on the next slide.</ns1:t>
             </ns1:r>
           </ns1:p>
         </ns0:txBody>
@@ -2868,7 +3384,31 @@
           <ns1:lstStyle/>
           <ns1:p>
             <ns1:r>
-              <ns1:t>Explain binary as two categories and multiclass as more than two. More classes do not automatically make every dataset harder; difficulty also depends on their separation, examples and error costs. A confusion table will later reveal which categories are mixed up.</ns1:t>
+              <ns1:t>Let us see how you did.</ns1:t>
+            </ns1:r>
+          </ns1:p>
+          <ns1:p/>
+          <ns1:p>
+            <ns1:r>
+              <ns1:t>For A, days until replacement is regression. The answer is a number with a unit, which is days.</ns1:t>
+            </ns1:r>
+          </ns1:p>
+          <ns1:p/>
+          <ns1:p>
+            <ns1:r>
+              <ns1:t>For B, pass or fail is classification. There are two categories, so we call it binary classification. Binary means two.</ns1:t>
+            </ns1:r>
+          </ns1:p>
+          <ns1:p/>
+          <ns1:p>
+            <ns1:r>
+              <ns1:t>For C, five fault types is still classification, but it is multiclass instead of binary. Multiclass means more than two categories. A model with more categories is not automatically harder to build. The difficulty depends on how well the categories separate in the data, how many examples we have, and what each error costs.</ns1:t>
+            </ns1:r>
+          </ns1:p>
+          <ns1:p/>
+          <ns1:p>
+            <ns1:r>
+              <ns1:t>In Week 9 we study which categories get confused with each other, and that tells us much more than a single accuracy score.</ns1:t>
             </ns1:r>
           </ns1:p>
         </ns0:txBody>
@@ -2938,7 +3478,19 @@
           <ns1:lstStyle/>
           <ns1:p>
             <ns1:r>
-              <ns1:t>Introduce four reasons a prediction may not be useful. A model returning an answer is not evidence of data quality, a real predictive relationship or safe operation.</ns1:t>
+              <ns1:t>This is the seventh segment, and it takes fifteen minutes. We look at what machine learning cannot do. There are four limitations, and we will work through each of them.</ns1:t>
+            </ns1:r>
+          </ns1:p>
+          <ns1:p/>
+          <ns1:p>
+            <ns1:r>
+              <ns1:t>A model will always give you an answer. A returned prediction does not prove that the data was good, that a real relationship exists, or that an action is safe. So whenever you see a prediction, the next step is to ask whether the data and the testing really support the use that someone has in mind.</ns1:t>
+            </ns1:r>
+          </ns1:p>
+          <ns1:p/>
+          <ns1:p>
+            <ns1:r>
+              <ns1:t>The next two slides give the four limits, first in general terms and then in your own discipline.</ns1:t>
             </ns1:r>
           </ns1:p>
         </ns0:txBody>
@@ -3008,7 +3560,19 @@
           <ns1:lstStyle/>
           <ns1:p>
             <ns1:r>
-              <ns1:t>Explain the lesson’s sequence: define the ideas, inspect a worked example, then practise identifying a sensible prediction task. Timings are a guide, not a requirement to rush. The activities can be completed individually.</ns1:t>
+              <ns1:t>Every session this semester has the same shape, so you always know what is coming. Each session lasts three hours and is split into eleven segments.</ns1:t>
+            </ns1:r>
+          </ns1:p>
+          <ns1:p/>
+          <ns1:p>
+            <ns1:r>
+              <ns1:t>No stretch of talking from me runs longer than twenty five minutes. After each short explanation you do something yourself, such as answering a question, working through a small example or solving a problem on paper. Roughly half of every session is you doing and half is me explaining.</ns1:t>
+            </ns1:r>
+          </ns1:p>
+          <ns1:p/>
+          <ns1:p>
+            <ns1:r>
+              <ns1:t>Today's segments follow the same pattern. We define the main ideas, we work through an example together, and then you try one on your own. Use the segment slides to see where we are and how long each part should take.</ns1:t>
             </ns1:r>
           </ns1:p>
         </ns0:txBody>
@@ -3078,7 +3642,25 @@
           <ns1:lstStyle/>
           <ns1:p>
             <ns1:r>
-              <ns1:t>Walk through the four limits on the diagram: inadequate observations, weak or irrelevant inputs, a better known equation, and changes between past and current conditions. Explain that these are questions to investigate rather than universal claims about every plant or dataset.</ns1:t>
+              <ns1:t>These are four limits of machine learning, and none of them goes away with a better computer.</ns1:t>
+            </ns1:r>
+          </ns1:p>
+          <ns1:p/>
+          <ns1:p>
+            <ns1:r>
+              <ns1:t>First, there may be no data, or too few observations. A model can only learn from what has been recorded. Second, the inputs may carry no useful signal. They may be weak or irrelevant to the outcome. Third, a better method may already exist. A known physical equation can beat a model. Fourth, the future may change. Conditions today can differ from the conditions in the past data.</ns1:t>
+            </ns1:r>
+          </ns1:p>
+          <ns1:p/>
+          <ns1:p>
+            <ns1:r>
+              <ns1:t>A model can produce a prediction even when the data are unsuitable. It will not warn you. So for every problem, check whether the inputs and the testing support the use you intend.</ns1:t>
+            </ns1:r>
+          </ns1:p>
+          <ns1:p/>
+          <ns1:p>
+            <ns1:r>
+              <ns1:t>These four are questions to investigate for each plant and each data set. Each one is a question to investigate in each case.</ns1:t>
             </ns1:r>
           </ns1:p>
         </ns0:txBody>
@@ -3148,7 +3730,37 @@
           <ns1:lstStyle/>
           <ns1:p>
             <ns1:r>
-              <ns1:t>Treat each engineering situation as an illustrative scenario. Missing historical observations prevent learning that relationship from those observations. A superficially correlated label may fail elsewhere. A validated physical equation can be preferable. Changed equipment or materials can invalidate an old evaluation.</ns1:t>
+              <ns1:t>Here are the same four limits in your own discipline.</ns1:t>
+            </ns1:r>
+          </ns1:p>
+          <ns1:p/>
+          <ns1:p>
+            <ns1:r>
+              <ns1:t>One, no data. Blast fragmentation was judged by eye for decades, so there is no data set of it.</ns1:t>
+            </ns1:r>
+          </ns1:p>
+          <ns1:p/>
+          <ns1:p>
+            <ns1:r>
+              <ns1:t>Two, no signal. The name of the shift supervisor does not cause recovery to change. A model given that column will still find a pattern in it.</ns1:t>
+            </ns1:r>
+          </ns1:p>
+          <ns1:p/>
+          <ns1:p>
+            <ns1:r>
+              <ns1:t>Three, physics is better. Contained metal is tonnage times grade. That is arithmetic, and there is nothing to predict. Do not use a model where an equation will do.</ns1:t>
+            </ns1:r>
+          </ns1:p>
+          <ns1:p/>
+          <ns1:p>
+            <ns1:r>
+              <ns1:t>Four, the future changed. A model trained on one ore body will not carry over to the next bench when the mineralogy changes. A bench is one working level of the mine.</ns1:t>
+            </ns1:r>
+          </ns1:p>
+          <ns1:p/>
+          <ns1:p>
+            <ns1:r>
+              <ns1:t>This matters for the rest of the course. Every project in Week 9 has to survive these four questions before it is approved. A team that cannot answer them has not defined an engineering problem yet. It has picked a technique and gone looking for somewhere to use it.</ns1:t>
             </ns1:r>
           </ns1:p>
         </ns0:txBody>
@@ -3218,7 +3830,19 @@
           <ns1:lstStyle/>
           <ns1:p>
             <ns1:r>
-              <ns1:t>Introduce the Problem Hunt as practice defining a question before choosing a technique. It supports the A1 brief; it does not create another graded upload.</ns1:t>
+              <ns1:t>This is the eighth segment, and it takes thirty minutes. It is a challenge called the Problem Hunt.</ns1:t>
+            </ns1:r>
+          </ns1:p>
+          <ns1:p/>
+          <ns1:p>
+            <ns1:r>
+              <ns1:t>Your task is to read a problem and identify the information that is available. You then use the worked example to plan your first step. The skill we practise is defining a good question before choosing any technique.</ns1:t>
+            </ns1:r>
+          </ns1:p>
+          <ns1:p/>
+          <ns1:p>
+            <ns1:r>
+              <ns1:t>This exercise supports your Assignment A1 brief. It is practice, and it does not create another graded upload. A good answer may even conclude that an established rule is better than machine learning, and that is a perfectly good finding.</ns1:t>
             </ns1:r>
           </ns1:p>
         </ns0:txBody>
@@ -3288,7 +3912,25 @@
           <ns1:lstStyle/>
           <ns1:p>
             <ns1:r>
-              <ns1:t>Work through one candidate: specify the outcome, potential measurements, who records them, the decision helped and the cost of error. Then identify two other candidates. A good answer may conclude that an established rule is better than ML.</ns1:t>
+              <ns1:t>This is the Problem Hunt. There are three tasks.</ns1:t>
+            </ns1:r>
+          </ns1:p>
+          <ns1:p/>
+          <ns1:p>
+            <ns1:r>
+              <ns1:t>First, list three problems from exploration, ore and reservoir characterisation, production and equipment health where data might help. Second, classify each problem. Is it predicting a number, predicting a category, or something else? Explain your choice. Third, use the worked example as a guide, write down your assumptions, and explain your answer.</ns1:t>
+            </ns1:r>
+          </ns1:p>
+          <ns1:p/>
+          <ns1:p>
+            <ns1:r>
+              <ns1:t>Work through six questions in order. What do you want to predict? Who measures that, and how often? Would a rule you already know do this better? What would the answer let somebody do? How would you know if you were wrong? And what does a mistake cost here?</ns1:t>
+            </ns1:r>
+          </ns1:p>
+          <ns1:p/>
+          <ns1:p>
+            <ns1:r>
+              <ns1:t>Take one candidate problem and answer all six questions for it. Then repeat the process for the other two.</ns1:t>
             </ns1:r>
           </ns1:p>
         </ns0:txBody>
@@ -3358,7 +4000,25 @@
           <ns1:lstStyle/>
           <ns1:p>
             <ns1:r>
-              <ns1:t>Project teamwork is separate from today’s individual exercises. Explain rotating roles and the contribution log as specific records of who produced and explained each part. Individual written defence and reflection follow the current Week 15 brief; do not promise an unannounced live examination.</ns1:t>
+              <ns1:t>Now let us talk about how your team works all semester. Project teams have four or five people. You do two projects together. The first is a data analysis project, and the second is the Engineering ML Project, which runs from Week 9 to Week 15. The slide gives the due week for the first one.</ns1:t>
+            </ns1:r>
+          </ns1:p>
+          <ns1:p/>
+          <ns1:p>
+            <ns1:r>
+              <ns1:t>Roles rotate at every milestone. The roles are data analysis, modelling, engineering review, documentation and presentation. Rotating means each member practises different skills.</ns1:t>
+            </ns1:r>
+          </ns1:p>
+          <ns1:p/>
+          <ns1:p>
+            <ns1:r>
+              <ns1:t>Individual accountability is built in. Sixty five per cent of the mark is individual. Your team keeps a contribution log, which is a record of who did what, and I check it against the repository history. The repository is the online folder where your project files and their changes are stored. In Week 15, each student submits an individual written defence and reflection, following the published brief.</ns1:t>
+            </ns1:r>
+          </ns1:p>
+          <ns1:p/>
+          <ns1:p>
+            <ns1:r>
+              <ns1:t>Before you leave, sign the team charter. Write the names, contact details, a weekly meeting slot, and what you will do if somebody stops contributing. Agreeing that now is much easier than agreeing it in November.</ns1:t>
             </ns1:r>
           </ns1:p>
         </ns0:txBody>
@@ -3428,7 +4088,19 @@
           <ns1:lstStyle/>
           <ns1:p>
             <ns1:r>
-              <ns1:t>Review one candidate problem against the visible questions, then explain the A1 submission checklist. Do not require a gallery walk or peer boards. The assignment should be understandable to someone revising alone.</ns1:t>
+              <ns1:t>This is the ninth segment, and it takes ten minutes. We do two things.</ns1:t>
+            </ns1:r>
+          </ns1:p>
+          <ns1:p/>
+          <ns1:p>
+            <ns1:r>
+              <ns1:t>First, look again at your candidate problems from the Problem Hunt. Check one of them against the six questions on the earlier slide. Second, we review Assignment A1 and what you need to do to prepare for Week 2.</ns1:t>
+            </ns1:r>
+          </ns1:p>
+          <ns1:p/>
+          <ns1:p>
+            <ns1:r>
+              <ns1:t>The next slide explains A1 and the steps before next week. It is written so that someone reading it alone can follow it, so you can return to it when you are revising.</ns1:t>
             </ns1:r>
           </ns1:p>
         </ns0:txBody>
@@ -3498,7 +4170,31 @@
           <ns1:lstStyle/>
           <ns1:p>
             <ns1:r>
-              <ns1:t>A1 asks for one report covering three candidate problems and a justified choice of one. For each, identify inputs, target where appropriate, a possible data source and a limitation. Use the current form deadline. Account setup is preparation for Week 2, not a second report.</ns1:t>
+              <ns1:t>Here is Assignment A1, which you complete before Week 2. Use the deadline shown on the course form.</ns1:t>
+            </ns1:r>
+          </ns1:p>
+          <ns1:p/>
+          <ns1:p>
+            <ns1:r>
+              <ns1:t>You write about three candidate machine learning problems from your own discipline. For each one, state the inputs, the target, the data source and one limitation. Then choose one problem and its data set, and explain why it is feasible, meaning why it can really be done.</ns1:t>
+            </ns1:r>
+          </ns1:p>
+          <ns1:p/>
+          <ns1:p>
+            <ns1:r>
+              <ns1:t>The marks are six for framing, eight for data and six for judgement. Submit one DOCX file or one text PDF.</ns1:t>
+            </ns1:r>
+          </ns1:p>
+          <ns1:p/>
+          <ns1:p>
+            <ns1:r>
+              <ns1:t>Also before next week, create a GitHub account, which is a place to store project files online. Create a Google account if you do not have one, because we work in Google Colab from Week 2. Colab lets you write and run Python in a browser. Watch the video on the next slide. Sign and hand in your team charter.</ns1:t>
+            </ns1:r>
+          </ns1:p>
+          <ns1:p/>
+          <ns1:p>
+            <ns1:r>
+              <ns1:t>Do not install anything. Week 2 needs only a browser.</ns1:t>
             </ns1:r>
           </ns1:p>
         </ns0:txBody>
@@ -3568,7 +4264,25 @@
           <ns1:lstStyle/>
           <ns1:p>
             <ns1:r>
-              <ns1:t>The video is supplementary. Ask students to compare its definitions of AI, ML and deep learning with the lesson. Preview it before class; availability and suggested excerpt timings may change. Students can use the preceding explanations if the video is unavailable.</ns1:t>
+              <ns1:t>Please watch this video before Week 2. It comes from IBM Technology. Its title is AI, Machine Learning, Deep Learning and Generative AI Explained, and it runs for under ten minutes. The link is on the slide.</ns1:t>
+            </ns1:r>
+          </ns1:p>
+          <ns1:p/>
+          <ns1:p>
+            <ns1:r>
+              <ns1:t>As you watch, compare the speaker's definitions with the diagram we used today, where artificial intelligence contains machine learning, and machine learning contains deep learning. Note any terms that the speaker uses differently from us.</ns1:t>
+            </ns1:r>
+          </ns1:p>
+          <ns1:p/>
+          <ns1:p>
+            <ns1:r>
+              <ns1:t>Generative AI means systems that create new text, images or other content. We name it here, and we do not study it in Semester 1.</ns1:t>
+            </ns1:r>
+          </ns1:p>
+          <ns1:p/>
+          <ns1:p>
+            <ns1:r>
+              <ns1:t>If the video is unavailable, you can use today's slides for the same definitions.</ns1:t>
             </ns1:r>
           </ns1:p>
         </ns0:txBody>
@@ -3638,7 +4352,19 @@
           <ns1:lstStyle/>
           <ns1:p>
             <ns1:r>
-              <ns1:t>Explain how to revise: attempt the self-test before reading its answers, then use the glossary to clarify unfamiliar terms. The reference slides summarise this lesson; they do not introduce additional submission requirements.</ns1:t>
+              <ns1:t>This is the tenth segment, and it takes five minutes. Everything from here on is for you to study from.</ns1:t>
+            </ns1:r>
+          </ns1:p>
+          <ns1:p/>
+          <ns1:p>
+            <ns1:r>
+              <ns1:t>The slides that follow contain a summary, a self test with answers, a glossary, and a one page reference. Use them in that order when you revise. Attempt the self test first and write something for each question. Only then read the answers. Use the glossary whenever a word is unfamiliar.</ns1:t>
+            </ns1:r>
+          </ns1:p>
+          <ns1:p/>
+          <ns1:p>
+            <ns1:r>
+              <ns1:t>These slides recap today's lesson. They do not add any new submission.</ns1:t>
             </ns1:r>
           </ns1:p>
         </ns0:txBody>
@@ -3708,7 +4434,37 @@
           <ns1:lstStyle/>
           <ns1:p>
             <ns1:r>
-              <ns1:t>Recap the chain: engineering question, suitable observations, candidate inputs and target, method choice, evaluation and limitations. The row-and-column description applies to the supervised tables used here, not every possible dataset. Images, text and unlabelled data can have other structures.</ns1:t>
+              <ns1:t>Let us summarise what you should take away.</ns1:t>
+            </ns1:r>
+          </ns1:p>
+          <ns1:p/>
+          <ns1:p>
+            <ns1:r>
+              <ns1:t>Artificial intelligence is a goal. Machine learning is one way of reaching it. Data science is the craft of getting a trustworthy answer out of data at all.</ns1:t>
+            </ns1:r>
+          </ns1:p>
+          <ns1:p/>
+          <ns1:p>
+            <ns1:r>
+              <ns1:t>In traditional programming you write the rule. In machine learning you supply examples and the computer infers the rule, and then you must decide whether to trust it.</ns1:t>
+            </ns1:r>
+          </ns1:p>
+          <ns1:p/>
+          <ns1:p>
+            <ns1:r>
+              <ns1:t>The tables we used have one row per example, columns of candidate inputs, and an observed target. Other data sets can have different structures, such as images or text.</ns1:t>
+            </ns1:r>
+          </ns1:p>
+          <ns1:p/>
+          <ns1:p>
+            <ns1:r>
+              <ns1:t>Regression predicts a number with a unit. Classification predicts which of a small set of categories a case belongs to. The same data can pose either question.</ns1:t>
+            </ns1:r>
+          </ns1:p>
+          <ns1:p/>
+          <ns1:p>
+            <ns1:r>
+              <ns1:t>A model learns association. It does not learn cause, and a good fit is no evidence of a mechanism. Check for missing data, weak patterns, better physical models and changed conditions. A prediction alone does not show that a model is useful, so check the data, the errors and the limits of the intended use.</ns1:t>
             </ns1:r>
           </ns1:p>
         </ns0:txBody>
@@ -3778,7 +4534,25 @@
           <ns1:lstStyle/>
           <ns1:p>
             <ns1:r>
-              <ns1:t>Follow the semester from setup and Python to tables, cleaning, practical tests and models. Weeks 7 and 14 are test weeks. Test-day downloads and Colab submission follow the current test-entry instructions; do not substitute older offline-test guidance.</ns1:t>
+              <ns1:t>This slide shows the whole semester. It has fifteen weeks.</ns1:t>
+            </ns1:r>
+          </ns1:p>
+          <ns1:p/>
+          <ns1:p>
+            <ns1:r>
+              <ns1:t>The early weeks set you up and teach the basics of Python, which is the programming language we use, and how to prepare data. Weeks 7 and 14 are practical tests. In a practical test you are given a data set you have never seen before, and you are asked what you make of it. This tests whether you can work with real data. You prepare for it by doing the weekly exercises.</ns1:t>
+            </ns1:r>
+          </ns1:p>
+          <ns1:p/>
+          <ns1:p>
+            <ns1:r>
+              <ns1:t>The project runs from Week 9 to the last session. You will work on it in a team, and I will explain how teams work later today.</ns1:t>
+            </ns1:r>
+          </ns1:p>
+          <ns1:p/>
+          <ns1:p>
+            <ns1:r>
+              <ns1:t>Keep this slide in mind when you plan your own time. Check the slide for the weeks that matter most.</ns1:t>
             </ns1:r>
           </ns1:p>
         </ns0:txBody>
@@ -3848,7 +4622,43 @@
           <ns1:lstStyle/>
           <ns1:p>
             <ns1:r>
-              <ns1:t>Students should justify each answer. Features depend on what is known at prediction time. A score on training data can reflect memorisation. Before acting on a prediction, examine the error tolerance, operating conditions and consequences of mistakes.</ns1:t>
+              <ns1:t>This self test has five questions. Write something for each one before you look at the answers.</ns1:t>
+            </ns1:r>
+          </ns1:p>
+          <ns1:p/>
+          <ns1:p>
+            <ns1:r>
+              <ns1:t>Question A. A colleague says, we should use AI for this. What three questions would you ask before agreeing?</ns1:t>
+            </ns1:r>
+          </ns1:p>
+          <ns1:p/>
+          <ns1:p>
+            <ns1:r>
+              <ns1:t>Question B. You have a table of five hundred past pump repairs. Which columns are the features, which one is the target, and what tells you?</ns1:t>
+            </ns1:r>
+          </ns1:p>
+          <ns1:p/>
+          <ns1:p>
+            <ns1:r>
+              <ns1:t>Question C. Give one problem from your discipline that is regression, and one that is classification.</ns1:t>
+            </ns1:r>
+          </ns1:p>
+          <ns1:p/>
+          <ns1:p>
+            <ns1:r>
+              <ns1:t>Question D. Why is a very good fit on data that the model has already seen no evidence that the model is any good?</ns1:t>
+            </ns1:r>
+          </ns1:p>
+          <ns1:p/>
+          <ns1:p>
+            <ns1:r>
+              <ns1:t>Question E. Your model predicts silica in the concentrate to within a few percentage points. Name one thing you would still need to know before acting on it.</ns1:t>
+            </ns1:r>
+          </ns1:p>
+          <ns1:p/>
+          <ns1:p>
+            <ns1:r>
+              <ns1:t>The answers are on the next slide.</ns1:t>
             </ns1:r>
           </ns1:p>
         </ns0:txBody>
@@ -3918,7 +4728,37 @@
           <ns1:lstStyle/>
           <ns1:p>
             <ns1:r>
-              <ns1:t>Use each answer to explain the reason. The target is determined by the question. Candidate features must be available beforehand and then checked for usefulness. Separate evaluation tests generalisation, but also needs relevant cases and protection against leakage.</ns1:t>
+              <ns1:t>Here are the answers.</ns1:t>
+            </ns1:r>
+          </ns1:p>
+          <ns1:p/>
+          <ns1:p>
+            <ns1:r>
+              <ns1:t>A. Ask what value you want to predict, which recorded data can help, and whether an established equation is suitable. Settle those questions before you choose a model.</ns1:t>
+            </ns1:r>
+          </ns1:p>
+          <ns1:p/>
+          <ns1:p>
+            <ns1:r>
+              <ns1:t>B. The target is whatever you want to predict, say the time to the next failure. The features are everything known before that moment, such as operating hours, load and temperature. The test is timing. Anything known only afterwards cannot be a feature.</ns1:t>
+            </ns1:r>
+          </ns1:p>
+          <ns1:p/>
+          <ns1:p>
+            <ns1:r>
+              <ns1:t>C. For regression, use any quantity with a unit, such as silica in the concentrate in percentage points. For classification, use ore or waste, or a lithology such as sandstone, shale or limestone.</ns1:t>
+            </ns1:r>
+          </ns1:p>
+          <ns1:p/>
+          <ns1:p>
+            <ns1:r>
+              <ns1:t>D. A model may memorise its training examples. To check whether it predicts new cases well, evaluate it on separate examples.</ns1:t>
+            </ns1:r>
+          </ns1:p>
+          <ns1:p/>
+          <ns1:p>
+            <ns1:r>
+              <ns1:t>E. You need to know how large the error is in engineering terms and whether that is tolerable, what it costs when the model is wrong, and whether today's conditions still resemble the data it learned from.</ns1:t>
             </ns1:r>
           </ns1:p>
         </ns0:txBody>
@@ -3988,7 +4828,25 @@
           <ns1:lstStyle/>
           <ns1:p>
             <ns1:r>
-              <ns1:t>Give a timing example for leakage: a repair recorded after failure is unavailable when predicting failure. Generalisation concerns new cases. Association alone does not establish causation; causal conclusions need additional assumptions or study design.</ns1:t>
+              <ns1:t>This is the last glossary slide, with three terms.</ns1:t>
+            </ns1:r>
+          </ns1:p>
+          <ns1:p/>
+          <ns1:p>
+            <ns1:r>
+              <ns1:t>Data leakage means accidentally giving the model information that it would not have in real use. Usually that is something only known after the outcome. The repair column from earlier is an example. We return to this in Week 10.</ns1:t>
+            </ns1:r>
+          </ns1:p>
+          <ns1:p/>
+          <ns1:p>
+            <ns1:r>
+              <ns1:t>Generalisation asks whether a rule learned from past cases still works on new ones. That is what we really care about.</ns1:t>
+            </ns1:r>
+          </ns1:p>
+          <ns1:p/>
+          <ns1:p>
+            <ns1:r>
+              <ns1:t>Association versus cause is the third. A model learns which columns move together. It knows nothing about the mechanism behind them. To show that one thing causes another, you need extra assumptions or a carefully designed study.</ns1:t>
             </ns1:r>
           </ns1:p>
         </ns0:txBody>
@@ -4058,7 +4916,25 @@
           <ns1:lstStyle/>
           <ns1:p>
             <ns1:r>
-              <ns1:t>Use the eight questions as a decision checklist. A prediction task needs an outcome, but descriptive data analysis can answer questions without a target. Check availability, evaluation and consequences before committing to a model.</ns1:t>
+              <ns1:t>This slide is a cheat sheet with eight questions to ask about any data problem. Keep this slide. You can use it for every project in this course.</ns1:t>
+            </ns1:r>
+          </ns1:p>
+          <ns1:p/>
+          <ns1:p>
+            <ns1:r>
+              <ns1:t>One, what exactly am I predicting? Name the target column and its unit. Two, is it a number or a category? Numeric class codes are still categories. Three, what do I know beforehand? List the features and check each one. Would I really have it before the outcome?</ns1:t>
+            </ns1:r>
+          </ns1:p>
+          <ns1:p/>
+          <ns1:p>
+            <ns1:r>
+              <ns1:t>Four, where does the data come from? Who measured it, how often, over what period, and is it kept anywhere? Five, would a rule or an equation do this better? If a code of practice or a validated formula answers it, use that.</ns1:t>
+            </ns1:r>
+          </ns1:p>
+          <ns1:p/>
+          <ns1:p>
+            <ns1:r>
+              <ns1:t>Six, how will I know if I am wrong? You need cases the model has never seen, so decide now how you will hold some back. Seven, what does being wrong cost? A false alarm and a missed failure are not equally bad, and that decides which model you pick. Eight, do today's conditions still resemble the data? If the process, material or plant has changed, the model may be quietly obsolete.</ns1:t>
             </ns1:r>
           </ns1:p>
         </ns0:txBody>
@@ -4128,7 +5004,19 @@
           <ns1:lstStyle/>
           <ns1:p>
             <ns1:r>
-              <ns1:t>Explain the difference between estimated completion time and availability: the quiz may take about five minutes, while its response window is 24 hours from lecturer activation. Use the cohort’s current quiz policy and the active link. The course’s quiz category remains 10% even where Quiz 6 is waived.</ns1:t>
+              <ns1:t>The Week 1 quiz has five questions and takes about five minutes. It covers features and target, regression and classification, and one of the four limits applied to a case.</ns1:t>
+            </ns1:r>
+          </ns1:p>
+          <ns1:p/>
+          <ns1:p>
+            <ns1:r>
+              <ns1:t>Enter your own Student Registration Number exactly as recorded. You have one attempt, from the Google account you are signed in to. The quiz opens when I activate it and stays open for twenty four hours.</ns1:t>
+            </ns1:r>
+          </ns1:p>
+          <ns1:p/>
+          <ns1:p>
+            <ns1:r>
+              <ns1:t>After you submit, tap View score and read the feedback. The quiz category is ten per cent, and your best nine of eleven count because Quiz 6 is waived. Check the slide for the link.</ns1:t>
             </ns1:r>
           </ns1:p>
         </ns0:txBody>
@@ -4198,7 +5086,19 @@
           <ns1:lstStyle/>
           <ns1:p>
             <ns1:r>
-              <ns1:t>Close accurately: today learners practised reasoning from observations, making a prediction and checking error. Later Python lessons fit and evaluate models computationally. Bring a laptop and browser for Week 2; the introductory paper example is not an extra upload.</ns1:t>
+              <ns1:t>The one thing to remember from today is that you have practised prediction reasoning. You used twelve rows of data to make a prediction, and then you measured its error.</ns1:t>
+            </ns1:r>
+          </ns1:p>
+          <ns1:p/>
+          <ns1:p>
+            <ns1:r>
+              <ns1:t>Later lessons use Python to repeat these calculations on much larger data sets. The computer does the same kind of work that you did by hand, and it can do it for thousands of rows. Today's paper exercise is not an extra upload.</ns1:t>
+            </ns1:r>
+          </ns1:p>
+          <ns1:p/>
+          <ns1:p>
+            <ns1:r>
+              <ns1:t>Next week we start with Colab notebooks and version control. Bring a laptop with a browser.</ns1:t>
             </ns1:r>
           </ns1:p>
         </ns0:txBody>
@@ -4268,7 +5168,19 @@
           <ns1:lstStyle/>
           <ns1:p>
             <ns1:r>
-              <ns1:t>Connect each course goal to visible evidence: a runnable notebook, a correct summary, a reasoned chart or an evaluated model. Knowing a tool name is not the same as explaining a result. Engineering meaning and units remain part of every calculation.</ns1:t>
+              <ns1:t>By December you should be able to say several things with confidence, and this slide lists them. The course builds in order. First you learn to read data. Then you clean it and summarise it. Finally you build a model and test whether it works.</ns1:t>
+            </ns1:r>
+          </ns1:p>
+          <ns1:p/>
+          <ns1:p>
+            <ns1:r>
+              <ns1:t>Each week has an exercise that practises one stage of that route. You show what you can do. That means a notebook that runs, a summary that is correct, a chart whose reasoning you can explain, or a model whose results you have checked.</ns1:t>
+            </ns1:r>
+          </ns1:p>
+          <ns1:p/>
+          <ns1:p>
+            <ns1:r>
+              <ns1:t>In every calculation we also keep the engineering meaning, including the units. A number without a unit tells an engineer very little.</ns1:t>
             </ns1:r>
           </ns1:p>
         </ns0:txBody>
@@ -4338,7 +5250,19 @@
           <ns1:lstStyle/>
           <ns1:p>
             <ns1:r>
-              <ns1:t>Introduce how individual work and projects fit together. The next assessment slide supplies the components and weights. Separate weekly tasks from project milestones so students do not confuse one submission with another.</ns1:t>
+              <ns1:t>This is the first segment, and it lasts fifteen minutes. In it we cover three things. These are the goals of the course, how it is assessed, and the work you do each week.</ns1:t>
+            </ns1:r>
+          </ns1:p>
+          <ns1:p/>
+          <ns1:p>
+            <ns1:r>
+              <ns1:t>The course has two kinds of work. Some is individual, and some is done with a team in a project. We keep these separate so that you always know what you are submitting and who it is for. The next slide gives the assessment components and what each one is worth.</ns1:t>
+            </ns1:r>
+          </ns1:p>
+          <ns1:p/>
+          <ns1:p>
+            <ns1:r>
+              <ns1:t>A weekly task is a small piece of work. A project milestone is a stage of your team project. They are different, and you do not hand in one in place of the other.</ns1:t>
             </ns1:r>
           </ns1:p>
         </ns0:txBody>
@@ -4408,7 +5332,19 @@
           <ns1:lstStyle/>
           <ns1:p>
             <ns1:r>
-              <ns1:t>Walk through the displayed assessment components and add their weights to 100%. Explain which work is individual and which is a project. The current cohort waiver policy overrides old weekly counts: CML3112 and CML3113 have A6 and Quiz 6 waived; CML3111 retains them. Waived tasks do not become zeros.</ns1:t>
+              <ns1:t>Here is how your marks are built. Assessment includes code, data analysis, models and written explanations. So you will write short pieces of code, analyse data, build models, and explain in writing what you did and what you found.</ns1:t>
+            </ns1:r>
+          </ns1:p>
+          <ns1:p/>
+          <ns1:p>
+            <ns1:r>
+              <ns1:t>Individual work accounts for sixty five per cent of the mark. That means most of your result depends on what you can do yourself.</ns1:t>
+            </ns1:r>
+          </ns1:p>
+          <ns1:p/>
+          <ns1:p>
+            <ns1:r>
+              <ns1:t>The slide lists the components and their weights, and together they add up to one hundred per cent. Some weekly tasks and quizzes can differ by cohort, so check the details for your own class on the course page. Read the marking criteria for each piece of work before you start it.</ns1:t>
             </ns1:r>
           </ns1:p>
         </ns0:txBody>
@@ -4478,7 +5414,25 @@
           <ns1:lstStyle/>
           <ns1:p>
             <ns1:r>
-              <ns1:t>Explain reproducible work as work another person can rerun from the supplied files and instructions. Students should state sources, units and contributions. Asking for help is useful when the learner can show the attempted step and the exact error.</ns1:t>
+              <ns1:t>This slide sets out what I expect from you, and what you can expect from me.</ns1:t>
+            </ns1:r>
+          </ns1:p>
+          <ns1:p/>
+          <ns1:p>
+            <ns1:r>
+              <ns1:t>First, attend. There is one three hour session a week. The value is in the practical work and the challenge, and you cannot read that later. Second, do the weekly deliverable every week. Eleven small pieces spread over twelve weeks is manageable. Trying nine of them in December is not.</ns1:t>
+            </ns1:r>
+          </ns1:p>
+          <ns1:p/>
+          <ns1:p>
+            <ns1:r>
+              <ns1:t>When you ask for help, include the error message, what you tried and what you expected to happen. When you get stuck, note the step that failed and ask.</ns1:t>
+            </ns1:r>
+          </ns1:p>
+          <ns1:p/>
+          <ns1:p>
+            <ns1:r>
+              <ns1:t>From me, you get every marking scheme before the work is set, so you never meet a rubric for the first time in an assessment. You get feedback on weekly work within a week, and instant feedback on every quiz. I also ask you to download the lesson files before class so that you can use the data without an internet connection. And ask how each topic relates to your engineering problem.</ns1:t>
             </ns1:r>
           </ns1:p>
         </ns0:txBody>

--- a/IUEA_Teaching_Plan/decks/CML3113_Week01_Mining_Petroleum.pptx
+++ b/IUEA_Teaching_Plan/decks/CML3113_Week01_Mining_Petroleum.pptx
@@ -30969,7 +30969,7 @@
                 </a:solidFill>
                 <a:latin typeface="Calibri"/>
               </a:rPr>
-              <a:t>Weeks 1 to 6: a quiz and an assignment each week. The best 4 of the 6 count.</a:t>
+              <a:t>Weeks 1 to 5: a quiz and an assignment each week, and the best 3 of the 5 count. Week 6 is waived.</a:t>
             </a:r>
           </a:p>
           <a:p>
